--- a/pitch/Del-Norte-Nighthawk-Sponsor-Pitch.pptx
+++ b/pitch/Del-Norte-Nighthawk-Sponsor-Pitch.pptx
@@ -17,9 +17,10 @@
     <p:sldId id="265" r:id="rId11"/>
     <p:sldId id="266" r:id="rId12"/>
     <p:sldId id="267" r:id="rId13"/>
+    <p:sldId id="268" r:id="rId14"/>
   </p:sldIdLst>
   <p:notesMasterIdLst>
-    <p:notesMasterId r:id="rId14"/>
+    <p:notesMasterId r:id="rId15"/>
   </p:notesMasterIdLst>
   <p:sldSz cx="9144000" cy="5143500"/>
   <p:notesSz cx="5143500" cy="9144000"/>
@@ -819,6 +820,94 @@
 </p:notes>
 </file>
 
+<file path=ppt/notesSlides/notesSlide13.xml><?xml version="1.0" encoding="utf-8"?>
+<p:notes xmlns:a="http://schemas.openxmlformats.org/drawingml/2006/main" xmlns:r="http://schemas.openxmlformats.org/officeDocument/2006/relationships" xmlns:p="http://schemas.openxmlformats.org/presentationml/2006/main">
+  <p:cSld>
+    <p:spTree>
+      <p:nvGrpSpPr>
+        <p:cNvPr id="1" name=""/>
+        <p:cNvGrpSpPr/>
+        <p:nvPr/>
+      </p:nvGrpSpPr>
+      <p:grpSpPr>
+        <a:xfrm>
+          <a:off x="0" y="0"/>
+          <a:ext cx="0" cy="0"/>
+          <a:chOff x="0" y="0"/>
+          <a:chExt cx="0" cy="0"/>
+        </a:xfrm>
+      </p:grpSpPr>
+      <p:sp>
+        <p:nvSpPr>
+          <p:cNvPr id="2" name="Slide Image Placeholder 1"/>
+          <p:cNvSpPr>
+            <a:spLocks noGrp="1" noRot="1" noChangeAspect="1"/>
+          </p:cNvSpPr>
+          <p:nvPr>
+            <p:ph type="sldImg"/>
+          </p:nvPr>
+        </p:nvSpPr>
+        <p:spPr/>
+      </p:sp>
+      <p:sp>
+        <p:nvSpPr>
+          <p:cNvPr id="3" name="Notes Placeholder 2"/>
+          <p:cNvSpPr>
+            <a:spLocks noGrp="1"/>
+          </p:cNvSpPr>
+          <p:nvPr>
+            <p:ph type="body" idx="1"/>
+          </p:nvPr>
+        </p:nvSpPr>
+        <p:spPr/>
+        <p:txBody>
+          <a:bodyPr/>
+          <a:lstStyle/>
+          <a:p>
+            <a:r>
+              <a:rPr lang="en-US" dirty="0"/>
+              <a:t/>
+            </a:r>
+            <a:endParaRPr lang="en-US" dirty="0"/>
+          </a:p>
+        </p:txBody>
+      </p:sp>
+      <p:sp>
+        <p:nvSpPr>
+          <p:cNvPr id="4" name="Slide Number Placeholder 3"/>
+          <p:cNvSpPr>
+            <a:spLocks noGrp="1"/>
+          </p:cNvSpPr>
+          <p:nvPr>
+            <p:ph type="sldNum" sz="quarter" idx="10"/>
+          </p:nvPr>
+        </p:nvSpPr>
+        <p:spPr/>
+        <p:txBody>
+          <a:bodyPr/>
+          <a:lstStyle/>
+          <a:p>
+            <a:fld id="{F7021451-1387-4CA6-816F-3879F97B5CBC}" type="slidenum">
+              <a:rPr lang="en-US"/>
+              <a:t>13</a:t>
+            </a:fld>
+            <a:endParaRPr lang="en-US"/>
+          </a:p>
+        </p:txBody>
+      </p:sp>
+    </p:spTree>
+    <p:extLst>
+      <p:ext uri="{BB962C8B-B14F-4D97-AF65-F5344CB8AC3E}">
+        <p14:creationId xmlns:p14="http://schemas.microsoft.com/office/powerpoint/2010/main" val="1024086991"/>
+      </p:ext>
+    </p:extLst>
+  </p:cSld>
+  <p:clrMapOvr>
+    <a:masterClrMapping/>
+  </p:clrMapOvr>
+</p:notes>
+</file>
+
 <file path=ppt/notesSlides/notesSlide2.xml><?xml version="1.0" encoding="utf-8"?>
 <p:notes xmlns:a="http://schemas.openxmlformats.org/drawingml/2006/main" xmlns:r="http://schemas.openxmlformats.org/officeDocument/2006/relationships" xmlns:p="http://schemas.openxmlformats.org/presentationml/2006/main">
   <p:cSld>
@@ -2166,6 +2255,1082 @@
     <p:bg>
       <p:bgPr>
         <a:solidFill>
+          <a:srgbClr val="FFFFFF"/>
+        </a:solidFill>
+      </p:bgPr>
+    </p:bg>
+    <p:spTree>
+      <p:nvGrpSpPr>
+        <p:cNvPr id="1" name=""/>
+        <p:cNvGrpSpPr/>
+        <p:nvPr/>
+      </p:nvGrpSpPr>
+      <p:grpSpPr>
+        <a:xfrm>
+          <a:off x="0" y="0"/>
+          <a:ext cx="0" cy="0"/>
+          <a:chOff x="0" y="0"/>
+          <a:chExt cx="0" cy="0"/>
+        </a:xfrm>
+      </p:grpSpPr>
+      <p:sp>
+        <p:nvSpPr>
+          <p:cNvPr id="2" name="Shape 0"/>
+          <p:cNvSpPr/>
+          <p:nvPr/>
+        </p:nvSpPr>
+        <p:spPr>
+          <a:xfrm>
+            <a:off x="0" y="0"/>
+            <a:ext cx="9144000" cy="1005840"/>
+          </a:xfrm>
+          <a:prstGeom prst="rect">
+            <a:avLst/>
+          </a:prstGeom>
+          <a:solidFill>
+            <a:srgbClr val="002D62"/>
+          </a:solidFill>
+          <a:ln/>
+        </p:spPr>
+      </p:sp>
+      <p:sp>
+        <p:nvSpPr>
+          <p:cNvPr id="3" name="Text 1"/>
+          <p:cNvSpPr/>
+          <p:nvPr/>
+        </p:nvSpPr>
+        <p:spPr>
+          <a:xfrm>
+            <a:off x="731520" y="228600"/>
+            <a:ext cx="7315200" cy="548640"/>
+          </a:xfrm>
+          <a:prstGeom prst="rect">
+            <a:avLst/>
+          </a:prstGeom>
+          <a:noFill/>
+          <a:ln/>
+        </p:spPr>
+        <p:txBody>
+          <a:bodyPr wrap="square" lIns="0" tIns="0" rIns="0" bIns="0" rtlCol="0" anchor="ctr"/>
+          <a:lstStyle/>
+          <a:p>
+            <a:pPr indent="0" marL="0">
+              <a:buNone/>
+            </a:pPr>
+            <a:r>
+              <a:rPr lang="en-US" sz="2800" b="1" dirty="0">
+                <a:solidFill>
+                  <a:srgbClr val="C5A55A"/>
+                </a:solidFill>
+                <a:latin typeface="Arial Black" pitchFamily="34" charset="0"/>
+                <a:ea typeface="Arial Black" pitchFamily="34" charset="-122"/>
+                <a:cs typeface="Arial Black" pitchFamily="34" charset="-120"/>
+              </a:rPr>
+              <a:t>CURRENT SPONSORS (2026-2027)</a:t>
+            </a:r>
+            <a:endParaRPr lang="en-US" sz="2800" dirty="0"/>
+          </a:p>
+        </p:txBody>
+      </p:sp>
+      <p:sp>
+        <p:nvSpPr>
+          <p:cNvPr id="4" name="Shape 2"/>
+          <p:cNvSpPr/>
+          <p:nvPr/>
+        </p:nvSpPr>
+        <p:spPr>
+          <a:xfrm>
+            <a:off x="731520" y="1280160"/>
+            <a:ext cx="2468880" cy="640080"/>
+          </a:xfrm>
+          <a:prstGeom prst="rect">
+            <a:avLst/>
+          </a:prstGeom>
+          <a:solidFill>
+            <a:srgbClr val="F5F0E6"/>
+          </a:solidFill>
+          <a:ln/>
+          <a:effectLst>
+            <a:outerShdw sx="100000" sy="100000" kx="0" ky="0" algn="bl" rotWithShape="0" blurRad="101600" dist="38100" dir="8100000">
+              <a:srgbClr val="000000">
+                <a:alpha val="20000"/>
+              </a:srgbClr>
+            </a:outerShdw>
+          </a:effectLst>
+        </p:spPr>
+      </p:sp>
+      <p:sp>
+        <p:nvSpPr>
+          <p:cNvPr id="5" name="Shape 3"/>
+          <p:cNvSpPr/>
+          <p:nvPr/>
+        </p:nvSpPr>
+        <p:spPr>
+          <a:xfrm>
+            <a:off x="731520" y="1280160"/>
+            <a:ext cx="54864" cy="640080"/>
+          </a:xfrm>
+          <a:prstGeom prst="rect">
+            <a:avLst/>
+          </a:prstGeom>
+          <a:solidFill>
+            <a:srgbClr val="C5A55A"/>
+          </a:solidFill>
+          <a:ln/>
+        </p:spPr>
+      </p:sp>
+      <p:sp>
+        <p:nvSpPr>
+          <p:cNvPr id="6" name="Text 4"/>
+          <p:cNvSpPr/>
+          <p:nvPr/>
+        </p:nvSpPr>
+        <p:spPr>
+          <a:xfrm>
+            <a:off x="914400" y="1280160"/>
+            <a:ext cx="2103120" cy="640080"/>
+          </a:xfrm>
+          <a:prstGeom prst="rect">
+            <a:avLst/>
+          </a:prstGeom>
+          <a:noFill/>
+          <a:ln/>
+        </p:spPr>
+        <p:txBody>
+          <a:bodyPr wrap="square" lIns="0" tIns="0" rIns="0" bIns="0" rtlCol="0" anchor="ctr"/>
+          <a:lstStyle/>
+          <a:p>
+            <a:pPr indent="0" marL="0">
+              <a:buNone/>
+            </a:pPr>
+            <a:r>
+              <a:rPr lang="en-US" sz="1300" b="1" dirty="0">
+                <a:solidFill>
+                  <a:srgbClr val="002D62"/>
+                </a:solidFill>
+                <a:latin typeface="Arial" pitchFamily="34" charset="0"/>
+                <a:ea typeface="Arial" pitchFamily="34" charset="-122"/>
+                <a:cs typeface="Arial" pitchFamily="34" charset="-120"/>
+              </a:rPr>
+              <a:t>Baskin Robbins</a:t>
+            </a:r>
+            <a:endParaRPr lang="en-US" sz="1300" dirty="0"/>
+          </a:p>
+        </p:txBody>
+      </p:sp>
+      <p:sp>
+        <p:nvSpPr>
+          <p:cNvPr id="7" name="Shape 5"/>
+          <p:cNvSpPr/>
+          <p:nvPr/>
+        </p:nvSpPr>
+        <p:spPr>
+          <a:xfrm>
+            <a:off x="3474720" y="1280160"/>
+            <a:ext cx="2468880" cy="640080"/>
+          </a:xfrm>
+          <a:prstGeom prst="rect">
+            <a:avLst/>
+          </a:prstGeom>
+          <a:solidFill>
+            <a:srgbClr val="F5F0E6"/>
+          </a:solidFill>
+          <a:ln/>
+          <a:effectLst>
+            <a:outerShdw sx="100000" sy="100000" kx="0" ky="0" algn="bl" rotWithShape="0" blurRad="101600" dist="38100" dir="8100000">
+              <a:srgbClr val="000000">
+                <a:alpha val="20000"/>
+              </a:srgbClr>
+            </a:outerShdw>
+          </a:effectLst>
+        </p:spPr>
+      </p:sp>
+      <p:sp>
+        <p:nvSpPr>
+          <p:cNvPr id="8" name="Shape 6"/>
+          <p:cNvSpPr/>
+          <p:nvPr/>
+        </p:nvSpPr>
+        <p:spPr>
+          <a:xfrm>
+            <a:off x="3474720" y="1280160"/>
+            <a:ext cx="54864" cy="640080"/>
+          </a:xfrm>
+          <a:prstGeom prst="rect">
+            <a:avLst/>
+          </a:prstGeom>
+          <a:solidFill>
+            <a:srgbClr val="C5A55A"/>
+          </a:solidFill>
+          <a:ln/>
+        </p:spPr>
+      </p:sp>
+      <p:sp>
+        <p:nvSpPr>
+          <p:cNvPr id="9" name="Text 7"/>
+          <p:cNvSpPr/>
+          <p:nvPr/>
+        </p:nvSpPr>
+        <p:spPr>
+          <a:xfrm>
+            <a:off x="3657600" y="1280160"/>
+            <a:ext cx="2103120" cy="640080"/>
+          </a:xfrm>
+          <a:prstGeom prst="rect">
+            <a:avLst/>
+          </a:prstGeom>
+          <a:noFill/>
+          <a:ln/>
+        </p:spPr>
+        <p:txBody>
+          <a:bodyPr wrap="square" lIns="0" tIns="0" rIns="0" bIns="0" rtlCol="0" anchor="ctr"/>
+          <a:lstStyle/>
+          <a:p>
+            <a:pPr indent="0" marL="0">
+              <a:buNone/>
+            </a:pPr>
+            <a:r>
+              <a:rPr lang="en-US" sz="1300" b="1" dirty="0">
+                <a:solidFill>
+                  <a:srgbClr val="002D62"/>
+                </a:solidFill>
+                <a:latin typeface="Arial" pitchFamily="34" charset="0"/>
+                <a:ea typeface="Arial" pitchFamily="34" charset="-122"/>
+                <a:cs typeface="Arial" pitchFamily="34" charset="-120"/>
+              </a:rPr>
+              <a:t>Harland Brewing</a:t>
+            </a:r>
+            <a:endParaRPr lang="en-US" sz="1300" dirty="0"/>
+          </a:p>
+        </p:txBody>
+      </p:sp>
+      <p:sp>
+        <p:nvSpPr>
+          <p:cNvPr id="10" name="Shape 8"/>
+          <p:cNvSpPr/>
+          <p:nvPr/>
+        </p:nvSpPr>
+        <p:spPr>
+          <a:xfrm>
+            <a:off x="6217920" y="1280160"/>
+            <a:ext cx="2468880" cy="640080"/>
+          </a:xfrm>
+          <a:prstGeom prst="rect">
+            <a:avLst/>
+          </a:prstGeom>
+          <a:solidFill>
+            <a:srgbClr val="F5F0E6"/>
+          </a:solidFill>
+          <a:ln/>
+          <a:effectLst>
+            <a:outerShdw sx="100000" sy="100000" kx="0" ky="0" algn="bl" rotWithShape="0" blurRad="101600" dist="38100" dir="8100000">
+              <a:srgbClr val="000000">
+                <a:alpha val="20000"/>
+              </a:srgbClr>
+            </a:outerShdw>
+          </a:effectLst>
+        </p:spPr>
+      </p:sp>
+      <p:sp>
+        <p:nvSpPr>
+          <p:cNvPr id="11" name="Shape 9"/>
+          <p:cNvSpPr/>
+          <p:nvPr/>
+        </p:nvSpPr>
+        <p:spPr>
+          <a:xfrm>
+            <a:off x="6217920" y="1280160"/>
+            <a:ext cx="54864" cy="640080"/>
+          </a:xfrm>
+          <a:prstGeom prst="rect">
+            <a:avLst/>
+          </a:prstGeom>
+          <a:solidFill>
+            <a:srgbClr val="C5A55A"/>
+          </a:solidFill>
+          <a:ln/>
+        </p:spPr>
+      </p:sp>
+      <p:sp>
+        <p:nvSpPr>
+          <p:cNvPr id="12" name="Text 10"/>
+          <p:cNvSpPr/>
+          <p:nvPr/>
+        </p:nvSpPr>
+        <p:spPr>
+          <a:xfrm>
+            <a:off x="6400800" y="1280160"/>
+            <a:ext cx="2103120" cy="640080"/>
+          </a:xfrm>
+          <a:prstGeom prst="rect">
+            <a:avLst/>
+          </a:prstGeom>
+          <a:noFill/>
+          <a:ln/>
+        </p:spPr>
+        <p:txBody>
+          <a:bodyPr wrap="square" lIns="0" tIns="0" rIns="0" bIns="0" rtlCol="0" anchor="ctr"/>
+          <a:lstStyle/>
+          <a:p>
+            <a:pPr indent="0" marL="0">
+              <a:buNone/>
+            </a:pPr>
+            <a:r>
+              <a:rPr lang="en-US" sz="1300" b="1" dirty="0">
+                <a:solidFill>
+                  <a:srgbClr val="002D62"/>
+                </a:solidFill>
+                <a:latin typeface="Arial" pitchFamily="34" charset="0"/>
+                <a:ea typeface="Arial" pitchFamily="34" charset="-122"/>
+                <a:cs typeface="Arial" pitchFamily="34" charset="-120"/>
+              </a:rPr>
+              <a:t>Board &amp; Brew</a:t>
+            </a:r>
+            <a:endParaRPr lang="en-US" sz="1300" dirty="0"/>
+          </a:p>
+        </p:txBody>
+      </p:sp>
+      <p:sp>
+        <p:nvSpPr>
+          <p:cNvPr id="13" name="Shape 11"/>
+          <p:cNvSpPr/>
+          <p:nvPr/>
+        </p:nvSpPr>
+        <p:spPr>
+          <a:xfrm>
+            <a:off x="731520" y="2103120"/>
+            <a:ext cx="2468880" cy="640080"/>
+          </a:xfrm>
+          <a:prstGeom prst="rect">
+            <a:avLst/>
+          </a:prstGeom>
+          <a:solidFill>
+            <a:srgbClr val="F5F0E6"/>
+          </a:solidFill>
+          <a:ln/>
+          <a:effectLst>
+            <a:outerShdw sx="100000" sy="100000" kx="0" ky="0" algn="bl" rotWithShape="0" blurRad="101600" dist="38100" dir="8100000">
+              <a:srgbClr val="000000">
+                <a:alpha val="20000"/>
+              </a:srgbClr>
+            </a:outerShdw>
+          </a:effectLst>
+        </p:spPr>
+      </p:sp>
+      <p:sp>
+        <p:nvSpPr>
+          <p:cNvPr id="14" name="Shape 12"/>
+          <p:cNvSpPr/>
+          <p:nvPr/>
+        </p:nvSpPr>
+        <p:spPr>
+          <a:xfrm>
+            <a:off x="731520" y="2103120"/>
+            <a:ext cx="54864" cy="640080"/>
+          </a:xfrm>
+          <a:prstGeom prst="rect">
+            <a:avLst/>
+          </a:prstGeom>
+          <a:solidFill>
+            <a:srgbClr val="C5A55A"/>
+          </a:solidFill>
+          <a:ln/>
+        </p:spPr>
+      </p:sp>
+      <p:sp>
+        <p:nvSpPr>
+          <p:cNvPr id="15" name="Text 13"/>
+          <p:cNvSpPr/>
+          <p:nvPr/>
+        </p:nvSpPr>
+        <p:spPr>
+          <a:xfrm>
+            <a:off x="914400" y="2103120"/>
+            <a:ext cx="2103120" cy="640080"/>
+          </a:xfrm>
+          <a:prstGeom prst="rect">
+            <a:avLst/>
+          </a:prstGeom>
+          <a:noFill/>
+          <a:ln/>
+        </p:spPr>
+        <p:txBody>
+          <a:bodyPr wrap="square" lIns="0" tIns="0" rIns="0" bIns="0" rtlCol="0" anchor="ctr"/>
+          <a:lstStyle/>
+          <a:p>
+            <a:pPr indent="0" marL="0">
+              <a:buNone/>
+            </a:pPr>
+            <a:r>
+              <a:rPr lang="en-US" sz="1300" b="1" dirty="0">
+                <a:solidFill>
+                  <a:srgbClr val="002D62"/>
+                </a:solidFill>
+                <a:latin typeface="Arial" pitchFamily="34" charset="0"/>
+                <a:ea typeface="Arial" pitchFamily="34" charset="-122"/>
+                <a:cs typeface="Arial" pitchFamily="34" charset="-120"/>
+              </a:rPr>
+              <a:t>L&amp;L Hawaiian Barbecue</a:t>
+            </a:r>
+            <a:endParaRPr lang="en-US" sz="1300" dirty="0"/>
+          </a:p>
+        </p:txBody>
+      </p:sp>
+      <p:sp>
+        <p:nvSpPr>
+          <p:cNvPr id="16" name="Shape 14"/>
+          <p:cNvSpPr/>
+          <p:nvPr/>
+        </p:nvSpPr>
+        <p:spPr>
+          <a:xfrm>
+            <a:off x="3474720" y="2103120"/>
+            <a:ext cx="2468880" cy="640080"/>
+          </a:xfrm>
+          <a:prstGeom prst="rect">
+            <a:avLst/>
+          </a:prstGeom>
+          <a:solidFill>
+            <a:srgbClr val="F5F0E6"/>
+          </a:solidFill>
+          <a:ln/>
+          <a:effectLst>
+            <a:outerShdw sx="100000" sy="100000" kx="0" ky="0" algn="bl" rotWithShape="0" blurRad="101600" dist="38100" dir="8100000">
+              <a:srgbClr val="000000">
+                <a:alpha val="20000"/>
+              </a:srgbClr>
+            </a:outerShdw>
+          </a:effectLst>
+        </p:spPr>
+      </p:sp>
+      <p:sp>
+        <p:nvSpPr>
+          <p:cNvPr id="17" name="Shape 15"/>
+          <p:cNvSpPr/>
+          <p:nvPr/>
+        </p:nvSpPr>
+        <p:spPr>
+          <a:xfrm>
+            <a:off x="3474720" y="2103120"/>
+            <a:ext cx="54864" cy="640080"/>
+          </a:xfrm>
+          <a:prstGeom prst="rect">
+            <a:avLst/>
+          </a:prstGeom>
+          <a:solidFill>
+            <a:srgbClr val="C5A55A"/>
+          </a:solidFill>
+          <a:ln/>
+        </p:spPr>
+      </p:sp>
+      <p:sp>
+        <p:nvSpPr>
+          <p:cNvPr id="18" name="Text 16"/>
+          <p:cNvSpPr/>
+          <p:nvPr/>
+        </p:nvSpPr>
+        <p:spPr>
+          <a:xfrm>
+            <a:off x="3657600" y="2103120"/>
+            <a:ext cx="2103120" cy="640080"/>
+          </a:xfrm>
+          <a:prstGeom prst="rect">
+            <a:avLst/>
+          </a:prstGeom>
+          <a:noFill/>
+          <a:ln/>
+        </p:spPr>
+        <p:txBody>
+          <a:bodyPr wrap="square" lIns="0" tIns="0" rIns="0" bIns="0" rtlCol="0" anchor="ctr"/>
+          <a:lstStyle/>
+          <a:p>
+            <a:pPr indent="0" marL="0">
+              <a:buNone/>
+            </a:pPr>
+            <a:r>
+              <a:rPr lang="en-US" sz="1300" b="1" dirty="0">
+                <a:solidFill>
+                  <a:srgbClr val="002D62"/>
+                </a:solidFill>
+                <a:latin typeface="Arial" pitchFamily="34" charset="0"/>
+                <a:ea typeface="Arial" pitchFamily="34" charset="-122"/>
+                <a:cs typeface="Arial" pitchFamily="34" charset="-120"/>
+              </a:rPr>
+              <a:t>Kahoots</a:t>
+            </a:r>
+            <a:endParaRPr lang="en-US" sz="1300" dirty="0"/>
+          </a:p>
+        </p:txBody>
+      </p:sp>
+      <p:sp>
+        <p:nvSpPr>
+          <p:cNvPr id="19" name="Shape 17"/>
+          <p:cNvSpPr/>
+          <p:nvPr/>
+        </p:nvSpPr>
+        <p:spPr>
+          <a:xfrm>
+            <a:off x="6217920" y="2103120"/>
+            <a:ext cx="2468880" cy="640080"/>
+          </a:xfrm>
+          <a:prstGeom prst="rect">
+            <a:avLst/>
+          </a:prstGeom>
+          <a:solidFill>
+            <a:srgbClr val="F5F0E6"/>
+          </a:solidFill>
+          <a:ln/>
+          <a:effectLst>
+            <a:outerShdw sx="100000" sy="100000" kx="0" ky="0" algn="bl" rotWithShape="0" blurRad="101600" dist="38100" dir="8100000">
+              <a:srgbClr val="000000">
+                <a:alpha val="20000"/>
+              </a:srgbClr>
+            </a:outerShdw>
+          </a:effectLst>
+        </p:spPr>
+      </p:sp>
+      <p:sp>
+        <p:nvSpPr>
+          <p:cNvPr id="20" name="Shape 18"/>
+          <p:cNvSpPr/>
+          <p:nvPr/>
+        </p:nvSpPr>
+        <p:spPr>
+          <a:xfrm>
+            <a:off x="6217920" y="2103120"/>
+            <a:ext cx="54864" cy="640080"/>
+          </a:xfrm>
+          <a:prstGeom prst="rect">
+            <a:avLst/>
+          </a:prstGeom>
+          <a:solidFill>
+            <a:srgbClr val="C5A55A"/>
+          </a:solidFill>
+          <a:ln/>
+        </p:spPr>
+      </p:sp>
+      <p:sp>
+        <p:nvSpPr>
+          <p:cNvPr id="21" name="Text 19"/>
+          <p:cNvSpPr/>
+          <p:nvPr/>
+        </p:nvSpPr>
+        <p:spPr>
+          <a:xfrm>
+            <a:off x="6400800" y="2103120"/>
+            <a:ext cx="2103120" cy="640080"/>
+          </a:xfrm>
+          <a:prstGeom prst="rect">
+            <a:avLst/>
+          </a:prstGeom>
+          <a:noFill/>
+          <a:ln/>
+        </p:spPr>
+        <p:txBody>
+          <a:bodyPr wrap="square" lIns="0" tIns="0" rIns="0" bIns="0" rtlCol="0" anchor="ctr"/>
+          <a:lstStyle/>
+          <a:p>
+            <a:pPr indent="0" marL="0">
+              <a:buNone/>
+            </a:pPr>
+            <a:r>
+              <a:rPr lang="en-US" sz="1300" b="1" dirty="0">
+                <a:solidFill>
+                  <a:srgbClr val="002D62"/>
+                </a:solidFill>
+                <a:latin typeface="Arial" pitchFamily="34" charset="0"/>
+                <a:ea typeface="Arial" pitchFamily="34" charset="-122"/>
+                <a:cs typeface="Arial" pitchFamily="34" charset="-120"/>
+              </a:rPr>
+              <a:t>Mostra Coffee</a:t>
+            </a:r>
+            <a:endParaRPr lang="en-US" sz="1300" dirty="0"/>
+          </a:p>
+        </p:txBody>
+      </p:sp>
+      <p:sp>
+        <p:nvSpPr>
+          <p:cNvPr id="22" name="Shape 20"/>
+          <p:cNvSpPr/>
+          <p:nvPr/>
+        </p:nvSpPr>
+        <p:spPr>
+          <a:xfrm>
+            <a:off x="731520" y="2926080"/>
+            <a:ext cx="2468880" cy="640080"/>
+          </a:xfrm>
+          <a:prstGeom prst="rect">
+            <a:avLst/>
+          </a:prstGeom>
+          <a:solidFill>
+            <a:srgbClr val="F5F0E6"/>
+          </a:solidFill>
+          <a:ln/>
+          <a:effectLst>
+            <a:outerShdw sx="100000" sy="100000" kx="0" ky="0" algn="bl" rotWithShape="0" blurRad="101600" dist="38100" dir="8100000">
+              <a:srgbClr val="000000">
+                <a:alpha val="20000"/>
+              </a:srgbClr>
+            </a:outerShdw>
+          </a:effectLst>
+        </p:spPr>
+      </p:sp>
+      <p:sp>
+        <p:nvSpPr>
+          <p:cNvPr id="23" name="Shape 21"/>
+          <p:cNvSpPr/>
+          <p:nvPr/>
+        </p:nvSpPr>
+        <p:spPr>
+          <a:xfrm>
+            <a:off x="731520" y="2926080"/>
+            <a:ext cx="54864" cy="640080"/>
+          </a:xfrm>
+          <a:prstGeom prst="rect">
+            <a:avLst/>
+          </a:prstGeom>
+          <a:solidFill>
+            <a:srgbClr val="C5A55A"/>
+          </a:solidFill>
+          <a:ln/>
+        </p:spPr>
+      </p:sp>
+      <p:sp>
+        <p:nvSpPr>
+          <p:cNvPr id="24" name="Text 22"/>
+          <p:cNvSpPr/>
+          <p:nvPr/>
+        </p:nvSpPr>
+        <p:spPr>
+          <a:xfrm>
+            <a:off x="914400" y="2926080"/>
+            <a:ext cx="2103120" cy="640080"/>
+          </a:xfrm>
+          <a:prstGeom prst="rect">
+            <a:avLst/>
+          </a:prstGeom>
+          <a:noFill/>
+          <a:ln/>
+        </p:spPr>
+        <p:txBody>
+          <a:bodyPr wrap="square" lIns="0" tIns="0" rIns="0" bIns="0" rtlCol="0" anchor="ctr"/>
+          <a:lstStyle/>
+          <a:p>
+            <a:pPr indent="0" marL="0">
+              <a:buNone/>
+            </a:pPr>
+            <a:r>
+              <a:rPr lang="en-US" sz="1300" b="1" dirty="0">
+                <a:solidFill>
+                  <a:srgbClr val="002D62"/>
+                </a:solidFill>
+                <a:latin typeface="Arial" pitchFamily="34" charset="0"/>
+                <a:ea typeface="Arial" pitchFamily="34" charset="-122"/>
+                <a:cs typeface="Arial" pitchFamily="34" charset="-120"/>
+              </a:rPr>
+              <a:t>Rosinas</a:t>
+            </a:r>
+            <a:endParaRPr lang="en-US" sz="1300" dirty="0"/>
+          </a:p>
+        </p:txBody>
+      </p:sp>
+      <p:sp>
+        <p:nvSpPr>
+          <p:cNvPr id="25" name="Shape 23"/>
+          <p:cNvSpPr/>
+          <p:nvPr/>
+        </p:nvSpPr>
+        <p:spPr>
+          <a:xfrm>
+            <a:off x="3474720" y="2926080"/>
+            <a:ext cx="2468880" cy="640080"/>
+          </a:xfrm>
+          <a:prstGeom prst="rect">
+            <a:avLst/>
+          </a:prstGeom>
+          <a:solidFill>
+            <a:srgbClr val="F5F0E6"/>
+          </a:solidFill>
+          <a:ln/>
+          <a:effectLst>
+            <a:outerShdw sx="100000" sy="100000" kx="0" ky="0" algn="bl" rotWithShape="0" blurRad="101600" dist="38100" dir="8100000">
+              <a:srgbClr val="000000">
+                <a:alpha val="20000"/>
+              </a:srgbClr>
+            </a:outerShdw>
+          </a:effectLst>
+        </p:spPr>
+      </p:sp>
+      <p:sp>
+        <p:nvSpPr>
+          <p:cNvPr id="26" name="Shape 24"/>
+          <p:cNvSpPr/>
+          <p:nvPr/>
+        </p:nvSpPr>
+        <p:spPr>
+          <a:xfrm>
+            <a:off x="3474720" y="2926080"/>
+            <a:ext cx="54864" cy="640080"/>
+          </a:xfrm>
+          <a:prstGeom prst="rect">
+            <a:avLst/>
+          </a:prstGeom>
+          <a:solidFill>
+            <a:srgbClr val="C5A55A"/>
+          </a:solidFill>
+          <a:ln/>
+        </p:spPr>
+      </p:sp>
+      <p:sp>
+        <p:nvSpPr>
+          <p:cNvPr id="27" name="Text 25"/>
+          <p:cNvSpPr/>
+          <p:nvPr/>
+        </p:nvSpPr>
+        <p:spPr>
+          <a:xfrm>
+            <a:off x="3657600" y="2926080"/>
+            <a:ext cx="2103120" cy="640080"/>
+          </a:xfrm>
+          <a:prstGeom prst="rect">
+            <a:avLst/>
+          </a:prstGeom>
+          <a:noFill/>
+          <a:ln/>
+        </p:spPr>
+        <p:txBody>
+          <a:bodyPr wrap="square" lIns="0" tIns="0" rIns="0" bIns="0" rtlCol="0" anchor="ctr"/>
+          <a:lstStyle/>
+          <a:p>
+            <a:pPr indent="0" marL="0">
+              <a:buNone/>
+            </a:pPr>
+            <a:r>
+              <a:rPr lang="en-US" sz="1300" b="1" dirty="0">
+                <a:solidFill>
+                  <a:srgbClr val="002D62"/>
+                </a:solidFill>
+                <a:latin typeface="Arial" pitchFamily="34" charset="0"/>
+                <a:ea typeface="Arial" pitchFamily="34" charset="-122"/>
+                <a:cs typeface="Arial" pitchFamily="34" charset="-120"/>
+              </a:rPr>
+              <a:t>Donut Touch</a:t>
+            </a:r>
+            <a:endParaRPr lang="en-US" sz="1300" dirty="0"/>
+          </a:p>
+        </p:txBody>
+      </p:sp>
+      <p:sp>
+        <p:nvSpPr>
+          <p:cNvPr id="28" name="Shape 26"/>
+          <p:cNvSpPr/>
+          <p:nvPr/>
+        </p:nvSpPr>
+        <p:spPr>
+          <a:xfrm>
+            <a:off x="6217920" y="2926080"/>
+            <a:ext cx="2468880" cy="640080"/>
+          </a:xfrm>
+          <a:prstGeom prst="rect">
+            <a:avLst/>
+          </a:prstGeom>
+          <a:solidFill>
+            <a:srgbClr val="F5F0E6"/>
+          </a:solidFill>
+          <a:ln/>
+          <a:effectLst>
+            <a:outerShdw sx="100000" sy="100000" kx="0" ky="0" algn="bl" rotWithShape="0" blurRad="101600" dist="38100" dir="8100000">
+              <a:srgbClr val="000000">
+                <a:alpha val="20000"/>
+              </a:srgbClr>
+            </a:outerShdw>
+          </a:effectLst>
+        </p:spPr>
+      </p:sp>
+      <p:sp>
+        <p:nvSpPr>
+          <p:cNvPr id="29" name="Shape 27"/>
+          <p:cNvSpPr/>
+          <p:nvPr/>
+        </p:nvSpPr>
+        <p:spPr>
+          <a:xfrm>
+            <a:off x="6217920" y="2926080"/>
+            <a:ext cx="54864" cy="640080"/>
+          </a:xfrm>
+          <a:prstGeom prst="rect">
+            <a:avLst/>
+          </a:prstGeom>
+          <a:solidFill>
+            <a:srgbClr val="C5A55A"/>
+          </a:solidFill>
+          <a:ln/>
+        </p:spPr>
+      </p:sp>
+      <p:sp>
+        <p:nvSpPr>
+          <p:cNvPr id="30" name="Text 28"/>
+          <p:cNvSpPr/>
+          <p:nvPr/>
+        </p:nvSpPr>
+        <p:spPr>
+          <a:xfrm>
+            <a:off x="6400800" y="2926080"/>
+            <a:ext cx="2103120" cy="640080"/>
+          </a:xfrm>
+          <a:prstGeom prst="rect">
+            <a:avLst/>
+          </a:prstGeom>
+          <a:noFill/>
+          <a:ln/>
+        </p:spPr>
+        <p:txBody>
+          <a:bodyPr wrap="square" lIns="0" tIns="0" rIns="0" bIns="0" rtlCol="0" anchor="ctr"/>
+          <a:lstStyle/>
+          <a:p>
+            <a:pPr indent="0" marL="0">
+              <a:buNone/>
+            </a:pPr>
+            <a:r>
+              <a:rPr lang="en-US" sz="1300" b="1" dirty="0">
+                <a:solidFill>
+                  <a:srgbClr val="002D62"/>
+                </a:solidFill>
+                <a:latin typeface="Arial" pitchFamily="34" charset="0"/>
+                <a:ea typeface="Arial" pitchFamily="34" charset="-122"/>
+                <a:cs typeface="Arial" pitchFamily="34" charset="-120"/>
+              </a:rPr>
+              <a:t>Sushi Ken</a:t>
+            </a:r>
+            <a:endParaRPr lang="en-US" sz="1300" dirty="0"/>
+          </a:p>
+        </p:txBody>
+      </p:sp>
+      <p:sp>
+        <p:nvSpPr>
+          <p:cNvPr id="31" name="Shape 29"/>
+          <p:cNvSpPr/>
+          <p:nvPr/>
+        </p:nvSpPr>
+        <p:spPr>
+          <a:xfrm>
+            <a:off x="731520" y="3749040"/>
+            <a:ext cx="2468880" cy="640080"/>
+          </a:xfrm>
+          <a:prstGeom prst="rect">
+            <a:avLst/>
+          </a:prstGeom>
+          <a:solidFill>
+            <a:srgbClr val="F5F0E6"/>
+          </a:solidFill>
+          <a:ln/>
+          <a:effectLst>
+            <a:outerShdw sx="100000" sy="100000" kx="0" ky="0" algn="bl" rotWithShape="0" blurRad="101600" dist="38100" dir="8100000">
+              <a:srgbClr val="000000">
+                <a:alpha val="20000"/>
+              </a:srgbClr>
+            </a:outerShdw>
+          </a:effectLst>
+        </p:spPr>
+      </p:sp>
+      <p:sp>
+        <p:nvSpPr>
+          <p:cNvPr id="32" name="Shape 30"/>
+          <p:cNvSpPr/>
+          <p:nvPr/>
+        </p:nvSpPr>
+        <p:spPr>
+          <a:xfrm>
+            <a:off x="731520" y="3749040"/>
+            <a:ext cx="54864" cy="640080"/>
+          </a:xfrm>
+          <a:prstGeom prst="rect">
+            <a:avLst/>
+          </a:prstGeom>
+          <a:solidFill>
+            <a:srgbClr val="C5A55A"/>
+          </a:solidFill>
+          <a:ln/>
+        </p:spPr>
+      </p:sp>
+      <p:sp>
+        <p:nvSpPr>
+          <p:cNvPr id="33" name="Text 31"/>
+          <p:cNvSpPr/>
+          <p:nvPr/>
+        </p:nvSpPr>
+        <p:spPr>
+          <a:xfrm>
+            <a:off x="914400" y="3749040"/>
+            <a:ext cx="2103120" cy="640080"/>
+          </a:xfrm>
+          <a:prstGeom prst="rect">
+            <a:avLst/>
+          </a:prstGeom>
+          <a:noFill/>
+          <a:ln/>
+        </p:spPr>
+        <p:txBody>
+          <a:bodyPr wrap="square" lIns="0" tIns="0" rIns="0" bIns="0" rtlCol="0" anchor="ctr"/>
+          <a:lstStyle/>
+          <a:p>
+            <a:pPr indent="0" marL="0">
+              <a:buNone/>
+            </a:pPr>
+            <a:r>
+              <a:rPr lang="en-US" sz="1300" b="1" dirty="0">
+                <a:solidFill>
+                  <a:srgbClr val="002D62"/>
+                </a:solidFill>
+                <a:latin typeface="Arial" pitchFamily="34" charset="0"/>
+                <a:ea typeface="Arial" pitchFamily="34" charset="-122"/>
+                <a:cs typeface="Arial" pitchFamily="34" charset="-120"/>
+              </a:rPr>
+              <a:t>Flippin Pizza</a:t>
+            </a:r>
+            <a:endParaRPr lang="en-US" sz="1300" dirty="0"/>
+          </a:p>
+        </p:txBody>
+      </p:sp>
+      <p:sp>
+        <p:nvSpPr>
+          <p:cNvPr id="34" name="Shape 32"/>
+          <p:cNvSpPr/>
+          <p:nvPr/>
+        </p:nvSpPr>
+        <p:spPr>
+          <a:xfrm>
+            <a:off x="3474720" y="3749040"/>
+            <a:ext cx="2468880" cy="640080"/>
+          </a:xfrm>
+          <a:prstGeom prst="rect">
+            <a:avLst/>
+          </a:prstGeom>
+          <a:solidFill>
+            <a:srgbClr val="F5F0E6"/>
+          </a:solidFill>
+          <a:ln/>
+          <a:effectLst>
+            <a:outerShdw sx="100000" sy="100000" kx="0" ky="0" algn="bl" rotWithShape="0" blurRad="101600" dist="38100" dir="8100000">
+              <a:srgbClr val="000000">
+                <a:alpha val="20000"/>
+              </a:srgbClr>
+            </a:outerShdw>
+          </a:effectLst>
+        </p:spPr>
+      </p:sp>
+      <p:sp>
+        <p:nvSpPr>
+          <p:cNvPr id="35" name="Shape 33"/>
+          <p:cNvSpPr/>
+          <p:nvPr/>
+        </p:nvSpPr>
+        <p:spPr>
+          <a:xfrm>
+            <a:off x="3474720" y="3749040"/>
+            <a:ext cx="54864" cy="640080"/>
+          </a:xfrm>
+          <a:prstGeom prst="rect">
+            <a:avLst/>
+          </a:prstGeom>
+          <a:solidFill>
+            <a:srgbClr val="C5A55A"/>
+          </a:solidFill>
+          <a:ln/>
+        </p:spPr>
+      </p:sp>
+      <p:sp>
+        <p:nvSpPr>
+          <p:cNvPr id="36" name="Text 34"/>
+          <p:cNvSpPr/>
+          <p:nvPr/>
+        </p:nvSpPr>
+        <p:spPr>
+          <a:xfrm>
+            <a:off x="3657600" y="3749040"/>
+            <a:ext cx="2103120" cy="640080"/>
+          </a:xfrm>
+          <a:prstGeom prst="rect">
+            <a:avLst/>
+          </a:prstGeom>
+          <a:noFill/>
+          <a:ln/>
+        </p:spPr>
+        <p:txBody>
+          <a:bodyPr wrap="square" lIns="0" tIns="0" rIns="0" bIns="0" rtlCol="0" anchor="ctr"/>
+          <a:lstStyle/>
+          <a:p>
+            <a:pPr indent="0" marL="0">
+              <a:buNone/>
+            </a:pPr>
+            <a:r>
+              <a:rPr lang="en-US" sz="1300" b="1" dirty="0">
+                <a:solidFill>
+                  <a:srgbClr val="002D62"/>
+                </a:solidFill>
+                <a:latin typeface="Arial" pitchFamily="34" charset="0"/>
+                <a:ea typeface="Arial" pitchFamily="34" charset="-122"/>
+                <a:cs typeface="Arial" pitchFamily="34" charset="-120"/>
+              </a:rPr>
+              <a:t>Round Table Pizza</a:t>
+            </a:r>
+            <a:endParaRPr lang="en-US" sz="1300" dirty="0"/>
+          </a:p>
+        </p:txBody>
+      </p:sp>
+      <p:sp>
+        <p:nvSpPr>
+          <p:cNvPr id="37" name="Text 35"/>
+          <p:cNvSpPr/>
+          <p:nvPr/>
+        </p:nvSpPr>
+        <p:spPr>
+          <a:xfrm>
+            <a:off x="731520" y="4572000"/>
+            <a:ext cx="7680960" cy="365760"/>
+          </a:xfrm>
+          <a:prstGeom prst="rect">
+            <a:avLst/>
+          </a:prstGeom>
+          <a:noFill/>
+          <a:ln/>
+        </p:spPr>
+        <p:txBody>
+          <a:bodyPr wrap="square" lIns="0" tIns="0" rIns="0" bIns="0" rtlCol="0" anchor="ctr"/>
+          <a:lstStyle/>
+          <a:p>
+            <a:pPr indent="0" marL="0">
+              <a:buNone/>
+            </a:pPr>
+            <a:r>
+              <a:rPr lang="en-US" sz="1300" i="1" dirty="0">
+                <a:solidFill>
+                  <a:srgbClr val="888888"/>
+                </a:solidFill>
+                <a:latin typeface="Arial" pitchFamily="34" charset="0"/>
+                <a:ea typeface="Arial" pitchFamily="34" charset="-122"/>
+                <a:cs typeface="Arial" pitchFamily="34" charset="-120"/>
+              </a:rPr>
+              <a:t>Join them and put your business in front of the entire Nighthawk community.</a:t>
+            </a:r>
+            <a:endParaRPr lang="en-US" sz="1300" dirty="0"/>
+          </a:p>
+        </p:txBody>
+      </p:sp>
+    </p:spTree>
+  </p:cSld>
+  <p:clrMapOvr>
+    <a:masterClrMapping/>
+  </p:clrMapOvr>
+</p:sld>
+</file>
+
+<file path=ppt/slides/slide11.xml><?xml version="1.0" encoding="utf-8"?>
+<p:sld xmlns:a="http://schemas.openxmlformats.org/drawingml/2006/main" xmlns:r="http://schemas.openxmlformats.org/officeDocument/2006/relationships" xmlns:p="http://schemas.openxmlformats.org/presentationml/2006/main">
+  <p:cSld name="Slide 11">
+    <p:bg>
+      <p:bgPr>
+        <a:solidFill>
           <a:srgbClr val="001A3A"/>
         </a:solidFill>
       </p:bgPr>
@@ -2377,7 +3542,7 @@
         <p:spPr>
           <a:xfrm>
             <a:off x="822960" y="2377440"/>
-            <a:ext cx="2103120" cy="457200"/>
+            <a:ext cx="2103120" cy="411480"/>
           </a:xfrm>
           <a:prstGeom prst="rect">
             <a:avLst/>
@@ -2401,7 +3566,7 @@
                 <a:ea typeface="Arial" pitchFamily="34" charset="-122"/>
                 <a:cs typeface="Arial" pitchFamily="34" charset="-120"/>
               </a:rPr>
-              <a:t>Featured at the top of the card</a:t>
+              <a:t>Featured at top of card</a:t>
             </a:r>
             <a:endParaRPr lang="en-US" sz="1100" dirty="0"/>
           </a:p>
@@ -2409,34 +3574,14 @@
       </p:sp>
       <p:sp>
         <p:nvSpPr>
-          <p:cNvPr id="9" name="Shape 7"/>
-          <p:cNvSpPr/>
-          <p:nvPr/>
-        </p:nvSpPr>
-        <p:spPr>
-          <a:xfrm>
-            <a:off x="822960" y="2834640"/>
-            <a:ext cx="2103120" cy="9144"/>
-          </a:xfrm>
-          <a:prstGeom prst="rect">
-            <a:avLst/>
-          </a:prstGeom>
-          <a:solidFill>
-            <a:srgbClr val="1E2A42"/>
-          </a:solidFill>
-          <a:ln/>
-        </p:spPr>
-      </p:sp>
-      <p:sp>
-        <p:nvSpPr>
-          <p:cNvPr id="10" name="Text 8"/>
-          <p:cNvSpPr/>
-          <p:nvPr/>
-        </p:nvSpPr>
-        <p:spPr>
-          <a:xfrm>
-            <a:off x="822960" y="2926080"/>
-            <a:ext cx="2103120" cy="457200"/>
+          <p:cNvPr id="9" name="Text 7"/>
+          <p:cNvSpPr/>
+          <p:nvPr/>
+        </p:nvSpPr>
+        <p:spPr>
+          <a:xfrm>
+            <a:off x="822960" y="2880360"/>
+            <a:ext cx="2103120" cy="411480"/>
           </a:xfrm>
           <a:prstGeom prst="rect">
             <a:avLst/>
@@ -2460,7 +3605,7 @@
                 <a:ea typeface="Arial" pitchFamily="34" charset="-122"/>
                 <a:cs typeface="Arial" pitchFamily="34" charset="-120"/>
               </a:rPr>
-              <a:t>2 push promotions per month</a:t>
+              <a:t>2 push promotions/month</a:t>
             </a:r>
             <a:endParaRPr lang="en-US" sz="1100" dirty="0"/>
           </a:p>
@@ -2468,34 +3613,14 @@
       </p:sp>
       <p:sp>
         <p:nvSpPr>
-          <p:cNvPr id="11" name="Shape 9"/>
+          <p:cNvPr id="10" name="Text 8"/>
           <p:cNvSpPr/>
           <p:nvPr/>
         </p:nvSpPr>
         <p:spPr>
           <a:xfrm>
             <a:off x="822960" y="3383280"/>
-            <a:ext cx="2103120" cy="9144"/>
-          </a:xfrm>
-          <a:prstGeom prst="rect">
-            <a:avLst/>
-          </a:prstGeom>
-          <a:solidFill>
-            <a:srgbClr val="1E2A42"/>
-          </a:solidFill>
-          <a:ln/>
-        </p:spPr>
-      </p:sp>
-      <p:sp>
-        <p:nvSpPr>
-          <p:cNvPr id="12" name="Text 10"/>
-          <p:cNvSpPr/>
-          <p:nvPr/>
-        </p:nvSpPr>
-        <p:spPr>
-          <a:xfrm>
-            <a:off x="822960" y="3474720"/>
-            <a:ext cx="2103120" cy="457200"/>
+            <a:ext cx="2103120" cy="411480"/>
           </a:xfrm>
           <a:prstGeom prst="rect">
             <a:avLst/>
@@ -2527,34 +3652,14 @@
       </p:sp>
       <p:sp>
         <p:nvSpPr>
-          <p:cNvPr id="13" name="Shape 11"/>
-          <p:cNvSpPr/>
-          <p:nvPr/>
-        </p:nvSpPr>
-        <p:spPr>
-          <a:xfrm>
-            <a:off x="822960" y="3931920"/>
-            <a:ext cx="2103120" cy="9144"/>
-          </a:xfrm>
-          <a:prstGeom prst="rect">
-            <a:avLst/>
-          </a:prstGeom>
-          <a:solidFill>
-            <a:srgbClr val="1E2A42"/>
-          </a:solidFill>
-          <a:ln/>
-        </p:spPr>
-      </p:sp>
-      <p:sp>
-        <p:nvSpPr>
-          <p:cNvPr id="14" name="Text 12"/>
-          <p:cNvSpPr/>
-          <p:nvPr/>
-        </p:nvSpPr>
-        <p:spPr>
-          <a:xfrm>
-            <a:off x="822960" y="4023360"/>
-            <a:ext cx="2103120" cy="457200"/>
+          <p:cNvPr id="11" name="Text 9"/>
+          <p:cNvSpPr/>
+          <p:nvPr/>
+        </p:nvSpPr>
+        <p:spPr>
+          <a:xfrm>
+            <a:off x="822960" y="3886200"/>
+            <a:ext cx="2103120" cy="411480"/>
           </a:xfrm>
           <a:prstGeom prst="rect">
             <a:avLst/>
@@ -2586,7 +3691,7 @@
       </p:sp>
       <p:sp>
         <p:nvSpPr>
-          <p:cNvPr id="15" name="Shape 13"/>
+          <p:cNvPr id="12" name="Shape 10"/>
           <p:cNvSpPr/>
           <p:nvPr/>
         </p:nvSpPr>
@@ -2613,7 +3718,7 @@
       </p:sp>
       <p:sp>
         <p:nvSpPr>
-          <p:cNvPr id="16" name="Shape 14"/>
+          <p:cNvPr id="13" name="Shape 11"/>
           <p:cNvSpPr/>
           <p:nvPr/>
         </p:nvSpPr>
@@ -2633,7 +3738,7 @@
       </p:sp>
       <p:sp>
         <p:nvSpPr>
-          <p:cNvPr id="17" name="Text 15"/>
+          <p:cNvPr id="14" name="Text 12"/>
           <p:cNvSpPr/>
           <p:nvPr/>
         </p:nvSpPr>
@@ -2672,7 +3777,7 @@
       </p:sp>
       <p:sp>
         <p:nvSpPr>
-          <p:cNvPr id="18" name="Text 16"/>
+          <p:cNvPr id="15" name="Text 13"/>
           <p:cNvSpPr/>
           <p:nvPr/>
         </p:nvSpPr>
@@ -2711,14 +3816,14 @@
       </p:sp>
       <p:sp>
         <p:nvSpPr>
-          <p:cNvPr id="19" name="Text 17"/>
+          <p:cNvPr id="16" name="Text 14"/>
           <p:cNvSpPr/>
           <p:nvPr/>
         </p:nvSpPr>
         <p:spPr>
           <a:xfrm>
             <a:off x="3703320" y="2377440"/>
-            <a:ext cx="2103120" cy="457200"/>
+            <a:ext cx="2103120" cy="411480"/>
           </a:xfrm>
           <a:prstGeom prst="rect">
             <a:avLst/>
@@ -2750,34 +3855,14 @@
       </p:sp>
       <p:sp>
         <p:nvSpPr>
-          <p:cNvPr id="20" name="Shape 18"/>
-          <p:cNvSpPr/>
-          <p:nvPr/>
-        </p:nvSpPr>
-        <p:spPr>
-          <a:xfrm>
-            <a:off x="3703320" y="2834640"/>
-            <a:ext cx="2103120" cy="9144"/>
-          </a:xfrm>
-          <a:prstGeom prst="rect">
-            <a:avLst/>
-          </a:prstGeom>
-          <a:solidFill>
-            <a:srgbClr val="1E2A42"/>
-          </a:solidFill>
-          <a:ln/>
-        </p:spPr>
-      </p:sp>
-      <p:sp>
-        <p:nvSpPr>
-          <p:cNvPr id="21" name="Text 19"/>
-          <p:cNvSpPr/>
-          <p:nvPr/>
-        </p:nvSpPr>
-        <p:spPr>
-          <a:xfrm>
-            <a:off x="3703320" y="2926080"/>
-            <a:ext cx="2103120" cy="457200"/>
+          <p:cNvPr id="17" name="Text 15"/>
+          <p:cNvSpPr/>
+          <p:nvPr/>
+        </p:nvSpPr>
+        <p:spPr>
+          <a:xfrm>
+            <a:off x="3703320" y="2880360"/>
+            <a:ext cx="2103120" cy="411480"/>
           </a:xfrm>
           <a:prstGeom prst="rect">
             <a:avLst/>
@@ -2801,7 +3886,7 @@
                 <a:ea typeface="Arial" pitchFamily="34" charset="-122"/>
                 <a:cs typeface="Arial" pitchFamily="34" charset="-120"/>
               </a:rPr>
-              <a:t>1 push promotion per month</a:t>
+              <a:t>1 push promotion/month</a:t>
             </a:r>
             <a:endParaRPr lang="en-US" sz="1100" dirty="0"/>
           </a:p>
@@ -2809,34 +3894,14 @@
       </p:sp>
       <p:sp>
         <p:nvSpPr>
-          <p:cNvPr id="22" name="Shape 20"/>
+          <p:cNvPr id="18" name="Text 16"/>
           <p:cNvSpPr/>
           <p:nvPr/>
         </p:nvSpPr>
         <p:spPr>
           <a:xfrm>
             <a:off x="3703320" y="3383280"/>
-            <a:ext cx="2103120" cy="9144"/>
-          </a:xfrm>
-          <a:prstGeom prst="rect">
-            <a:avLst/>
-          </a:prstGeom>
-          <a:solidFill>
-            <a:srgbClr val="1E2A42"/>
-          </a:solidFill>
-          <a:ln/>
-        </p:spPr>
-      </p:sp>
-      <p:sp>
-        <p:nvSpPr>
-          <p:cNvPr id="23" name="Text 21"/>
-          <p:cNvSpPr/>
-          <p:nvPr/>
-        </p:nvSpPr>
-        <p:spPr>
-          <a:xfrm>
-            <a:off x="3703320" y="3474720"/>
-            <a:ext cx="2103120" cy="457200"/>
+            <a:ext cx="2103120" cy="411480"/>
           </a:xfrm>
           <a:prstGeom prst="rect">
             <a:avLst/>
@@ -2868,7 +3933,7 @@
       </p:sp>
       <p:sp>
         <p:nvSpPr>
-          <p:cNvPr id="24" name="Shape 22"/>
+          <p:cNvPr id="19" name="Shape 17"/>
           <p:cNvSpPr/>
           <p:nvPr/>
         </p:nvSpPr>
@@ -2895,7 +3960,7 @@
       </p:sp>
       <p:sp>
         <p:nvSpPr>
-          <p:cNvPr id="25" name="Shape 23"/>
+          <p:cNvPr id="20" name="Shape 18"/>
           <p:cNvSpPr/>
           <p:nvPr/>
         </p:nvSpPr>
@@ -2915,7 +3980,7 @@
       </p:sp>
       <p:sp>
         <p:nvSpPr>
-          <p:cNvPr id="26" name="Text 24"/>
+          <p:cNvPr id="21" name="Text 19"/>
           <p:cNvSpPr/>
           <p:nvPr/>
         </p:nvSpPr>
@@ -2954,7 +4019,7 @@
       </p:sp>
       <p:sp>
         <p:nvSpPr>
-          <p:cNvPr id="27" name="Text 25"/>
+          <p:cNvPr id="22" name="Text 20"/>
           <p:cNvSpPr/>
           <p:nvPr/>
         </p:nvSpPr>
@@ -2993,14 +4058,14 @@
       </p:sp>
       <p:sp>
         <p:nvSpPr>
-          <p:cNvPr id="28" name="Text 26"/>
+          <p:cNvPr id="23" name="Text 21"/>
           <p:cNvSpPr/>
           <p:nvPr/>
         </p:nvSpPr>
         <p:spPr>
           <a:xfrm>
             <a:off x="6583680" y="2377440"/>
-            <a:ext cx="2103120" cy="457200"/>
+            <a:ext cx="2103120" cy="411480"/>
           </a:xfrm>
           <a:prstGeom prst="rect">
             <a:avLst/>
@@ -3032,34 +4097,14 @@
       </p:sp>
       <p:sp>
         <p:nvSpPr>
-          <p:cNvPr id="29" name="Shape 27"/>
-          <p:cNvSpPr/>
-          <p:nvPr/>
-        </p:nvSpPr>
-        <p:spPr>
-          <a:xfrm>
-            <a:off x="6583680" y="2834640"/>
-            <a:ext cx="2103120" cy="9144"/>
-          </a:xfrm>
-          <a:prstGeom prst="rect">
-            <a:avLst/>
-          </a:prstGeom>
-          <a:solidFill>
-            <a:srgbClr val="1E2A42"/>
-          </a:solidFill>
-          <a:ln/>
-        </p:spPr>
-      </p:sp>
-      <p:sp>
-        <p:nvSpPr>
-          <p:cNvPr id="30" name="Text 28"/>
-          <p:cNvSpPr/>
-          <p:nvPr/>
-        </p:nvSpPr>
-        <p:spPr>
-          <a:xfrm>
-            <a:off x="6583680" y="2926080"/>
-            <a:ext cx="2103120" cy="457200"/>
+          <p:cNvPr id="24" name="Text 22"/>
+          <p:cNvSpPr/>
+          <p:nvPr/>
+        </p:nvSpPr>
+        <p:spPr>
+          <a:xfrm>
+            <a:off x="6583680" y="2880360"/>
+            <a:ext cx="2103120" cy="411480"/>
           </a:xfrm>
           <a:prstGeom prst="rect">
             <a:avLst/>
@@ -3097,9 +4142,9 @@
 </p:sld>
 </file>
 
-<file path=ppt/slides/slide11.xml><?xml version="1.0" encoding="utf-8"?>
+<file path=ppt/slides/slide12.xml><?xml version="1.0" encoding="utf-8"?>
 <p:sld xmlns:a="http://schemas.openxmlformats.org/drawingml/2006/main" xmlns:r="http://schemas.openxmlformats.org/officeDocument/2006/relationships" xmlns:p="http://schemas.openxmlformats.org/presentationml/2006/main">
-  <p:cSld name="Slide 11">
+  <p:cSld name="Slide 12">
     <p:bg>
       <p:bgPr>
         <a:solidFill>
@@ -3286,7 +4331,7 @@
         </p:nvSpPr>
         <p:spPr>
           <a:xfrm>
-            <a:off x="914400" y="2103120"/>
+            <a:off x="914400" y="2057400"/>
             <a:ext cx="457200" cy="457200"/>
           </a:xfrm>
           <a:prstGeom prst="ellipse">
@@ -3306,7 +4351,7 @@
         </p:nvSpPr>
         <p:spPr>
           <a:xfrm>
-            <a:off x="914400" y="2103120"/>
+            <a:off x="914400" y="2057400"/>
             <a:ext cx="457200" cy="457200"/>
           </a:xfrm>
           <a:prstGeom prst="rect">
@@ -3345,7 +4390,7 @@
         </p:nvSpPr>
         <p:spPr>
           <a:xfrm>
-            <a:off x="1645920" y="2057400"/>
+            <a:off x="1645920" y="2011680"/>
             <a:ext cx="6766560" cy="548640"/>
           </a:xfrm>
           <a:prstGeom prst="rect">
@@ -3370,7 +4415,7 @@
                 <a:ea typeface="Arial" pitchFamily="34" charset="-122"/>
                 <a:cs typeface="Arial" pitchFamily="34" charset="-120"/>
               </a:rPr>
-              <a:t>Tell us your discount offer (e.g., 10% off, BOGO, etc.)</a:t>
+              <a:t>Tell us your discount offer</a:t>
             </a:r>
             <a:endParaRPr lang="en-US" sz="1500" dirty="0"/>
           </a:p>
@@ -3384,7 +4429,7 @@
         </p:nvSpPr>
         <p:spPr>
           <a:xfrm>
-            <a:off x="914400" y="2788920"/>
+            <a:off x="914400" y="2697480"/>
             <a:ext cx="457200" cy="457200"/>
           </a:xfrm>
           <a:prstGeom prst="ellipse">
@@ -3404,7 +4449,7 @@
         </p:nvSpPr>
         <p:spPr>
           <a:xfrm>
-            <a:off x="914400" y="2788920"/>
+            <a:off x="914400" y="2697480"/>
             <a:ext cx="457200" cy="457200"/>
           </a:xfrm>
           <a:prstGeom prst="rect">
@@ -3443,7 +4488,7 @@
         </p:nvSpPr>
         <p:spPr>
           <a:xfrm>
-            <a:off x="1645920" y="2743200"/>
+            <a:off x="1645920" y="2651760"/>
             <a:ext cx="6766560" cy="548640"/>
           </a:xfrm>
           <a:prstGeom prst="rect">
@@ -3468,7 +4513,7 @@
                 <a:ea typeface="Arial" pitchFamily="34" charset="-122"/>
                 <a:cs typeface="Arial" pitchFamily="34" charset="-120"/>
               </a:rPr>
-              <a:t>We add your business to the card — it goes live immediately</a:t>
+              <a:t>We add your business to the card — live immediately</a:t>
             </a:r>
             <a:endParaRPr lang="en-US" sz="1500" dirty="0"/>
           </a:p>
@@ -3482,7 +4527,7 @@
         </p:nvSpPr>
         <p:spPr>
           <a:xfrm>
-            <a:off x="914400" y="3474720"/>
+            <a:off x="914400" y="3337560"/>
             <a:ext cx="457200" cy="457200"/>
           </a:xfrm>
           <a:prstGeom prst="ellipse">
@@ -3502,7 +4547,7 @@
         </p:nvSpPr>
         <p:spPr>
           <a:xfrm>
-            <a:off x="914400" y="3474720"/>
+            <a:off x="914400" y="3337560"/>
             <a:ext cx="457200" cy="457200"/>
           </a:xfrm>
           <a:prstGeom prst="rect">
@@ -3541,7 +4586,7 @@
         </p:nvSpPr>
         <p:spPr>
           <a:xfrm>
-            <a:off x="1645920" y="3429000"/>
+            <a:off x="1645920" y="3291840"/>
             <a:ext cx="6766560" cy="548640"/>
           </a:xfrm>
           <a:prstGeom prst="rect">
@@ -3566,7 +4611,7 @@
                 <a:ea typeface="Arial" pitchFamily="34" charset="-122"/>
                 <a:cs typeface="Arial" pitchFamily="34" charset="-120"/>
               </a:rPr>
-              <a:t>Existing cardholders get a push notification about your business</a:t>
+              <a:t>Existing cardholders get a push notification</a:t>
             </a:r>
             <a:endParaRPr lang="en-US" sz="1500" dirty="0"/>
           </a:p>
@@ -3580,7 +4625,7 @@
         </p:nvSpPr>
         <p:spPr>
           <a:xfrm>
-            <a:off x="914400" y="4160520"/>
+            <a:off x="914400" y="3977640"/>
             <a:ext cx="457200" cy="457200"/>
           </a:xfrm>
           <a:prstGeom prst="ellipse">
@@ -3600,7 +4645,7 @@
         </p:nvSpPr>
         <p:spPr>
           <a:xfrm>
-            <a:off x="914400" y="4160520"/>
+            <a:off x="914400" y="3977640"/>
             <a:ext cx="457200" cy="457200"/>
           </a:xfrm>
           <a:prstGeom prst="rect">
@@ -3639,7 +4684,7 @@
         </p:nvSpPr>
         <p:spPr>
           <a:xfrm>
-            <a:off x="1645920" y="4114800"/>
+            <a:off x="1645920" y="3931920"/>
             <a:ext cx="6766560" cy="548640"/>
           </a:xfrm>
           <a:prstGeom prst="rect">
@@ -3664,9 +4709,72 @@
                 <a:ea typeface="Arial" pitchFamily="34" charset="-122"/>
                 <a:cs typeface="Arial" pitchFamily="34" charset="-120"/>
               </a:rPr>
-              <a:t>Start seeing customers walk in with the Nighthawk Card</a:t>
+              <a:t>Start seeing customers with the Nighthawk Card</a:t>
             </a:r>
             <a:endParaRPr lang="en-US" sz="1500" dirty="0"/>
+          </a:p>
+        </p:txBody>
+      </p:sp>
+      <p:pic>
+        <p:nvPicPr>
+          <p:cNvPr id="19" name="Image 0" descr="preencoded.png">    </p:cNvPr>
+          <p:cNvPicPr>
+            <a:picLocks noChangeAspect="1"/>
+          </p:cNvPicPr>
+          <p:nvPr/>
+        </p:nvPicPr>
+        <p:blipFill>
+          <a:blip r:embed="rId1"/>
+          <a:stretch>
+            <a:fillRect/>
+          </a:stretch>
+        </p:blipFill>
+        <p:spPr>
+          <a:xfrm>
+            <a:off x="6858000" y="1280160"/>
+            <a:ext cx="1645920" cy="1645920"/>
+          </a:xfrm>
+          <a:prstGeom prst="rect">
+            <a:avLst/>
+          </a:prstGeom>
+        </p:spPr>
+      </p:pic>
+      <p:sp>
+        <p:nvSpPr>
+          <p:cNvPr id="20" name="Text 17"/>
+          <p:cNvSpPr/>
+          <p:nvPr/>
+        </p:nvSpPr>
+        <p:spPr>
+          <a:xfrm>
+            <a:off x="6858000" y="2926080"/>
+            <a:ext cx="1645920" cy="274320"/>
+          </a:xfrm>
+          <a:prstGeom prst="rect">
+            <a:avLst/>
+          </a:prstGeom>
+          <a:noFill/>
+          <a:ln/>
+        </p:spPr>
+        <p:txBody>
+          <a:bodyPr wrap="square" lIns="0" tIns="0" rIns="0" bIns="0" rtlCol="0" anchor="ctr"/>
+          <a:lstStyle/>
+          <a:p>
+            <a:pPr algn="ctr" indent="0" marL="0">
+              <a:buNone/>
+            </a:pPr>
+            <a:r>
+              <a:rPr lang="en-US" sz="900" dirty="0">
+                <a:solidFill>
+                  <a:srgbClr val="999999"/>
+                </a:solidFill>
+                <a:latin typeface="Arial" pitchFamily="34" charset="0"/>
+                <a:ea typeface="Arial" pitchFamily="34" charset="-122"/>
+                <a:cs typeface="Arial" pitchFamily="34" charset="-120"/>
+              </a:rPr>
+              <a:t>Sample QR Code</a:t>
+            </a:r>
+            <a:endParaRPr lang="en-US" sz="900" dirty="0"/>
           </a:p>
         </p:txBody>
       </p:sp>
@@ -3678,9 +4786,9 @@
 </p:sld>
 </file>
 
-<file path=ppt/slides/slide12.xml><?xml version="1.0" encoding="utf-8"?>
+<file path=ppt/slides/slide13.xml><?xml version="1.0" encoding="utf-8"?>
 <p:sld xmlns:a="http://schemas.openxmlformats.org/drawingml/2006/main" xmlns:r="http://schemas.openxmlformats.org/officeDocument/2006/relationships" xmlns:p="http://schemas.openxmlformats.org/presentationml/2006/main">
-  <p:cSld name="Slide 12">
+  <p:cSld name="Slide 13">
     <p:bg>
       <p:bgPr>
         <a:solidFill>
@@ -3910,8 +5018,8 @@
         </p:nvSpPr>
         <p:spPr>
           <a:xfrm>
-            <a:off x="731520" y="4389120"/>
-            <a:ext cx="7680960" cy="457200"/>
+            <a:off x="731520" y="4572000"/>
+            <a:ext cx="7680960" cy="274320"/>
           </a:xfrm>
           <a:prstGeom prst="rect">
             <a:avLst/>
@@ -3927,7 +5035,7 @@
               <a:buNone/>
             </a:pPr>
             <a:r>
-              <a:rPr lang="en-US" sz="1400" dirty="0">
+              <a:rPr lang="en-US" sz="1000" i="1" dirty="0">
                 <a:solidFill>
                   <a:srgbClr val="A0A0A0"/>
                 </a:solidFill>
@@ -3935,9 +5043,9 @@
                 <a:ea typeface="Arial" pitchFamily="34" charset="-122"/>
                 <a:cs typeface="Arial" pitchFamily="34" charset="-120"/>
               </a:rPr>
-              <a:t>Contact us to get started</a:t>
-            </a:r>
-            <a:endParaRPr lang="en-US" sz="1400" dirty="0"/>
+              <a:t>All sponsorships subject to Terms &amp; Conditions, Privacy Policy, and Sponsor Agreement.</a:t>
+            </a:r>
+            <a:endParaRPr lang="en-US" sz="1000" dirty="0"/>
           </a:p>
         </p:txBody>
       </p:sp>
@@ -4046,7 +5154,7 @@
                 <a:ea typeface="Arial Black" pitchFamily="34" charset="-122"/>
                 <a:cs typeface="Arial Black" pitchFamily="34" charset="-120"/>
               </a:rPr>
-              <a:t>THE OPPORTUNITY</a:t>
+              <a:t>THE NIGHTHAWK DISCOUNT CARD</a:t>
             </a:r>
             <a:endParaRPr lang="en-US" sz="2800" dirty="0"/>
           </a:p>
@@ -4054,54 +5162,46 @@
       </p:sp>
       <p:sp>
         <p:nvSpPr>
-          <p:cNvPr id="4" name="Shape 2"/>
-          <p:cNvSpPr/>
-          <p:nvPr/>
-        </p:nvSpPr>
-        <p:spPr>
-          <a:xfrm>
-            <a:off x="731520" y="1371600"/>
-            <a:ext cx="7680960" cy="1005840"/>
-          </a:xfrm>
-          <a:prstGeom prst="rect">
-            <a:avLst/>
-          </a:prstGeom>
-          <a:solidFill>
-            <a:srgbClr val="F5F0E6"/>
-          </a:solidFill>
-          <a:ln/>
-          <a:effectLst>
-            <a:outerShdw sx="100000" sy="100000" kx="0" ky="0" algn="bl" rotWithShape="0" blurRad="101600" dist="38100" dir="8100000">
-              <a:srgbClr val="000000">
-                <a:alpha val="20000"/>
-              </a:srgbClr>
-            </a:outerShdw>
-          </a:effectLst>
-        </p:spPr>
-      </p:sp>
-      <p:sp>
-        <p:nvSpPr>
-          <p:cNvPr id="5" name="Shape 3"/>
-          <p:cNvSpPr/>
-          <p:nvPr/>
-        </p:nvSpPr>
-        <p:spPr>
-          <a:xfrm>
-            <a:off x="731520" y="1371600"/>
-            <a:ext cx="64008" cy="1005840"/>
-          </a:xfrm>
-          <a:prstGeom prst="rect">
-            <a:avLst/>
-          </a:prstGeom>
-          <a:solidFill>
-            <a:srgbClr val="C5A55A"/>
-          </a:solidFill>
-          <a:ln/>
-        </p:spPr>
+          <p:cNvPr id="4" name="Text 2"/>
+          <p:cNvSpPr/>
+          <p:nvPr/>
+        </p:nvSpPr>
+        <p:spPr>
+          <a:xfrm>
+            <a:off x="457200" y="1097280"/>
+            <a:ext cx="3657600" cy="365760"/>
+          </a:xfrm>
+          <a:prstGeom prst="rect">
+            <a:avLst/>
+          </a:prstGeom>
+          <a:noFill/>
+          <a:ln/>
+        </p:spPr>
+        <p:txBody>
+          <a:bodyPr wrap="square" lIns="0" tIns="0" rIns="0" bIns="0" rtlCol="0" anchor="ctr"/>
+          <a:lstStyle/>
+          <a:p>
+            <a:pPr algn="ctr" indent="0" marL="0">
+              <a:buNone/>
+            </a:pPr>
+            <a:r>
+              <a:rPr lang="en-US" sz="1300" b="1" dirty="0">
+                <a:solidFill>
+                  <a:srgbClr val="002D62"/>
+                </a:solidFill>
+                <a:latin typeface="Arial" pitchFamily="34" charset="0"/>
+                <a:ea typeface="Arial" pitchFamily="34" charset="-122"/>
+                <a:cs typeface="Arial" pitchFamily="34" charset="-120"/>
+              </a:rPr>
+              <a:t>Physical Card</a:t>
+            </a:r>
+            <a:endParaRPr lang="en-US" sz="1300" dirty="0"/>
+          </a:p>
+        </p:txBody>
       </p:sp>
       <p:pic>
         <p:nvPicPr>
-          <p:cNvPr id="6" name="Image 0" descr="preencoded.png">    </p:cNvPr>
+          <p:cNvPr id="5" name="Image 0" descr="preencoded.png">    </p:cNvPr>
           <p:cNvPicPr>
             <a:picLocks noChangeAspect="1"/>
           </p:cNvPicPr>
@@ -4109,14 +5209,13 @@
         </p:nvPicPr>
         <p:blipFill>
           <a:blip r:embed="rId1"/>
-          <a:stretch>
-            <a:fillRect/>
-          </a:stretch>
+          <a:srcRect l="0" r="0" t="0" b="0"/>
+          <a:stretch/>
         </p:blipFill>
         <p:spPr>
           <a:xfrm>
-            <a:off x="1051560" y="1600200"/>
-            <a:ext cx="502920" cy="502920"/>
+            <a:off x="731520" y="1463040"/>
+            <a:ext cx="3474720" cy="1984248"/>
           </a:xfrm>
           <a:prstGeom prst="rect">
             <a:avLst/>
@@ -4125,132 +5224,85 @@
       </p:pic>
       <p:sp>
         <p:nvSpPr>
-          <p:cNvPr id="7" name="Text 4"/>
-          <p:cNvSpPr/>
-          <p:nvPr/>
-        </p:nvSpPr>
-        <p:spPr>
-          <a:xfrm>
-            <a:off x="1828800" y="1463040"/>
-            <a:ext cx="6217920" cy="365760"/>
-          </a:xfrm>
-          <a:prstGeom prst="rect">
-            <a:avLst/>
-          </a:prstGeom>
-          <a:noFill/>
-          <a:ln/>
-        </p:spPr>
-        <p:txBody>
-          <a:bodyPr wrap="square" lIns="0" tIns="0" rIns="0" bIns="0" rtlCol="0" anchor="ctr"/>
-          <a:lstStyle/>
-          <a:p>
-            <a:pPr indent="0" marL="0">
-              <a:buNone/>
-            </a:pPr>
-            <a:r>
-              <a:rPr lang="en-US" sz="1600" b="1" dirty="0">
-                <a:solidFill>
-                  <a:srgbClr val="002D62"/>
+          <p:cNvPr id="6" name="Text 3"/>
+          <p:cNvSpPr/>
+          <p:nvPr/>
+        </p:nvSpPr>
+        <p:spPr>
+          <a:xfrm>
+            <a:off x="3931920" y="2286000"/>
+            <a:ext cx="1280160" cy="457200"/>
+          </a:xfrm>
+          <a:prstGeom prst="rect">
+            <a:avLst/>
+          </a:prstGeom>
+          <a:noFill/>
+          <a:ln/>
+        </p:spPr>
+        <p:txBody>
+          <a:bodyPr wrap="square" lIns="0" tIns="0" rIns="0" bIns="0" rtlCol="0" anchor="ctr"/>
+          <a:lstStyle/>
+          <a:p>
+            <a:pPr algn="ctr" indent="0" marL="0">
+              <a:buNone/>
+            </a:pPr>
+            <a:r>
+              <a:rPr lang="en-US" sz="2400" dirty="0">
+                <a:solidFill>
+                  <a:srgbClr val="C5A55A"/>
                 </a:solidFill>
                 <a:latin typeface="Arial" pitchFamily="34" charset="0"/>
                 <a:ea typeface="Arial" pitchFamily="34" charset="-122"/>
                 <a:cs typeface="Arial" pitchFamily="34" charset="-120"/>
               </a:rPr>
-              <a:t>Always With Them</a:t>
-            </a:r>
-            <a:endParaRPr lang="en-US" sz="1600" dirty="0"/>
-          </a:p>
-        </p:txBody>
-      </p:sp>
-      <p:sp>
-        <p:nvSpPr>
-          <p:cNvPr id="8" name="Text 5"/>
-          <p:cNvSpPr/>
-          <p:nvPr/>
-        </p:nvSpPr>
-        <p:spPr>
-          <a:xfrm>
-            <a:off x="1828800" y="1828800"/>
-            <a:ext cx="6217920" cy="457200"/>
-          </a:xfrm>
-          <a:prstGeom prst="rect">
-            <a:avLst/>
-          </a:prstGeom>
-          <a:noFill/>
-          <a:ln/>
-        </p:spPr>
-        <p:txBody>
-          <a:bodyPr wrap="square" lIns="0" tIns="0" rIns="0" bIns="0" rtlCol="0" anchor="ctr"/>
-          <a:lstStyle/>
-          <a:p>
-            <a:pPr indent="0" marL="0">
-              <a:buNone/>
-            </a:pPr>
-            <a:r>
-              <a:rPr lang="en-US" sz="1200" dirty="0">
-                <a:solidFill>
-                  <a:srgbClr val="555555"/>
+              <a:t>&gt;&gt;&gt;</a:t>
+            </a:r>
+            <a:endParaRPr lang="en-US" sz="2400" dirty="0"/>
+          </a:p>
+        </p:txBody>
+      </p:sp>
+      <p:sp>
+        <p:nvSpPr>
+          <p:cNvPr id="7" name="Text 4"/>
+          <p:cNvSpPr/>
+          <p:nvPr/>
+        </p:nvSpPr>
+        <p:spPr>
+          <a:xfrm>
+            <a:off x="5029200" y="1097280"/>
+            <a:ext cx="3657600" cy="365760"/>
+          </a:xfrm>
+          <a:prstGeom prst="rect">
+            <a:avLst/>
+          </a:prstGeom>
+          <a:noFill/>
+          <a:ln/>
+        </p:spPr>
+        <p:txBody>
+          <a:bodyPr wrap="square" lIns="0" tIns="0" rIns="0" bIns="0" rtlCol="0" anchor="ctr"/>
+          <a:lstStyle/>
+          <a:p>
+            <a:pPr algn="ctr" indent="0" marL="0">
+              <a:buNone/>
+            </a:pPr>
+            <a:r>
+              <a:rPr lang="en-US" sz="1300" b="1" dirty="0">
+                <a:solidFill>
+                  <a:srgbClr val="002D62"/>
                 </a:solidFill>
                 <a:latin typeface="Arial" pitchFamily="34" charset="0"/>
                 <a:ea typeface="Arial" pitchFamily="34" charset="-122"/>
                 <a:cs typeface="Arial" pitchFamily="34" charset="-120"/>
               </a:rPr>
-              <a:t>Every cardholder carries your brand in their Apple Wallet — visible every time they open their phone</a:t>
-            </a:r>
-            <a:endParaRPr lang="en-US" sz="1200" dirty="0"/>
-          </a:p>
-        </p:txBody>
-      </p:sp>
-      <p:sp>
-        <p:nvSpPr>
-          <p:cNvPr id="9" name="Shape 6"/>
-          <p:cNvSpPr/>
-          <p:nvPr/>
-        </p:nvSpPr>
-        <p:spPr>
-          <a:xfrm>
-            <a:off x="731520" y="2560320"/>
-            <a:ext cx="7680960" cy="1005840"/>
-          </a:xfrm>
-          <a:prstGeom prst="rect">
-            <a:avLst/>
-          </a:prstGeom>
-          <a:solidFill>
-            <a:srgbClr val="F5F0E6"/>
-          </a:solidFill>
-          <a:ln/>
-          <a:effectLst>
-            <a:outerShdw sx="100000" sy="100000" kx="0" ky="0" algn="bl" rotWithShape="0" blurRad="101600" dist="38100" dir="8100000">
-              <a:srgbClr val="000000">
-                <a:alpha val="20000"/>
-              </a:srgbClr>
-            </a:outerShdw>
-          </a:effectLst>
-        </p:spPr>
-      </p:sp>
-      <p:sp>
-        <p:nvSpPr>
-          <p:cNvPr id="10" name="Shape 7"/>
-          <p:cNvSpPr/>
-          <p:nvPr/>
-        </p:nvSpPr>
-        <p:spPr>
-          <a:xfrm>
-            <a:off x="731520" y="2560320"/>
-            <a:ext cx="64008" cy="1005840"/>
-          </a:xfrm>
-          <a:prstGeom prst="rect">
-            <a:avLst/>
-          </a:prstGeom>
-          <a:solidFill>
-            <a:srgbClr val="C5A55A"/>
-          </a:solidFill>
-          <a:ln/>
-        </p:spPr>
+              <a:t>Apple Wallet</a:t>
+            </a:r>
+            <a:endParaRPr lang="en-US" sz="1300" dirty="0"/>
+          </a:p>
+        </p:txBody>
       </p:sp>
       <p:pic>
         <p:nvPicPr>
-          <p:cNvPr id="11" name="Image 1" descr="preencoded.png">    </p:cNvPr>
+          <p:cNvPr id="8" name="Image 1" descr="preencoded.png">    </p:cNvPr>
           <p:cNvPicPr>
             <a:picLocks noChangeAspect="1"/>
           </p:cNvPicPr>
@@ -4258,14 +5310,13 @@
         </p:nvPicPr>
         <p:blipFill>
           <a:blip r:embed="rId2"/>
-          <a:stretch>
-            <a:fillRect/>
-          </a:stretch>
+          <a:srcRect l="0" r="0" t="0" b="0"/>
+          <a:stretch/>
         </p:blipFill>
         <p:spPr>
           <a:xfrm>
-            <a:off x="1051560" y="2788920"/>
-            <a:ext cx="502920" cy="502920"/>
+            <a:off x="5669280" y="1371600"/>
+            <a:ext cx="2103120" cy="3255264"/>
           </a:xfrm>
           <a:prstGeom prst="rect">
             <a:avLst/>
@@ -4274,14 +5325,14 @@
       </p:pic>
       <p:sp>
         <p:nvSpPr>
-          <p:cNvPr id="12" name="Text 8"/>
-          <p:cNvSpPr/>
-          <p:nvPr/>
-        </p:nvSpPr>
-        <p:spPr>
-          <a:xfrm>
-            <a:off x="1828800" y="2651760"/>
-            <a:ext cx="6217920" cy="365760"/>
+          <p:cNvPr id="9" name="Text 5"/>
+          <p:cNvSpPr/>
+          <p:nvPr/>
+        </p:nvSpPr>
+        <p:spPr>
+          <a:xfrm>
+            <a:off x="731520" y="4572000"/>
+            <a:ext cx="7680960" cy="365760"/>
           </a:xfrm>
           <a:prstGeom prst="rect">
             <a:avLst/>
@@ -4297,205 +5348,17 @@
               <a:buNone/>
             </a:pPr>
             <a:r>
-              <a:rPr lang="en-US" sz="1600" b="1" dirty="0">
-                <a:solidFill>
-                  <a:srgbClr val="002D62"/>
+              <a:rPr lang="en-US" sz="1400" i="1" dirty="0">
+                <a:solidFill>
+                  <a:srgbClr val="888888"/>
                 </a:solidFill>
                 <a:latin typeface="Arial" pitchFamily="34" charset="0"/>
                 <a:ea typeface="Arial" pitchFamily="34" charset="-122"/>
                 <a:cs typeface="Arial" pitchFamily="34" charset="-120"/>
               </a:rPr>
-              <a:t>Stay Top-of-Mind</a:t>
-            </a:r>
-            <a:endParaRPr lang="en-US" sz="1600" dirty="0"/>
-          </a:p>
-        </p:txBody>
-      </p:sp>
-      <p:sp>
-        <p:nvSpPr>
-          <p:cNvPr id="13" name="Text 9"/>
-          <p:cNvSpPr/>
-          <p:nvPr/>
-        </p:nvSpPr>
-        <p:spPr>
-          <a:xfrm>
-            <a:off x="1828800" y="3017520"/>
-            <a:ext cx="6217920" cy="457200"/>
-          </a:xfrm>
-          <a:prstGeom prst="rect">
-            <a:avLst/>
-          </a:prstGeom>
-          <a:noFill/>
-          <a:ln/>
-        </p:spPr>
-        <p:txBody>
-          <a:bodyPr wrap="square" lIns="0" tIns="0" rIns="0" bIns="0" rtlCol="0" anchor="ctr"/>
-          <a:lstStyle/>
-          <a:p>
-            <a:pPr indent="0" marL="0">
-              <a:buNone/>
-            </a:pPr>
-            <a:r>
-              <a:rPr lang="en-US" sz="1200" dirty="0">
-                <a:solidFill>
-                  <a:srgbClr val="555555"/>
-                </a:solidFill>
-                <a:latin typeface="Arial" pitchFamily="34" charset="0"/>
-                <a:ea typeface="Arial" pitchFamily="34" charset="-122"/>
-                <a:cs typeface="Arial" pitchFamily="34" charset="-120"/>
-              </a:rPr>
-              <a:t>Unlike a physical card in a drawer, a digital card sends notifications and keeps your business front and center</a:t>
-            </a:r>
-            <a:endParaRPr lang="en-US" sz="1200" dirty="0"/>
-          </a:p>
-        </p:txBody>
-      </p:sp>
-      <p:sp>
-        <p:nvSpPr>
-          <p:cNvPr id="14" name="Shape 10"/>
-          <p:cNvSpPr/>
-          <p:nvPr/>
-        </p:nvSpPr>
-        <p:spPr>
-          <a:xfrm>
-            <a:off x="731520" y="3749040"/>
-            <a:ext cx="7680960" cy="1005840"/>
-          </a:xfrm>
-          <a:prstGeom prst="rect">
-            <a:avLst/>
-          </a:prstGeom>
-          <a:solidFill>
-            <a:srgbClr val="F5F0E6"/>
-          </a:solidFill>
-          <a:ln/>
-          <a:effectLst>
-            <a:outerShdw sx="100000" sy="100000" kx="0" ky="0" algn="bl" rotWithShape="0" blurRad="101600" dist="38100" dir="8100000">
-              <a:srgbClr val="000000">
-                <a:alpha val="20000"/>
-              </a:srgbClr>
-            </a:outerShdw>
-          </a:effectLst>
-        </p:spPr>
-      </p:sp>
-      <p:sp>
-        <p:nvSpPr>
-          <p:cNvPr id="15" name="Shape 11"/>
-          <p:cNvSpPr/>
-          <p:nvPr/>
-        </p:nvSpPr>
-        <p:spPr>
-          <a:xfrm>
-            <a:off x="731520" y="3749040"/>
-            <a:ext cx="64008" cy="1005840"/>
-          </a:xfrm>
-          <a:prstGeom prst="rect">
-            <a:avLst/>
-          </a:prstGeom>
-          <a:solidFill>
-            <a:srgbClr val="C5A55A"/>
-          </a:solidFill>
-          <a:ln/>
-        </p:spPr>
-      </p:sp>
-      <p:pic>
-        <p:nvPicPr>
-          <p:cNvPr id="16" name="Image 2" descr="preencoded.png">    </p:cNvPr>
-          <p:cNvPicPr>
-            <a:picLocks noChangeAspect="1"/>
-          </p:cNvPicPr>
-          <p:nvPr/>
-        </p:nvPicPr>
-        <p:blipFill>
-          <a:blip r:embed="rId3"/>
-          <a:stretch>
-            <a:fillRect/>
-          </a:stretch>
-        </p:blipFill>
-        <p:spPr>
-          <a:xfrm>
-            <a:off x="1051560" y="3977640"/>
-            <a:ext cx="502920" cy="502920"/>
-          </a:xfrm>
-          <a:prstGeom prst="rect">
-            <a:avLst/>
-          </a:prstGeom>
-        </p:spPr>
-      </p:pic>
-      <p:sp>
-        <p:nvSpPr>
-          <p:cNvPr id="17" name="Text 12"/>
-          <p:cNvSpPr/>
-          <p:nvPr/>
-        </p:nvSpPr>
-        <p:spPr>
-          <a:xfrm>
-            <a:off x="1828800" y="3840480"/>
-            <a:ext cx="6217920" cy="365760"/>
-          </a:xfrm>
-          <a:prstGeom prst="rect">
-            <a:avLst/>
-          </a:prstGeom>
-          <a:noFill/>
-          <a:ln/>
-        </p:spPr>
-        <p:txBody>
-          <a:bodyPr wrap="square" lIns="0" tIns="0" rIns="0" bIns="0" rtlCol="0" anchor="ctr"/>
-          <a:lstStyle/>
-          <a:p>
-            <a:pPr indent="0" marL="0">
-              <a:buNone/>
-            </a:pPr>
-            <a:r>
-              <a:rPr lang="en-US" sz="1600" b="1" dirty="0">
-                <a:solidFill>
-                  <a:srgbClr val="002D62"/>
-                </a:solidFill>
-                <a:latin typeface="Arial" pitchFamily="34" charset="0"/>
-                <a:ea typeface="Arial" pitchFamily="34" charset="-122"/>
-                <a:cs typeface="Arial" pitchFamily="34" charset="-120"/>
-              </a:rPr>
-              <a:t>Passionate Community</a:t>
-            </a:r>
-            <a:endParaRPr lang="en-US" sz="1600" dirty="0"/>
-          </a:p>
-        </p:txBody>
-      </p:sp>
-      <p:sp>
-        <p:nvSpPr>
-          <p:cNvPr id="18" name="Text 13"/>
-          <p:cNvSpPr/>
-          <p:nvPr/>
-        </p:nvSpPr>
-        <p:spPr>
-          <a:xfrm>
-            <a:off x="1828800" y="4206240"/>
-            <a:ext cx="6217920" cy="457200"/>
-          </a:xfrm>
-          <a:prstGeom prst="rect">
-            <a:avLst/>
-          </a:prstGeom>
-          <a:noFill/>
-          <a:ln/>
-        </p:spPr>
-        <p:txBody>
-          <a:bodyPr wrap="square" lIns="0" tIns="0" rIns="0" bIns="0" rtlCol="0" anchor="ctr"/>
-          <a:lstStyle/>
-          <a:p>
-            <a:pPr indent="0" marL="0">
-              <a:buNone/>
-            </a:pPr>
-            <a:r>
-              <a:rPr lang="en-US" sz="1200" dirty="0">
-                <a:solidFill>
-                  <a:srgbClr val="555555"/>
-                </a:solidFill>
-                <a:latin typeface="Arial" pitchFamily="34" charset="0"/>
-                <a:ea typeface="Arial" pitchFamily="34" charset="-122"/>
-                <a:cs typeface="Arial" pitchFamily="34" charset="-120"/>
-              </a:rPr>
-              <a:t>Del Norte Football has a dedicated community of students, parents, alumni, and fans — your customers</a:t>
-            </a:r>
-            <a:endParaRPr lang="en-US" sz="1200" dirty="0"/>
+              <a:t>Same card. Now digital. Always in their phone.</a:t>
+            </a:r>
+            <a:endParaRPr lang="en-US" sz="1400" dirty="0"/>
           </a:p>
         </p:txBody>
       </p:sp>
@@ -4598,8 +5461,8 @@
         </p:nvSpPr>
         <p:spPr>
           <a:xfrm>
-            <a:off x="914400" y="1234440"/>
-            <a:ext cx="548640" cy="548640"/>
+            <a:off x="731520" y="1143000"/>
+            <a:ext cx="457200" cy="457200"/>
           </a:xfrm>
           <a:prstGeom prst="ellipse">
             <a:avLst/>
@@ -4618,8 +5481,8 @@
         </p:nvSpPr>
         <p:spPr>
           <a:xfrm>
-            <a:off x="914400" y="1234440"/>
-            <a:ext cx="548640" cy="548640"/>
+            <a:off x="731520" y="1143000"/>
+            <a:ext cx="457200" cy="457200"/>
           </a:xfrm>
           <a:prstGeom prst="rect">
             <a:avLst/>
@@ -4635,7 +5498,7 @@
               <a:buNone/>
             </a:pPr>
             <a:r>
-              <a:rPr lang="en-US" sz="2000" b="1" dirty="0">
+              <a:rPr lang="en-US" sz="1800" b="1" dirty="0">
                 <a:solidFill>
                   <a:srgbClr val="002D62"/>
                 </a:solidFill>
@@ -4645,7 +5508,7 @@
               </a:rPr>
               <a:t>1</a:t>
             </a:r>
-            <a:endParaRPr lang="en-US" sz="2000" dirty="0"/>
+            <a:endParaRPr lang="en-US" sz="1800" dirty="0"/>
           </a:p>
         </p:txBody>
       </p:sp>
@@ -4657,8 +5520,8 @@
         </p:nvSpPr>
         <p:spPr>
           <a:xfrm>
-            <a:off x="1828800" y="1188720"/>
-            <a:ext cx="6583680" cy="640080"/>
+            <a:off x="1463040" y="1097280"/>
+            <a:ext cx="3840480" cy="548640"/>
           </a:xfrm>
           <a:prstGeom prst="rect">
             <a:avLst/>
@@ -4674,7 +5537,7 @@
               <a:buNone/>
             </a:pPr>
             <a:r>
-              <a:rPr lang="en-US" sz="1600" dirty="0">
+              <a:rPr lang="en-US" sz="1400" dirty="0">
                 <a:solidFill>
                   <a:srgbClr val="FFFFFF"/>
                 </a:solidFill>
@@ -4682,9 +5545,9 @@
                 <a:ea typeface="Arial" pitchFamily="34" charset="-122"/>
                 <a:cs typeface="Arial" pitchFamily="34" charset="-120"/>
               </a:rPr>
-              <a:t>Fan visits our page or scans a link and taps "Add to Apple Wallet"</a:t>
-            </a:r>
-            <a:endParaRPr lang="en-US" sz="1600" dirty="0"/>
+              <a:t>Scan the QR code on their physical card</a:t>
+            </a:r>
+            <a:endParaRPr lang="en-US" sz="1400" dirty="0"/>
           </a:p>
         </p:txBody>
       </p:sp>
@@ -4696,30 +5559,8 @@
         </p:nvSpPr>
         <p:spPr>
           <a:xfrm>
-            <a:off x="1161288" y="1783080"/>
-            <a:ext cx="54864" cy="320040"/>
-          </a:xfrm>
-          <a:prstGeom prst="rect">
-            <a:avLst/>
-          </a:prstGeom>
-          <a:solidFill>
-            <a:srgbClr val="C5A55A">
-              <a:alpha val="60000"/>
-            </a:srgbClr>
-          </a:solidFill>
-          <a:ln/>
-        </p:spPr>
-      </p:sp>
-      <p:sp>
-        <p:nvSpPr>
-          <p:cNvPr id="8" name="Shape 6"/>
-          <p:cNvSpPr/>
-          <p:nvPr/>
-        </p:nvSpPr>
-        <p:spPr>
-          <a:xfrm>
-            <a:off x="914400" y="2148840"/>
-            <a:ext cx="548640" cy="548640"/>
+            <a:off x="731520" y="1920240"/>
+            <a:ext cx="457200" cy="457200"/>
           </a:xfrm>
           <a:prstGeom prst="ellipse">
             <a:avLst/>
@@ -4732,14 +5573,14 @@
       </p:sp>
       <p:sp>
         <p:nvSpPr>
-          <p:cNvPr id="9" name="Text 7"/>
-          <p:cNvSpPr/>
-          <p:nvPr/>
-        </p:nvSpPr>
-        <p:spPr>
-          <a:xfrm>
-            <a:off x="914400" y="2148840"/>
-            <a:ext cx="548640" cy="548640"/>
+          <p:cNvPr id="8" name="Text 6"/>
+          <p:cNvSpPr/>
+          <p:nvPr/>
+        </p:nvSpPr>
+        <p:spPr>
+          <a:xfrm>
+            <a:off x="731520" y="1920240"/>
+            <a:ext cx="457200" cy="457200"/>
           </a:xfrm>
           <a:prstGeom prst="rect">
             <a:avLst/>
@@ -4755,7 +5596,7 @@
               <a:buNone/>
             </a:pPr>
             <a:r>
-              <a:rPr lang="en-US" sz="2000" b="1" dirty="0">
+              <a:rPr lang="en-US" sz="1800" b="1" dirty="0">
                 <a:solidFill>
                   <a:srgbClr val="002D62"/>
                 </a:solidFill>
@@ -4765,20 +5606,20 @@
               </a:rPr>
               <a:t>2</a:t>
             </a:r>
-            <a:endParaRPr lang="en-US" sz="2000" dirty="0"/>
-          </a:p>
-        </p:txBody>
-      </p:sp>
-      <p:sp>
-        <p:nvSpPr>
-          <p:cNvPr id="10" name="Text 8"/>
-          <p:cNvSpPr/>
-          <p:nvPr/>
-        </p:nvSpPr>
-        <p:spPr>
-          <a:xfrm>
-            <a:off x="1828800" y="2103120"/>
-            <a:ext cx="6583680" cy="640080"/>
+            <a:endParaRPr lang="en-US" sz="1800" dirty="0"/>
+          </a:p>
+        </p:txBody>
+      </p:sp>
+      <p:sp>
+        <p:nvSpPr>
+          <p:cNvPr id="9" name="Text 7"/>
+          <p:cNvSpPr/>
+          <p:nvPr/>
+        </p:nvSpPr>
+        <p:spPr>
+          <a:xfrm>
+            <a:off x="1463040" y="1874520"/>
+            <a:ext cx="3840480" cy="548640"/>
           </a:xfrm>
           <a:prstGeom prst="rect">
             <a:avLst/>
@@ -4794,7 +5635,7 @@
               <a:buNone/>
             </a:pPr>
             <a:r>
-              <a:rPr lang="en-US" sz="1600" dirty="0">
+              <a:rPr lang="en-US" sz="1400" dirty="0">
                 <a:solidFill>
                   <a:srgbClr val="FFFFFF"/>
                 </a:solidFill>
@@ -4802,44 +5643,22 @@
                 <a:ea typeface="Arial" pitchFamily="34" charset="-122"/>
                 <a:cs typeface="Arial" pitchFamily="34" charset="-120"/>
               </a:rPr>
-              <a:t>The Nighthawk Discount Card appears in their Wallet — gold and navy, school branding</a:t>
-            </a:r>
-            <a:endParaRPr lang="en-US" sz="1600" dirty="0"/>
-          </a:p>
-        </p:txBody>
-      </p:sp>
-      <p:sp>
-        <p:nvSpPr>
-          <p:cNvPr id="11" name="Shape 9"/>
-          <p:cNvSpPr/>
-          <p:nvPr/>
-        </p:nvSpPr>
-        <p:spPr>
-          <a:xfrm>
-            <a:off x="1161288" y="2697480"/>
-            <a:ext cx="54864" cy="320040"/>
-          </a:xfrm>
-          <a:prstGeom prst="rect">
-            <a:avLst/>
-          </a:prstGeom>
-          <a:solidFill>
-            <a:srgbClr val="C5A55A">
-              <a:alpha val="60000"/>
-            </a:srgbClr>
-          </a:solidFill>
-          <a:ln/>
-        </p:spPr>
-      </p:sp>
-      <p:sp>
-        <p:nvSpPr>
-          <p:cNvPr id="12" name="Shape 10"/>
-          <p:cNvSpPr/>
-          <p:nvPr/>
-        </p:nvSpPr>
-        <p:spPr>
-          <a:xfrm>
-            <a:off x="914400" y="3063240"/>
-            <a:ext cx="548640" cy="548640"/>
+              <a:t>Enter their name and tap "Add to Apple Wallet"</a:t>
+            </a:r>
+            <a:endParaRPr lang="en-US" sz="1400" dirty="0"/>
+          </a:p>
+        </p:txBody>
+      </p:sp>
+      <p:sp>
+        <p:nvSpPr>
+          <p:cNvPr id="10" name="Shape 8"/>
+          <p:cNvSpPr/>
+          <p:nvPr/>
+        </p:nvSpPr>
+        <p:spPr>
+          <a:xfrm>
+            <a:off x="731520" y="2697480"/>
+            <a:ext cx="457200" cy="457200"/>
           </a:xfrm>
           <a:prstGeom prst="ellipse">
             <a:avLst/>
@@ -4852,14 +5671,14 @@
       </p:sp>
       <p:sp>
         <p:nvSpPr>
-          <p:cNvPr id="13" name="Text 11"/>
-          <p:cNvSpPr/>
-          <p:nvPr/>
-        </p:nvSpPr>
-        <p:spPr>
-          <a:xfrm>
-            <a:off x="914400" y="3063240"/>
-            <a:ext cx="548640" cy="548640"/>
+          <p:cNvPr id="11" name="Text 9"/>
+          <p:cNvSpPr/>
+          <p:nvPr/>
+        </p:nvSpPr>
+        <p:spPr>
+          <a:xfrm>
+            <a:off x="731520" y="2697480"/>
+            <a:ext cx="457200" cy="457200"/>
           </a:xfrm>
           <a:prstGeom prst="rect">
             <a:avLst/>
@@ -4875,7 +5694,7 @@
               <a:buNone/>
             </a:pPr>
             <a:r>
-              <a:rPr lang="en-US" sz="2000" b="1" dirty="0">
+              <a:rPr lang="en-US" sz="1800" b="1" dirty="0">
                 <a:solidFill>
                   <a:srgbClr val="002D62"/>
                 </a:solidFill>
@@ -4885,20 +5704,20 @@
               </a:rPr>
               <a:t>3</a:t>
             </a:r>
-            <a:endParaRPr lang="en-US" sz="2000" dirty="0"/>
-          </a:p>
-        </p:txBody>
-      </p:sp>
-      <p:sp>
-        <p:nvSpPr>
-          <p:cNvPr id="14" name="Text 12"/>
-          <p:cNvSpPr/>
-          <p:nvPr/>
-        </p:nvSpPr>
-        <p:spPr>
-          <a:xfrm>
-            <a:off x="1828800" y="3017520"/>
-            <a:ext cx="6583680" cy="640080"/>
+            <a:endParaRPr lang="en-US" sz="1800" dirty="0"/>
+          </a:p>
+        </p:txBody>
+      </p:sp>
+      <p:sp>
+        <p:nvSpPr>
+          <p:cNvPr id="12" name="Text 10"/>
+          <p:cNvSpPr/>
+          <p:nvPr/>
+        </p:nvSpPr>
+        <p:spPr>
+          <a:xfrm>
+            <a:off x="1463040" y="2651760"/>
+            <a:ext cx="3840480" cy="548640"/>
           </a:xfrm>
           <a:prstGeom prst="rect">
             <a:avLst/>
@@ -4914,7 +5733,7 @@
               <a:buNone/>
             </a:pPr>
             <a:r>
-              <a:rPr lang="en-US" sz="1600" dirty="0">
+              <a:rPr lang="en-US" sz="1400" dirty="0">
                 <a:solidFill>
                   <a:srgbClr val="FFFFFF"/>
                 </a:solidFill>
@@ -4922,44 +5741,22 @@
                 <a:ea typeface="Arial" pitchFamily="34" charset="-122"/>
                 <a:cs typeface="Arial" pitchFamily="34" charset="-120"/>
               </a:rPr>
-              <a:t>At your business, they show the card or the cashier scans the QR code</a:t>
-            </a:r>
-            <a:endParaRPr lang="en-US" sz="1600" dirty="0"/>
-          </a:p>
-        </p:txBody>
-      </p:sp>
-      <p:sp>
-        <p:nvSpPr>
-          <p:cNvPr id="15" name="Shape 13"/>
-          <p:cNvSpPr/>
-          <p:nvPr/>
-        </p:nvSpPr>
-        <p:spPr>
-          <a:xfrm>
-            <a:off x="1161288" y="3611880"/>
-            <a:ext cx="54864" cy="320040"/>
-          </a:xfrm>
-          <a:prstGeom prst="rect">
-            <a:avLst/>
-          </a:prstGeom>
-          <a:solidFill>
-            <a:srgbClr val="C5A55A">
-              <a:alpha val="60000"/>
-            </a:srgbClr>
-          </a:solidFill>
-          <a:ln/>
-        </p:spPr>
-      </p:sp>
-      <p:sp>
-        <p:nvSpPr>
-          <p:cNvPr id="16" name="Shape 14"/>
-          <p:cNvSpPr/>
-          <p:nvPr/>
-        </p:nvSpPr>
-        <p:spPr>
-          <a:xfrm>
-            <a:off x="914400" y="3977640"/>
-            <a:ext cx="548640" cy="548640"/>
+              <a:t>Show the card at participating businesses</a:t>
+            </a:r>
+            <a:endParaRPr lang="en-US" sz="1400" dirty="0"/>
+          </a:p>
+        </p:txBody>
+      </p:sp>
+      <p:sp>
+        <p:nvSpPr>
+          <p:cNvPr id="13" name="Shape 11"/>
+          <p:cNvSpPr/>
+          <p:nvPr/>
+        </p:nvSpPr>
+        <p:spPr>
+          <a:xfrm>
+            <a:off x="731520" y="3474720"/>
+            <a:ext cx="457200" cy="457200"/>
           </a:xfrm>
           <a:prstGeom prst="ellipse">
             <a:avLst/>
@@ -4972,14 +5769,14 @@
       </p:sp>
       <p:sp>
         <p:nvSpPr>
-          <p:cNvPr id="17" name="Text 15"/>
-          <p:cNvSpPr/>
-          <p:nvPr/>
-        </p:nvSpPr>
-        <p:spPr>
-          <a:xfrm>
-            <a:off x="914400" y="3977640"/>
-            <a:ext cx="548640" cy="548640"/>
+          <p:cNvPr id="14" name="Text 12"/>
+          <p:cNvSpPr/>
+          <p:nvPr/>
+        </p:nvSpPr>
+        <p:spPr>
+          <a:xfrm>
+            <a:off x="731520" y="3474720"/>
+            <a:ext cx="457200" cy="457200"/>
           </a:xfrm>
           <a:prstGeom prst="rect">
             <a:avLst/>
@@ -4995,7 +5792,7 @@
               <a:buNone/>
             </a:pPr>
             <a:r>
-              <a:rPr lang="en-US" sz="2000" b="1" dirty="0">
+              <a:rPr lang="en-US" sz="1800" b="1" dirty="0">
                 <a:solidFill>
                   <a:srgbClr val="002D62"/>
                 </a:solidFill>
@@ -5005,20 +5802,20 @@
               </a:rPr>
               <a:t>4</a:t>
             </a:r>
-            <a:endParaRPr lang="en-US" sz="2000" dirty="0"/>
-          </a:p>
-        </p:txBody>
-      </p:sp>
-      <p:sp>
-        <p:nvSpPr>
-          <p:cNvPr id="18" name="Text 16"/>
-          <p:cNvSpPr/>
-          <p:nvPr/>
-        </p:nvSpPr>
-        <p:spPr>
-          <a:xfrm>
-            <a:off x="1828800" y="3931920"/>
-            <a:ext cx="6583680" cy="640080"/>
+            <a:endParaRPr lang="en-US" sz="1800" dirty="0"/>
+          </a:p>
+        </p:txBody>
+      </p:sp>
+      <p:sp>
+        <p:nvSpPr>
+          <p:cNvPr id="15" name="Text 13"/>
+          <p:cNvSpPr/>
+          <p:nvPr/>
+        </p:nvSpPr>
+        <p:spPr>
+          <a:xfrm>
+            <a:off x="1463040" y="3429000"/>
+            <a:ext cx="3840480" cy="548640"/>
           </a:xfrm>
           <a:prstGeom prst="rect">
             <a:avLst/>
@@ -5034,7 +5831,7 @@
               <a:buNone/>
             </a:pPr>
             <a:r>
-              <a:rPr lang="en-US" sz="1600" dirty="0">
+              <a:rPr lang="en-US" sz="1400" dirty="0">
                 <a:solidFill>
                   <a:srgbClr val="FFFFFF"/>
                 </a:solidFill>
@@ -5042,12 +5839,35 @@
                 <a:ea typeface="Arial" pitchFamily="34" charset="-122"/>
                 <a:cs typeface="Arial" pitchFamily="34" charset="-120"/>
               </a:rPr>
-              <a:t>Discount is applied — simple, fast, no paper coupons</a:t>
-            </a:r>
-            <a:endParaRPr lang="en-US" sz="1600" dirty="0"/>
-          </a:p>
-        </p:txBody>
-      </p:sp>
+              <a:t>Discount applied — simple, fast, no paper</a:t>
+            </a:r>
+            <a:endParaRPr lang="en-US" sz="1400" dirty="0"/>
+          </a:p>
+        </p:txBody>
+      </p:sp>
+      <p:pic>
+        <p:nvPicPr>
+          <p:cNvPr id="16" name="Image 0" descr="preencoded.png">    </p:cNvPr>
+          <p:cNvPicPr>
+            <a:picLocks noChangeAspect="1"/>
+          </p:cNvPicPr>
+          <p:nvPr/>
+        </p:nvPicPr>
+        <p:blipFill>
+          <a:blip r:embed="rId1"/>
+          <a:srcRect l="0" r="0" t="0" b="0"/>
+          <a:stretch/>
+        </p:blipFill>
+        <p:spPr>
+          <a:xfrm>
+            <a:off x="5943600" y="731520"/>
+            <a:ext cx="2560320" cy="3520440"/>
+          </a:xfrm>
+          <a:prstGeom prst="rect">
+            <a:avLst/>
+          </a:prstGeom>
+        </p:spPr>
+      </p:pic>
     </p:spTree>
   </p:cSld>
   <p:clrMapOvr>
@@ -5155,8 +5975,8 @@
         </p:blipFill>
         <p:spPr>
           <a:xfrm>
-            <a:off x="914400" y="1417320"/>
-            <a:ext cx="457200" cy="457200"/>
+            <a:off x="731520" y="1280160"/>
+            <a:ext cx="411480" cy="411480"/>
           </a:xfrm>
           <a:prstGeom prst="rect">
             <a:avLst/>
@@ -5171,8 +5991,8 @@
         </p:nvSpPr>
         <p:spPr>
           <a:xfrm>
-            <a:off x="1645920" y="1371600"/>
-            <a:ext cx="6766560" cy="640080"/>
+            <a:off x="1371600" y="1188720"/>
+            <a:ext cx="3931920" cy="594360"/>
           </a:xfrm>
           <a:prstGeom prst="rect">
             <a:avLst/>
@@ -5188,7 +6008,7 @@
               <a:buNone/>
             </a:pPr>
             <a:r>
-              <a:rPr lang="en-US" sz="1500" dirty="0">
+              <a:rPr lang="en-US" sz="1400" dirty="0">
                 <a:solidFill>
                   <a:srgbClr val="333333"/>
                 </a:solidFill>
@@ -5196,9 +6016,9 @@
                 <a:ea typeface="Arial" pitchFamily="34" charset="-122"/>
                 <a:cs typeface="Arial" pitchFamily="34" charset="-120"/>
               </a:rPr>
-              <a:t>Your business name and discount are listed on the back of every digital card</a:t>
-            </a:r>
-            <a:endParaRPr lang="en-US" sz="1500" dirty="0"/>
+              <a:t>Your business listed on every digital card</a:t>
+            </a:r>
+            <a:endParaRPr lang="en-US" sz="1400" dirty="0"/>
           </a:p>
         </p:txBody>
       </p:sp>
@@ -5218,8 +6038,8 @@
         </p:blipFill>
         <p:spPr>
           <a:xfrm>
-            <a:off x="914400" y="2286000"/>
-            <a:ext cx="457200" cy="457200"/>
+            <a:off x="731520" y="2057400"/>
+            <a:ext cx="411480" cy="411480"/>
           </a:xfrm>
           <a:prstGeom prst="rect">
             <a:avLst/>
@@ -5234,8 +6054,8 @@
         </p:nvSpPr>
         <p:spPr>
           <a:xfrm>
-            <a:off x="1645920" y="2240280"/>
-            <a:ext cx="6766560" cy="640080"/>
+            <a:off x="1371600" y="1965960"/>
+            <a:ext cx="3931920" cy="594360"/>
           </a:xfrm>
           <a:prstGeom prst="rect">
             <a:avLst/>
@@ -5251,7 +6071,7 @@
               <a:buNone/>
             </a:pPr>
             <a:r>
-              <a:rPr lang="en-US" sz="1500" dirty="0">
+              <a:rPr lang="en-US" sz="1400" dirty="0">
                 <a:solidFill>
                   <a:srgbClr val="333333"/>
                 </a:solidFill>
@@ -5259,9 +6079,9 @@
                 <a:ea typeface="Arial" pitchFamily="34" charset="-122"/>
                 <a:cs typeface="Arial" pitchFamily="34" charset="-120"/>
               </a:rPr>
-              <a:t>When a customer scans the QR code at your location, that visit is tracked</a:t>
-            </a:r>
-            <a:endParaRPr lang="en-US" sz="1500" dirty="0"/>
+              <a:t>Customer scans QR → you see this verification screen</a:t>
+            </a:r>
+            <a:endParaRPr lang="en-US" sz="1400" dirty="0"/>
           </a:p>
         </p:txBody>
       </p:sp>
@@ -5281,8 +6101,8 @@
         </p:blipFill>
         <p:spPr>
           <a:xfrm>
-            <a:off x="914400" y="3154680"/>
-            <a:ext cx="457200" cy="457200"/>
+            <a:off x="731520" y="2834640"/>
+            <a:ext cx="411480" cy="411480"/>
           </a:xfrm>
           <a:prstGeom prst="rect">
             <a:avLst/>
@@ -5297,8 +6117,8 @@
         </p:nvSpPr>
         <p:spPr>
           <a:xfrm>
-            <a:off x="1645920" y="3108960"/>
-            <a:ext cx="6766560" cy="640080"/>
+            <a:off x="1371600" y="2743200"/>
+            <a:ext cx="3931920" cy="594360"/>
           </a:xfrm>
           <a:prstGeom prst="rect">
             <a:avLst/>
@@ -5314,7 +6134,7 @@
               <a:buNone/>
             </a:pPr>
             <a:r>
-              <a:rPr lang="en-US" sz="1500" dirty="0">
+              <a:rPr lang="en-US" sz="1400" dirty="0">
                 <a:solidFill>
                   <a:srgbClr val="333333"/>
                 </a:solidFill>
@@ -5322,9 +6142,9 @@
                 <a:ea typeface="Arial" pitchFamily="34" charset="-122"/>
                 <a:cs typeface="Arial" pitchFamily="34" charset="-120"/>
               </a:rPr>
-              <a:t>You receive reports showing visits and unique customers from the program</a:t>
-            </a:r>
-            <a:endParaRPr lang="en-US" sz="1500" dirty="0"/>
+              <a:t>Every visit tracked — you get usage reports</a:t>
+            </a:r>
+            <a:endParaRPr lang="en-US" sz="1400" dirty="0"/>
           </a:p>
         </p:txBody>
       </p:sp>
@@ -5344,8 +6164,8 @@
         </p:blipFill>
         <p:spPr>
           <a:xfrm>
-            <a:off x="914400" y="4023360"/>
-            <a:ext cx="457200" cy="457200"/>
+            <a:off x="731520" y="3611880"/>
+            <a:ext cx="411480" cy="411480"/>
           </a:xfrm>
           <a:prstGeom prst="rect">
             <a:avLst/>
@@ -5360,8 +6180,8 @@
         </p:nvSpPr>
         <p:spPr>
           <a:xfrm>
-            <a:off x="1645920" y="3977640"/>
-            <a:ext cx="6766560" cy="640080"/>
+            <a:off x="1371600" y="3520440"/>
+            <a:ext cx="3931920" cy="594360"/>
           </a:xfrm>
           <a:prstGeom prst="rect">
             <a:avLst/>
@@ -5377,7 +6197,7 @@
               <a:buNone/>
             </a:pPr>
             <a:r>
-              <a:rPr lang="en-US" sz="1500" dirty="0">
+              <a:rPr lang="en-US" sz="1400" dirty="0">
                 <a:solidFill>
                   <a:srgbClr val="333333"/>
                 </a:solidFill>
@@ -5385,12 +6205,35 @@
                 <a:ea typeface="Arial" pitchFamily="34" charset="-122"/>
                 <a:cs typeface="Arial" pitchFamily="34" charset="-120"/>
               </a:rPr>
-              <a:t>No POS changes needed — cashier just scans and applies the discount</a:t>
-            </a:r>
-            <a:endParaRPr lang="en-US" sz="1500" dirty="0"/>
-          </a:p>
-        </p:txBody>
-      </p:sp>
+              <a:t>No POS changes — cashier just scans and applies discount</a:t>
+            </a:r>
+            <a:endParaRPr lang="en-US" sz="1400" dirty="0"/>
+          </a:p>
+        </p:txBody>
+      </p:sp>
+      <p:pic>
+        <p:nvPicPr>
+          <p:cNvPr id="12" name="Image 4" descr="preencoded.png">    </p:cNvPr>
+          <p:cNvPicPr>
+            <a:picLocks noChangeAspect="1"/>
+          </p:cNvPicPr>
+          <p:nvPr/>
+        </p:nvPicPr>
+        <p:blipFill>
+          <a:blip r:embed="rId5"/>
+          <a:srcRect l="0" r="0" t="0" b="0"/>
+          <a:stretch/>
+        </p:blipFill>
+        <p:spPr>
+          <a:xfrm>
+            <a:off x="5669280" y="1005840"/>
+            <a:ext cx="2560320" cy="3328416"/>
+          </a:xfrm>
+          <a:prstGeom prst="rect">
+            <a:avLst/>
+          </a:prstGeom>
+        </p:spPr>
+      </p:pic>
     </p:spTree>
   </p:cSld>
   <p:clrMapOvr>
@@ -5476,715 +6319,69 @@
                 <a:ea typeface="Arial Black" pitchFamily="34" charset="-122"/>
                 <a:cs typeface="Arial Black" pitchFamily="34" charset="-120"/>
               </a:rPr>
-              <a:t>WHY DIGITAL BEATS PHYSICAL</a:t>
+              <a:t>YOUR BUSINESS ON EVERY CARD</a:t>
             </a:r>
             <a:endParaRPr lang="en-US" sz="2400" dirty="0"/>
           </a:p>
         </p:txBody>
       </p:sp>
-      <p:sp>
-        <p:nvSpPr>
-          <p:cNvPr id="4" name="Shape 2"/>
-          <p:cNvSpPr/>
-          <p:nvPr/>
-        </p:nvSpPr>
-        <p:spPr>
-          <a:xfrm>
-            <a:off x="731520" y="1097280"/>
-            <a:ext cx="3657600" cy="548640"/>
-          </a:xfrm>
-          <a:prstGeom prst="rect">
-            <a:avLst/>
-          </a:prstGeom>
-          <a:solidFill>
-            <a:srgbClr val="4A4A4A"/>
-          </a:solidFill>
-          <a:ln/>
-        </p:spPr>
-      </p:sp>
-      <p:sp>
-        <p:nvSpPr>
-          <p:cNvPr id="5" name="Text 3"/>
-          <p:cNvSpPr/>
-          <p:nvPr/>
-        </p:nvSpPr>
-        <p:spPr>
-          <a:xfrm>
-            <a:off x="731520" y="1097280"/>
-            <a:ext cx="3657600" cy="548640"/>
-          </a:xfrm>
-          <a:prstGeom prst="rect">
-            <a:avLst/>
-          </a:prstGeom>
-          <a:noFill/>
-          <a:ln/>
-        </p:spPr>
-        <p:txBody>
-          <a:bodyPr wrap="square" lIns="0" tIns="0" rIns="0" bIns="0" rtlCol="0" anchor="ctr"/>
-          <a:lstStyle/>
-          <a:p>
-            <a:pPr algn="ctr" indent="0" marL="0">
-              <a:buNone/>
-            </a:pPr>
-            <a:r>
-              <a:rPr lang="en-US" sz="1600" b="1" dirty="0">
-                <a:solidFill>
-                  <a:srgbClr val="FFFFFF"/>
+      <p:pic>
+        <p:nvPicPr>
+          <p:cNvPr id="4" name="Image 0" descr="preencoded.png">    </p:cNvPr>
+          <p:cNvPicPr>
+            <a:picLocks noChangeAspect="1"/>
+          </p:cNvPicPr>
+          <p:nvPr/>
+        </p:nvPicPr>
+        <p:blipFill>
+          <a:blip r:embed="rId1"/>
+          <a:srcRect l="0" r="0" t="0" b="0"/>
+          <a:stretch/>
+        </p:blipFill>
+        <p:spPr>
+          <a:xfrm>
+            <a:off x="914400" y="1097280"/>
+            <a:ext cx="7315200" cy="3657600"/>
+          </a:xfrm>
+          <a:prstGeom prst="rect">
+            <a:avLst/>
+          </a:prstGeom>
+        </p:spPr>
+      </p:pic>
+      <p:sp>
+        <p:nvSpPr>
+          <p:cNvPr id="5" name="Text 2"/>
+          <p:cNvSpPr/>
+          <p:nvPr/>
+        </p:nvSpPr>
+        <p:spPr>
+          <a:xfrm>
+            <a:off x="731520" y="4572000"/>
+            <a:ext cx="7680960" cy="365760"/>
+          </a:xfrm>
+          <a:prstGeom prst="rect">
+            <a:avLst/>
+          </a:prstGeom>
+          <a:noFill/>
+          <a:ln/>
+        </p:spPr>
+        <p:txBody>
+          <a:bodyPr wrap="square" lIns="0" tIns="0" rIns="0" bIns="0" rtlCol="0" anchor="ctr"/>
+          <a:lstStyle/>
+          <a:p>
+            <a:pPr indent="0" marL="0">
+              <a:buNone/>
+            </a:pPr>
+            <a:r>
+              <a:rPr lang="en-US" sz="1200" i="1" dirty="0">
+                <a:solidFill>
+                  <a:srgbClr val="D4B96A"/>
                 </a:solidFill>
                 <a:latin typeface="Arial" pitchFamily="34" charset="0"/>
                 <a:ea typeface="Arial" pitchFamily="34" charset="-122"/>
                 <a:cs typeface="Arial" pitchFamily="34" charset="-120"/>
               </a:rPr>
-              <a:t>Physical Card</a:t>
-            </a:r>
-            <a:endParaRPr lang="en-US" sz="1600" dirty="0"/>
-          </a:p>
-        </p:txBody>
-      </p:sp>
-      <p:sp>
-        <p:nvSpPr>
-          <p:cNvPr id="6" name="Shape 4"/>
-          <p:cNvSpPr/>
-          <p:nvPr/>
-        </p:nvSpPr>
-        <p:spPr>
-          <a:xfrm>
-            <a:off x="4754880" y="1097280"/>
-            <a:ext cx="3657600" cy="548640"/>
-          </a:xfrm>
-          <a:prstGeom prst="rect">
-            <a:avLst/>
-          </a:prstGeom>
-          <a:solidFill>
-            <a:srgbClr val="C5A55A"/>
-          </a:solidFill>
-          <a:ln/>
-        </p:spPr>
-      </p:sp>
-      <p:sp>
-        <p:nvSpPr>
-          <p:cNvPr id="7" name="Text 5"/>
-          <p:cNvSpPr/>
-          <p:nvPr/>
-        </p:nvSpPr>
-        <p:spPr>
-          <a:xfrm>
-            <a:off x="4754880" y="1097280"/>
-            <a:ext cx="3657600" cy="548640"/>
-          </a:xfrm>
-          <a:prstGeom prst="rect">
-            <a:avLst/>
-          </a:prstGeom>
-          <a:noFill/>
-          <a:ln/>
-        </p:spPr>
-        <p:txBody>
-          <a:bodyPr wrap="square" lIns="0" tIns="0" rIns="0" bIns="0" rtlCol="0" anchor="ctr"/>
-          <a:lstStyle/>
-          <a:p>
-            <a:pPr algn="ctr" indent="0" marL="0">
-              <a:buNone/>
-            </a:pPr>
-            <a:r>
-              <a:rPr lang="en-US" sz="1600" b="1" dirty="0">
-                <a:solidFill>
-                  <a:srgbClr val="002D62"/>
-                </a:solidFill>
-                <a:latin typeface="Arial" pitchFamily="34" charset="0"/>
-                <a:ea typeface="Arial" pitchFamily="34" charset="-122"/>
-                <a:cs typeface="Arial" pitchFamily="34" charset="-120"/>
-              </a:rPr>
-              <a:t>Digital Card</a:t>
-            </a:r>
-            <a:endParaRPr lang="en-US" sz="1600" dirty="0"/>
-          </a:p>
-        </p:txBody>
-      </p:sp>
-      <p:sp>
-        <p:nvSpPr>
-          <p:cNvPr id="8" name="Shape 6"/>
-          <p:cNvSpPr/>
-          <p:nvPr/>
-        </p:nvSpPr>
-        <p:spPr>
-          <a:xfrm>
-            <a:off x="731520" y="1737360"/>
-            <a:ext cx="3657600" cy="548640"/>
-          </a:xfrm>
-          <a:prstGeom prst="rect">
-            <a:avLst/>
-          </a:prstGeom>
-          <a:solidFill>
-            <a:srgbClr val="0A1A35"/>
-          </a:solidFill>
-          <a:ln/>
-        </p:spPr>
-      </p:sp>
-      <p:sp>
-        <p:nvSpPr>
-          <p:cNvPr id="9" name="Shape 7"/>
-          <p:cNvSpPr/>
-          <p:nvPr/>
-        </p:nvSpPr>
-        <p:spPr>
-          <a:xfrm>
-            <a:off x="4754880" y="1737360"/>
-            <a:ext cx="3657600" cy="548640"/>
-          </a:xfrm>
-          <a:prstGeom prst="rect">
-            <a:avLst/>
-          </a:prstGeom>
-          <a:solidFill>
-            <a:srgbClr val="0A1A35"/>
-          </a:solidFill>
-          <a:ln/>
-        </p:spPr>
-      </p:sp>
-      <p:sp>
-        <p:nvSpPr>
-          <p:cNvPr id="10" name="Text 8"/>
-          <p:cNvSpPr/>
-          <p:nvPr/>
-        </p:nvSpPr>
-        <p:spPr>
-          <a:xfrm>
-            <a:off x="914400" y="1737360"/>
-            <a:ext cx="3291840" cy="548640"/>
-          </a:xfrm>
-          <a:prstGeom prst="rect">
-            <a:avLst/>
-          </a:prstGeom>
-          <a:noFill/>
-          <a:ln/>
-        </p:spPr>
-        <p:txBody>
-          <a:bodyPr wrap="square" lIns="0" tIns="0" rIns="0" bIns="0" rtlCol="0" anchor="ctr"/>
-          <a:lstStyle/>
-          <a:p>
-            <a:pPr indent="0" marL="0">
-              <a:buNone/>
-            </a:pPr>
-            <a:r>
-              <a:rPr lang="en-US" sz="1200" dirty="0">
-                <a:solidFill>
-                  <a:srgbClr val="A0A0A0"/>
-                </a:solidFill>
-                <a:latin typeface="Arial" pitchFamily="34" charset="0"/>
-                <a:ea typeface="Arial" pitchFamily="34" charset="-122"/>
-                <a:cs typeface="Arial" pitchFamily="34" charset="-120"/>
-              </a:rPr>
-              <a:t>Gets lost, forgotten at home</a:t>
-            </a:r>
-            <a:endParaRPr lang="en-US" sz="1200" dirty="0"/>
-          </a:p>
-        </p:txBody>
-      </p:sp>
-      <p:sp>
-        <p:nvSpPr>
-          <p:cNvPr id="11" name="Text 9"/>
-          <p:cNvSpPr/>
-          <p:nvPr/>
-        </p:nvSpPr>
-        <p:spPr>
-          <a:xfrm>
-            <a:off x="4937760" y="1737360"/>
-            <a:ext cx="3291840" cy="548640"/>
-          </a:xfrm>
-          <a:prstGeom prst="rect">
-            <a:avLst/>
-          </a:prstGeom>
-          <a:noFill/>
-          <a:ln/>
-        </p:spPr>
-        <p:txBody>
-          <a:bodyPr wrap="square" lIns="0" tIns="0" rIns="0" bIns="0" rtlCol="0" anchor="ctr"/>
-          <a:lstStyle/>
-          <a:p>
-            <a:pPr indent="0" marL="0">
-              <a:buNone/>
-            </a:pPr>
-            <a:r>
-              <a:rPr lang="en-US" sz="1200" b="1" dirty="0">
-                <a:solidFill>
-                  <a:srgbClr val="C5A55A"/>
-                </a:solidFill>
-                <a:latin typeface="Arial" pitchFamily="34" charset="0"/>
-                <a:ea typeface="Arial" pitchFamily="34" charset="-122"/>
-                <a:cs typeface="Arial" pitchFamily="34" charset="-120"/>
-              </a:rPr>
-              <a:t>Always in their phone</a:t>
-            </a:r>
-            <a:endParaRPr lang="en-US" sz="1200" dirty="0"/>
-          </a:p>
-        </p:txBody>
-      </p:sp>
-      <p:sp>
-        <p:nvSpPr>
-          <p:cNvPr id="12" name="Shape 10"/>
-          <p:cNvSpPr/>
-          <p:nvPr/>
-        </p:nvSpPr>
-        <p:spPr>
-          <a:xfrm>
-            <a:off x="731520" y="2331720"/>
-            <a:ext cx="3657600" cy="548640"/>
-          </a:xfrm>
-          <a:prstGeom prst="rect">
-            <a:avLst/>
-          </a:prstGeom>
-          <a:solidFill>
-            <a:srgbClr val="0E2040"/>
-          </a:solidFill>
-          <a:ln/>
-        </p:spPr>
-      </p:sp>
-      <p:sp>
-        <p:nvSpPr>
-          <p:cNvPr id="13" name="Shape 11"/>
-          <p:cNvSpPr/>
-          <p:nvPr/>
-        </p:nvSpPr>
-        <p:spPr>
-          <a:xfrm>
-            <a:off x="4754880" y="2331720"/>
-            <a:ext cx="3657600" cy="548640"/>
-          </a:xfrm>
-          <a:prstGeom prst="rect">
-            <a:avLst/>
-          </a:prstGeom>
-          <a:solidFill>
-            <a:srgbClr val="0E2040"/>
-          </a:solidFill>
-          <a:ln/>
-        </p:spPr>
-      </p:sp>
-      <p:sp>
-        <p:nvSpPr>
-          <p:cNvPr id="14" name="Text 12"/>
-          <p:cNvSpPr/>
-          <p:nvPr/>
-        </p:nvSpPr>
-        <p:spPr>
-          <a:xfrm>
-            <a:off x="914400" y="2331720"/>
-            <a:ext cx="3291840" cy="548640"/>
-          </a:xfrm>
-          <a:prstGeom prst="rect">
-            <a:avLst/>
-          </a:prstGeom>
-          <a:noFill/>
-          <a:ln/>
-        </p:spPr>
-        <p:txBody>
-          <a:bodyPr wrap="square" lIns="0" tIns="0" rIns="0" bIns="0" rtlCol="0" anchor="ctr"/>
-          <a:lstStyle/>
-          <a:p>
-            <a:pPr indent="0" marL="0">
-              <a:buNone/>
-            </a:pPr>
-            <a:r>
-              <a:rPr lang="en-US" sz="1200" dirty="0">
-                <a:solidFill>
-                  <a:srgbClr val="A0A0A0"/>
-                </a:solidFill>
-                <a:latin typeface="Arial" pitchFamily="34" charset="0"/>
-                <a:ea typeface="Arial" pitchFamily="34" charset="-122"/>
-                <a:cs typeface="Arial" pitchFamily="34" charset="-120"/>
-              </a:rPr>
-              <a:t>No way to track usage</a:t>
-            </a:r>
-            <a:endParaRPr lang="en-US" sz="1200" dirty="0"/>
-          </a:p>
-        </p:txBody>
-      </p:sp>
-      <p:sp>
-        <p:nvSpPr>
-          <p:cNvPr id="15" name="Text 13"/>
-          <p:cNvSpPr/>
-          <p:nvPr/>
-        </p:nvSpPr>
-        <p:spPr>
-          <a:xfrm>
-            <a:off x="4937760" y="2331720"/>
-            <a:ext cx="3291840" cy="548640"/>
-          </a:xfrm>
-          <a:prstGeom prst="rect">
-            <a:avLst/>
-          </a:prstGeom>
-          <a:noFill/>
-          <a:ln/>
-        </p:spPr>
-        <p:txBody>
-          <a:bodyPr wrap="square" lIns="0" tIns="0" rIns="0" bIns="0" rtlCol="0" anchor="ctr"/>
-          <a:lstStyle/>
-          <a:p>
-            <a:pPr indent="0" marL="0">
-              <a:buNone/>
-            </a:pPr>
-            <a:r>
-              <a:rPr lang="en-US" sz="1200" b="1" dirty="0">
-                <a:solidFill>
-                  <a:srgbClr val="C5A55A"/>
-                </a:solidFill>
-                <a:latin typeface="Arial" pitchFamily="34" charset="0"/>
-                <a:ea typeface="Arial" pitchFamily="34" charset="-122"/>
-                <a:cs typeface="Arial" pitchFamily="34" charset="-120"/>
-              </a:rPr>
-              <a:t>Every scan is tracked</a:t>
-            </a:r>
-            <a:endParaRPr lang="en-US" sz="1200" dirty="0"/>
-          </a:p>
-        </p:txBody>
-      </p:sp>
-      <p:sp>
-        <p:nvSpPr>
-          <p:cNvPr id="16" name="Shape 14"/>
-          <p:cNvSpPr/>
-          <p:nvPr/>
-        </p:nvSpPr>
-        <p:spPr>
-          <a:xfrm>
-            <a:off x="731520" y="2926080"/>
-            <a:ext cx="3657600" cy="548640"/>
-          </a:xfrm>
-          <a:prstGeom prst="rect">
-            <a:avLst/>
-          </a:prstGeom>
-          <a:solidFill>
-            <a:srgbClr val="0A1A35"/>
-          </a:solidFill>
-          <a:ln/>
-        </p:spPr>
-      </p:sp>
-      <p:sp>
-        <p:nvSpPr>
-          <p:cNvPr id="17" name="Shape 15"/>
-          <p:cNvSpPr/>
-          <p:nvPr/>
-        </p:nvSpPr>
-        <p:spPr>
-          <a:xfrm>
-            <a:off x="4754880" y="2926080"/>
-            <a:ext cx="3657600" cy="548640"/>
-          </a:xfrm>
-          <a:prstGeom prst="rect">
-            <a:avLst/>
-          </a:prstGeom>
-          <a:solidFill>
-            <a:srgbClr val="0A1A35"/>
-          </a:solidFill>
-          <a:ln/>
-        </p:spPr>
-      </p:sp>
-      <p:sp>
-        <p:nvSpPr>
-          <p:cNvPr id="18" name="Text 16"/>
-          <p:cNvSpPr/>
-          <p:nvPr/>
-        </p:nvSpPr>
-        <p:spPr>
-          <a:xfrm>
-            <a:off x="914400" y="2926080"/>
-            <a:ext cx="3291840" cy="548640"/>
-          </a:xfrm>
-          <a:prstGeom prst="rect">
-            <a:avLst/>
-          </a:prstGeom>
-          <a:noFill/>
-          <a:ln/>
-        </p:spPr>
-        <p:txBody>
-          <a:bodyPr wrap="square" lIns="0" tIns="0" rIns="0" bIns="0" rtlCol="0" anchor="ctr"/>
-          <a:lstStyle/>
-          <a:p>
-            <a:pPr indent="0" marL="0">
-              <a:buNone/>
-            </a:pPr>
-            <a:r>
-              <a:rPr lang="en-US" sz="1200" dirty="0">
-                <a:solidFill>
-                  <a:srgbClr val="A0A0A0"/>
-                </a:solidFill>
-                <a:latin typeface="Arial" pitchFamily="34" charset="0"/>
-                <a:ea typeface="Arial" pitchFamily="34" charset="-122"/>
-                <a:cs typeface="Arial" pitchFamily="34" charset="-120"/>
-              </a:rPr>
-              <a:t>Static — can't change once printed</a:t>
-            </a:r>
-            <a:endParaRPr lang="en-US" sz="1200" dirty="0"/>
-          </a:p>
-        </p:txBody>
-      </p:sp>
-      <p:sp>
-        <p:nvSpPr>
-          <p:cNvPr id="19" name="Text 17"/>
-          <p:cNvSpPr/>
-          <p:nvPr/>
-        </p:nvSpPr>
-        <p:spPr>
-          <a:xfrm>
-            <a:off x="4937760" y="2926080"/>
-            <a:ext cx="3291840" cy="548640"/>
-          </a:xfrm>
-          <a:prstGeom prst="rect">
-            <a:avLst/>
-          </a:prstGeom>
-          <a:noFill/>
-          <a:ln/>
-        </p:spPr>
-        <p:txBody>
-          <a:bodyPr wrap="square" lIns="0" tIns="0" rIns="0" bIns="0" rtlCol="0" anchor="ctr"/>
-          <a:lstStyle/>
-          <a:p>
-            <a:pPr indent="0" marL="0">
-              <a:buNone/>
-            </a:pPr>
-            <a:r>
-              <a:rPr lang="en-US" sz="1200" b="1" dirty="0">
-                <a:solidFill>
-                  <a:srgbClr val="C5A55A"/>
-                </a:solidFill>
-                <a:latin typeface="Arial" pitchFamily="34" charset="0"/>
-                <a:ea typeface="Arial" pitchFamily="34" charset="-122"/>
-                <a:cs typeface="Arial" pitchFamily="34" charset="-120"/>
-              </a:rPr>
-              <a:t>Push new deals anytime</a:t>
-            </a:r>
-            <a:endParaRPr lang="en-US" sz="1200" dirty="0"/>
-          </a:p>
-        </p:txBody>
-      </p:sp>
-      <p:sp>
-        <p:nvSpPr>
-          <p:cNvPr id="20" name="Shape 18"/>
-          <p:cNvSpPr/>
-          <p:nvPr/>
-        </p:nvSpPr>
-        <p:spPr>
-          <a:xfrm>
-            <a:off x="731520" y="3520440"/>
-            <a:ext cx="3657600" cy="548640"/>
-          </a:xfrm>
-          <a:prstGeom prst="rect">
-            <a:avLst/>
-          </a:prstGeom>
-          <a:solidFill>
-            <a:srgbClr val="0E2040"/>
-          </a:solidFill>
-          <a:ln/>
-        </p:spPr>
-      </p:sp>
-      <p:sp>
-        <p:nvSpPr>
-          <p:cNvPr id="21" name="Shape 19"/>
-          <p:cNvSpPr/>
-          <p:nvPr/>
-        </p:nvSpPr>
-        <p:spPr>
-          <a:xfrm>
-            <a:off x="4754880" y="3520440"/>
-            <a:ext cx="3657600" cy="548640"/>
-          </a:xfrm>
-          <a:prstGeom prst="rect">
-            <a:avLst/>
-          </a:prstGeom>
-          <a:solidFill>
-            <a:srgbClr val="0E2040"/>
-          </a:solidFill>
-          <a:ln/>
-        </p:spPr>
-      </p:sp>
-      <p:sp>
-        <p:nvSpPr>
-          <p:cNvPr id="22" name="Text 20"/>
-          <p:cNvSpPr/>
-          <p:nvPr/>
-        </p:nvSpPr>
-        <p:spPr>
-          <a:xfrm>
-            <a:off x="914400" y="3520440"/>
-            <a:ext cx="3291840" cy="548640"/>
-          </a:xfrm>
-          <a:prstGeom prst="rect">
-            <a:avLst/>
-          </a:prstGeom>
-          <a:noFill/>
-          <a:ln/>
-        </p:spPr>
-        <p:txBody>
-          <a:bodyPr wrap="square" lIns="0" tIns="0" rIns="0" bIns="0" rtlCol="0" anchor="ctr"/>
-          <a:lstStyle/>
-          <a:p>
-            <a:pPr indent="0" marL="0">
-              <a:buNone/>
-            </a:pPr>
-            <a:r>
-              <a:rPr lang="en-US" sz="1200" dirty="0">
-                <a:solidFill>
-                  <a:srgbClr val="A0A0A0"/>
-                </a:solidFill>
-                <a:latin typeface="Arial" pitchFamily="34" charset="0"/>
-                <a:ea typeface="Arial" pitchFamily="34" charset="-122"/>
-                <a:cs typeface="Arial" pitchFamily="34" charset="-120"/>
-              </a:rPr>
-              <a:t>One-time impression</a:t>
-            </a:r>
-            <a:endParaRPr lang="en-US" sz="1200" dirty="0"/>
-          </a:p>
-        </p:txBody>
-      </p:sp>
-      <p:sp>
-        <p:nvSpPr>
-          <p:cNvPr id="23" name="Text 21"/>
-          <p:cNvSpPr/>
-          <p:nvPr/>
-        </p:nvSpPr>
-        <p:spPr>
-          <a:xfrm>
-            <a:off x="4937760" y="3520440"/>
-            <a:ext cx="3291840" cy="548640"/>
-          </a:xfrm>
-          <a:prstGeom prst="rect">
-            <a:avLst/>
-          </a:prstGeom>
-          <a:noFill/>
-          <a:ln/>
-        </p:spPr>
-        <p:txBody>
-          <a:bodyPr wrap="square" lIns="0" tIns="0" rIns="0" bIns="0" rtlCol="0" anchor="ctr"/>
-          <a:lstStyle/>
-          <a:p>
-            <a:pPr indent="0" marL="0">
-              <a:buNone/>
-            </a:pPr>
-            <a:r>
-              <a:rPr lang="en-US" sz="1200" b="1" dirty="0">
-                <a:solidFill>
-                  <a:srgbClr val="C5A55A"/>
-                </a:solidFill>
-                <a:latin typeface="Arial" pitchFamily="34" charset="0"/>
-                <a:ea typeface="Arial" pitchFamily="34" charset="-122"/>
-                <a:cs typeface="Arial" pitchFamily="34" charset="-120"/>
-              </a:rPr>
-              <a:t>Ongoing notifications</a:t>
-            </a:r>
-            <a:endParaRPr lang="en-US" sz="1200" dirty="0"/>
-          </a:p>
-        </p:txBody>
-      </p:sp>
-      <p:sp>
-        <p:nvSpPr>
-          <p:cNvPr id="24" name="Shape 22"/>
-          <p:cNvSpPr/>
-          <p:nvPr/>
-        </p:nvSpPr>
-        <p:spPr>
-          <a:xfrm>
-            <a:off x="731520" y="4114800"/>
-            <a:ext cx="3657600" cy="548640"/>
-          </a:xfrm>
-          <a:prstGeom prst="rect">
-            <a:avLst/>
-          </a:prstGeom>
-          <a:solidFill>
-            <a:srgbClr val="0A1A35"/>
-          </a:solidFill>
-          <a:ln/>
-        </p:spPr>
-      </p:sp>
-      <p:sp>
-        <p:nvSpPr>
-          <p:cNvPr id="25" name="Shape 23"/>
-          <p:cNvSpPr/>
-          <p:nvPr/>
-        </p:nvSpPr>
-        <p:spPr>
-          <a:xfrm>
-            <a:off x="4754880" y="4114800"/>
-            <a:ext cx="3657600" cy="548640"/>
-          </a:xfrm>
-          <a:prstGeom prst="rect">
-            <a:avLst/>
-          </a:prstGeom>
-          <a:solidFill>
-            <a:srgbClr val="0A1A35"/>
-          </a:solidFill>
-          <a:ln/>
-        </p:spPr>
-      </p:sp>
-      <p:sp>
-        <p:nvSpPr>
-          <p:cNvPr id="26" name="Text 24"/>
-          <p:cNvSpPr/>
-          <p:nvPr/>
-        </p:nvSpPr>
-        <p:spPr>
-          <a:xfrm>
-            <a:off x="914400" y="4114800"/>
-            <a:ext cx="3291840" cy="548640"/>
-          </a:xfrm>
-          <a:prstGeom prst="rect">
-            <a:avLst/>
-          </a:prstGeom>
-          <a:noFill/>
-          <a:ln/>
-        </p:spPr>
-        <p:txBody>
-          <a:bodyPr wrap="square" lIns="0" tIns="0" rIns="0" bIns="0" rtlCol="0" anchor="ctr"/>
-          <a:lstStyle/>
-          <a:p>
-            <a:pPr indent="0" marL="0">
-              <a:buNone/>
-            </a:pPr>
-            <a:r>
-              <a:rPr lang="en-US" sz="1200" dirty="0">
-                <a:solidFill>
-                  <a:srgbClr val="A0A0A0"/>
-                </a:solidFill>
-                <a:latin typeface="Arial" pitchFamily="34" charset="0"/>
-                <a:ea typeface="Arial" pitchFamily="34" charset="-122"/>
-                <a:cs typeface="Arial" pitchFamily="34" charset="-120"/>
-              </a:rPr>
-              <a:t>Printing costs</a:t>
-            </a:r>
-            <a:endParaRPr lang="en-US" sz="1200" dirty="0"/>
-          </a:p>
-        </p:txBody>
-      </p:sp>
-      <p:sp>
-        <p:nvSpPr>
-          <p:cNvPr id="27" name="Text 25"/>
-          <p:cNvSpPr/>
-          <p:nvPr/>
-        </p:nvSpPr>
-        <p:spPr>
-          <a:xfrm>
-            <a:off x="4937760" y="4114800"/>
-            <a:ext cx="3291840" cy="548640"/>
-          </a:xfrm>
-          <a:prstGeom prst="rect">
-            <a:avLst/>
-          </a:prstGeom>
-          <a:noFill/>
-          <a:ln/>
-        </p:spPr>
-        <p:txBody>
-          <a:bodyPr wrap="square" lIns="0" tIns="0" rIns="0" bIns="0" rtlCol="0" anchor="ctr"/>
-          <a:lstStyle/>
-          <a:p>
-            <a:pPr indent="0" marL="0">
-              <a:buNone/>
-            </a:pPr>
-            <a:r>
-              <a:rPr lang="en-US" sz="1200" b="1" dirty="0">
-                <a:solidFill>
-                  <a:srgbClr val="C5A55A"/>
-                </a:solidFill>
-                <a:latin typeface="Arial" pitchFamily="34" charset="0"/>
-                <a:ea typeface="Arial" pitchFamily="34" charset="-122"/>
-                <a:cs typeface="Arial" pitchFamily="34" charset="-120"/>
-              </a:rPr>
-              <a:t>Zero printing costs</a:t>
+              <a:t>Each card has a unique QR code linking the physical card to Apple Wallet</a:t>
             </a:r>
             <a:endParaRPr lang="en-US" sz="1200" dirty="0"/>
           </a:p>
@@ -6201,6 +6398,805 @@
 <file path=ppt/slides/slide6.xml><?xml version="1.0" encoding="utf-8"?>
 <p:sld xmlns:a="http://schemas.openxmlformats.org/drawingml/2006/main" xmlns:r="http://schemas.openxmlformats.org/officeDocument/2006/relationships" xmlns:p="http://schemas.openxmlformats.org/presentationml/2006/main">
   <p:cSld name="Slide 6">
+    <p:bg>
+      <p:bgPr>
+        <a:solidFill>
+          <a:srgbClr val="FFFFFF"/>
+        </a:solidFill>
+      </p:bgPr>
+    </p:bg>
+    <p:spTree>
+      <p:nvGrpSpPr>
+        <p:cNvPr id="1" name=""/>
+        <p:cNvGrpSpPr/>
+        <p:nvPr/>
+      </p:nvGrpSpPr>
+      <p:grpSpPr>
+        <a:xfrm>
+          <a:off x="0" y="0"/>
+          <a:ext cx="0" cy="0"/>
+          <a:chOff x="0" y="0"/>
+          <a:chExt cx="0" cy="0"/>
+        </a:xfrm>
+      </p:grpSpPr>
+      <p:sp>
+        <p:nvSpPr>
+          <p:cNvPr id="2" name="Shape 0"/>
+          <p:cNvSpPr/>
+          <p:nvPr/>
+        </p:nvSpPr>
+        <p:spPr>
+          <a:xfrm>
+            <a:off x="0" y="0"/>
+            <a:ext cx="9144000" cy="1005840"/>
+          </a:xfrm>
+          <a:prstGeom prst="rect">
+            <a:avLst/>
+          </a:prstGeom>
+          <a:solidFill>
+            <a:srgbClr val="002D62"/>
+          </a:solidFill>
+          <a:ln/>
+        </p:spPr>
+      </p:sp>
+      <p:sp>
+        <p:nvSpPr>
+          <p:cNvPr id="3" name="Text 1"/>
+          <p:cNvSpPr/>
+          <p:nvPr/>
+        </p:nvSpPr>
+        <p:spPr>
+          <a:xfrm>
+            <a:off x="731520" y="228600"/>
+            <a:ext cx="7315200" cy="548640"/>
+          </a:xfrm>
+          <a:prstGeom prst="rect">
+            <a:avLst/>
+          </a:prstGeom>
+          <a:noFill/>
+          <a:ln/>
+        </p:spPr>
+        <p:txBody>
+          <a:bodyPr wrap="square" lIns="0" tIns="0" rIns="0" bIns="0" rtlCol="0" anchor="ctr"/>
+          <a:lstStyle/>
+          <a:p>
+            <a:pPr indent="0" marL="0">
+              <a:buNone/>
+            </a:pPr>
+            <a:r>
+              <a:rPr lang="en-US" sz="2800" b="1" dirty="0">
+                <a:solidFill>
+                  <a:srgbClr val="C5A55A"/>
+                </a:solidFill>
+                <a:latin typeface="Arial Black" pitchFamily="34" charset="0"/>
+                <a:ea typeface="Arial Black" pitchFamily="34" charset="-122"/>
+                <a:cs typeface="Arial Black" pitchFamily="34" charset="-120"/>
+              </a:rPr>
+              <a:t>WHY DIGITAL BEATS PHYSICAL</a:t>
+            </a:r>
+            <a:endParaRPr lang="en-US" sz="2800" dirty="0"/>
+          </a:p>
+        </p:txBody>
+      </p:sp>
+      <p:sp>
+        <p:nvSpPr>
+          <p:cNvPr id="4" name="Shape 2"/>
+          <p:cNvSpPr/>
+          <p:nvPr/>
+        </p:nvSpPr>
+        <p:spPr>
+          <a:xfrm>
+            <a:off x="731520" y="1188720"/>
+            <a:ext cx="3657600" cy="457200"/>
+          </a:xfrm>
+          <a:prstGeom prst="rect">
+            <a:avLst/>
+          </a:prstGeom>
+          <a:solidFill>
+            <a:srgbClr val="E8E0E0"/>
+          </a:solidFill>
+          <a:ln/>
+        </p:spPr>
+      </p:sp>
+      <p:sp>
+        <p:nvSpPr>
+          <p:cNvPr id="5" name="Text 3"/>
+          <p:cNvSpPr/>
+          <p:nvPr/>
+        </p:nvSpPr>
+        <p:spPr>
+          <a:xfrm>
+            <a:off x="731520" y="1188720"/>
+            <a:ext cx="3657600" cy="457200"/>
+          </a:xfrm>
+          <a:prstGeom prst="rect">
+            <a:avLst/>
+          </a:prstGeom>
+          <a:noFill/>
+          <a:ln/>
+        </p:spPr>
+        <p:txBody>
+          <a:bodyPr wrap="square" lIns="0" tIns="0" rIns="0" bIns="0" rtlCol="0" anchor="ctr"/>
+          <a:lstStyle/>
+          <a:p>
+            <a:pPr algn="ctr" indent="0" marL="0">
+              <a:buNone/>
+            </a:pPr>
+            <a:r>
+              <a:rPr lang="en-US" sz="1400" b="1" dirty="0">
+                <a:solidFill>
+                  <a:srgbClr val="999999"/>
+                </a:solidFill>
+                <a:latin typeface="Arial" pitchFamily="34" charset="0"/>
+                <a:ea typeface="Arial" pitchFamily="34" charset="-122"/>
+                <a:cs typeface="Arial" pitchFamily="34" charset="-120"/>
+              </a:rPr>
+              <a:t>Physical Card</a:t>
+            </a:r>
+            <a:endParaRPr lang="en-US" sz="1400" dirty="0"/>
+          </a:p>
+        </p:txBody>
+      </p:sp>
+      <p:sp>
+        <p:nvSpPr>
+          <p:cNvPr id="6" name="Shape 4"/>
+          <p:cNvSpPr/>
+          <p:nvPr/>
+        </p:nvSpPr>
+        <p:spPr>
+          <a:xfrm>
+            <a:off x="4754880" y="1188720"/>
+            <a:ext cx="3657600" cy="457200"/>
+          </a:xfrm>
+          <a:prstGeom prst="rect">
+            <a:avLst/>
+          </a:prstGeom>
+          <a:solidFill>
+            <a:srgbClr val="C5A55A"/>
+          </a:solidFill>
+          <a:ln/>
+        </p:spPr>
+      </p:sp>
+      <p:sp>
+        <p:nvSpPr>
+          <p:cNvPr id="7" name="Text 5"/>
+          <p:cNvSpPr/>
+          <p:nvPr/>
+        </p:nvSpPr>
+        <p:spPr>
+          <a:xfrm>
+            <a:off x="4754880" y="1188720"/>
+            <a:ext cx="3657600" cy="457200"/>
+          </a:xfrm>
+          <a:prstGeom prst="rect">
+            <a:avLst/>
+          </a:prstGeom>
+          <a:noFill/>
+          <a:ln/>
+        </p:spPr>
+        <p:txBody>
+          <a:bodyPr wrap="square" lIns="0" tIns="0" rIns="0" bIns="0" rtlCol="0" anchor="ctr"/>
+          <a:lstStyle/>
+          <a:p>
+            <a:pPr algn="ctr" indent="0" marL="0">
+              <a:buNone/>
+            </a:pPr>
+            <a:r>
+              <a:rPr lang="en-US" sz="1400" b="1" dirty="0">
+                <a:solidFill>
+                  <a:srgbClr val="002D62"/>
+                </a:solidFill>
+                <a:latin typeface="Arial" pitchFamily="34" charset="0"/>
+                <a:ea typeface="Arial" pitchFamily="34" charset="-122"/>
+                <a:cs typeface="Arial" pitchFamily="34" charset="-120"/>
+              </a:rPr>
+              <a:t>Digital Card</a:t>
+            </a:r>
+            <a:endParaRPr lang="en-US" sz="1400" dirty="0"/>
+          </a:p>
+        </p:txBody>
+      </p:sp>
+      <p:sp>
+        <p:nvSpPr>
+          <p:cNvPr id="8" name="Shape 6"/>
+          <p:cNvSpPr/>
+          <p:nvPr/>
+        </p:nvSpPr>
+        <p:spPr>
+          <a:xfrm>
+            <a:off x="731520" y="1737360"/>
+            <a:ext cx="3657600" cy="502920"/>
+          </a:xfrm>
+          <a:prstGeom prst="rect">
+            <a:avLst/>
+          </a:prstGeom>
+          <a:solidFill>
+            <a:srgbClr val="F8F6F2"/>
+          </a:solidFill>
+          <a:ln/>
+        </p:spPr>
+      </p:sp>
+      <p:sp>
+        <p:nvSpPr>
+          <p:cNvPr id="9" name="Shape 7"/>
+          <p:cNvSpPr/>
+          <p:nvPr/>
+        </p:nvSpPr>
+        <p:spPr>
+          <a:xfrm>
+            <a:off x="4754880" y="1737360"/>
+            <a:ext cx="3657600" cy="502920"/>
+          </a:xfrm>
+          <a:prstGeom prst="rect">
+            <a:avLst/>
+          </a:prstGeom>
+          <a:solidFill>
+            <a:srgbClr val="F8F6F2"/>
+          </a:solidFill>
+          <a:ln/>
+        </p:spPr>
+      </p:sp>
+      <p:sp>
+        <p:nvSpPr>
+          <p:cNvPr id="10" name="Text 8"/>
+          <p:cNvSpPr/>
+          <p:nvPr/>
+        </p:nvSpPr>
+        <p:spPr>
+          <a:xfrm>
+            <a:off x="914400" y="1737360"/>
+            <a:ext cx="3291840" cy="502920"/>
+          </a:xfrm>
+          <a:prstGeom prst="rect">
+            <a:avLst/>
+          </a:prstGeom>
+          <a:noFill/>
+          <a:ln/>
+        </p:spPr>
+        <p:txBody>
+          <a:bodyPr wrap="square" lIns="0" tIns="0" rIns="0" bIns="0" rtlCol="0" anchor="ctr"/>
+          <a:lstStyle/>
+          <a:p>
+            <a:pPr indent="0" marL="0">
+              <a:buNone/>
+            </a:pPr>
+            <a:r>
+              <a:rPr lang="en-US" sz="1200" dirty="0">
+                <a:solidFill>
+                  <a:srgbClr val="999999"/>
+                </a:solidFill>
+                <a:latin typeface="Arial" pitchFamily="34" charset="0"/>
+                <a:ea typeface="Arial" pitchFamily="34" charset="-122"/>
+                <a:cs typeface="Arial" pitchFamily="34" charset="-120"/>
+              </a:rPr>
+              <a:t>Gets lost, forgotten at home</a:t>
+            </a:r>
+            <a:endParaRPr lang="en-US" sz="1200" dirty="0"/>
+          </a:p>
+        </p:txBody>
+      </p:sp>
+      <p:sp>
+        <p:nvSpPr>
+          <p:cNvPr id="11" name="Text 9"/>
+          <p:cNvSpPr/>
+          <p:nvPr/>
+        </p:nvSpPr>
+        <p:spPr>
+          <a:xfrm>
+            <a:off x="4937760" y="1737360"/>
+            <a:ext cx="3291840" cy="502920"/>
+          </a:xfrm>
+          <a:prstGeom prst="rect">
+            <a:avLst/>
+          </a:prstGeom>
+          <a:noFill/>
+          <a:ln/>
+        </p:spPr>
+        <p:txBody>
+          <a:bodyPr wrap="square" lIns="0" tIns="0" rIns="0" bIns="0" rtlCol="0" anchor="ctr"/>
+          <a:lstStyle/>
+          <a:p>
+            <a:pPr indent="0" marL="0">
+              <a:buNone/>
+            </a:pPr>
+            <a:r>
+              <a:rPr lang="en-US" sz="1200" b="1" dirty="0">
+                <a:solidFill>
+                  <a:srgbClr val="002D62"/>
+                </a:solidFill>
+                <a:latin typeface="Arial" pitchFamily="34" charset="0"/>
+                <a:ea typeface="Arial" pitchFamily="34" charset="-122"/>
+                <a:cs typeface="Arial" pitchFamily="34" charset="-120"/>
+              </a:rPr>
+              <a:t>Always in their phone</a:t>
+            </a:r>
+            <a:endParaRPr lang="en-US" sz="1200" dirty="0"/>
+          </a:p>
+        </p:txBody>
+      </p:sp>
+      <p:sp>
+        <p:nvSpPr>
+          <p:cNvPr id="12" name="Shape 10"/>
+          <p:cNvSpPr/>
+          <p:nvPr/>
+        </p:nvSpPr>
+        <p:spPr>
+          <a:xfrm>
+            <a:off x="731520" y="2286000"/>
+            <a:ext cx="3657600" cy="502920"/>
+          </a:xfrm>
+          <a:prstGeom prst="rect">
+            <a:avLst/>
+          </a:prstGeom>
+          <a:solidFill>
+            <a:srgbClr val="FFFFFF"/>
+          </a:solidFill>
+          <a:ln/>
+        </p:spPr>
+      </p:sp>
+      <p:sp>
+        <p:nvSpPr>
+          <p:cNvPr id="13" name="Shape 11"/>
+          <p:cNvSpPr/>
+          <p:nvPr/>
+        </p:nvSpPr>
+        <p:spPr>
+          <a:xfrm>
+            <a:off x="4754880" y="2286000"/>
+            <a:ext cx="3657600" cy="502920"/>
+          </a:xfrm>
+          <a:prstGeom prst="rect">
+            <a:avLst/>
+          </a:prstGeom>
+          <a:solidFill>
+            <a:srgbClr val="FFFFFF"/>
+          </a:solidFill>
+          <a:ln/>
+        </p:spPr>
+      </p:sp>
+      <p:sp>
+        <p:nvSpPr>
+          <p:cNvPr id="14" name="Text 12"/>
+          <p:cNvSpPr/>
+          <p:nvPr/>
+        </p:nvSpPr>
+        <p:spPr>
+          <a:xfrm>
+            <a:off x="914400" y="2286000"/>
+            <a:ext cx="3291840" cy="502920"/>
+          </a:xfrm>
+          <a:prstGeom prst="rect">
+            <a:avLst/>
+          </a:prstGeom>
+          <a:noFill/>
+          <a:ln/>
+        </p:spPr>
+        <p:txBody>
+          <a:bodyPr wrap="square" lIns="0" tIns="0" rIns="0" bIns="0" rtlCol="0" anchor="ctr"/>
+          <a:lstStyle/>
+          <a:p>
+            <a:pPr indent="0" marL="0">
+              <a:buNone/>
+            </a:pPr>
+            <a:r>
+              <a:rPr lang="en-US" sz="1200" dirty="0">
+                <a:solidFill>
+                  <a:srgbClr val="999999"/>
+                </a:solidFill>
+                <a:latin typeface="Arial" pitchFamily="34" charset="0"/>
+                <a:ea typeface="Arial" pitchFamily="34" charset="-122"/>
+                <a:cs typeface="Arial" pitchFamily="34" charset="-120"/>
+              </a:rPr>
+              <a:t>No way to track usage</a:t>
+            </a:r>
+            <a:endParaRPr lang="en-US" sz="1200" dirty="0"/>
+          </a:p>
+        </p:txBody>
+      </p:sp>
+      <p:sp>
+        <p:nvSpPr>
+          <p:cNvPr id="15" name="Text 13"/>
+          <p:cNvSpPr/>
+          <p:nvPr/>
+        </p:nvSpPr>
+        <p:spPr>
+          <a:xfrm>
+            <a:off x="4937760" y="2286000"/>
+            <a:ext cx="3291840" cy="502920"/>
+          </a:xfrm>
+          <a:prstGeom prst="rect">
+            <a:avLst/>
+          </a:prstGeom>
+          <a:noFill/>
+          <a:ln/>
+        </p:spPr>
+        <p:txBody>
+          <a:bodyPr wrap="square" lIns="0" tIns="0" rIns="0" bIns="0" rtlCol="0" anchor="ctr"/>
+          <a:lstStyle/>
+          <a:p>
+            <a:pPr indent="0" marL="0">
+              <a:buNone/>
+            </a:pPr>
+            <a:r>
+              <a:rPr lang="en-US" sz="1200" b="1" dirty="0">
+                <a:solidFill>
+                  <a:srgbClr val="002D62"/>
+                </a:solidFill>
+                <a:latin typeface="Arial" pitchFamily="34" charset="0"/>
+                <a:ea typeface="Arial" pitchFamily="34" charset="-122"/>
+                <a:cs typeface="Arial" pitchFamily="34" charset="-120"/>
+              </a:rPr>
+              <a:t>Every scan is tracked</a:t>
+            </a:r>
+            <a:endParaRPr lang="en-US" sz="1200" dirty="0"/>
+          </a:p>
+        </p:txBody>
+      </p:sp>
+      <p:sp>
+        <p:nvSpPr>
+          <p:cNvPr id="16" name="Shape 14"/>
+          <p:cNvSpPr/>
+          <p:nvPr/>
+        </p:nvSpPr>
+        <p:spPr>
+          <a:xfrm>
+            <a:off x="731520" y="2834640"/>
+            <a:ext cx="3657600" cy="502920"/>
+          </a:xfrm>
+          <a:prstGeom prst="rect">
+            <a:avLst/>
+          </a:prstGeom>
+          <a:solidFill>
+            <a:srgbClr val="F8F6F2"/>
+          </a:solidFill>
+          <a:ln/>
+        </p:spPr>
+      </p:sp>
+      <p:sp>
+        <p:nvSpPr>
+          <p:cNvPr id="17" name="Shape 15"/>
+          <p:cNvSpPr/>
+          <p:nvPr/>
+        </p:nvSpPr>
+        <p:spPr>
+          <a:xfrm>
+            <a:off x="4754880" y="2834640"/>
+            <a:ext cx="3657600" cy="502920"/>
+          </a:xfrm>
+          <a:prstGeom prst="rect">
+            <a:avLst/>
+          </a:prstGeom>
+          <a:solidFill>
+            <a:srgbClr val="F8F6F2"/>
+          </a:solidFill>
+          <a:ln/>
+        </p:spPr>
+      </p:sp>
+      <p:sp>
+        <p:nvSpPr>
+          <p:cNvPr id="18" name="Text 16"/>
+          <p:cNvSpPr/>
+          <p:nvPr/>
+        </p:nvSpPr>
+        <p:spPr>
+          <a:xfrm>
+            <a:off x="914400" y="2834640"/>
+            <a:ext cx="3291840" cy="502920"/>
+          </a:xfrm>
+          <a:prstGeom prst="rect">
+            <a:avLst/>
+          </a:prstGeom>
+          <a:noFill/>
+          <a:ln/>
+        </p:spPr>
+        <p:txBody>
+          <a:bodyPr wrap="square" lIns="0" tIns="0" rIns="0" bIns="0" rtlCol="0" anchor="ctr"/>
+          <a:lstStyle/>
+          <a:p>
+            <a:pPr indent="0" marL="0">
+              <a:buNone/>
+            </a:pPr>
+            <a:r>
+              <a:rPr lang="en-US" sz="1200" dirty="0">
+                <a:solidFill>
+                  <a:srgbClr val="999999"/>
+                </a:solidFill>
+                <a:latin typeface="Arial" pitchFamily="34" charset="0"/>
+                <a:ea typeface="Arial" pitchFamily="34" charset="-122"/>
+                <a:cs typeface="Arial" pitchFamily="34" charset="-120"/>
+              </a:rPr>
+              <a:t>Static once printed</a:t>
+            </a:r>
+            <a:endParaRPr lang="en-US" sz="1200" dirty="0"/>
+          </a:p>
+        </p:txBody>
+      </p:sp>
+      <p:sp>
+        <p:nvSpPr>
+          <p:cNvPr id="19" name="Text 17"/>
+          <p:cNvSpPr/>
+          <p:nvPr/>
+        </p:nvSpPr>
+        <p:spPr>
+          <a:xfrm>
+            <a:off x="4937760" y="2834640"/>
+            <a:ext cx="3291840" cy="502920"/>
+          </a:xfrm>
+          <a:prstGeom prst="rect">
+            <a:avLst/>
+          </a:prstGeom>
+          <a:noFill/>
+          <a:ln/>
+        </p:spPr>
+        <p:txBody>
+          <a:bodyPr wrap="square" lIns="0" tIns="0" rIns="0" bIns="0" rtlCol="0" anchor="ctr"/>
+          <a:lstStyle/>
+          <a:p>
+            <a:pPr indent="0" marL="0">
+              <a:buNone/>
+            </a:pPr>
+            <a:r>
+              <a:rPr lang="en-US" sz="1200" b="1" dirty="0">
+                <a:solidFill>
+                  <a:srgbClr val="002D62"/>
+                </a:solidFill>
+                <a:latin typeface="Arial" pitchFamily="34" charset="0"/>
+                <a:ea typeface="Arial" pitchFamily="34" charset="-122"/>
+                <a:cs typeface="Arial" pitchFamily="34" charset="-120"/>
+              </a:rPr>
+              <a:t>Push new deals anytime</a:t>
+            </a:r>
+            <a:endParaRPr lang="en-US" sz="1200" dirty="0"/>
+          </a:p>
+        </p:txBody>
+      </p:sp>
+      <p:sp>
+        <p:nvSpPr>
+          <p:cNvPr id="20" name="Shape 18"/>
+          <p:cNvSpPr/>
+          <p:nvPr/>
+        </p:nvSpPr>
+        <p:spPr>
+          <a:xfrm>
+            <a:off x="731520" y="3383280"/>
+            <a:ext cx="3657600" cy="502920"/>
+          </a:xfrm>
+          <a:prstGeom prst="rect">
+            <a:avLst/>
+          </a:prstGeom>
+          <a:solidFill>
+            <a:srgbClr val="FFFFFF"/>
+          </a:solidFill>
+          <a:ln/>
+        </p:spPr>
+      </p:sp>
+      <p:sp>
+        <p:nvSpPr>
+          <p:cNvPr id="21" name="Shape 19"/>
+          <p:cNvSpPr/>
+          <p:nvPr/>
+        </p:nvSpPr>
+        <p:spPr>
+          <a:xfrm>
+            <a:off x="4754880" y="3383280"/>
+            <a:ext cx="3657600" cy="502920"/>
+          </a:xfrm>
+          <a:prstGeom prst="rect">
+            <a:avLst/>
+          </a:prstGeom>
+          <a:solidFill>
+            <a:srgbClr val="FFFFFF"/>
+          </a:solidFill>
+          <a:ln/>
+        </p:spPr>
+      </p:sp>
+      <p:sp>
+        <p:nvSpPr>
+          <p:cNvPr id="22" name="Text 20"/>
+          <p:cNvSpPr/>
+          <p:nvPr/>
+        </p:nvSpPr>
+        <p:spPr>
+          <a:xfrm>
+            <a:off x="914400" y="3383280"/>
+            <a:ext cx="3291840" cy="502920"/>
+          </a:xfrm>
+          <a:prstGeom prst="rect">
+            <a:avLst/>
+          </a:prstGeom>
+          <a:noFill/>
+          <a:ln/>
+        </p:spPr>
+        <p:txBody>
+          <a:bodyPr wrap="square" lIns="0" tIns="0" rIns="0" bIns="0" rtlCol="0" anchor="ctr"/>
+          <a:lstStyle/>
+          <a:p>
+            <a:pPr indent="0" marL="0">
+              <a:buNone/>
+            </a:pPr>
+            <a:r>
+              <a:rPr lang="en-US" sz="1200" dirty="0">
+                <a:solidFill>
+                  <a:srgbClr val="999999"/>
+                </a:solidFill>
+                <a:latin typeface="Arial" pitchFamily="34" charset="0"/>
+                <a:ea typeface="Arial" pitchFamily="34" charset="-122"/>
+                <a:cs typeface="Arial" pitchFamily="34" charset="-120"/>
+              </a:rPr>
+              <a:t>One-time impression</a:t>
+            </a:r>
+            <a:endParaRPr lang="en-US" sz="1200" dirty="0"/>
+          </a:p>
+        </p:txBody>
+      </p:sp>
+      <p:sp>
+        <p:nvSpPr>
+          <p:cNvPr id="23" name="Text 21"/>
+          <p:cNvSpPr/>
+          <p:nvPr/>
+        </p:nvSpPr>
+        <p:spPr>
+          <a:xfrm>
+            <a:off x="4937760" y="3383280"/>
+            <a:ext cx="3291840" cy="502920"/>
+          </a:xfrm>
+          <a:prstGeom prst="rect">
+            <a:avLst/>
+          </a:prstGeom>
+          <a:noFill/>
+          <a:ln/>
+        </p:spPr>
+        <p:txBody>
+          <a:bodyPr wrap="square" lIns="0" tIns="0" rIns="0" bIns="0" rtlCol="0" anchor="ctr"/>
+          <a:lstStyle/>
+          <a:p>
+            <a:pPr indent="0" marL="0">
+              <a:buNone/>
+            </a:pPr>
+            <a:r>
+              <a:rPr lang="en-US" sz="1200" b="1" dirty="0">
+                <a:solidFill>
+                  <a:srgbClr val="002D62"/>
+                </a:solidFill>
+                <a:latin typeface="Arial" pitchFamily="34" charset="0"/>
+                <a:ea typeface="Arial" pitchFamily="34" charset="-122"/>
+                <a:cs typeface="Arial" pitchFamily="34" charset="-120"/>
+              </a:rPr>
+              <a:t>Ongoing notifications</a:t>
+            </a:r>
+            <a:endParaRPr lang="en-US" sz="1200" dirty="0"/>
+          </a:p>
+        </p:txBody>
+      </p:sp>
+      <p:sp>
+        <p:nvSpPr>
+          <p:cNvPr id="24" name="Shape 22"/>
+          <p:cNvSpPr/>
+          <p:nvPr/>
+        </p:nvSpPr>
+        <p:spPr>
+          <a:xfrm>
+            <a:off x="731520" y="3931920"/>
+            <a:ext cx="3657600" cy="502920"/>
+          </a:xfrm>
+          <a:prstGeom prst="rect">
+            <a:avLst/>
+          </a:prstGeom>
+          <a:solidFill>
+            <a:srgbClr val="F8F6F2"/>
+          </a:solidFill>
+          <a:ln/>
+        </p:spPr>
+      </p:sp>
+      <p:sp>
+        <p:nvSpPr>
+          <p:cNvPr id="25" name="Shape 23"/>
+          <p:cNvSpPr/>
+          <p:nvPr/>
+        </p:nvSpPr>
+        <p:spPr>
+          <a:xfrm>
+            <a:off x="4754880" y="3931920"/>
+            <a:ext cx="3657600" cy="502920"/>
+          </a:xfrm>
+          <a:prstGeom prst="rect">
+            <a:avLst/>
+          </a:prstGeom>
+          <a:solidFill>
+            <a:srgbClr val="F8F6F2"/>
+          </a:solidFill>
+          <a:ln/>
+        </p:spPr>
+      </p:sp>
+      <p:sp>
+        <p:nvSpPr>
+          <p:cNvPr id="26" name="Text 24"/>
+          <p:cNvSpPr/>
+          <p:nvPr/>
+        </p:nvSpPr>
+        <p:spPr>
+          <a:xfrm>
+            <a:off x="914400" y="3931920"/>
+            <a:ext cx="3291840" cy="502920"/>
+          </a:xfrm>
+          <a:prstGeom prst="rect">
+            <a:avLst/>
+          </a:prstGeom>
+          <a:noFill/>
+          <a:ln/>
+        </p:spPr>
+        <p:txBody>
+          <a:bodyPr wrap="square" lIns="0" tIns="0" rIns="0" bIns="0" rtlCol="0" anchor="ctr"/>
+          <a:lstStyle/>
+          <a:p>
+            <a:pPr indent="0" marL="0">
+              <a:buNone/>
+            </a:pPr>
+            <a:r>
+              <a:rPr lang="en-US" sz="1200" dirty="0">
+                <a:solidFill>
+                  <a:srgbClr val="999999"/>
+                </a:solidFill>
+                <a:latin typeface="Arial" pitchFamily="34" charset="0"/>
+                <a:ea typeface="Arial" pitchFamily="34" charset="-122"/>
+                <a:cs typeface="Arial" pitchFamily="34" charset="-120"/>
+              </a:rPr>
+              <a:t>Printing costs</a:t>
+            </a:r>
+            <a:endParaRPr lang="en-US" sz="1200" dirty="0"/>
+          </a:p>
+        </p:txBody>
+      </p:sp>
+      <p:sp>
+        <p:nvSpPr>
+          <p:cNvPr id="27" name="Text 25"/>
+          <p:cNvSpPr/>
+          <p:nvPr/>
+        </p:nvSpPr>
+        <p:spPr>
+          <a:xfrm>
+            <a:off x="4937760" y="3931920"/>
+            <a:ext cx="3291840" cy="502920"/>
+          </a:xfrm>
+          <a:prstGeom prst="rect">
+            <a:avLst/>
+          </a:prstGeom>
+          <a:noFill/>
+          <a:ln/>
+        </p:spPr>
+        <p:txBody>
+          <a:bodyPr wrap="square" lIns="0" tIns="0" rIns="0" bIns="0" rtlCol="0" anchor="ctr"/>
+          <a:lstStyle/>
+          <a:p>
+            <a:pPr indent="0" marL="0">
+              <a:buNone/>
+            </a:pPr>
+            <a:r>
+              <a:rPr lang="en-US" sz="1200" b="1" dirty="0">
+                <a:solidFill>
+                  <a:srgbClr val="002D62"/>
+                </a:solidFill>
+                <a:latin typeface="Arial" pitchFamily="34" charset="0"/>
+                <a:ea typeface="Arial" pitchFamily="34" charset="-122"/>
+                <a:cs typeface="Arial" pitchFamily="34" charset="-120"/>
+              </a:rPr>
+              <a:t>Zero printing costs</a:t>
+            </a:r>
+            <a:endParaRPr lang="en-US" sz="1200" dirty="0"/>
+          </a:p>
+        </p:txBody>
+      </p:sp>
+    </p:spTree>
+  </p:cSld>
+  <p:clrMapOvr>
+    <a:masterClrMapping/>
+  </p:clrMapOvr>
+</p:sld>
+</file>
+
+<file path=ppt/slides/slide7.xml><?xml version="1.0" encoding="utf-8"?>
+<p:sld xmlns:a="http://schemas.openxmlformats.org/drawingml/2006/main" xmlns:r="http://schemas.openxmlformats.org/officeDocument/2006/relationships" xmlns:p="http://schemas.openxmlformats.org/presentationml/2006/main">
+  <p:cSld name="Slide 7">
     <p:bg>
       <p:bgPr>
         <a:solidFill>
@@ -6371,8 +7367,8 @@
         </p:nvSpPr>
         <p:spPr>
           <a:xfrm>
-            <a:off x="1097280" y="2103120"/>
-            <a:ext cx="6949440" cy="594360"/>
+            <a:off x="1097280" y="2011680"/>
+            <a:ext cx="6949440" cy="502920"/>
           </a:xfrm>
           <a:prstGeom prst="rect">
             <a:avLst/>
@@ -6398,8 +7394,8 @@
         </p:nvSpPr>
         <p:spPr>
           <a:xfrm>
-            <a:off x="1097280" y="2103120"/>
-            <a:ext cx="64008" cy="594360"/>
+            <a:off x="1097280" y="2011680"/>
+            <a:ext cx="64008" cy="502920"/>
           </a:xfrm>
           <a:prstGeom prst="rect">
             <a:avLst/>
@@ -6418,8 +7414,8 @@
         </p:nvSpPr>
         <p:spPr>
           <a:xfrm>
-            <a:off x="1463040" y="2103120"/>
-            <a:ext cx="6400800" cy="594360"/>
+            <a:off x="1463040" y="2011680"/>
+            <a:ext cx="6400800" cy="502920"/>
           </a:xfrm>
           <a:prstGeom prst="rect">
             <a:avLst/>
@@ -6457,8 +7453,8 @@
         </p:nvSpPr>
         <p:spPr>
           <a:xfrm>
-            <a:off x="1097280" y="2834640"/>
-            <a:ext cx="6949440" cy="594360"/>
+            <a:off x="1097280" y="2651760"/>
+            <a:ext cx="6949440" cy="502920"/>
           </a:xfrm>
           <a:prstGeom prst="rect">
             <a:avLst/>
@@ -6484,8 +7480,8 @@
         </p:nvSpPr>
         <p:spPr>
           <a:xfrm>
-            <a:off x="1097280" y="2834640"/>
-            <a:ext cx="64008" cy="594360"/>
+            <a:off x="1097280" y="2651760"/>
+            <a:ext cx="64008" cy="502920"/>
           </a:xfrm>
           <a:prstGeom prst="rect">
             <a:avLst/>
@@ -6504,8 +7500,8 @@
         </p:nvSpPr>
         <p:spPr>
           <a:xfrm>
-            <a:off x="1463040" y="2834640"/>
-            <a:ext cx="6400800" cy="594360"/>
+            <a:off x="1463040" y="2651760"/>
+            <a:ext cx="6400800" cy="502920"/>
           </a:xfrm>
           <a:prstGeom prst="rect">
             <a:avLst/>
@@ -6543,8 +7539,8 @@
         </p:nvSpPr>
         <p:spPr>
           <a:xfrm>
-            <a:off x="1097280" y="3566160"/>
-            <a:ext cx="6949440" cy="594360"/>
+            <a:off x="1097280" y="3291840"/>
+            <a:ext cx="6949440" cy="502920"/>
           </a:xfrm>
           <a:prstGeom prst="rect">
             <a:avLst/>
@@ -6570,8 +7566,8 @@
         </p:nvSpPr>
         <p:spPr>
           <a:xfrm>
-            <a:off x="1097280" y="3566160"/>
-            <a:ext cx="64008" cy="594360"/>
+            <a:off x="1097280" y="3291840"/>
+            <a:ext cx="64008" cy="502920"/>
           </a:xfrm>
           <a:prstGeom prst="rect">
             <a:avLst/>
@@ -6590,8 +7586,8 @@
         </p:nvSpPr>
         <p:spPr>
           <a:xfrm>
-            <a:off x="1463040" y="3566160"/>
-            <a:ext cx="6400800" cy="594360"/>
+            <a:off x="1463040" y="3291840"/>
+            <a:ext cx="6400800" cy="502920"/>
           </a:xfrm>
           <a:prstGeom prst="rect">
             <a:avLst/>
@@ -6629,8 +7625,8 @@
         </p:nvSpPr>
         <p:spPr>
           <a:xfrm>
-            <a:off x="731520" y="4114800"/>
-            <a:ext cx="7680960" cy="731520"/>
+            <a:off x="731520" y="4023360"/>
+            <a:ext cx="7680960" cy="457200"/>
           </a:xfrm>
           <a:prstGeom prst="rect">
             <a:avLst/>
@@ -6655,23 +7651,6 @@
                 <a:cs typeface="Arial" pitchFamily="34" charset="-120"/>
               </a:rPr>
               <a:t>Cardholders get a lock-screen notification and their card updates automatically.</a:t>
-            </a:r>
-            <a:endParaRPr lang="en-US" sz="1300" dirty="0"/>
-          </a:p>
-          <a:p>
-            <a:pPr indent="0" marL="0">
-              <a:buNone/>
-            </a:pPr>
-            <a:r>
-              <a:rPr lang="en-US" sz="1300" dirty="0">
-                <a:solidFill>
-                  <a:srgbClr val="D4B96A"/>
-                </a:solidFill>
-                <a:latin typeface="Arial" pitchFamily="34" charset="0"/>
-                <a:ea typeface="Arial" pitchFamily="34" charset="-122"/>
-                <a:cs typeface="Arial" pitchFamily="34" charset="-120"/>
-              </a:rPr>
-              <a:t>This drives real foot traffic to your business on the days that matter most.</a:t>
             </a:r>
             <a:endParaRPr lang="en-US" sz="1300" dirty="0"/>
           </a:p>
@@ -6685,9 +7664,9 @@
 </p:sld>
 </file>
 
-<file path=ppt/slides/slide7.xml><?xml version="1.0" encoding="utf-8"?>
+<file path=ppt/slides/slide8.xml><?xml version="1.0" encoding="utf-8"?>
 <p:sld xmlns:a="http://schemas.openxmlformats.org/drawingml/2006/main" xmlns:r="http://schemas.openxmlformats.org/officeDocument/2006/relationships" xmlns:p="http://schemas.openxmlformats.org/presentationml/2006/main">
-  <p:cSld name="Slide 7">
+  <p:cSld name="Slide 8">
     <p:bg>
       <p:bgPr>
         <a:solidFill>
@@ -6784,8 +7763,8 @@
         </p:blipFill>
         <p:spPr>
           <a:xfrm>
-            <a:off x="914400" y="1353312"/>
-            <a:ext cx="411480" cy="411480"/>
+            <a:off x="731520" y="1261872"/>
+            <a:ext cx="365760" cy="365760"/>
           </a:xfrm>
           <a:prstGeom prst="rect">
             <a:avLst/>
@@ -6800,7 +7779,7 @@
         </p:nvSpPr>
         <p:spPr>
           <a:xfrm>
-            <a:off x="1554480" y="1280160"/>
+            <a:off x="1371600" y="1188720"/>
             <a:ext cx="2743200" cy="320040"/>
           </a:xfrm>
           <a:prstGeom prst="rect">
@@ -6839,7 +7818,7 @@
         </p:nvSpPr>
         <p:spPr>
           <a:xfrm>
-            <a:off x="1554480" y="1572768"/>
+            <a:off x="1371600" y="1481328"/>
             <a:ext cx="6400800" cy="320040"/>
           </a:xfrm>
           <a:prstGeom prst="rect">
@@ -6886,8 +7865,8 @@
         </p:blipFill>
         <p:spPr>
           <a:xfrm>
-            <a:off x="914400" y="2084832"/>
-            <a:ext cx="411480" cy="411480"/>
+            <a:off x="731520" y="1947672"/>
+            <a:ext cx="365760" cy="365760"/>
           </a:xfrm>
           <a:prstGeom prst="rect">
             <a:avLst/>
@@ -6902,7 +7881,7 @@
         </p:nvSpPr>
         <p:spPr>
           <a:xfrm>
-            <a:off x="1554480" y="2011680"/>
+            <a:off x="1371600" y="1874520"/>
             <a:ext cx="2743200" cy="320040"/>
           </a:xfrm>
           <a:prstGeom prst="rect">
@@ -6927,7 +7906,7 @@
                 <a:ea typeface="Arial" pitchFamily="34" charset="-122"/>
                 <a:cs typeface="Arial" pitchFamily="34" charset="-120"/>
               </a:rPr>
-              <a:t>Push Promotion Access</a:t>
+              <a:t>Push Promotions</a:t>
             </a:r>
             <a:endParaRPr lang="en-US" sz="1400" dirty="0"/>
           </a:p>
@@ -6941,7 +7920,7 @@
         </p:nvSpPr>
         <p:spPr>
           <a:xfrm>
-            <a:off x="1554480" y="2304288"/>
+            <a:off x="1371600" y="2167128"/>
             <a:ext cx="6400800" cy="320040"/>
           </a:xfrm>
           <a:prstGeom prst="rect">
@@ -6966,7 +7945,7 @@
                 <a:ea typeface="Arial" pitchFamily="34" charset="-122"/>
                 <a:cs typeface="Arial" pitchFamily="34" charset="-120"/>
               </a:rPr>
-              <a:t>Request a featured promotion before game days or events</a:t>
+              <a:t>Featured deals pushed to every cardholder's phone</a:t>
             </a:r>
             <a:endParaRPr lang="en-US" sz="1200" dirty="0"/>
           </a:p>
@@ -6988,8 +7967,8 @@
         </p:blipFill>
         <p:spPr>
           <a:xfrm>
-            <a:off x="914400" y="2816352"/>
-            <a:ext cx="411480" cy="411480"/>
+            <a:off x="731520" y="2633472"/>
+            <a:ext cx="365760" cy="365760"/>
           </a:xfrm>
           <a:prstGeom prst="rect">
             <a:avLst/>
@@ -7004,7 +7983,7 @@
         </p:nvSpPr>
         <p:spPr>
           <a:xfrm>
-            <a:off x="1554480" y="2743200"/>
+            <a:off x="1371600" y="2560320"/>
             <a:ext cx="2743200" cy="320040"/>
           </a:xfrm>
           <a:prstGeom prst="rect">
@@ -7043,7 +8022,7 @@
         </p:nvSpPr>
         <p:spPr>
           <a:xfrm>
-            <a:off x="1554480" y="3035808"/>
+            <a:off x="1371600" y="2852928"/>
             <a:ext cx="6400800" cy="320040"/>
           </a:xfrm>
           <a:prstGeom prst="rect">
@@ -7068,7 +8047,7 @@
                 <a:ea typeface="Arial" pitchFamily="34" charset="-122"/>
                 <a:cs typeface="Arial" pitchFamily="34" charset="-120"/>
               </a:rPr>
-              <a:t>See exactly how many customers used the card at your business</a:t>
+              <a:t>See visits and unique customers on your own dashboard</a:t>
             </a:r>
             <a:endParaRPr lang="en-US" sz="1200" dirty="0"/>
           </a:p>
@@ -7090,8 +8069,8 @@
         </p:blipFill>
         <p:spPr>
           <a:xfrm>
-            <a:off x="914400" y="3547872"/>
-            <a:ext cx="411480" cy="411480"/>
+            <a:off x="731520" y="3319272"/>
+            <a:ext cx="365760" cy="365760"/>
           </a:xfrm>
           <a:prstGeom prst="rect">
             <a:avLst/>
@@ -7106,7 +8085,7 @@
         </p:nvSpPr>
         <p:spPr>
           <a:xfrm>
-            <a:off x="1554480" y="3474720"/>
+            <a:off x="1371600" y="3246120"/>
             <a:ext cx="2743200" cy="320040"/>
           </a:xfrm>
           <a:prstGeom prst="rect">
@@ -7145,7 +8124,7 @@
         </p:nvSpPr>
         <p:spPr>
           <a:xfrm>
-            <a:off x="1554480" y="3767328"/>
+            <a:off x="1371600" y="3538728"/>
             <a:ext cx="6400800" cy="320040"/>
           </a:xfrm>
           <a:prstGeom prst="rect">
@@ -7192,8 +8171,8 @@
         </p:blipFill>
         <p:spPr>
           <a:xfrm>
-            <a:off x="914400" y="4279392"/>
-            <a:ext cx="411480" cy="411480"/>
+            <a:off x="731520" y="4005072"/>
+            <a:ext cx="365760" cy="365760"/>
           </a:xfrm>
           <a:prstGeom prst="rect">
             <a:avLst/>
@@ -7208,7 +8187,7 @@
         </p:nvSpPr>
         <p:spPr>
           <a:xfrm>
-            <a:off x="1554480" y="4206240"/>
+            <a:off x="1371600" y="3931920"/>
             <a:ext cx="2743200" cy="320040"/>
           </a:xfrm>
           <a:prstGeom prst="rect">
@@ -7247,7 +8226,7 @@
         </p:nvSpPr>
         <p:spPr>
           <a:xfrm>
-            <a:off x="1554480" y="4498848"/>
+            <a:off x="1371600" y="4224528"/>
             <a:ext cx="6400800" cy="320040"/>
           </a:xfrm>
           <a:prstGeom prst="rect">
@@ -7286,9 +8265,9 @@
 </p:sld>
 </file>
 
-<file path=ppt/slides/slide8.xml><?xml version="1.0" encoding="utf-8"?>
+<file path=ppt/slides/slide9.xml><?xml version="1.0" encoding="utf-8"?>
 <p:sld xmlns:a="http://schemas.openxmlformats.org/drawingml/2006/main" xmlns:r="http://schemas.openxmlformats.org/officeDocument/2006/relationships" xmlns:p="http://schemas.openxmlformats.org/presentationml/2006/main">
-  <p:cSld name="Slide 8">
+  <p:cSld name="Slide 9">
     <p:bg>
       <p:bgPr>
         <a:solidFill>
@@ -7338,8 +8317,8 @@
         </p:nvSpPr>
         <p:spPr>
           <a:xfrm>
-            <a:off x="731520" y="365760"/>
-            <a:ext cx="8229600" cy="548640"/>
+            <a:off x="731520" y="320040"/>
+            <a:ext cx="8229600" cy="457200"/>
           </a:xfrm>
           <a:prstGeom prst="rect">
             <a:avLst/>
@@ -7363,7 +8342,7 @@
                 <a:ea typeface="Arial Black" pitchFamily="34" charset="-122"/>
                 <a:cs typeface="Arial Black" pitchFamily="34" charset="-120"/>
               </a:rPr>
-              <a:t>TRACKING &amp; REPORTING</a:t>
+              <a:t>YOUR OWN DASHBOARD</a:t>
             </a:r>
             <a:endParaRPr lang="en-US" sz="2400" dirty="0"/>
           </a:p>
@@ -7377,8 +8356,8 @@
         </p:nvSpPr>
         <p:spPr>
           <a:xfrm>
-            <a:off x="731520" y="1005840"/>
-            <a:ext cx="7680960" cy="365760"/>
+            <a:off x="731520" y="777240"/>
+            <a:ext cx="7315200" cy="274320"/>
           </a:xfrm>
           <a:prstGeom prst="rect">
             <a:avLst/>
@@ -7394,1544 +8373,43 @@
               <a:buNone/>
             </a:pPr>
             <a:r>
-              <a:rPr lang="en-US" sz="1500" dirty="0">
-                <a:solidFill>
-                  <a:srgbClr val="FFFFFF"/>
+              <a:rPr lang="en-US" sz="1300" dirty="0">
+                <a:solidFill>
+                  <a:srgbClr val="A0A0A0"/>
                 </a:solidFill>
                 <a:latin typeface="Arial" pitchFamily="34" charset="0"/>
                 <a:ea typeface="Arial" pitchFamily="34" charset="-122"/>
                 <a:cs typeface="Arial" pitchFamily="34" charset="-120"/>
               </a:rPr>
-              <a:t>Every QR code scan is logged with date and time.</a:t>
-            </a:r>
-            <a:endParaRPr lang="en-US" sz="1500" dirty="0"/>
-          </a:p>
-        </p:txBody>
-      </p:sp>
-      <p:sp>
-        <p:nvSpPr>
-          <p:cNvPr id="5" name="Shape 3"/>
-          <p:cNvSpPr/>
-          <p:nvPr/>
-        </p:nvSpPr>
-        <p:spPr>
-          <a:xfrm>
-            <a:off x="731520" y="1645920"/>
-            <a:ext cx="2468880" cy="1828800"/>
-          </a:xfrm>
-          <a:prstGeom prst="rect">
-            <a:avLst/>
-          </a:prstGeom>
-          <a:solidFill>
-            <a:srgbClr val="0A1A35"/>
-          </a:solidFill>
-          <a:ln/>
-          <a:effectLst>
-            <a:outerShdw sx="100000" sy="100000" kx="0" ky="0" algn="bl" rotWithShape="0" blurRad="101600" dist="38100" dir="8100000">
-              <a:srgbClr val="000000">
-                <a:alpha val="20000"/>
-              </a:srgbClr>
-            </a:outerShdw>
-          </a:effectLst>
-        </p:spPr>
-      </p:sp>
-      <p:sp>
-        <p:nvSpPr>
-          <p:cNvPr id="6" name="Shape 4"/>
-          <p:cNvSpPr/>
-          <p:nvPr/>
-        </p:nvSpPr>
-        <p:spPr>
-          <a:xfrm>
-            <a:off x="731520" y="1645920"/>
-            <a:ext cx="2468880" cy="54864"/>
-          </a:xfrm>
-          <a:prstGeom prst="rect">
-            <a:avLst/>
-          </a:prstGeom>
-          <a:solidFill>
-            <a:srgbClr val="C5A55A"/>
-          </a:solidFill>
-          <a:ln/>
-        </p:spPr>
-      </p:sp>
-      <p:sp>
-        <p:nvSpPr>
-          <p:cNvPr id="7" name="Text 5"/>
-          <p:cNvSpPr/>
-          <p:nvPr/>
-        </p:nvSpPr>
-        <p:spPr>
-          <a:xfrm>
-            <a:off x="731520" y="1828800"/>
-            <a:ext cx="2468880" cy="914400"/>
-          </a:xfrm>
-          <a:prstGeom prst="rect">
-            <a:avLst/>
-          </a:prstGeom>
-          <a:noFill/>
-          <a:ln/>
-        </p:spPr>
-        <p:txBody>
-          <a:bodyPr wrap="square" lIns="0" tIns="0" rIns="0" bIns="0" rtlCol="0" anchor="ctr"/>
-          <a:lstStyle/>
-          <a:p>
-            <a:pPr algn="ctr" indent="0" marL="0">
-              <a:buNone/>
-            </a:pPr>
-            <a:r>
-              <a:rPr lang="en-US" sz="2000" b="1" dirty="0">
-                <a:solidFill>
-                  <a:srgbClr val="C5A55A"/>
-                </a:solidFill>
-                <a:latin typeface="Arial Black" pitchFamily="34" charset="0"/>
-                <a:ea typeface="Arial Black" pitchFamily="34" charset="-122"/>
-                <a:cs typeface="Arial Black" pitchFamily="34" charset="-120"/>
-              </a:rPr>
-              <a:t>Total Visits</a:t>
-            </a:r>
-            <a:endParaRPr lang="en-US" sz="2000" dirty="0"/>
-          </a:p>
-        </p:txBody>
-      </p:sp>
-      <p:sp>
-        <p:nvSpPr>
-          <p:cNvPr id="8" name="Text 6"/>
-          <p:cNvSpPr/>
-          <p:nvPr/>
-        </p:nvSpPr>
-        <p:spPr>
-          <a:xfrm>
-            <a:off x="731520" y="2743200"/>
-            <a:ext cx="2468880" cy="457200"/>
-          </a:xfrm>
-          <a:prstGeom prst="rect">
-            <a:avLst/>
-          </a:prstGeom>
-          <a:noFill/>
-          <a:ln/>
-        </p:spPr>
-        <p:txBody>
-          <a:bodyPr wrap="square" lIns="0" tIns="0" rIns="0" bIns="0" rtlCol="0" anchor="ctr"/>
-          <a:lstStyle/>
-          <a:p>
-            <a:pPr algn="ctr" indent="0" marL="0">
-              <a:buNone/>
-            </a:pPr>
-            <a:r>
-              <a:rPr lang="en-US" sz="1200" dirty="0">
-                <a:solidFill>
-                  <a:srgbClr val="A0A0A0"/>
-                </a:solidFill>
-                <a:latin typeface="Arial" pitchFamily="34" charset="0"/>
-                <a:ea typeface="Arial" pitchFamily="34" charset="-122"/>
-                <a:cs typeface="Arial" pitchFamily="34" charset="-120"/>
-              </a:rPr>
-              <a:t>From cardholders</a:t>
-            </a:r>
-            <a:endParaRPr lang="en-US" sz="1200" dirty="0"/>
-          </a:p>
-        </p:txBody>
-      </p:sp>
-      <p:sp>
-        <p:nvSpPr>
-          <p:cNvPr id="9" name="Shape 7"/>
-          <p:cNvSpPr/>
-          <p:nvPr/>
-        </p:nvSpPr>
-        <p:spPr>
-          <a:xfrm>
-            <a:off x="3474720" y="1645920"/>
-            <a:ext cx="2468880" cy="1828800"/>
-          </a:xfrm>
-          <a:prstGeom prst="rect">
-            <a:avLst/>
-          </a:prstGeom>
-          <a:solidFill>
-            <a:srgbClr val="0A1A35"/>
-          </a:solidFill>
-          <a:ln/>
-          <a:effectLst>
-            <a:outerShdw sx="100000" sy="100000" kx="0" ky="0" algn="bl" rotWithShape="0" blurRad="101600" dist="38100" dir="8100000">
-              <a:srgbClr val="000000">
-                <a:alpha val="20000"/>
-              </a:srgbClr>
-            </a:outerShdw>
-          </a:effectLst>
-        </p:spPr>
-      </p:sp>
-      <p:sp>
-        <p:nvSpPr>
-          <p:cNvPr id="10" name="Shape 8"/>
-          <p:cNvSpPr/>
-          <p:nvPr/>
-        </p:nvSpPr>
-        <p:spPr>
-          <a:xfrm>
-            <a:off x="3474720" y="1645920"/>
-            <a:ext cx="2468880" cy="54864"/>
-          </a:xfrm>
-          <a:prstGeom prst="rect">
-            <a:avLst/>
-          </a:prstGeom>
-          <a:solidFill>
-            <a:srgbClr val="C5A55A"/>
-          </a:solidFill>
-          <a:ln/>
-        </p:spPr>
-      </p:sp>
-      <p:sp>
-        <p:nvSpPr>
-          <p:cNvPr id="11" name="Text 9"/>
-          <p:cNvSpPr/>
-          <p:nvPr/>
-        </p:nvSpPr>
-        <p:spPr>
-          <a:xfrm>
-            <a:off x="3474720" y="1828800"/>
-            <a:ext cx="2468880" cy="914400"/>
-          </a:xfrm>
-          <a:prstGeom prst="rect">
-            <a:avLst/>
-          </a:prstGeom>
-          <a:noFill/>
-          <a:ln/>
-        </p:spPr>
-        <p:txBody>
-          <a:bodyPr wrap="square" lIns="0" tIns="0" rIns="0" bIns="0" rtlCol="0" anchor="ctr"/>
-          <a:lstStyle/>
-          <a:p>
-            <a:pPr algn="ctr" indent="0" marL="0">
-              <a:buNone/>
-            </a:pPr>
-            <a:r>
-              <a:rPr lang="en-US" sz="2000" b="1" dirty="0">
-                <a:solidFill>
-                  <a:srgbClr val="C5A55A"/>
-                </a:solidFill>
-                <a:latin typeface="Arial Black" pitchFamily="34" charset="0"/>
-                <a:ea typeface="Arial Black" pitchFamily="34" charset="-122"/>
-                <a:cs typeface="Arial Black" pitchFamily="34" charset="-120"/>
-              </a:rPr>
-              <a:t>Unique</a:t>
-            </a:r>
-            <a:endParaRPr lang="en-US" sz="2000" dirty="0"/>
-          </a:p>
-          <a:p>
-            <a:pPr algn="ctr" indent="0" marL="0">
-              <a:buNone/>
-            </a:pPr>
-            <a:r>
-              <a:rPr lang="en-US" sz="2000" b="1" dirty="0">
-                <a:solidFill>
-                  <a:srgbClr val="C5A55A"/>
-                </a:solidFill>
-                <a:latin typeface="Arial Black" pitchFamily="34" charset="0"/>
-                <a:ea typeface="Arial Black" pitchFamily="34" charset="-122"/>
-                <a:cs typeface="Arial Black" pitchFamily="34" charset="-120"/>
-              </a:rPr>
-              <a:t>Customers</a:t>
-            </a:r>
-            <a:endParaRPr lang="en-US" sz="2000" dirty="0"/>
-          </a:p>
-        </p:txBody>
-      </p:sp>
-      <p:sp>
-        <p:nvSpPr>
-          <p:cNvPr id="12" name="Text 10"/>
-          <p:cNvSpPr/>
-          <p:nvPr/>
-        </p:nvSpPr>
-        <p:spPr>
-          <a:xfrm>
-            <a:off x="3474720" y="2743200"/>
-            <a:ext cx="2468880" cy="457200"/>
-          </a:xfrm>
-          <a:prstGeom prst="rect">
-            <a:avLst/>
-          </a:prstGeom>
-          <a:noFill/>
-          <a:ln/>
-        </p:spPr>
-        <p:txBody>
-          <a:bodyPr wrap="square" lIns="0" tIns="0" rIns="0" bIns="0" rtlCol="0" anchor="ctr"/>
-          <a:lstStyle/>
-          <a:p>
-            <a:pPr algn="ctr" indent="0" marL="0">
-              <a:buNone/>
-            </a:pPr>
-            <a:r>
-              <a:rPr lang="en-US" sz="1200" dirty="0">
-                <a:solidFill>
-                  <a:srgbClr val="A0A0A0"/>
-                </a:solidFill>
-                <a:latin typeface="Arial" pitchFamily="34" charset="0"/>
-                <a:ea typeface="Arial" pitchFamily="34" charset="-122"/>
-                <a:cs typeface="Arial" pitchFamily="34" charset="-120"/>
-              </a:rPr>
-              <a:t>Individual card IDs</a:t>
-            </a:r>
-            <a:endParaRPr lang="en-US" sz="1200" dirty="0"/>
-          </a:p>
-        </p:txBody>
-      </p:sp>
-      <p:sp>
-        <p:nvSpPr>
-          <p:cNvPr id="13" name="Shape 11"/>
-          <p:cNvSpPr/>
-          <p:nvPr/>
-        </p:nvSpPr>
-        <p:spPr>
-          <a:xfrm>
-            <a:off x="6217920" y="1645920"/>
-            <a:ext cx="2468880" cy="1828800"/>
-          </a:xfrm>
-          <a:prstGeom prst="rect">
-            <a:avLst/>
-          </a:prstGeom>
-          <a:solidFill>
-            <a:srgbClr val="0A1A35"/>
-          </a:solidFill>
-          <a:ln/>
-          <a:effectLst>
-            <a:outerShdw sx="100000" sy="100000" kx="0" ky="0" algn="bl" rotWithShape="0" blurRad="101600" dist="38100" dir="8100000">
-              <a:srgbClr val="000000">
-                <a:alpha val="20000"/>
-              </a:srgbClr>
-            </a:outerShdw>
-          </a:effectLst>
-        </p:spPr>
-      </p:sp>
-      <p:sp>
-        <p:nvSpPr>
-          <p:cNvPr id="14" name="Shape 12"/>
-          <p:cNvSpPr/>
-          <p:nvPr/>
-        </p:nvSpPr>
-        <p:spPr>
-          <a:xfrm>
-            <a:off x="6217920" y="1645920"/>
-            <a:ext cx="2468880" cy="54864"/>
-          </a:xfrm>
-          <a:prstGeom prst="rect">
-            <a:avLst/>
-          </a:prstGeom>
-          <a:solidFill>
-            <a:srgbClr val="C5A55A"/>
-          </a:solidFill>
-          <a:ln/>
-        </p:spPr>
-      </p:sp>
-      <p:sp>
-        <p:nvSpPr>
-          <p:cNvPr id="15" name="Text 13"/>
-          <p:cNvSpPr/>
-          <p:nvPr/>
-        </p:nvSpPr>
-        <p:spPr>
-          <a:xfrm>
-            <a:off x="6217920" y="1828800"/>
-            <a:ext cx="2468880" cy="914400"/>
-          </a:xfrm>
-          <a:prstGeom prst="rect">
-            <a:avLst/>
-          </a:prstGeom>
-          <a:noFill/>
-          <a:ln/>
-        </p:spPr>
-        <p:txBody>
-          <a:bodyPr wrap="square" lIns="0" tIns="0" rIns="0" bIns="0" rtlCol="0" anchor="ctr"/>
-          <a:lstStyle/>
-          <a:p>
-            <a:pPr algn="ctr" indent="0" marL="0">
-              <a:buNone/>
-            </a:pPr>
-            <a:r>
-              <a:rPr lang="en-US" sz="2000" b="1" dirty="0">
-                <a:solidFill>
-                  <a:srgbClr val="C5A55A"/>
-                </a:solidFill>
-                <a:latin typeface="Arial Black" pitchFamily="34" charset="0"/>
-                <a:ea typeface="Arial Black" pitchFamily="34" charset="-122"/>
-                <a:cs typeface="Arial Black" pitchFamily="34" charset="-120"/>
-              </a:rPr>
-              <a:t>Busiest</a:t>
-            </a:r>
-            <a:endParaRPr lang="en-US" sz="2000" dirty="0"/>
-          </a:p>
-          <a:p>
-            <a:pPr algn="ctr" indent="0" marL="0">
-              <a:buNone/>
-            </a:pPr>
-            <a:r>
-              <a:rPr lang="en-US" sz="2000" b="1" dirty="0">
-                <a:solidFill>
-                  <a:srgbClr val="C5A55A"/>
-                </a:solidFill>
-                <a:latin typeface="Arial Black" pitchFamily="34" charset="0"/>
-                <a:ea typeface="Arial Black" pitchFamily="34" charset="-122"/>
-                <a:cs typeface="Arial Black" pitchFamily="34" charset="-120"/>
-              </a:rPr>
-              <a:t>Days</a:t>
-            </a:r>
-            <a:endParaRPr lang="en-US" sz="2000" dirty="0"/>
-          </a:p>
-        </p:txBody>
-      </p:sp>
-      <p:sp>
-        <p:nvSpPr>
-          <p:cNvPr id="16" name="Text 14"/>
-          <p:cNvSpPr/>
-          <p:nvPr/>
-        </p:nvSpPr>
-        <p:spPr>
-          <a:xfrm>
-            <a:off x="6217920" y="2743200"/>
-            <a:ext cx="2468880" cy="457200"/>
-          </a:xfrm>
-          <a:prstGeom prst="rect">
-            <a:avLst/>
-          </a:prstGeom>
-          <a:noFill/>
-          <a:ln/>
-        </p:spPr>
-        <p:txBody>
-          <a:bodyPr wrap="square" lIns="0" tIns="0" rIns="0" bIns="0" rtlCol="0" anchor="ctr"/>
-          <a:lstStyle/>
-          <a:p>
-            <a:pPr algn="ctr" indent="0" marL="0">
-              <a:buNone/>
-            </a:pPr>
-            <a:r>
-              <a:rPr lang="en-US" sz="1200" dirty="0">
-                <a:solidFill>
-                  <a:srgbClr val="A0A0A0"/>
-                </a:solidFill>
-                <a:latin typeface="Arial" pitchFamily="34" charset="0"/>
-                <a:ea typeface="Arial" pitchFamily="34" charset="-122"/>
-                <a:cs typeface="Arial" pitchFamily="34" charset="-120"/>
-              </a:rPr>
-              <a:t>Peak traffic times</a:t>
-            </a:r>
-            <a:endParaRPr lang="en-US" sz="1200" dirty="0"/>
-          </a:p>
-        </p:txBody>
-      </p:sp>
-      <p:sp>
-        <p:nvSpPr>
-          <p:cNvPr id="17" name="Text 15"/>
-          <p:cNvSpPr/>
-          <p:nvPr/>
-        </p:nvSpPr>
-        <p:spPr>
-          <a:xfrm>
-            <a:off x="731520" y="3931920"/>
-            <a:ext cx="7680960" cy="457200"/>
-          </a:xfrm>
-          <a:prstGeom prst="rect">
-            <a:avLst/>
-          </a:prstGeom>
-          <a:noFill/>
-          <a:ln/>
-        </p:spPr>
-        <p:txBody>
-          <a:bodyPr wrap="square" lIns="0" tIns="0" rIns="0" bIns="0" rtlCol="0" anchor="ctr"/>
-          <a:lstStyle/>
-          <a:p>
-            <a:pPr indent="0" marL="0">
-              <a:buNone/>
-            </a:pPr>
-            <a:r>
-              <a:rPr lang="en-US" sz="1400" i="1" dirty="0">
-                <a:solidFill>
-                  <a:srgbClr val="D4B96A"/>
-                </a:solidFill>
-                <a:latin typeface="Arial" pitchFamily="34" charset="0"/>
-                <a:ea typeface="Arial" pitchFamily="34" charset="-122"/>
-                <a:cs typeface="Arial" pitchFamily="34" charset="-120"/>
-              </a:rPr>
-              <a:t>Use this data to measure ROI and plan future promotions.</a:t>
-            </a:r>
-            <a:endParaRPr lang="en-US" sz="1400" dirty="0"/>
-          </a:p>
-        </p:txBody>
-      </p:sp>
-    </p:spTree>
-  </p:cSld>
-  <p:clrMapOvr>
-    <a:masterClrMapping/>
-  </p:clrMapOvr>
-</p:sld>
-</file>
-
-<file path=ppt/slides/slide9.xml><?xml version="1.0" encoding="utf-8"?>
-<p:sld xmlns:a="http://schemas.openxmlformats.org/drawingml/2006/main" xmlns:r="http://schemas.openxmlformats.org/officeDocument/2006/relationships" xmlns:p="http://schemas.openxmlformats.org/presentationml/2006/main">
-  <p:cSld name="Slide 9">
-    <p:bg>
-      <p:bgPr>
-        <a:solidFill>
-          <a:srgbClr val="FFFFFF"/>
-        </a:solidFill>
-      </p:bgPr>
-    </p:bg>
-    <p:spTree>
-      <p:nvGrpSpPr>
-        <p:cNvPr id="1" name=""/>
-        <p:cNvGrpSpPr/>
-        <p:nvPr/>
-      </p:nvGrpSpPr>
-      <p:grpSpPr>
-        <a:xfrm>
-          <a:off x="0" y="0"/>
-          <a:ext cx="0" cy="0"/>
-          <a:chOff x="0" y="0"/>
-          <a:chExt cx="0" cy="0"/>
-        </a:xfrm>
-      </p:grpSpPr>
-      <p:sp>
-        <p:nvSpPr>
-          <p:cNvPr id="2" name="Shape 0"/>
-          <p:cNvSpPr/>
-          <p:nvPr/>
-        </p:nvSpPr>
-        <p:spPr>
-          <a:xfrm>
-            <a:off x="0" y="0"/>
-            <a:ext cx="9144000" cy="1005840"/>
-          </a:xfrm>
-          <a:prstGeom prst="rect">
-            <a:avLst/>
-          </a:prstGeom>
-          <a:solidFill>
-            <a:srgbClr val="002D62"/>
-          </a:solidFill>
-          <a:ln/>
-        </p:spPr>
-      </p:sp>
-      <p:sp>
-        <p:nvSpPr>
-          <p:cNvPr id="3" name="Text 1"/>
-          <p:cNvSpPr/>
-          <p:nvPr/>
-        </p:nvSpPr>
-        <p:spPr>
-          <a:xfrm>
-            <a:off x="731520" y="228600"/>
-            <a:ext cx="7315200" cy="548640"/>
-          </a:xfrm>
-          <a:prstGeom prst="rect">
-            <a:avLst/>
-          </a:prstGeom>
-          <a:noFill/>
-          <a:ln/>
-        </p:spPr>
-        <p:txBody>
-          <a:bodyPr wrap="square" lIns="0" tIns="0" rIns="0" bIns="0" rtlCol="0" anchor="ctr"/>
-          <a:lstStyle/>
-          <a:p>
-            <a:pPr indent="0" marL="0">
-              <a:buNone/>
-            </a:pPr>
-            <a:r>
-              <a:rPr lang="en-US" sz="2800" b="1" dirty="0">
-                <a:solidFill>
-                  <a:srgbClr val="C5A55A"/>
-                </a:solidFill>
-                <a:latin typeface="Arial Black" pitchFamily="34" charset="0"/>
-                <a:ea typeface="Arial Black" pitchFamily="34" charset="-122"/>
-                <a:cs typeface="Arial Black" pitchFamily="34" charset="-120"/>
-              </a:rPr>
-              <a:t>CURRENT SPONSORS (2026-2027)</a:t>
-            </a:r>
-            <a:endParaRPr lang="en-US" sz="2800" dirty="0"/>
-          </a:p>
-        </p:txBody>
-      </p:sp>
-      <p:sp>
-        <p:nvSpPr>
-          <p:cNvPr id="4" name="Shape 2"/>
-          <p:cNvSpPr/>
-          <p:nvPr/>
-        </p:nvSpPr>
-        <p:spPr>
-          <a:xfrm>
-            <a:off x="731520" y="1280160"/>
-            <a:ext cx="2468880" cy="640080"/>
-          </a:xfrm>
-          <a:prstGeom prst="rect">
-            <a:avLst/>
-          </a:prstGeom>
-          <a:solidFill>
-            <a:srgbClr val="F5F0E6"/>
-          </a:solidFill>
-          <a:ln/>
-          <a:effectLst>
-            <a:outerShdw sx="100000" sy="100000" kx="0" ky="0" algn="bl" rotWithShape="0" blurRad="101600" dist="38100" dir="8100000">
-              <a:srgbClr val="000000">
-                <a:alpha val="20000"/>
-              </a:srgbClr>
-            </a:outerShdw>
-          </a:effectLst>
-        </p:spPr>
-      </p:sp>
-      <p:sp>
-        <p:nvSpPr>
-          <p:cNvPr id="5" name="Shape 3"/>
-          <p:cNvSpPr/>
-          <p:nvPr/>
-        </p:nvSpPr>
-        <p:spPr>
-          <a:xfrm>
-            <a:off x="731520" y="1280160"/>
-            <a:ext cx="54864" cy="640080"/>
-          </a:xfrm>
-          <a:prstGeom prst="rect">
-            <a:avLst/>
-          </a:prstGeom>
-          <a:solidFill>
-            <a:srgbClr val="C5A55A"/>
-          </a:solidFill>
-          <a:ln/>
-        </p:spPr>
-      </p:sp>
-      <p:sp>
-        <p:nvSpPr>
-          <p:cNvPr id="6" name="Text 4"/>
-          <p:cNvSpPr/>
-          <p:nvPr/>
-        </p:nvSpPr>
+              <a:t>Each sponsor gets a private login to view their analytics.</a:t>
+            </a:r>
+            <a:endParaRPr lang="en-US" sz="1300" dirty="0"/>
+          </a:p>
+        </p:txBody>
+      </p:sp>
+      <p:pic>
+        <p:nvPicPr>
+          <p:cNvPr id="5" name="Image 0" descr="preencoded.png">    </p:cNvPr>
+          <p:cNvPicPr>
+            <a:picLocks noChangeAspect="1"/>
+          </p:cNvPicPr>
+          <p:nvPr/>
+        </p:nvPicPr>
+        <p:blipFill>
+          <a:blip r:embed="rId1"/>
+          <a:srcRect l="0" r="0" t="0" b="0"/>
+          <a:stretch/>
+        </p:blipFill>
         <p:spPr>
           <a:xfrm>
             <a:off x="914400" y="1280160"/>
-            <a:ext cx="2103120" cy="640080"/>
-          </a:xfrm>
-          <a:prstGeom prst="rect">
-            <a:avLst/>
-          </a:prstGeom>
-          <a:noFill/>
-          <a:ln/>
-        </p:spPr>
-        <p:txBody>
-          <a:bodyPr wrap="square" lIns="0" tIns="0" rIns="0" bIns="0" rtlCol="0" anchor="ctr"/>
-          <a:lstStyle/>
-          <a:p>
-            <a:pPr indent="0" marL="0">
-              <a:buNone/>
-            </a:pPr>
-            <a:r>
-              <a:rPr lang="en-US" sz="1300" b="1" dirty="0">
-                <a:solidFill>
-                  <a:srgbClr val="002D62"/>
-                </a:solidFill>
-                <a:latin typeface="Arial" pitchFamily="34" charset="0"/>
-                <a:ea typeface="Arial" pitchFamily="34" charset="-122"/>
-                <a:cs typeface="Arial" pitchFamily="34" charset="-120"/>
-              </a:rPr>
-              <a:t>Baskin Robbins</a:t>
-            </a:r>
-            <a:endParaRPr lang="en-US" sz="1300" dirty="0"/>
-          </a:p>
-        </p:txBody>
-      </p:sp>
-      <p:sp>
-        <p:nvSpPr>
-          <p:cNvPr id="7" name="Shape 5"/>
-          <p:cNvSpPr/>
-          <p:nvPr/>
-        </p:nvSpPr>
-        <p:spPr>
-          <a:xfrm>
-            <a:off x="3474720" y="1280160"/>
-            <a:ext cx="2468880" cy="640080"/>
-          </a:xfrm>
-          <a:prstGeom prst="rect">
-            <a:avLst/>
-          </a:prstGeom>
-          <a:solidFill>
-            <a:srgbClr val="F5F0E6"/>
-          </a:solidFill>
-          <a:ln/>
-          <a:effectLst>
-            <a:outerShdw sx="100000" sy="100000" kx="0" ky="0" algn="bl" rotWithShape="0" blurRad="101600" dist="38100" dir="8100000">
-              <a:srgbClr val="000000">
-                <a:alpha val="20000"/>
-              </a:srgbClr>
-            </a:outerShdw>
-          </a:effectLst>
-        </p:spPr>
-      </p:sp>
-      <p:sp>
-        <p:nvSpPr>
-          <p:cNvPr id="8" name="Shape 6"/>
-          <p:cNvSpPr/>
-          <p:nvPr/>
-        </p:nvSpPr>
-        <p:spPr>
-          <a:xfrm>
-            <a:off x="3474720" y="1280160"/>
-            <a:ext cx="54864" cy="640080"/>
-          </a:xfrm>
-          <a:prstGeom prst="rect">
-            <a:avLst/>
-          </a:prstGeom>
-          <a:solidFill>
-            <a:srgbClr val="C5A55A"/>
-          </a:solidFill>
-          <a:ln/>
-        </p:spPr>
-      </p:sp>
-      <p:sp>
-        <p:nvSpPr>
-          <p:cNvPr id="9" name="Text 7"/>
-          <p:cNvSpPr/>
-          <p:nvPr/>
-        </p:nvSpPr>
-        <p:spPr>
-          <a:xfrm>
-            <a:off x="3657600" y="1280160"/>
-            <a:ext cx="2103120" cy="640080"/>
-          </a:xfrm>
-          <a:prstGeom prst="rect">
-            <a:avLst/>
-          </a:prstGeom>
-          <a:noFill/>
-          <a:ln/>
-        </p:spPr>
-        <p:txBody>
-          <a:bodyPr wrap="square" lIns="0" tIns="0" rIns="0" bIns="0" rtlCol="0" anchor="ctr"/>
-          <a:lstStyle/>
-          <a:p>
-            <a:pPr indent="0" marL="0">
-              <a:buNone/>
-            </a:pPr>
-            <a:r>
-              <a:rPr lang="en-US" sz="1300" b="1" dirty="0">
-                <a:solidFill>
-                  <a:srgbClr val="002D62"/>
-                </a:solidFill>
-                <a:latin typeface="Arial" pitchFamily="34" charset="0"/>
-                <a:ea typeface="Arial" pitchFamily="34" charset="-122"/>
-                <a:cs typeface="Arial" pitchFamily="34" charset="-120"/>
-              </a:rPr>
-              <a:t>Harland Brewing</a:t>
-            </a:r>
-            <a:endParaRPr lang="en-US" sz="1300" dirty="0"/>
-          </a:p>
-        </p:txBody>
-      </p:sp>
-      <p:sp>
-        <p:nvSpPr>
-          <p:cNvPr id="10" name="Shape 8"/>
-          <p:cNvSpPr/>
-          <p:nvPr/>
-        </p:nvSpPr>
-        <p:spPr>
-          <a:xfrm>
-            <a:off x="6217920" y="1280160"/>
-            <a:ext cx="2468880" cy="640080"/>
-          </a:xfrm>
-          <a:prstGeom prst="rect">
-            <a:avLst/>
-          </a:prstGeom>
-          <a:solidFill>
-            <a:srgbClr val="F5F0E6"/>
-          </a:solidFill>
-          <a:ln/>
-          <a:effectLst>
-            <a:outerShdw sx="100000" sy="100000" kx="0" ky="0" algn="bl" rotWithShape="0" blurRad="101600" dist="38100" dir="8100000">
-              <a:srgbClr val="000000">
-                <a:alpha val="20000"/>
-              </a:srgbClr>
-            </a:outerShdw>
-          </a:effectLst>
-        </p:spPr>
-      </p:sp>
-      <p:sp>
-        <p:nvSpPr>
-          <p:cNvPr id="11" name="Shape 9"/>
-          <p:cNvSpPr/>
-          <p:nvPr/>
-        </p:nvSpPr>
-        <p:spPr>
-          <a:xfrm>
-            <a:off x="6217920" y="1280160"/>
-            <a:ext cx="54864" cy="640080"/>
-          </a:xfrm>
-          <a:prstGeom prst="rect">
-            <a:avLst/>
-          </a:prstGeom>
-          <a:solidFill>
-            <a:srgbClr val="C5A55A"/>
-          </a:solidFill>
-          <a:ln/>
-        </p:spPr>
-      </p:sp>
-      <p:sp>
-        <p:nvSpPr>
-          <p:cNvPr id="12" name="Text 10"/>
-          <p:cNvSpPr/>
-          <p:nvPr/>
-        </p:nvSpPr>
-        <p:spPr>
-          <a:xfrm>
-            <a:off x="6400800" y="1280160"/>
-            <a:ext cx="2103120" cy="640080"/>
-          </a:xfrm>
-          <a:prstGeom prst="rect">
-            <a:avLst/>
-          </a:prstGeom>
-          <a:noFill/>
-          <a:ln/>
-        </p:spPr>
-        <p:txBody>
-          <a:bodyPr wrap="square" lIns="0" tIns="0" rIns="0" bIns="0" rtlCol="0" anchor="ctr"/>
-          <a:lstStyle/>
-          <a:p>
-            <a:pPr indent="0" marL="0">
-              <a:buNone/>
-            </a:pPr>
-            <a:r>
-              <a:rPr lang="en-US" sz="1300" b="1" dirty="0">
-                <a:solidFill>
-                  <a:srgbClr val="002D62"/>
-                </a:solidFill>
-                <a:latin typeface="Arial" pitchFamily="34" charset="0"/>
-                <a:ea typeface="Arial" pitchFamily="34" charset="-122"/>
-                <a:cs typeface="Arial" pitchFamily="34" charset="-120"/>
-              </a:rPr>
-              <a:t>Board &amp; Brew</a:t>
-            </a:r>
-            <a:endParaRPr lang="en-US" sz="1300" dirty="0"/>
-          </a:p>
-        </p:txBody>
-      </p:sp>
-      <p:sp>
-        <p:nvSpPr>
-          <p:cNvPr id="13" name="Shape 11"/>
-          <p:cNvSpPr/>
-          <p:nvPr/>
-        </p:nvSpPr>
-        <p:spPr>
-          <a:xfrm>
-            <a:off x="731520" y="2103120"/>
-            <a:ext cx="2468880" cy="640080"/>
-          </a:xfrm>
-          <a:prstGeom prst="rect">
-            <a:avLst/>
-          </a:prstGeom>
-          <a:solidFill>
-            <a:srgbClr val="F5F0E6"/>
-          </a:solidFill>
-          <a:ln/>
-          <a:effectLst>
-            <a:outerShdw sx="100000" sy="100000" kx="0" ky="0" algn="bl" rotWithShape="0" blurRad="101600" dist="38100" dir="8100000">
-              <a:srgbClr val="000000">
-                <a:alpha val="20000"/>
-              </a:srgbClr>
-            </a:outerShdw>
-          </a:effectLst>
-        </p:spPr>
-      </p:sp>
-      <p:sp>
-        <p:nvSpPr>
-          <p:cNvPr id="14" name="Shape 12"/>
-          <p:cNvSpPr/>
-          <p:nvPr/>
-        </p:nvSpPr>
-        <p:spPr>
-          <a:xfrm>
-            <a:off x="731520" y="2103120"/>
-            <a:ext cx="54864" cy="640080"/>
-          </a:xfrm>
-          <a:prstGeom prst="rect">
-            <a:avLst/>
-          </a:prstGeom>
-          <a:solidFill>
-            <a:srgbClr val="C5A55A"/>
-          </a:solidFill>
-          <a:ln/>
-        </p:spPr>
-      </p:sp>
-      <p:sp>
-        <p:nvSpPr>
-          <p:cNvPr id="15" name="Text 13"/>
-          <p:cNvSpPr/>
-          <p:nvPr/>
-        </p:nvSpPr>
-        <p:spPr>
-          <a:xfrm>
-            <a:off x="914400" y="2103120"/>
-            <a:ext cx="2103120" cy="640080"/>
-          </a:xfrm>
-          <a:prstGeom prst="rect">
-            <a:avLst/>
-          </a:prstGeom>
-          <a:noFill/>
-          <a:ln/>
-        </p:spPr>
-        <p:txBody>
-          <a:bodyPr wrap="square" lIns="0" tIns="0" rIns="0" bIns="0" rtlCol="0" anchor="ctr"/>
-          <a:lstStyle/>
-          <a:p>
-            <a:pPr indent="0" marL="0">
-              <a:buNone/>
-            </a:pPr>
-            <a:r>
-              <a:rPr lang="en-US" sz="1300" b="1" dirty="0">
-                <a:solidFill>
-                  <a:srgbClr val="002D62"/>
-                </a:solidFill>
-                <a:latin typeface="Arial" pitchFamily="34" charset="0"/>
-                <a:ea typeface="Arial" pitchFamily="34" charset="-122"/>
-                <a:cs typeface="Arial" pitchFamily="34" charset="-120"/>
-              </a:rPr>
-              <a:t>L&amp;L Hawaiian Barbecue</a:t>
-            </a:r>
-            <a:endParaRPr lang="en-US" sz="1300" dirty="0"/>
-          </a:p>
-        </p:txBody>
-      </p:sp>
-      <p:sp>
-        <p:nvSpPr>
-          <p:cNvPr id="16" name="Shape 14"/>
-          <p:cNvSpPr/>
-          <p:nvPr/>
-        </p:nvSpPr>
-        <p:spPr>
-          <a:xfrm>
-            <a:off x="3474720" y="2103120"/>
-            <a:ext cx="2468880" cy="640080"/>
-          </a:xfrm>
-          <a:prstGeom prst="rect">
-            <a:avLst/>
-          </a:prstGeom>
-          <a:solidFill>
-            <a:srgbClr val="F5F0E6"/>
-          </a:solidFill>
-          <a:ln/>
-          <a:effectLst>
-            <a:outerShdw sx="100000" sy="100000" kx="0" ky="0" algn="bl" rotWithShape="0" blurRad="101600" dist="38100" dir="8100000">
-              <a:srgbClr val="000000">
-                <a:alpha val="20000"/>
-              </a:srgbClr>
-            </a:outerShdw>
-          </a:effectLst>
-        </p:spPr>
-      </p:sp>
-      <p:sp>
-        <p:nvSpPr>
-          <p:cNvPr id="17" name="Shape 15"/>
-          <p:cNvSpPr/>
-          <p:nvPr/>
-        </p:nvSpPr>
-        <p:spPr>
-          <a:xfrm>
-            <a:off x="3474720" y="2103120"/>
-            <a:ext cx="54864" cy="640080"/>
-          </a:xfrm>
-          <a:prstGeom prst="rect">
-            <a:avLst/>
-          </a:prstGeom>
-          <a:solidFill>
-            <a:srgbClr val="C5A55A"/>
-          </a:solidFill>
-          <a:ln/>
-        </p:spPr>
-      </p:sp>
-      <p:sp>
-        <p:nvSpPr>
-          <p:cNvPr id="18" name="Text 16"/>
-          <p:cNvSpPr/>
-          <p:nvPr/>
-        </p:nvSpPr>
-        <p:spPr>
-          <a:xfrm>
-            <a:off x="3657600" y="2103120"/>
-            <a:ext cx="2103120" cy="640080"/>
-          </a:xfrm>
-          <a:prstGeom prst="rect">
-            <a:avLst/>
-          </a:prstGeom>
-          <a:noFill/>
-          <a:ln/>
-        </p:spPr>
-        <p:txBody>
-          <a:bodyPr wrap="square" lIns="0" tIns="0" rIns="0" bIns="0" rtlCol="0" anchor="ctr"/>
-          <a:lstStyle/>
-          <a:p>
-            <a:pPr indent="0" marL="0">
-              <a:buNone/>
-            </a:pPr>
-            <a:r>
-              <a:rPr lang="en-US" sz="1300" b="1" dirty="0">
-                <a:solidFill>
-                  <a:srgbClr val="002D62"/>
-                </a:solidFill>
-                <a:latin typeface="Arial" pitchFamily="34" charset="0"/>
-                <a:ea typeface="Arial" pitchFamily="34" charset="-122"/>
-                <a:cs typeface="Arial" pitchFamily="34" charset="-120"/>
-              </a:rPr>
-              <a:t>Kahoots</a:t>
-            </a:r>
-            <a:endParaRPr lang="en-US" sz="1300" dirty="0"/>
-          </a:p>
-        </p:txBody>
-      </p:sp>
-      <p:sp>
-        <p:nvSpPr>
-          <p:cNvPr id="19" name="Shape 17"/>
-          <p:cNvSpPr/>
-          <p:nvPr/>
-        </p:nvSpPr>
-        <p:spPr>
-          <a:xfrm>
-            <a:off x="6217920" y="2103120"/>
-            <a:ext cx="2468880" cy="640080"/>
-          </a:xfrm>
-          <a:prstGeom prst="rect">
-            <a:avLst/>
-          </a:prstGeom>
-          <a:solidFill>
-            <a:srgbClr val="F5F0E6"/>
-          </a:solidFill>
-          <a:ln/>
-          <a:effectLst>
-            <a:outerShdw sx="100000" sy="100000" kx="0" ky="0" algn="bl" rotWithShape="0" blurRad="101600" dist="38100" dir="8100000">
-              <a:srgbClr val="000000">
-                <a:alpha val="20000"/>
-              </a:srgbClr>
-            </a:outerShdw>
-          </a:effectLst>
-        </p:spPr>
-      </p:sp>
-      <p:sp>
-        <p:nvSpPr>
-          <p:cNvPr id="20" name="Shape 18"/>
-          <p:cNvSpPr/>
-          <p:nvPr/>
-        </p:nvSpPr>
-        <p:spPr>
-          <a:xfrm>
-            <a:off x="6217920" y="2103120"/>
-            <a:ext cx="54864" cy="640080"/>
-          </a:xfrm>
-          <a:prstGeom prst="rect">
-            <a:avLst/>
-          </a:prstGeom>
-          <a:solidFill>
-            <a:srgbClr val="C5A55A"/>
-          </a:solidFill>
-          <a:ln/>
-        </p:spPr>
-      </p:sp>
-      <p:sp>
-        <p:nvSpPr>
-          <p:cNvPr id="21" name="Text 19"/>
-          <p:cNvSpPr/>
-          <p:nvPr/>
-        </p:nvSpPr>
-        <p:spPr>
-          <a:xfrm>
-            <a:off x="6400800" y="2103120"/>
-            <a:ext cx="2103120" cy="640080"/>
-          </a:xfrm>
-          <a:prstGeom prst="rect">
-            <a:avLst/>
-          </a:prstGeom>
-          <a:noFill/>
-          <a:ln/>
-        </p:spPr>
-        <p:txBody>
-          <a:bodyPr wrap="square" lIns="0" tIns="0" rIns="0" bIns="0" rtlCol="0" anchor="ctr"/>
-          <a:lstStyle/>
-          <a:p>
-            <a:pPr indent="0" marL="0">
-              <a:buNone/>
-            </a:pPr>
-            <a:r>
-              <a:rPr lang="en-US" sz="1300" b="1" dirty="0">
-                <a:solidFill>
-                  <a:srgbClr val="002D62"/>
-                </a:solidFill>
-                <a:latin typeface="Arial" pitchFamily="34" charset="0"/>
-                <a:ea typeface="Arial" pitchFamily="34" charset="-122"/>
-                <a:cs typeface="Arial" pitchFamily="34" charset="-120"/>
-              </a:rPr>
-              <a:t>Mostra Coffee</a:t>
-            </a:r>
-            <a:endParaRPr lang="en-US" sz="1300" dirty="0"/>
-          </a:p>
-        </p:txBody>
-      </p:sp>
-      <p:sp>
-        <p:nvSpPr>
-          <p:cNvPr id="22" name="Shape 20"/>
-          <p:cNvSpPr/>
-          <p:nvPr/>
-        </p:nvSpPr>
-        <p:spPr>
-          <a:xfrm>
-            <a:off x="731520" y="2926080"/>
-            <a:ext cx="2468880" cy="640080"/>
-          </a:xfrm>
-          <a:prstGeom prst="rect">
-            <a:avLst/>
-          </a:prstGeom>
-          <a:solidFill>
-            <a:srgbClr val="F5F0E6"/>
-          </a:solidFill>
-          <a:ln/>
-          <a:effectLst>
-            <a:outerShdw sx="100000" sy="100000" kx="0" ky="0" algn="bl" rotWithShape="0" blurRad="101600" dist="38100" dir="8100000">
-              <a:srgbClr val="000000">
-                <a:alpha val="20000"/>
-              </a:srgbClr>
-            </a:outerShdw>
-          </a:effectLst>
-        </p:spPr>
-      </p:sp>
-      <p:sp>
-        <p:nvSpPr>
-          <p:cNvPr id="23" name="Shape 21"/>
-          <p:cNvSpPr/>
-          <p:nvPr/>
-        </p:nvSpPr>
-        <p:spPr>
-          <a:xfrm>
-            <a:off x="731520" y="2926080"/>
-            <a:ext cx="54864" cy="640080"/>
-          </a:xfrm>
-          <a:prstGeom prst="rect">
-            <a:avLst/>
-          </a:prstGeom>
-          <a:solidFill>
-            <a:srgbClr val="C5A55A"/>
-          </a:solidFill>
-          <a:ln/>
-        </p:spPr>
-      </p:sp>
-      <p:sp>
-        <p:nvSpPr>
-          <p:cNvPr id="24" name="Text 22"/>
-          <p:cNvSpPr/>
-          <p:nvPr/>
-        </p:nvSpPr>
-        <p:spPr>
-          <a:xfrm>
-            <a:off x="914400" y="2926080"/>
-            <a:ext cx="2103120" cy="640080"/>
-          </a:xfrm>
-          <a:prstGeom prst="rect">
-            <a:avLst/>
-          </a:prstGeom>
-          <a:noFill/>
-          <a:ln/>
-        </p:spPr>
-        <p:txBody>
-          <a:bodyPr wrap="square" lIns="0" tIns="0" rIns="0" bIns="0" rtlCol="0" anchor="ctr"/>
-          <a:lstStyle/>
-          <a:p>
-            <a:pPr indent="0" marL="0">
-              <a:buNone/>
-            </a:pPr>
-            <a:r>
-              <a:rPr lang="en-US" sz="1300" b="1" dirty="0">
-                <a:solidFill>
-                  <a:srgbClr val="002D62"/>
-                </a:solidFill>
-                <a:latin typeface="Arial" pitchFamily="34" charset="0"/>
-                <a:ea typeface="Arial" pitchFamily="34" charset="-122"/>
-                <a:cs typeface="Arial" pitchFamily="34" charset="-120"/>
-              </a:rPr>
-              <a:t>Rosinas</a:t>
-            </a:r>
-            <a:endParaRPr lang="en-US" sz="1300" dirty="0"/>
-          </a:p>
-        </p:txBody>
-      </p:sp>
-      <p:sp>
-        <p:nvSpPr>
-          <p:cNvPr id="25" name="Shape 23"/>
-          <p:cNvSpPr/>
-          <p:nvPr/>
-        </p:nvSpPr>
-        <p:spPr>
-          <a:xfrm>
-            <a:off x="3474720" y="2926080"/>
-            <a:ext cx="2468880" cy="640080"/>
-          </a:xfrm>
-          <a:prstGeom prst="rect">
-            <a:avLst/>
-          </a:prstGeom>
-          <a:solidFill>
-            <a:srgbClr val="F5F0E6"/>
-          </a:solidFill>
-          <a:ln/>
-          <a:effectLst>
-            <a:outerShdw sx="100000" sy="100000" kx="0" ky="0" algn="bl" rotWithShape="0" blurRad="101600" dist="38100" dir="8100000">
-              <a:srgbClr val="000000">
-                <a:alpha val="20000"/>
-              </a:srgbClr>
-            </a:outerShdw>
-          </a:effectLst>
-        </p:spPr>
-      </p:sp>
-      <p:sp>
-        <p:nvSpPr>
-          <p:cNvPr id="26" name="Shape 24"/>
-          <p:cNvSpPr/>
-          <p:nvPr/>
-        </p:nvSpPr>
-        <p:spPr>
-          <a:xfrm>
-            <a:off x="3474720" y="2926080"/>
-            <a:ext cx="54864" cy="640080"/>
-          </a:xfrm>
-          <a:prstGeom prst="rect">
-            <a:avLst/>
-          </a:prstGeom>
-          <a:solidFill>
-            <a:srgbClr val="C5A55A"/>
-          </a:solidFill>
-          <a:ln/>
-        </p:spPr>
-      </p:sp>
-      <p:sp>
-        <p:nvSpPr>
-          <p:cNvPr id="27" name="Text 25"/>
-          <p:cNvSpPr/>
-          <p:nvPr/>
-        </p:nvSpPr>
-        <p:spPr>
-          <a:xfrm>
-            <a:off x="3657600" y="2926080"/>
-            <a:ext cx="2103120" cy="640080"/>
-          </a:xfrm>
-          <a:prstGeom prst="rect">
-            <a:avLst/>
-          </a:prstGeom>
-          <a:noFill/>
-          <a:ln/>
-        </p:spPr>
-        <p:txBody>
-          <a:bodyPr wrap="square" lIns="0" tIns="0" rIns="0" bIns="0" rtlCol="0" anchor="ctr"/>
-          <a:lstStyle/>
-          <a:p>
-            <a:pPr indent="0" marL="0">
-              <a:buNone/>
-            </a:pPr>
-            <a:r>
-              <a:rPr lang="en-US" sz="1300" b="1" dirty="0">
-                <a:solidFill>
-                  <a:srgbClr val="002D62"/>
-                </a:solidFill>
-                <a:latin typeface="Arial" pitchFamily="34" charset="0"/>
-                <a:ea typeface="Arial" pitchFamily="34" charset="-122"/>
-                <a:cs typeface="Arial" pitchFamily="34" charset="-120"/>
-              </a:rPr>
-              <a:t>Donut Touch</a:t>
-            </a:r>
-            <a:endParaRPr lang="en-US" sz="1300" dirty="0"/>
-          </a:p>
-        </p:txBody>
-      </p:sp>
-      <p:sp>
-        <p:nvSpPr>
-          <p:cNvPr id="28" name="Shape 26"/>
-          <p:cNvSpPr/>
-          <p:nvPr/>
-        </p:nvSpPr>
-        <p:spPr>
-          <a:xfrm>
-            <a:off x="6217920" y="2926080"/>
-            <a:ext cx="2468880" cy="640080"/>
-          </a:xfrm>
-          <a:prstGeom prst="rect">
-            <a:avLst/>
-          </a:prstGeom>
-          <a:solidFill>
-            <a:srgbClr val="F5F0E6"/>
-          </a:solidFill>
-          <a:ln/>
-          <a:effectLst>
-            <a:outerShdw sx="100000" sy="100000" kx="0" ky="0" algn="bl" rotWithShape="0" blurRad="101600" dist="38100" dir="8100000">
-              <a:srgbClr val="000000">
-                <a:alpha val="20000"/>
-              </a:srgbClr>
-            </a:outerShdw>
-          </a:effectLst>
-        </p:spPr>
-      </p:sp>
-      <p:sp>
-        <p:nvSpPr>
-          <p:cNvPr id="29" name="Shape 27"/>
-          <p:cNvSpPr/>
-          <p:nvPr/>
-        </p:nvSpPr>
-        <p:spPr>
-          <a:xfrm>
-            <a:off x="6217920" y="2926080"/>
-            <a:ext cx="54864" cy="640080"/>
-          </a:xfrm>
-          <a:prstGeom prst="rect">
-            <a:avLst/>
-          </a:prstGeom>
-          <a:solidFill>
-            <a:srgbClr val="C5A55A"/>
-          </a:solidFill>
-          <a:ln/>
-        </p:spPr>
-      </p:sp>
-      <p:sp>
-        <p:nvSpPr>
-          <p:cNvPr id="30" name="Text 28"/>
-          <p:cNvSpPr/>
-          <p:nvPr/>
-        </p:nvSpPr>
-        <p:spPr>
-          <a:xfrm>
-            <a:off x="6400800" y="2926080"/>
-            <a:ext cx="2103120" cy="640080"/>
-          </a:xfrm>
-          <a:prstGeom prst="rect">
-            <a:avLst/>
-          </a:prstGeom>
-          <a:noFill/>
-          <a:ln/>
-        </p:spPr>
-        <p:txBody>
-          <a:bodyPr wrap="square" lIns="0" tIns="0" rIns="0" bIns="0" rtlCol="0" anchor="ctr"/>
-          <a:lstStyle/>
-          <a:p>
-            <a:pPr indent="0" marL="0">
-              <a:buNone/>
-            </a:pPr>
-            <a:r>
-              <a:rPr lang="en-US" sz="1300" b="1" dirty="0">
-                <a:solidFill>
-                  <a:srgbClr val="002D62"/>
-                </a:solidFill>
-                <a:latin typeface="Arial" pitchFamily="34" charset="0"/>
-                <a:ea typeface="Arial" pitchFamily="34" charset="-122"/>
-                <a:cs typeface="Arial" pitchFamily="34" charset="-120"/>
-              </a:rPr>
-              <a:t>Sushi Ken</a:t>
-            </a:r>
-            <a:endParaRPr lang="en-US" sz="1300" dirty="0"/>
-          </a:p>
-        </p:txBody>
-      </p:sp>
-      <p:sp>
-        <p:nvSpPr>
-          <p:cNvPr id="31" name="Shape 29"/>
-          <p:cNvSpPr/>
-          <p:nvPr/>
-        </p:nvSpPr>
-        <p:spPr>
-          <a:xfrm>
-            <a:off x="731520" y="3749040"/>
-            <a:ext cx="2468880" cy="640080"/>
-          </a:xfrm>
-          <a:prstGeom prst="rect">
-            <a:avLst/>
-          </a:prstGeom>
-          <a:solidFill>
-            <a:srgbClr val="F5F0E6"/>
-          </a:solidFill>
-          <a:ln/>
-          <a:effectLst>
-            <a:outerShdw sx="100000" sy="100000" kx="0" ky="0" algn="bl" rotWithShape="0" blurRad="101600" dist="38100" dir="8100000">
-              <a:srgbClr val="000000">
-                <a:alpha val="20000"/>
-              </a:srgbClr>
-            </a:outerShdw>
-          </a:effectLst>
-        </p:spPr>
-      </p:sp>
-      <p:sp>
-        <p:nvSpPr>
-          <p:cNvPr id="32" name="Shape 30"/>
-          <p:cNvSpPr/>
-          <p:nvPr/>
-        </p:nvSpPr>
-        <p:spPr>
-          <a:xfrm>
-            <a:off x="731520" y="3749040"/>
-            <a:ext cx="54864" cy="640080"/>
-          </a:xfrm>
-          <a:prstGeom prst="rect">
-            <a:avLst/>
-          </a:prstGeom>
-          <a:solidFill>
-            <a:srgbClr val="C5A55A"/>
-          </a:solidFill>
-          <a:ln/>
-        </p:spPr>
-      </p:sp>
-      <p:sp>
-        <p:nvSpPr>
-          <p:cNvPr id="33" name="Text 31"/>
-          <p:cNvSpPr/>
-          <p:nvPr/>
-        </p:nvSpPr>
-        <p:spPr>
-          <a:xfrm>
-            <a:off x="914400" y="3749040"/>
-            <a:ext cx="2103120" cy="640080"/>
-          </a:xfrm>
-          <a:prstGeom prst="rect">
-            <a:avLst/>
-          </a:prstGeom>
-          <a:noFill/>
-          <a:ln/>
-        </p:spPr>
-        <p:txBody>
-          <a:bodyPr wrap="square" lIns="0" tIns="0" rIns="0" bIns="0" rtlCol="0" anchor="ctr"/>
-          <a:lstStyle/>
-          <a:p>
-            <a:pPr indent="0" marL="0">
-              <a:buNone/>
-            </a:pPr>
-            <a:r>
-              <a:rPr lang="en-US" sz="1300" b="1" dirty="0">
-                <a:solidFill>
-                  <a:srgbClr val="002D62"/>
-                </a:solidFill>
-                <a:latin typeface="Arial" pitchFamily="34" charset="0"/>
-                <a:ea typeface="Arial" pitchFamily="34" charset="-122"/>
-                <a:cs typeface="Arial" pitchFamily="34" charset="-120"/>
-              </a:rPr>
-              <a:t>Flippin Pizza</a:t>
-            </a:r>
-            <a:endParaRPr lang="en-US" sz="1300" dirty="0"/>
-          </a:p>
-        </p:txBody>
-      </p:sp>
-      <p:sp>
-        <p:nvSpPr>
-          <p:cNvPr id="34" name="Shape 32"/>
-          <p:cNvSpPr/>
-          <p:nvPr/>
-        </p:nvSpPr>
-        <p:spPr>
-          <a:xfrm>
-            <a:off x="3474720" y="3749040"/>
-            <a:ext cx="2468880" cy="640080"/>
-          </a:xfrm>
-          <a:prstGeom prst="rect">
-            <a:avLst/>
-          </a:prstGeom>
-          <a:solidFill>
-            <a:srgbClr val="F5F0E6"/>
-          </a:solidFill>
-          <a:ln/>
-          <a:effectLst>
-            <a:outerShdw sx="100000" sy="100000" kx="0" ky="0" algn="bl" rotWithShape="0" blurRad="101600" dist="38100" dir="8100000">
-              <a:srgbClr val="000000">
-                <a:alpha val="20000"/>
-              </a:srgbClr>
-            </a:outerShdw>
-          </a:effectLst>
-        </p:spPr>
-      </p:sp>
-      <p:sp>
-        <p:nvSpPr>
-          <p:cNvPr id="35" name="Shape 33"/>
-          <p:cNvSpPr/>
-          <p:nvPr/>
-        </p:nvSpPr>
-        <p:spPr>
-          <a:xfrm>
-            <a:off x="3474720" y="3749040"/>
-            <a:ext cx="54864" cy="640080"/>
-          </a:xfrm>
-          <a:prstGeom prst="rect">
-            <a:avLst/>
-          </a:prstGeom>
-          <a:solidFill>
-            <a:srgbClr val="C5A55A"/>
-          </a:solidFill>
-          <a:ln/>
-        </p:spPr>
-      </p:sp>
-      <p:sp>
-        <p:nvSpPr>
-          <p:cNvPr id="36" name="Text 34"/>
-          <p:cNvSpPr/>
-          <p:nvPr/>
-        </p:nvSpPr>
-        <p:spPr>
-          <a:xfrm>
-            <a:off x="3657600" y="3749040"/>
-            <a:ext cx="2103120" cy="640080"/>
-          </a:xfrm>
-          <a:prstGeom prst="rect">
-            <a:avLst/>
-          </a:prstGeom>
-          <a:noFill/>
-          <a:ln/>
-        </p:spPr>
-        <p:txBody>
-          <a:bodyPr wrap="square" lIns="0" tIns="0" rIns="0" bIns="0" rtlCol="0" anchor="ctr"/>
-          <a:lstStyle/>
-          <a:p>
-            <a:pPr indent="0" marL="0">
-              <a:buNone/>
-            </a:pPr>
-            <a:r>
-              <a:rPr lang="en-US" sz="1300" b="1" dirty="0">
-                <a:solidFill>
-                  <a:srgbClr val="002D62"/>
-                </a:solidFill>
-                <a:latin typeface="Arial" pitchFamily="34" charset="0"/>
-                <a:ea typeface="Arial" pitchFamily="34" charset="-122"/>
-                <a:cs typeface="Arial" pitchFamily="34" charset="-120"/>
-              </a:rPr>
-              <a:t>Round Table Pizza</a:t>
-            </a:r>
-            <a:endParaRPr lang="en-US" sz="1300" dirty="0"/>
-          </a:p>
-        </p:txBody>
-      </p:sp>
-      <p:sp>
-        <p:nvSpPr>
-          <p:cNvPr id="37" name="Text 35"/>
-          <p:cNvSpPr/>
-          <p:nvPr/>
-        </p:nvSpPr>
-        <p:spPr>
-          <a:xfrm>
-            <a:off x="731520" y="4572000"/>
-            <a:ext cx="7680960" cy="365760"/>
-          </a:xfrm>
-          <a:prstGeom prst="rect">
-            <a:avLst/>
-          </a:prstGeom>
-          <a:noFill/>
-          <a:ln/>
-        </p:spPr>
-        <p:txBody>
-          <a:bodyPr wrap="square" lIns="0" tIns="0" rIns="0" bIns="0" rtlCol="0" anchor="ctr"/>
-          <a:lstStyle/>
-          <a:p>
-            <a:pPr indent="0" marL="0">
-              <a:buNone/>
-            </a:pPr>
-            <a:r>
-              <a:rPr lang="en-US" sz="1300" i="1" dirty="0">
-                <a:solidFill>
-                  <a:srgbClr val="888888"/>
-                </a:solidFill>
-                <a:latin typeface="Arial" pitchFamily="34" charset="0"/>
-                <a:ea typeface="Arial" pitchFamily="34" charset="-122"/>
-                <a:cs typeface="Arial" pitchFamily="34" charset="-120"/>
-              </a:rPr>
-              <a:t>Join them and put your business in front of the entire Nighthawk community.</a:t>
-            </a:r>
-            <a:endParaRPr lang="en-US" sz="1300" dirty="0"/>
-          </a:p>
-        </p:txBody>
-      </p:sp>
+            <a:ext cx="7315200" cy="3474720"/>
+          </a:xfrm>
+          <a:prstGeom prst="rect">
+            <a:avLst/>
+          </a:prstGeom>
+        </p:spPr>
+      </p:pic>
     </p:spTree>
   </p:cSld>
   <p:clrMapOvr>

--- a/pitch/Del-Norte-Nighthawk-Sponsor-Pitch.pptx
+++ b/pitch/Del-Norte-Nighthawk-Sponsor-Pitch.pptx
@@ -1973,14 +1973,13 @@
         </p:nvPicPr>
         <p:blipFill>
           <a:blip r:embed="rId1"/>
-          <a:stretch>
-            <a:fillRect/>
-          </a:stretch>
+          <a:srcRect l="0" r="0" t="0" b="0"/>
+          <a:stretch/>
         </p:blipFill>
         <p:spPr>
           <a:xfrm>
-            <a:off x="7772400" y="548640"/>
-            <a:ext cx="914400" cy="914400"/>
+            <a:off x="6858000" y="274320"/>
+            <a:ext cx="2011680" cy="1188720"/>
           </a:xfrm>
           <a:prstGeom prst="rect">
             <a:avLst/>
@@ -4840,14 +4839,13 @@
         </p:nvPicPr>
         <p:blipFill>
           <a:blip r:embed="rId1"/>
-          <a:stretch>
-            <a:fillRect/>
-          </a:stretch>
+          <a:srcRect l="0" r="0" t="0" b="0"/>
+          <a:stretch/>
         </p:blipFill>
         <p:spPr>
           <a:xfrm>
-            <a:off x="4023360" y="731520"/>
-            <a:ext cx="1097280" cy="1097280"/>
+            <a:off x="3200400" y="365760"/>
+            <a:ext cx="2743200" cy="1645920"/>
           </a:xfrm>
           <a:prstGeom prst="rect">
             <a:avLst/>

--- a/pitch/Del-Norte-Nighthawk-Sponsor-Pitch.pptx
+++ b/pitch/Del-Norte-Nighthawk-Sponsor-Pitch.pptx
@@ -3099,7 +3099,7 @@
                 <a:ea typeface="Arial" pitchFamily="34" charset="-122"/>
                 <a:cs typeface="Arial" pitchFamily="34" charset="-120"/>
               </a:rPr>
-              <a:t>Sushi Ken</a:t>
+              <a:t>Sushi Ren</a:t>
             </a:r>
             <a:endParaRPr lang="en-US" sz="1300" dirty="0"/>
           </a:p>

--- a/pitch/Del-Norte-Nighthawk-Sponsor-Pitch.pptx
+++ b/pitch/Del-Norte-Nighthawk-Sponsor-Pitch.pptx
@@ -18,9 +18,11 @@
     <p:sldId id="266" r:id="rId12"/>
     <p:sldId id="267" r:id="rId13"/>
     <p:sldId id="268" r:id="rId14"/>
+    <p:sldId id="269" r:id="rId15"/>
+    <p:sldId id="270" r:id="rId16"/>
   </p:sldIdLst>
   <p:notesMasterIdLst>
-    <p:notesMasterId r:id="rId15"/>
+    <p:notesMasterId r:id="rId17"/>
   </p:notesMasterIdLst>
   <p:sldSz cx="9144000" cy="5143500"/>
   <p:notesSz cx="5143500" cy="9144000"/>
@@ -908,6 +910,182 @@
 </p:notes>
 </file>
 
+<file path=ppt/notesSlides/notesSlide14.xml><?xml version="1.0" encoding="utf-8"?>
+<p:notes xmlns:a="http://schemas.openxmlformats.org/drawingml/2006/main" xmlns:r="http://schemas.openxmlformats.org/officeDocument/2006/relationships" xmlns:p="http://schemas.openxmlformats.org/presentationml/2006/main">
+  <p:cSld>
+    <p:spTree>
+      <p:nvGrpSpPr>
+        <p:cNvPr id="1" name=""/>
+        <p:cNvGrpSpPr/>
+        <p:nvPr/>
+      </p:nvGrpSpPr>
+      <p:grpSpPr>
+        <a:xfrm>
+          <a:off x="0" y="0"/>
+          <a:ext cx="0" cy="0"/>
+          <a:chOff x="0" y="0"/>
+          <a:chExt cx="0" cy="0"/>
+        </a:xfrm>
+      </p:grpSpPr>
+      <p:sp>
+        <p:nvSpPr>
+          <p:cNvPr id="2" name="Slide Image Placeholder 1"/>
+          <p:cNvSpPr>
+            <a:spLocks noGrp="1" noRot="1" noChangeAspect="1"/>
+          </p:cNvSpPr>
+          <p:nvPr>
+            <p:ph type="sldImg"/>
+          </p:nvPr>
+        </p:nvSpPr>
+        <p:spPr/>
+      </p:sp>
+      <p:sp>
+        <p:nvSpPr>
+          <p:cNvPr id="3" name="Notes Placeholder 2"/>
+          <p:cNvSpPr>
+            <a:spLocks noGrp="1"/>
+          </p:cNvSpPr>
+          <p:nvPr>
+            <p:ph type="body" idx="1"/>
+          </p:nvPr>
+        </p:nvSpPr>
+        <p:spPr/>
+        <p:txBody>
+          <a:bodyPr/>
+          <a:lstStyle/>
+          <a:p>
+            <a:r>
+              <a:rPr lang="en-US" dirty="0"/>
+              <a:t/>
+            </a:r>
+            <a:endParaRPr lang="en-US" dirty="0"/>
+          </a:p>
+        </p:txBody>
+      </p:sp>
+      <p:sp>
+        <p:nvSpPr>
+          <p:cNvPr id="4" name="Slide Number Placeholder 3"/>
+          <p:cNvSpPr>
+            <a:spLocks noGrp="1"/>
+          </p:cNvSpPr>
+          <p:nvPr>
+            <p:ph type="sldNum" sz="quarter" idx="10"/>
+          </p:nvPr>
+        </p:nvSpPr>
+        <p:spPr/>
+        <p:txBody>
+          <a:bodyPr/>
+          <a:lstStyle/>
+          <a:p>
+            <a:fld id="{F7021451-1387-4CA6-816F-3879F97B5CBC}" type="slidenum">
+              <a:rPr lang="en-US"/>
+              <a:t>14</a:t>
+            </a:fld>
+            <a:endParaRPr lang="en-US"/>
+          </a:p>
+        </p:txBody>
+      </p:sp>
+    </p:spTree>
+    <p:extLst>
+      <p:ext uri="{BB962C8B-B14F-4D97-AF65-F5344CB8AC3E}">
+        <p14:creationId xmlns:p14="http://schemas.microsoft.com/office/powerpoint/2010/main" val="1024086991"/>
+      </p:ext>
+    </p:extLst>
+  </p:cSld>
+  <p:clrMapOvr>
+    <a:masterClrMapping/>
+  </p:clrMapOvr>
+</p:notes>
+</file>
+
+<file path=ppt/notesSlides/notesSlide15.xml><?xml version="1.0" encoding="utf-8"?>
+<p:notes xmlns:a="http://schemas.openxmlformats.org/drawingml/2006/main" xmlns:r="http://schemas.openxmlformats.org/officeDocument/2006/relationships" xmlns:p="http://schemas.openxmlformats.org/presentationml/2006/main">
+  <p:cSld>
+    <p:spTree>
+      <p:nvGrpSpPr>
+        <p:cNvPr id="1" name=""/>
+        <p:cNvGrpSpPr/>
+        <p:nvPr/>
+      </p:nvGrpSpPr>
+      <p:grpSpPr>
+        <a:xfrm>
+          <a:off x="0" y="0"/>
+          <a:ext cx="0" cy="0"/>
+          <a:chOff x="0" y="0"/>
+          <a:chExt cx="0" cy="0"/>
+        </a:xfrm>
+      </p:grpSpPr>
+      <p:sp>
+        <p:nvSpPr>
+          <p:cNvPr id="2" name="Slide Image Placeholder 1"/>
+          <p:cNvSpPr>
+            <a:spLocks noGrp="1" noRot="1" noChangeAspect="1"/>
+          </p:cNvSpPr>
+          <p:nvPr>
+            <p:ph type="sldImg"/>
+          </p:nvPr>
+        </p:nvSpPr>
+        <p:spPr/>
+      </p:sp>
+      <p:sp>
+        <p:nvSpPr>
+          <p:cNvPr id="3" name="Notes Placeholder 2"/>
+          <p:cNvSpPr>
+            <a:spLocks noGrp="1"/>
+          </p:cNvSpPr>
+          <p:nvPr>
+            <p:ph type="body" idx="1"/>
+          </p:nvPr>
+        </p:nvSpPr>
+        <p:spPr/>
+        <p:txBody>
+          <a:bodyPr/>
+          <a:lstStyle/>
+          <a:p>
+            <a:r>
+              <a:rPr lang="en-US" dirty="0"/>
+              <a:t/>
+            </a:r>
+            <a:endParaRPr lang="en-US" dirty="0"/>
+          </a:p>
+        </p:txBody>
+      </p:sp>
+      <p:sp>
+        <p:nvSpPr>
+          <p:cNvPr id="4" name="Slide Number Placeholder 3"/>
+          <p:cNvSpPr>
+            <a:spLocks noGrp="1"/>
+          </p:cNvSpPr>
+          <p:nvPr>
+            <p:ph type="sldNum" sz="quarter" idx="10"/>
+          </p:nvPr>
+        </p:nvSpPr>
+        <p:spPr/>
+        <p:txBody>
+          <a:bodyPr/>
+          <a:lstStyle/>
+          <a:p>
+            <a:fld id="{F7021451-1387-4CA6-816F-3879F97B5CBC}" type="slidenum">
+              <a:rPr lang="en-US"/>
+              <a:t>15</a:t>
+            </a:fld>
+            <a:endParaRPr lang="en-US"/>
+          </a:p>
+        </p:txBody>
+      </p:sp>
+    </p:spTree>
+    <p:extLst>
+      <p:ext uri="{BB962C8B-B14F-4D97-AF65-F5344CB8AC3E}">
+        <p14:creationId xmlns:p14="http://schemas.microsoft.com/office/powerpoint/2010/main" val="1024086991"/>
+      </p:ext>
+    </p:extLst>
+  </p:cSld>
+  <p:clrMapOvr>
+    <a:masterClrMapping/>
+  </p:clrMapOvr>
+</p:notes>
+</file>
+
 <file path=ppt/notesSlides/notesSlide2.xml><?xml version="1.0" encoding="utf-8"?>
 <p:notes xmlns:a="http://schemas.openxmlformats.org/drawingml/2006/main" xmlns:r="http://schemas.openxmlformats.org/officeDocument/2006/relationships" xmlns:p="http://schemas.openxmlformats.org/presentationml/2006/main">
   <p:cSld>
@@ -2254,7 +2432,7 @@
     <p:bg>
       <p:bgPr>
         <a:solidFill>
-          <a:srgbClr val="FFFFFF"/>
+          <a:srgbClr val="001A3A"/>
         </a:solidFill>
       </p:bgPr>
     </p:bg>
@@ -2281,13 +2459,13 @@
         <p:spPr>
           <a:xfrm>
             <a:off x="0" y="0"/>
-            <a:ext cx="9144000" cy="1005840"/>
-          </a:xfrm>
-          <a:prstGeom prst="rect">
-            <a:avLst/>
-          </a:prstGeom>
-          <a:solidFill>
-            <a:srgbClr val="002D62"/>
+            <a:ext cx="9144000" cy="54864"/>
+          </a:xfrm>
+          <a:prstGeom prst="rect">
+            <a:avLst/>
+          </a:prstGeom>
+          <a:solidFill>
+            <a:srgbClr val="C5A55A"/>
           </a:solidFill>
           <a:ln/>
         </p:spPr>
@@ -2300,8 +2478,8 @@
         </p:nvSpPr>
         <p:spPr>
           <a:xfrm>
-            <a:off x="731520" y="228600"/>
-            <a:ext cx="7315200" cy="548640"/>
+            <a:off x="731520" y="320040"/>
+            <a:ext cx="8229600" cy="457200"/>
           </a:xfrm>
           <a:prstGeom prst="rect">
             <a:avLst/>
@@ -2317,7 +2495,7 @@
               <a:buNone/>
             </a:pPr>
             <a:r>
-              <a:rPr lang="en-US" sz="2800" b="1" dirty="0">
+              <a:rPr lang="en-US" sz="2400" b="1" dirty="0">
                 <a:solidFill>
                   <a:srgbClr val="C5A55A"/>
                 </a:solidFill>
@@ -2325,9 +2503,9 @@
                 <a:ea typeface="Arial Black" pitchFamily="34" charset="-122"/>
                 <a:cs typeface="Arial Black" pitchFamily="34" charset="-120"/>
               </a:rPr>
-              <a:t>CURRENT SPONSORS (2026-2027)</a:t>
-            </a:r>
-            <a:endParaRPr lang="en-US" sz="2800" dirty="0"/>
+              <a:t>SECURE &amp; PRIVATE</a:t>
+            </a:r>
+            <a:endParaRPr lang="en-US" sz="2400" dirty="0"/>
           </a:p>
         </p:txBody>
       </p:sp>
@@ -2339,23 +2517,16 @@
         </p:nvSpPr>
         <p:spPr>
           <a:xfrm>
-            <a:off x="731520" y="1280160"/>
-            <a:ext cx="2468880" cy="640080"/>
-          </a:xfrm>
-          <a:prstGeom prst="rect">
-            <a:avLst/>
-          </a:prstGeom>
-          <a:solidFill>
-            <a:srgbClr val="F5F0E6"/>
-          </a:solidFill>
-          <a:ln/>
-          <a:effectLst>
-            <a:outerShdw sx="100000" sy="100000" kx="0" ky="0" algn="bl" rotWithShape="0" blurRad="101600" dist="38100" dir="8100000">
-              <a:srgbClr val="000000">
-                <a:alpha val="20000"/>
-              </a:srgbClr>
-            </a:outerShdw>
-          </a:effectLst>
+            <a:off x="548640" y="914400"/>
+            <a:ext cx="8046720" cy="530352"/>
+          </a:xfrm>
+          <a:prstGeom prst="rect">
+            <a:avLst/>
+          </a:prstGeom>
+          <a:solidFill>
+            <a:srgbClr val="0A1A35"/>
+          </a:solidFill>
+          <a:ln/>
         </p:spPr>
       </p:sp>
       <p:sp>
@@ -2366,8 +2537,8 @@
         </p:nvSpPr>
         <p:spPr>
           <a:xfrm>
-            <a:off x="731520" y="1280160"/>
-            <a:ext cx="54864" cy="640080"/>
+            <a:off x="548640" y="914400"/>
+            <a:ext cx="64008" cy="530352"/>
           </a:xfrm>
           <a:prstGeom prst="rect">
             <a:avLst/>
@@ -2386,8 +2557,8 @@
         </p:nvSpPr>
         <p:spPr>
           <a:xfrm>
-            <a:off x="914400" y="1280160"/>
-            <a:ext cx="2103120" cy="640080"/>
+            <a:off x="822960" y="914400"/>
+            <a:ext cx="2743200" cy="530352"/>
           </a:xfrm>
           <a:prstGeom prst="rect">
             <a:avLst/>
@@ -2403,77 +2574,30 @@
               <a:buNone/>
             </a:pPr>
             <a:r>
-              <a:rPr lang="en-US" sz="1300" b="1" dirty="0">
-                <a:solidFill>
-                  <a:srgbClr val="002D62"/>
+              <a:rPr lang="en-US" sz="1200" b="1" dirty="0">
+                <a:solidFill>
+                  <a:srgbClr val="C5A55A"/>
                 </a:solidFill>
                 <a:latin typeface="Arial" pitchFamily="34" charset="0"/>
                 <a:ea typeface="Arial" pitchFamily="34" charset="-122"/>
                 <a:cs typeface="Arial" pitchFamily="34" charset="-120"/>
               </a:rPr>
-              <a:t>Baskin Robbins</a:t>
-            </a:r>
-            <a:endParaRPr lang="en-US" sz="1300" dirty="0"/>
-          </a:p>
-        </p:txBody>
-      </p:sp>
-      <p:sp>
-        <p:nvSpPr>
-          <p:cNvPr id="7" name="Shape 5"/>
-          <p:cNvSpPr/>
-          <p:nvPr/>
-        </p:nvSpPr>
-        <p:spPr>
-          <a:xfrm>
-            <a:off x="3474720" y="1280160"/>
-            <a:ext cx="2468880" cy="640080"/>
-          </a:xfrm>
-          <a:prstGeom prst="rect">
-            <a:avLst/>
-          </a:prstGeom>
-          <a:solidFill>
-            <a:srgbClr val="F5F0E6"/>
-          </a:solidFill>
-          <a:ln/>
-          <a:effectLst>
-            <a:outerShdw sx="100000" sy="100000" kx="0" ky="0" algn="bl" rotWithShape="0" blurRad="101600" dist="38100" dir="8100000">
-              <a:srgbClr val="000000">
-                <a:alpha val="20000"/>
-              </a:srgbClr>
-            </a:outerShdw>
-          </a:effectLst>
-        </p:spPr>
-      </p:sp>
-      <p:sp>
-        <p:nvSpPr>
-          <p:cNvPr id="8" name="Shape 6"/>
-          <p:cNvSpPr/>
-          <p:nvPr/>
-        </p:nvSpPr>
-        <p:spPr>
-          <a:xfrm>
-            <a:off x="3474720" y="1280160"/>
-            <a:ext cx="54864" cy="640080"/>
-          </a:xfrm>
-          <a:prstGeom prst="rect">
-            <a:avLst/>
-          </a:prstGeom>
-          <a:solidFill>
-            <a:srgbClr val="C5A55A"/>
-          </a:solidFill>
-          <a:ln/>
-        </p:spPr>
-      </p:sp>
-      <p:sp>
-        <p:nvSpPr>
-          <p:cNvPr id="9" name="Text 7"/>
-          <p:cNvSpPr/>
-          <p:nvPr/>
-        </p:nvSpPr>
-        <p:spPr>
-          <a:xfrm>
-            <a:off x="3657600" y="1280160"/>
-            <a:ext cx="2103120" cy="640080"/>
+              <a:t>Unique Cryptographic IDs</a:t>
+            </a:r>
+            <a:endParaRPr lang="en-US" sz="1200" dirty="0"/>
+          </a:p>
+        </p:txBody>
+      </p:sp>
+      <p:sp>
+        <p:nvSpPr>
+          <p:cNvPr id="7" name="Text 5"/>
+          <p:cNvSpPr/>
+          <p:nvPr/>
+        </p:nvSpPr>
+        <p:spPr>
+          <a:xfrm>
+            <a:off x="3566160" y="914400"/>
+            <a:ext cx="4846320" cy="530352"/>
           </a:xfrm>
           <a:prstGeom prst="rect">
             <a:avLst/>
@@ -2489,57 +2613,50 @@
               <a:buNone/>
             </a:pPr>
             <a:r>
-              <a:rPr lang="en-US" sz="1300" b="1" dirty="0">
-                <a:solidFill>
-                  <a:srgbClr val="002D62"/>
+              <a:rPr lang="en-US" sz="1100" dirty="0">
+                <a:solidFill>
+                  <a:srgbClr val="FFFFFF"/>
                 </a:solidFill>
                 <a:latin typeface="Arial" pitchFamily="34" charset="0"/>
                 <a:ea typeface="Arial" pitchFamily="34" charset="-122"/>
                 <a:cs typeface="Arial" pitchFamily="34" charset="-120"/>
               </a:rPr>
-              <a:t>Harland Brewing</a:t>
-            </a:r>
-            <a:endParaRPr lang="en-US" sz="1300" dirty="0"/>
-          </a:p>
-        </p:txBody>
-      </p:sp>
-      <p:sp>
-        <p:nvSpPr>
-          <p:cNvPr id="10" name="Shape 8"/>
-          <p:cNvSpPr/>
-          <p:nvPr/>
-        </p:nvSpPr>
-        <p:spPr>
-          <a:xfrm>
-            <a:off x="6217920" y="1280160"/>
-            <a:ext cx="2468880" cy="640080"/>
-          </a:xfrm>
-          <a:prstGeom prst="rect">
-            <a:avLst/>
-          </a:prstGeom>
-          <a:solidFill>
-            <a:srgbClr val="F5F0E6"/>
-          </a:solidFill>
-          <a:ln/>
-          <a:effectLst>
-            <a:outerShdw sx="100000" sy="100000" kx="0" ky="0" algn="bl" rotWithShape="0" blurRad="101600" dist="38100" dir="8100000">
-              <a:srgbClr val="000000">
-                <a:alpha val="20000"/>
-              </a:srgbClr>
-            </a:outerShdw>
-          </a:effectLst>
-        </p:spPr>
-      </p:sp>
-      <p:sp>
-        <p:nvSpPr>
-          <p:cNvPr id="11" name="Shape 9"/>
-          <p:cNvSpPr/>
-          <p:nvPr/>
-        </p:nvSpPr>
-        <p:spPr>
-          <a:xfrm>
-            <a:off x="6217920" y="1280160"/>
-            <a:ext cx="54864" cy="640080"/>
+              <a:t>Every card has a one-of-a-kind ID that can't be guessed, copied, or faked</a:t>
+            </a:r>
+            <a:endParaRPr lang="en-US" sz="1100" dirty="0"/>
+          </a:p>
+        </p:txBody>
+      </p:sp>
+      <p:sp>
+        <p:nvSpPr>
+          <p:cNvPr id="8" name="Shape 6"/>
+          <p:cNvSpPr/>
+          <p:nvPr/>
+        </p:nvSpPr>
+        <p:spPr>
+          <a:xfrm>
+            <a:off x="548640" y="1554480"/>
+            <a:ext cx="8046720" cy="530352"/>
+          </a:xfrm>
+          <a:prstGeom prst="rect">
+            <a:avLst/>
+          </a:prstGeom>
+          <a:solidFill>
+            <a:srgbClr val="0A1A35"/>
+          </a:solidFill>
+          <a:ln/>
+        </p:spPr>
+      </p:sp>
+      <p:sp>
+        <p:nvSpPr>
+          <p:cNvPr id="9" name="Shape 7"/>
+          <p:cNvSpPr/>
+          <p:nvPr/>
+        </p:nvSpPr>
+        <p:spPr>
+          <a:xfrm>
+            <a:off x="548640" y="1554480"/>
+            <a:ext cx="64008" cy="530352"/>
           </a:xfrm>
           <a:prstGeom prst="rect">
             <a:avLst/>
@@ -2552,14 +2669,14 @@
       </p:sp>
       <p:sp>
         <p:nvSpPr>
-          <p:cNvPr id="12" name="Text 10"/>
-          <p:cNvSpPr/>
-          <p:nvPr/>
-        </p:nvSpPr>
-        <p:spPr>
-          <a:xfrm>
-            <a:off x="6400800" y="1280160"/>
-            <a:ext cx="2103120" cy="640080"/>
+          <p:cNvPr id="10" name="Text 8"/>
+          <p:cNvSpPr/>
+          <p:nvPr/>
+        </p:nvSpPr>
+        <p:spPr>
+          <a:xfrm>
+            <a:off x="822960" y="1554480"/>
+            <a:ext cx="2743200" cy="530352"/>
           </a:xfrm>
           <a:prstGeom prst="rect">
             <a:avLst/>
@@ -2575,77 +2692,30 @@
               <a:buNone/>
             </a:pPr>
             <a:r>
-              <a:rPr lang="en-US" sz="1300" b="1" dirty="0">
-                <a:solidFill>
-                  <a:srgbClr val="002D62"/>
+              <a:rPr lang="en-US" sz="1200" b="1" dirty="0">
+                <a:solidFill>
+                  <a:srgbClr val="C5A55A"/>
                 </a:solidFill>
                 <a:latin typeface="Arial" pitchFamily="34" charset="0"/>
                 <a:ea typeface="Arial" pitchFamily="34" charset="-122"/>
                 <a:cs typeface="Arial" pitchFamily="34" charset="-120"/>
               </a:rPr>
-              <a:t>Board &amp; Brew</a:t>
-            </a:r>
-            <a:endParaRPr lang="en-US" sz="1300" dirty="0"/>
-          </a:p>
-        </p:txBody>
-      </p:sp>
-      <p:sp>
-        <p:nvSpPr>
-          <p:cNvPr id="13" name="Shape 11"/>
-          <p:cNvSpPr/>
-          <p:nvPr/>
-        </p:nvSpPr>
-        <p:spPr>
-          <a:xfrm>
-            <a:off x="731520" y="2103120"/>
-            <a:ext cx="2468880" cy="640080"/>
-          </a:xfrm>
-          <a:prstGeom prst="rect">
-            <a:avLst/>
-          </a:prstGeom>
-          <a:solidFill>
-            <a:srgbClr val="F5F0E6"/>
-          </a:solidFill>
-          <a:ln/>
-          <a:effectLst>
-            <a:outerShdw sx="100000" sy="100000" kx="0" ky="0" algn="bl" rotWithShape="0" blurRad="101600" dist="38100" dir="8100000">
-              <a:srgbClr val="000000">
-                <a:alpha val="20000"/>
-              </a:srgbClr>
-            </a:outerShdw>
-          </a:effectLst>
-        </p:spPr>
-      </p:sp>
-      <p:sp>
-        <p:nvSpPr>
-          <p:cNvPr id="14" name="Shape 12"/>
-          <p:cNvSpPr/>
-          <p:nvPr/>
-        </p:nvSpPr>
-        <p:spPr>
-          <a:xfrm>
-            <a:off x="731520" y="2103120"/>
-            <a:ext cx="54864" cy="640080"/>
-          </a:xfrm>
-          <a:prstGeom prst="rect">
-            <a:avLst/>
-          </a:prstGeom>
-          <a:solidFill>
-            <a:srgbClr val="C5A55A"/>
-          </a:solidFill>
-          <a:ln/>
-        </p:spPr>
-      </p:sp>
-      <p:sp>
-        <p:nvSpPr>
-          <p:cNvPr id="15" name="Text 13"/>
-          <p:cNvSpPr/>
-          <p:nvPr/>
-        </p:nvSpPr>
-        <p:spPr>
-          <a:xfrm>
-            <a:off x="914400" y="2103120"/>
-            <a:ext cx="2103120" cy="640080"/>
+              <a:t>Anti-Sharing Protection</a:t>
+            </a:r>
+            <a:endParaRPr lang="en-US" sz="1200" dirty="0"/>
+          </a:p>
+        </p:txBody>
+      </p:sp>
+      <p:sp>
+        <p:nvSpPr>
+          <p:cNvPr id="11" name="Text 9"/>
+          <p:cNvSpPr/>
+          <p:nvPr/>
+        </p:nvSpPr>
+        <p:spPr>
+          <a:xfrm>
+            <a:off x="3566160" y="1554480"/>
+            <a:ext cx="4846320" cy="530352"/>
           </a:xfrm>
           <a:prstGeom prst="rect">
             <a:avLst/>
@@ -2661,57 +2731,50 @@
               <a:buNone/>
             </a:pPr>
             <a:r>
-              <a:rPr lang="en-US" sz="1300" b="1" dirty="0">
-                <a:solidFill>
-                  <a:srgbClr val="002D62"/>
+              <a:rPr lang="en-US" sz="1100" dirty="0">
+                <a:solidFill>
+                  <a:srgbClr val="FFFFFF"/>
                 </a:solidFill>
                 <a:latin typeface="Arial" pitchFamily="34" charset="0"/>
                 <a:ea typeface="Arial" pitchFamily="34" charset="-122"/>
                 <a:cs typeface="Arial" pitchFamily="34" charset="-120"/>
               </a:rPr>
-              <a:t>L&amp;L Hawaiian Barbecue</a:t>
-            </a:r>
-            <a:endParaRPr lang="en-US" sz="1300" dirty="0"/>
-          </a:p>
-        </p:txBody>
-      </p:sp>
-      <p:sp>
-        <p:nvSpPr>
-          <p:cNvPr id="16" name="Shape 14"/>
-          <p:cNvSpPr/>
-          <p:nvPr/>
-        </p:nvSpPr>
-        <p:spPr>
-          <a:xfrm>
-            <a:off x="3474720" y="2103120"/>
-            <a:ext cx="2468880" cy="640080"/>
-          </a:xfrm>
-          <a:prstGeom prst="rect">
-            <a:avLst/>
-          </a:prstGeom>
-          <a:solidFill>
-            <a:srgbClr val="F5F0E6"/>
-          </a:solidFill>
-          <a:ln/>
-          <a:effectLst>
-            <a:outerShdw sx="100000" sy="100000" kx="0" ky="0" algn="bl" rotWithShape="0" blurRad="101600" dist="38100" dir="8100000">
-              <a:srgbClr val="000000">
-                <a:alpha val="20000"/>
-              </a:srgbClr>
-            </a:outerShdw>
-          </a:effectLst>
-        </p:spPr>
-      </p:sp>
-      <p:sp>
-        <p:nvSpPr>
-          <p:cNvPr id="17" name="Shape 15"/>
-          <p:cNvSpPr/>
-          <p:nvPr/>
-        </p:nvSpPr>
-        <p:spPr>
-          <a:xfrm>
-            <a:off x="3474720" y="2103120"/>
-            <a:ext cx="54864" cy="640080"/>
+              <a:t>Cards scanned too many times get flagged automatically with a warning</a:t>
+            </a:r>
+            <a:endParaRPr lang="en-US" sz="1100" dirty="0"/>
+          </a:p>
+        </p:txBody>
+      </p:sp>
+      <p:sp>
+        <p:nvSpPr>
+          <p:cNvPr id="12" name="Shape 10"/>
+          <p:cNvSpPr/>
+          <p:nvPr/>
+        </p:nvSpPr>
+        <p:spPr>
+          <a:xfrm>
+            <a:off x="548640" y="2194560"/>
+            <a:ext cx="8046720" cy="530352"/>
+          </a:xfrm>
+          <a:prstGeom prst="rect">
+            <a:avLst/>
+          </a:prstGeom>
+          <a:solidFill>
+            <a:srgbClr val="0A1A35"/>
+          </a:solidFill>
+          <a:ln/>
+        </p:spPr>
+      </p:sp>
+      <p:sp>
+        <p:nvSpPr>
+          <p:cNvPr id="13" name="Shape 11"/>
+          <p:cNvSpPr/>
+          <p:nvPr/>
+        </p:nvSpPr>
+        <p:spPr>
+          <a:xfrm>
+            <a:off x="548640" y="2194560"/>
+            <a:ext cx="64008" cy="530352"/>
           </a:xfrm>
           <a:prstGeom prst="rect">
             <a:avLst/>
@@ -2724,14 +2787,14 @@
       </p:sp>
       <p:sp>
         <p:nvSpPr>
-          <p:cNvPr id="18" name="Text 16"/>
-          <p:cNvSpPr/>
-          <p:nvPr/>
-        </p:nvSpPr>
-        <p:spPr>
-          <a:xfrm>
-            <a:off x="3657600" y="2103120"/>
-            <a:ext cx="2103120" cy="640080"/>
+          <p:cNvPr id="14" name="Text 12"/>
+          <p:cNvSpPr/>
+          <p:nvPr/>
+        </p:nvSpPr>
+        <p:spPr>
+          <a:xfrm>
+            <a:off x="822960" y="2194560"/>
+            <a:ext cx="2743200" cy="530352"/>
           </a:xfrm>
           <a:prstGeom prst="rect">
             <a:avLst/>
@@ -2747,77 +2810,30 @@
               <a:buNone/>
             </a:pPr>
             <a:r>
-              <a:rPr lang="en-US" sz="1300" b="1" dirty="0">
-                <a:solidFill>
-                  <a:srgbClr val="002D62"/>
+              <a:rPr lang="en-US" sz="1200" b="1" dirty="0">
+                <a:solidFill>
+                  <a:srgbClr val="C5A55A"/>
                 </a:solidFill>
                 <a:latin typeface="Arial" pitchFamily="34" charset="0"/>
                 <a:ea typeface="Arial" pitchFamily="34" charset="-122"/>
                 <a:cs typeface="Arial" pitchFamily="34" charset="-120"/>
               </a:rPr>
-              <a:t>Kahoots</a:t>
-            </a:r>
-            <a:endParaRPr lang="en-US" sz="1300" dirty="0"/>
-          </a:p>
-        </p:txBody>
-      </p:sp>
-      <p:sp>
-        <p:nvSpPr>
-          <p:cNvPr id="19" name="Shape 17"/>
-          <p:cNvSpPr/>
-          <p:nvPr/>
-        </p:nvSpPr>
-        <p:spPr>
-          <a:xfrm>
-            <a:off x="6217920" y="2103120"/>
-            <a:ext cx="2468880" cy="640080"/>
-          </a:xfrm>
-          <a:prstGeom prst="rect">
-            <a:avLst/>
-          </a:prstGeom>
-          <a:solidFill>
-            <a:srgbClr val="F5F0E6"/>
-          </a:solidFill>
-          <a:ln/>
-          <a:effectLst>
-            <a:outerShdw sx="100000" sy="100000" kx="0" ky="0" algn="bl" rotWithShape="0" blurRad="101600" dist="38100" dir="8100000">
-              <a:srgbClr val="000000">
-                <a:alpha val="20000"/>
-              </a:srgbClr>
-            </a:outerShdw>
-          </a:effectLst>
-        </p:spPr>
-      </p:sp>
-      <p:sp>
-        <p:nvSpPr>
-          <p:cNvPr id="20" name="Shape 18"/>
-          <p:cNvSpPr/>
-          <p:nvPr/>
-        </p:nvSpPr>
-        <p:spPr>
-          <a:xfrm>
-            <a:off x="6217920" y="2103120"/>
-            <a:ext cx="54864" cy="640080"/>
-          </a:xfrm>
-          <a:prstGeom prst="rect">
-            <a:avLst/>
-          </a:prstGeom>
-          <a:solidFill>
-            <a:srgbClr val="C5A55A"/>
-          </a:solidFill>
-          <a:ln/>
-        </p:spPr>
-      </p:sp>
-      <p:sp>
-        <p:nvSpPr>
-          <p:cNvPr id="21" name="Text 19"/>
-          <p:cNvSpPr/>
-          <p:nvPr/>
-        </p:nvSpPr>
-        <p:spPr>
-          <a:xfrm>
-            <a:off x="6400800" y="2103120"/>
-            <a:ext cx="2103120" cy="640080"/>
+              <a:t>Name Verification</a:t>
+            </a:r>
+            <a:endParaRPr lang="en-US" sz="1200" dirty="0"/>
+          </a:p>
+        </p:txBody>
+      </p:sp>
+      <p:sp>
+        <p:nvSpPr>
+          <p:cNvPr id="15" name="Text 13"/>
+          <p:cNvSpPr/>
+          <p:nvPr/>
+        </p:nvSpPr>
+        <p:spPr>
+          <a:xfrm>
+            <a:off x="3566160" y="2194560"/>
+            <a:ext cx="4846320" cy="530352"/>
           </a:xfrm>
           <a:prstGeom prst="rect">
             <a:avLst/>
@@ -2833,57 +2849,50 @@
               <a:buNone/>
             </a:pPr>
             <a:r>
-              <a:rPr lang="en-US" sz="1300" b="1" dirty="0">
-                <a:solidFill>
-                  <a:srgbClr val="002D62"/>
+              <a:rPr lang="en-US" sz="1100" dirty="0">
+                <a:solidFill>
+                  <a:srgbClr val="FFFFFF"/>
                 </a:solidFill>
                 <a:latin typeface="Arial" pitchFamily="34" charset="0"/>
                 <a:ea typeface="Arial" pitchFamily="34" charset="-122"/>
                 <a:cs typeface="Arial" pitchFamily="34" charset="-120"/>
               </a:rPr>
-              <a:t>Mostra Coffee</a:t>
-            </a:r>
-            <a:endParaRPr lang="en-US" sz="1300" dirty="0"/>
-          </a:p>
-        </p:txBody>
-      </p:sp>
-      <p:sp>
-        <p:nvSpPr>
-          <p:cNvPr id="22" name="Shape 20"/>
-          <p:cNvSpPr/>
-          <p:nvPr/>
-        </p:nvSpPr>
-        <p:spPr>
-          <a:xfrm>
-            <a:off x="731520" y="2926080"/>
-            <a:ext cx="2468880" cy="640080"/>
-          </a:xfrm>
-          <a:prstGeom prst="rect">
-            <a:avLst/>
-          </a:prstGeom>
-          <a:solidFill>
-            <a:srgbClr val="F5F0E6"/>
-          </a:solidFill>
-          <a:ln/>
-          <a:effectLst>
-            <a:outerShdw sx="100000" sy="100000" kx="0" ky="0" algn="bl" rotWithShape="0" blurRad="101600" dist="38100" dir="8100000">
-              <a:srgbClr val="000000">
-                <a:alpha val="20000"/>
-              </a:srgbClr>
-            </a:outerShdw>
-          </a:effectLst>
-        </p:spPr>
-      </p:sp>
-      <p:sp>
-        <p:nvSpPr>
-          <p:cNvPr id="23" name="Shape 21"/>
-          <p:cNvSpPr/>
-          <p:nvPr/>
-        </p:nvSpPr>
-        <p:spPr>
-          <a:xfrm>
-            <a:off x="731520" y="2926080"/>
-            <a:ext cx="54864" cy="640080"/>
+              <a:t>Cashier sees the cardholder's name on the verification screen</a:t>
+            </a:r>
+            <a:endParaRPr lang="en-US" sz="1100" dirty="0"/>
+          </a:p>
+        </p:txBody>
+      </p:sp>
+      <p:sp>
+        <p:nvSpPr>
+          <p:cNvPr id="16" name="Shape 14"/>
+          <p:cNvSpPr/>
+          <p:nvPr/>
+        </p:nvSpPr>
+        <p:spPr>
+          <a:xfrm>
+            <a:off x="548640" y="2834640"/>
+            <a:ext cx="8046720" cy="530352"/>
+          </a:xfrm>
+          <a:prstGeom prst="rect">
+            <a:avLst/>
+          </a:prstGeom>
+          <a:solidFill>
+            <a:srgbClr val="0A1A35"/>
+          </a:solidFill>
+          <a:ln/>
+        </p:spPr>
+      </p:sp>
+      <p:sp>
+        <p:nvSpPr>
+          <p:cNvPr id="17" name="Shape 15"/>
+          <p:cNvSpPr/>
+          <p:nvPr/>
+        </p:nvSpPr>
+        <p:spPr>
+          <a:xfrm>
+            <a:off x="548640" y="2834640"/>
+            <a:ext cx="64008" cy="530352"/>
           </a:xfrm>
           <a:prstGeom prst="rect">
             <a:avLst/>
@@ -2896,14 +2905,14 @@
       </p:sp>
       <p:sp>
         <p:nvSpPr>
-          <p:cNvPr id="24" name="Text 22"/>
-          <p:cNvSpPr/>
-          <p:nvPr/>
-        </p:nvSpPr>
-        <p:spPr>
-          <a:xfrm>
-            <a:off x="914400" y="2926080"/>
-            <a:ext cx="2103120" cy="640080"/>
+          <p:cNvPr id="18" name="Text 16"/>
+          <p:cNvSpPr/>
+          <p:nvPr/>
+        </p:nvSpPr>
+        <p:spPr>
+          <a:xfrm>
+            <a:off x="822960" y="2834640"/>
+            <a:ext cx="2743200" cy="530352"/>
           </a:xfrm>
           <a:prstGeom prst="rect">
             <a:avLst/>
@@ -2919,77 +2928,30 @@
               <a:buNone/>
             </a:pPr>
             <a:r>
-              <a:rPr lang="en-US" sz="1300" b="1" dirty="0">
-                <a:solidFill>
-                  <a:srgbClr val="002D62"/>
+              <a:rPr lang="en-US" sz="1200" b="1" dirty="0">
+                <a:solidFill>
+                  <a:srgbClr val="C5A55A"/>
                 </a:solidFill>
                 <a:latin typeface="Arial" pitchFamily="34" charset="0"/>
                 <a:ea typeface="Arial" pitchFamily="34" charset="-122"/>
                 <a:cs typeface="Arial" pitchFamily="34" charset="-120"/>
               </a:rPr>
-              <a:t>Rosinas</a:t>
-            </a:r>
-            <a:endParaRPr lang="en-US" sz="1300" dirty="0"/>
-          </a:p>
-        </p:txBody>
-      </p:sp>
-      <p:sp>
-        <p:nvSpPr>
-          <p:cNvPr id="25" name="Shape 23"/>
-          <p:cNvSpPr/>
-          <p:nvPr/>
-        </p:nvSpPr>
-        <p:spPr>
-          <a:xfrm>
-            <a:off x="3474720" y="2926080"/>
-            <a:ext cx="2468880" cy="640080"/>
-          </a:xfrm>
-          <a:prstGeom prst="rect">
-            <a:avLst/>
-          </a:prstGeom>
-          <a:solidFill>
-            <a:srgbClr val="F5F0E6"/>
-          </a:solidFill>
-          <a:ln/>
-          <a:effectLst>
-            <a:outerShdw sx="100000" sy="100000" kx="0" ky="0" algn="bl" rotWithShape="0" blurRad="101600" dist="38100" dir="8100000">
-              <a:srgbClr val="000000">
-                <a:alpha val="20000"/>
-              </a:srgbClr>
-            </a:outerShdw>
-          </a:effectLst>
-        </p:spPr>
-      </p:sp>
-      <p:sp>
-        <p:nvSpPr>
-          <p:cNvPr id="26" name="Shape 24"/>
-          <p:cNvSpPr/>
-          <p:nvPr/>
-        </p:nvSpPr>
-        <p:spPr>
-          <a:xfrm>
-            <a:off x="3474720" y="2926080"/>
-            <a:ext cx="54864" cy="640080"/>
-          </a:xfrm>
-          <a:prstGeom prst="rect">
-            <a:avLst/>
-          </a:prstGeom>
-          <a:solidFill>
-            <a:srgbClr val="C5A55A"/>
-          </a:solidFill>
-          <a:ln/>
-        </p:spPr>
-      </p:sp>
-      <p:sp>
-        <p:nvSpPr>
-          <p:cNvPr id="27" name="Text 25"/>
-          <p:cNvSpPr/>
-          <p:nvPr/>
-        </p:nvSpPr>
-        <p:spPr>
-          <a:xfrm>
-            <a:off x="3657600" y="2926080"/>
-            <a:ext cx="2103120" cy="640080"/>
+              <a:t>Your Data Is Yours</a:t>
+            </a:r>
+            <a:endParaRPr lang="en-US" sz="1200" dirty="0"/>
+          </a:p>
+        </p:txBody>
+      </p:sp>
+      <p:sp>
+        <p:nvSpPr>
+          <p:cNvPr id="19" name="Text 17"/>
+          <p:cNvSpPr/>
+          <p:nvPr/>
+        </p:nvSpPr>
+        <p:spPr>
+          <a:xfrm>
+            <a:off x="3566160" y="2834640"/>
+            <a:ext cx="4846320" cy="530352"/>
           </a:xfrm>
           <a:prstGeom prst="rect">
             <a:avLst/>
@@ -3005,57 +2967,50 @@
               <a:buNone/>
             </a:pPr>
             <a:r>
-              <a:rPr lang="en-US" sz="1300" b="1" dirty="0">
-                <a:solidFill>
-                  <a:srgbClr val="002D62"/>
+              <a:rPr lang="en-US" sz="1100" dirty="0">
+                <a:solidFill>
+                  <a:srgbClr val="FFFFFF"/>
                 </a:solidFill>
                 <a:latin typeface="Arial" pitchFamily="34" charset="0"/>
                 <a:ea typeface="Arial" pitchFamily="34" charset="-122"/>
                 <a:cs typeface="Arial" pitchFamily="34" charset="-120"/>
               </a:rPr>
-              <a:t>Donut Touch</a:t>
-            </a:r>
-            <a:endParaRPr lang="en-US" sz="1300" dirty="0"/>
-          </a:p>
-        </p:txBody>
-      </p:sp>
-      <p:sp>
-        <p:nvSpPr>
-          <p:cNvPr id="28" name="Shape 26"/>
-          <p:cNvSpPr/>
-          <p:nvPr/>
-        </p:nvSpPr>
-        <p:spPr>
-          <a:xfrm>
-            <a:off x="6217920" y="2926080"/>
-            <a:ext cx="2468880" cy="640080"/>
-          </a:xfrm>
-          <a:prstGeom prst="rect">
-            <a:avLst/>
-          </a:prstGeom>
-          <a:solidFill>
-            <a:srgbClr val="F5F0E6"/>
-          </a:solidFill>
-          <a:ln/>
-          <a:effectLst>
-            <a:outerShdw sx="100000" sy="100000" kx="0" ky="0" algn="bl" rotWithShape="0" blurRad="101600" dist="38100" dir="8100000">
-              <a:srgbClr val="000000">
-                <a:alpha val="20000"/>
-              </a:srgbClr>
-            </a:outerShdw>
-          </a:effectLst>
-        </p:spPr>
-      </p:sp>
-      <p:sp>
-        <p:nvSpPr>
-          <p:cNvPr id="29" name="Shape 27"/>
-          <p:cNvSpPr/>
-          <p:nvPr/>
-        </p:nvSpPr>
-        <p:spPr>
-          <a:xfrm>
-            <a:off x="6217920" y="2926080"/>
-            <a:ext cx="54864" cy="640080"/>
+              <a:t>Sponsors only see their own analytics — never other sponsors' data</a:t>
+            </a:r>
+            <a:endParaRPr lang="en-US" sz="1100" dirty="0"/>
+          </a:p>
+        </p:txBody>
+      </p:sp>
+      <p:sp>
+        <p:nvSpPr>
+          <p:cNvPr id="20" name="Shape 18"/>
+          <p:cNvSpPr/>
+          <p:nvPr/>
+        </p:nvSpPr>
+        <p:spPr>
+          <a:xfrm>
+            <a:off x="548640" y="3474720"/>
+            <a:ext cx="8046720" cy="530352"/>
+          </a:xfrm>
+          <a:prstGeom prst="rect">
+            <a:avLst/>
+          </a:prstGeom>
+          <a:solidFill>
+            <a:srgbClr val="0A1A35"/>
+          </a:solidFill>
+          <a:ln/>
+        </p:spPr>
+      </p:sp>
+      <p:sp>
+        <p:nvSpPr>
+          <p:cNvPr id="21" name="Shape 19"/>
+          <p:cNvSpPr/>
+          <p:nvPr/>
+        </p:nvSpPr>
+        <p:spPr>
+          <a:xfrm>
+            <a:off x="548640" y="3474720"/>
+            <a:ext cx="64008" cy="530352"/>
           </a:xfrm>
           <a:prstGeom prst="rect">
             <a:avLst/>
@@ -3068,14 +3023,14 @@
       </p:sp>
       <p:sp>
         <p:nvSpPr>
-          <p:cNvPr id="30" name="Text 28"/>
-          <p:cNvSpPr/>
-          <p:nvPr/>
-        </p:nvSpPr>
-        <p:spPr>
-          <a:xfrm>
-            <a:off x="6400800" y="2926080"/>
-            <a:ext cx="2103120" cy="640080"/>
+          <p:cNvPr id="22" name="Text 20"/>
+          <p:cNvSpPr/>
+          <p:nvPr/>
+        </p:nvSpPr>
+        <p:spPr>
+          <a:xfrm>
+            <a:off x="822960" y="3474720"/>
+            <a:ext cx="2743200" cy="530352"/>
           </a:xfrm>
           <a:prstGeom prst="rect">
             <a:avLst/>
@@ -3091,77 +3046,30 @@
               <a:buNone/>
             </a:pPr>
             <a:r>
-              <a:rPr lang="en-US" sz="1300" b="1" dirty="0">
-                <a:solidFill>
-                  <a:srgbClr val="002D62"/>
+              <a:rPr lang="en-US" sz="1200" b="1" dirty="0">
+                <a:solidFill>
+                  <a:srgbClr val="C5A55A"/>
                 </a:solidFill>
                 <a:latin typeface="Arial" pitchFamily="34" charset="0"/>
                 <a:ea typeface="Arial" pitchFamily="34" charset="-122"/>
                 <a:cs typeface="Arial" pitchFamily="34" charset="-120"/>
               </a:rPr>
-              <a:t>Sushi Ren</a:t>
-            </a:r>
-            <a:endParaRPr lang="en-US" sz="1300" dirty="0"/>
-          </a:p>
-        </p:txBody>
-      </p:sp>
-      <p:sp>
-        <p:nvSpPr>
-          <p:cNvPr id="31" name="Shape 29"/>
-          <p:cNvSpPr/>
-          <p:nvPr/>
-        </p:nvSpPr>
-        <p:spPr>
-          <a:xfrm>
-            <a:off x="731520" y="3749040"/>
-            <a:ext cx="2468880" cy="640080"/>
-          </a:xfrm>
-          <a:prstGeom prst="rect">
-            <a:avLst/>
-          </a:prstGeom>
-          <a:solidFill>
-            <a:srgbClr val="F5F0E6"/>
-          </a:solidFill>
-          <a:ln/>
-          <a:effectLst>
-            <a:outerShdw sx="100000" sy="100000" kx="0" ky="0" algn="bl" rotWithShape="0" blurRad="101600" dist="38100" dir="8100000">
-              <a:srgbClr val="000000">
-                <a:alpha val="20000"/>
-              </a:srgbClr>
-            </a:outerShdw>
-          </a:effectLst>
-        </p:spPr>
-      </p:sp>
-      <p:sp>
-        <p:nvSpPr>
-          <p:cNvPr id="32" name="Shape 30"/>
-          <p:cNvSpPr/>
-          <p:nvPr/>
-        </p:nvSpPr>
-        <p:spPr>
-          <a:xfrm>
-            <a:off x="731520" y="3749040"/>
-            <a:ext cx="54864" cy="640080"/>
-          </a:xfrm>
-          <a:prstGeom prst="rect">
-            <a:avLst/>
-          </a:prstGeom>
-          <a:solidFill>
-            <a:srgbClr val="C5A55A"/>
-          </a:solidFill>
-          <a:ln/>
-        </p:spPr>
-      </p:sp>
-      <p:sp>
-        <p:nvSpPr>
-          <p:cNvPr id="33" name="Text 31"/>
-          <p:cNvSpPr/>
-          <p:nvPr/>
-        </p:nvSpPr>
-        <p:spPr>
-          <a:xfrm>
-            <a:off x="914400" y="3749040"/>
-            <a:ext cx="2103120" cy="640080"/>
+              <a:t>No Personal Data Collected</a:t>
+            </a:r>
+            <a:endParaRPr lang="en-US" sz="1200" dirty="0"/>
+          </a:p>
+        </p:txBody>
+      </p:sp>
+      <p:sp>
+        <p:nvSpPr>
+          <p:cNvPr id="23" name="Text 21"/>
+          <p:cNvSpPr/>
+          <p:nvPr/>
+        </p:nvSpPr>
+        <p:spPr>
+          <a:xfrm>
+            <a:off x="3566160" y="3474720"/>
+            <a:ext cx="4846320" cy="530352"/>
           </a:xfrm>
           <a:prstGeom prst="rect">
             <a:avLst/>
@@ -3177,57 +3085,50 @@
               <a:buNone/>
             </a:pPr>
             <a:r>
-              <a:rPr lang="en-US" sz="1300" b="1" dirty="0">
-                <a:solidFill>
-                  <a:srgbClr val="002D62"/>
+              <a:rPr lang="en-US" sz="1100" dirty="0">
+                <a:solidFill>
+                  <a:srgbClr val="FFFFFF"/>
                 </a:solidFill>
                 <a:latin typeface="Arial" pitchFamily="34" charset="0"/>
                 <a:ea typeface="Arial" pitchFamily="34" charset="-122"/>
                 <a:cs typeface="Arial" pitchFamily="34" charset="-120"/>
               </a:rPr>
-              <a:t>Flippin Pizza</a:t>
-            </a:r>
-            <a:endParaRPr lang="en-US" sz="1300" dirty="0"/>
-          </a:p>
-        </p:txBody>
-      </p:sp>
-      <p:sp>
-        <p:nvSpPr>
-          <p:cNvPr id="34" name="Shape 32"/>
-          <p:cNvSpPr/>
-          <p:nvPr/>
-        </p:nvSpPr>
-        <p:spPr>
-          <a:xfrm>
-            <a:off x="3474720" y="3749040"/>
-            <a:ext cx="2468880" cy="640080"/>
-          </a:xfrm>
-          <a:prstGeom prst="rect">
-            <a:avLst/>
-          </a:prstGeom>
-          <a:solidFill>
-            <a:srgbClr val="F5F0E6"/>
-          </a:solidFill>
-          <a:ln/>
-          <a:effectLst>
-            <a:outerShdw sx="100000" sy="100000" kx="0" ky="0" algn="bl" rotWithShape="0" blurRad="101600" dist="38100" dir="8100000">
-              <a:srgbClr val="000000">
-                <a:alpha val="20000"/>
-              </a:srgbClr>
-            </a:outerShdw>
-          </a:effectLst>
-        </p:spPr>
-      </p:sp>
-      <p:sp>
-        <p:nvSpPr>
-          <p:cNvPr id="35" name="Shape 33"/>
-          <p:cNvSpPr/>
-          <p:nvPr/>
-        </p:nvSpPr>
-        <p:spPr>
-          <a:xfrm>
-            <a:off x="3474720" y="3749040"/>
-            <a:ext cx="54864" cy="640080"/>
+              <a:t>No emails, phone numbers, or payment info — just an optional name</a:t>
+            </a:r>
+            <a:endParaRPr lang="en-US" sz="1100" dirty="0"/>
+          </a:p>
+        </p:txBody>
+      </p:sp>
+      <p:sp>
+        <p:nvSpPr>
+          <p:cNvPr id="24" name="Shape 22"/>
+          <p:cNvSpPr/>
+          <p:nvPr/>
+        </p:nvSpPr>
+        <p:spPr>
+          <a:xfrm>
+            <a:off x="548640" y="4114800"/>
+            <a:ext cx="8046720" cy="530352"/>
+          </a:xfrm>
+          <a:prstGeom prst="rect">
+            <a:avLst/>
+          </a:prstGeom>
+          <a:solidFill>
+            <a:srgbClr val="0A1A35"/>
+          </a:solidFill>
+          <a:ln/>
+        </p:spPr>
+      </p:sp>
+      <p:sp>
+        <p:nvSpPr>
+          <p:cNvPr id="25" name="Shape 23"/>
+          <p:cNvSpPr/>
+          <p:nvPr/>
+        </p:nvSpPr>
+        <p:spPr>
+          <a:xfrm>
+            <a:off x="548640" y="4114800"/>
+            <a:ext cx="64008" cy="530352"/>
           </a:xfrm>
           <a:prstGeom prst="rect">
             <a:avLst/>
@@ -3240,14 +3141,14 @@
       </p:sp>
       <p:sp>
         <p:nvSpPr>
-          <p:cNvPr id="36" name="Text 34"/>
-          <p:cNvSpPr/>
-          <p:nvPr/>
-        </p:nvSpPr>
-        <p:spPr>
-          <a:xfrm>
-            <a:off x="3657600" y="3749040"/>
-            <a:ext cx="2103120" cy="640080"/>
+          <p:cNvPr id="26" name="Text 24"/>
+          <p:cNvSpPr/>
+          <p:nvPr/>
+        </p:nvSpPr>
+        <p:spPr>
+          <a:xfrm>
+            <a:off x="822960" y="4114800"/>
+            <a:ext cx="2743200" cy="530352"/>
           </a:xfrm>
           <a:prstGeom prst="rect">
             <a:avLst/>
@@ -3263,30 +3164,30 @@
               <a:buNone/>
             </a:pPr>
             <a:r>
-              <a:rPr lang="en-US" sz="1300" b="1" dirty="0">
-                <a:solidFill>
-                  <a:srgbClr val="002D62"/>
+              <a:rPr lang="en-US" sz="1200" b="1" dirty="0">
+                <a:solidFill>
+                  <a:srgbClr val="C5A55A"/>
                 </a:solidFill>
                 <a:latin typeface="Arial" pitchFamily="34" charset="0"/>
                 <a:ea typeface="Arial" pitchFamily="34" charset="-122"/>
                 <a:cs typeface="Arial" pitchFamily="34" charset="-120"/>
               </a:rPr>
-              <a:t>Round Table Pizza</a:t>
-            </a:r>
-            <a:endParaRPr lang="en-US" sz="1300" dirty="0"/>
-          </a:p>
-        </p:txBody>
-      </p:sp>
-      <p:sp>
-        <p:nvSpPr>
-          <p:cNvPr id="37" name="Text 35"/>
-          <p:cNvSpPr/>
-          <p:nvPr/>
-        </p:nvSpPr>
-        <p:spPr>
-          <a:xfrm>
-            <a:off x="731520" y="4572000"/>
-            <a:ext cx="7680960" cy="365760"/>
+              <a:t>Encrypted &amp; Compliant</a:t>
+            </a:r>
+            <a:endParaRPr lang="en-US" sz="1200" dirty="0"/>
+          </a:p>
+        </p:txBody>
+      </p:sp>
+      <p:sp>
+        <p:nvSpPr>
+          <p:cNvPr id="27" name="Text 25"/>
+          <p:cNvSpPr/>
+          <p:nvPr/>
+        </p:nvSpPr>
+        <p:spPr>
+          <a:xfrm>
+            <a:off x="3566160" y="4114800"/>
+            <a:ext cx="4846320" cy="530352"/>
           </a:xfrm>
           <a:prstGeom prst="rect">
             <a:avLst/>
@@ -3302,17 +3203,17 @@
               <a:buNone/>
             </a:pPr>
             <a:r>
-              <a:rPr lang="en-US" sz="1300" i="1" dirty="0">
-                <a:solidFill>
-                  <a:srgbClr val="888888"/>
+              <a:rPr lang="en-US" sz="1100" dirty="0">
+                <a:solidFill>
+                  <a:srgbClr val="FFFFFF"/>
                 </a:solidFill>
                 <a:latin typeface="Arial" pitchFamily="34" charset="0"/>
                 <a:ea typeface="Arial" pitchFamily="34" charset="-122"/>
                 <a:cs typeface="Arial" pitchFamily="34" charset="-120"/>
               </a:rPr>
-              <a:t>Join them and put your business in front of the entire Nighthawk community.</a:t>
-            </a:r>
-            <a:endParaRPr lang="en-US" sz="1300" dirty="0"/>
+              <a:t>HTTPS everywhere, CCPA compliant, hosted on secure cloud infrastructure</a:t>
+            </a:r>
+            <a:endParaRPr lang="en-US" sz="1100" dirty="0"/>
           </a:p>
         </p:txBody>
       </p:sp>
@@ -3376,8 +3277,8 @@
         </p:nvSpPr>
         <p:spPr>
           <a:xfrm>
-            <a:off x="731520" y="274320"/>
-            <a:ext cx="8229600" cy="548640"/>
+            <a:off x="731520" y="320040"/>
+            <a:ext cx="8229600" cy="457200"/>
           </a:xfrm>
           <a:prstGeom prst="rect">
             <a:avLst/>
@@ -3401,7 +3302,7 @@
                 <a:ea typeface="Arial Black" pitchFamily="34" charset="-122"/>
                 <a:cs typeface="Arial Black" pitchFamily="34" charset="-120"/>
               </a:rPr>
-              <a:t>SPONSORSHIP TIERS</a:t>
+              <a:t>YOUR OWN DASHBOARD</a:t>
             </a:r>
             <a:endParaRPr lang="en-US" sz="2400" dirty="0"/>
           </a:p>
@@ -3409,139 +3310,14 @@
       </p:sp>
       <p:sp>
         <p:nvSpPr>
-          <p:cNvPr id="4" name="Shape 2"/>
-          <p:cNvSpPr/>
-          <p:nvPr/>
-        </p:nvSpPr>
-        <p:spPr>
-          <a:xfrm>
-            <a:off x="548640" y="1005840"/>
-            <a:ext cx="2651760" cy="3840480"/>
-          </a:xfrm>
-          <a:prstGeom prst="rect">
-            <a:avLst/>
-          </a:prstGeom>
-          <a:solidFill>
-            <a:srgbClr val="0A1A35"/>
-          </a:solidFill>
-          <a:ln/>
-          <a:effectLst>
-            <a:outerShdw sx="100000" sy="100000" kx="0" ky="0" algn="bl" rotWithShape="0" blurRad="101600" dist="38100" dir="8100000">
-              <a:srgbClr val="000000">
-                <a:alpha val="20000"/>
-              </a:srgbClr>
-            </a:outerShdw>
-          </a:effectLst>
-        </p:spPr>
-      </p:sp>
-      <p:sp>
-        <p:nvSpPr>
-          <p:cNvPr id="5" name="Shape 3"/>
-          <p:cNvSpPr/>
-          <p:nvPr/>
-        </p:nvSpPr>
-        <p:spPr>
-          <a:xfrm>
-            <a:off x="548640" y="1005840"/>
-            <a:ext cx="2651760" cy="1097280"/>
-          </a:xfrm>
-          <a:prstGeom prst="rect">
-            <a:avLst/>
-          </a:prstGeom>
-          <a:solidFill>
-            <a:srgbClr val="C5A55A"/>
-          </a:solidFill>
-          <a:ln/>
-        </p:spPr>
-      </p:sp>
-      <p:sp>
-        <p:nvSpPr>
-          <p:cNvPr id="6" name="Text 4"/>
-          <p:cNvSpPr/>
-          <p:nvPr/>
-        </p:nvSpPr>
-        <p:spPr>
-          <a:xfrm>
-            <a:off x="548640" y="1051560"/>
-            <a:ext cx="2651760" cy="548640"/>
-          </a:xfrm>
-          <a:prstGeom prst="rect">
-            <a:avLst/>
-          </a:prstGeom>
-          <a:noFill/>
-          <a:ln/>
-        </p:spPr>
-        <p:txBody>
-          <a:bodyPr wrap="square" lIns="0" tIns="0" rIns="0" bIns="0" rtlCol="0" anchor="ctr"/>
-          <a:lstStyle/>
-          <a:p>
-            <a:pPr algn="ctr" indent="0" marL="0">
-              <a:buNone/>
-            </a:pPr>
-            <a:r>
-              <a:rPr lang="en-US" sz="2000" b="1" dirty="0">
-                <a:solidFill>
-                  <a:srgbClr val="002D62"/>
-                </a:solidFill>
-                <a:latin typeface="Arial Black" pitchFamily="34" charset="0"/>
-                <a:ea typeface="Arial Black" pitchFamily="34" charset="-122"/>
-                <a:cs typeface="Arial Black" pitchFamily="34" charset="-120"/>
-              </a:rPr>
-              <a:t>GOLD</a:t>
-            </a:r>
-            <a:endParaRPr lang="en-US" sz="2000" dirty="0"/>
-          </a:p>
-        </p:txBody>
-      </p:sp>
-      <p:sp>
-        <p:nvSpPr>
-          <p:cNvPr id="7" name="Text 5"/>
-          <p:cNvSpPr/>
-          <p:nvPr/>
-        </p:nvSpPr>
-        <p:spPr>
-          <a:xfrm>
-            <a:off x="548640" y="1554480"/>
-            <a:ext cx="2651760" cy="502920"/>
-          </a:xfrm>
-          <a:prstGeom prst="rect">
-            <a:avLst/>
-          </a:prstGeom>
-          <a:noFill/>
-          <a:ln/>
-        </p:spPr>
-        <p:txBody>
-          <a:bodyPr wrap="square" lIns="0" tIns="0" rIns="0" bIns="0" rtlCol="0" anchor="ctr"/>
-          <a:lstStyle/>
-          <a:p>
-            <a:pPr algn="ctr" indent="0" marL="0">
-              <a:buNone/>
-            </a:pPr>
-            <a:r>
-              <a:rPr lang="en-US" sz="3200" b="1" dirty="0">
-                <a:solidFill>
-                  <a:srgbClr val="002D62"/>
-                </a:solidFill>
-                <a:latin typeface="Arial Black" pitchFamily="34" charset="0"/>
-                <a:ea typeface="Arial Black" pitchFamily="34" charset="-122"/>
-                <a:cs typeface="Arial Black" pitchFamily="34" charset="-120"/>
-              </a:rPr>
-              <a:t>$500</a:t>
-            </a:r>
-            <a:endParaRPr lang="en-US" sz="3200" dirty="0"/>
-          </a:p>
-        </p:txBody>
-      </p:sp>
-      <p:sp>
-        <p:nvSpPr>
-          <p:cNvPr id="8" name="Text 6"/>
-          <p:cNvSpPr/>
-          <p:nvPr/>
-        </p:nvSpPr>
-        <p:spPr>
-          <a:xfrm>
-            <a:off x="822960" y="2377440"/>
-            <a:ext cx="2103120" cy="411480"/>
+          <p:cNvPr id="4" name="Text 2"/>
+          <p:cNvSpPr/>
+          <p:nvPr/>
+        </p:nvSpPr>
+        <p:spPr>
+          <a:xfrm>
+            <a:off x="731520" y="777240"/>
+            <a:ext cx="7315200" cy="274320"/>
           </a:xfrm>
           <a:prstGeom prst="rect">
             <a:avLst/>
@@ -3557,582 +3333,43 @@
               <a:buNone/>
             </a:pPr>
             <a:r>
-              <a:rPr lang="en-US" sz="1100" dirty="0">
-                <a:solidFill>
-                  <a:srgbClr val="FFFFFF"/>
+              <a:rPr lang="en-US" sz="1300" dirty="0">
+                <a:solidFill>
+                  <a:srgbClr val="A0A0A0"/>
                 </a:solidFill>
                 <a:latin typeface="Arial" pitchFamily="34" charset="0"/>
                 <a:ea typeface="Arial" pitchFamily="34" charset="-122"/>
                 <a:cs typeface="Arial" pitchFamily="34" charset="-120"/>
               </a:rPr>
-              <a:t>Featured at top of card</a:t>
-            </a:r>
-            <a:endParaRPr lang="en-US" sz="1100" dirty="0"/>
-          </a:p>
-        </p:txBody>
-      </p:sp>
-      <p:sp>
-        <p:nvSpPr>
-          <p:cNvPr id="9" name="Text 7"/>
-          <p:cNvSpPr/>
-          <p:nvPr/>
-        </p:nvSpPr>
-        <p:spPr>
-          <a:xfrm>
-            <a:off x="822960" y="2880360"/>
-            <a:ext cx="2103120" cy="411480"/>
-          </a:xfrm>
-          <a:prstGeom prst="rect">
-            <a:avLst/>
-          </a:prstGeom>
-          <a:noFill/>
-          <a:ln/>
-        </p:spPr>
-        <p:txBody>
-          <a:bodyPr wrap="square" lIns="0" tIns="0" rIns="0" bIns="0" rtlCol="0" anchor="ctr"/>
-          <a:lstStyle/>
-          <a:p>
-            <a:pPr indent="0" marL="0">
-              <a:buNone/>
-            </a:pPr>
-            <a:r>
-              <a:rPr lang="en-US" sz="1100" dirty="0">
-                <a:solidFill>
-                  <a:srgbClr val="FFFFFF"/>
-                </a:solidFill>
-                <a:latin typeface="Arial" pitchFamily="34" charset="0"/>
-                <a:ea typeface="Arial" pitchFamily="34" charset="-122"/>
-                <a:cs typeface="Arial" pitchFamily="34" charset="-120"/>
-              </a:rPr>
-              <a:t>2 push promotions/month</a:t>
-            </a:r>
-            <a:endParaRPr lang="en-US" sz="1100" dirty="0"/>
-          </a:p>
-        </p:txBody>
-      </p:sp>
-      <p:sp>
-        <p:nvSpPr>
-          <p:cNvPr id="10" name="Text 8"/>
-          <p:cNvSpPr/>
-          <p:nvPr/>
-        </p:nvSpPr>
-        <p:spPr>
-          <a:xfrm>
-            <a:off x="822960" y="3383280"/>
-            <a:ext cx="2103120" cy="411480"/>
-          </a:xfrm>
-          <a:prstGeom prst="rect">
-            <a:avLst/>
-          </a:prstGeom>
-          <a:noFill/>
-          <a:ln/>
-        </p:spPr>
-        <p:txBody>
-          <a:bodyPr wrap="square" lIns="0" tIns="0" rIns="0" bIns="0" rtlCol="0" anchor="ctr"/>
-          <a:lstStyle/>
-          <a:p>
-            <a:pPr indent="0" marL="0">
-              <a:buNone/>
-            </a:pPr>
-            <a:r>
-              <a:rPr lang="en-US" sz="1100" dirty="0">
-                <a:solidFill>
-                  <a:srgbClr val="FFFFFF"/>
-                </a:solidFill>
-                <a:latin typeface="Arial" pitchFamily="34" charset="0"/>
-                <a:ea typeface="Arial" pitchFamily="34" charset="-122"/>
-                <a:cs typeface="Arial" pitchFamily="34" charset="-120"/>
-              </a:rPr>
-              <a:t>Monthly usage reports</a:t>
-            </a:r>
-            <a:endParaRPr lang="en-US" sz="1100" dirty="0"/>
-          </a:p>
-        </p:txBody>
-      </p:sp>
-      <p:sp>
-        <p:nvSpPr>
-          <p:cNvPr id="11" name="Text 9"/>
-          <p:cNvSpPr/>
-          <p:nvPr/>
-        </p:nvSpPr>
-        <p:spPr>
-          <a:xfrm>
-            <a:off x="822960" y="3886200"/>
-            <a:ext cx="2103120" cy="411480"/>
-          </a:xfrm>
-          <a:prstGeom prst="rect">
-            <a:avLst/>
-          </a:prstGeom>
-          <a:noFill/>
-          <a:ln/>
-        </p:spPr>
-        <p:txBody>
-          <a:bodyPr wrap="square" lIns="0" tIns="0" rIns="0" bIns="0" rtlCol="0" anchor="ctr"/>
-          <a:lstStyle/>
-          <a:p>
-            <a:pPr indent="0" marL="0">
-              <a:buNone/>
-            </a:pPr>
-            <a:r>
-              <a:rPr lang="en-US" sz="1100" dirty="0">
-                <a:solidFill>
-                  <a:srgbClr val="FFFFFF"/>
-                </a:solidFill>
-                <a:latin typeface="Arial" pitchFamily="34" charset="0"/>
-                <a:ea typeface="Arial" pitchFamily="34" charset="-122"/>
-                <a:cs typeface="Arial" pitchFamily="34" charset="-120"/>
-              </a:rPr>
-              <a:t>Logo on game day materials</a:t>
-            </a:r>
-            <a:endParaRPr lang="en-US" sz="1100" dirty="0"/>
-          </a:p>
-        </p:txBody>
-      </p:sp>
-      <p:sp>
-        <p:nvSpPr>
-          <p:cNvPr id="12" name="Shape 10"/>
-          <p:cNvSpPr/>
-          <p:nvPr/>
-        </p:nvSpPr>
-        <p:spPr>
-          <a:xfrm>
-            <a:off x="3429000" y="1005840"/>
-            <a:ext cx="2651760" cy="3840480"/>
-          </a:xfrm>
-          <a:prstGeom prst="rect">
-            <a:avLst/>
-          </a:prstGeom>
-          <a:solidFill>
-            <a:srgbClr val="0A1A35"/>
-          </a:solidFill>
-          <a:ln/>
-          <a:effectLst>
-            <a:outerShdw sx="100000" sy="100000" kx="0" ky="0" algn="bl" rotWithShape="0" blurRad="101600" dist="38100" dir="8100000">
-              <a:srgbClr val="000000">
-                <a:alpha val="20000"/>
-              </a:srgbClr>
-            </a:outerShdw>
-          </a:effectLst>
-        </p:spPr>
-      </p:sp>
-      <p:sp>
-        <p:nvSpPr>
-          <p:cNvPr id="13" name="Shape 11"/>
-          <p:cNvSpPr/>
-          <p:nvPr/>
-        </p:nvSpPr>
-        <p:spPr>
-          <a:xfrm>
-            <a:off x="3429000" y="1005840"/>
-            <a:ext cx="2651760" cy="1097280"/>
-          </a:xfrm>
-          <a:prstGeom prst="rect">
-            <a:avLst/>
-          </a:prstGeom>
-          <a:solidFill>
-            <a:srgbClr val="C0C0C0"/>
-          </a:solidFill>
-          <a:ln/>
-        </p:spPr>
-      </p:sp>
-      <p:sp>
-        <p:nvSpPr>
-          <p:cNvPr id="14" name="Text 12"/>
-          <p:cNvSpPr/>
-          <p:nvPr/>
-        </p:nvSpPr>
-        <p:spPr>
-          <a:xfrm>
-            <a:off x="3429000" y="1051560"/>
-            <a:ext cx="2651760" cy="548640"/>
-          </a:xfrm>
-          <a:prstGeom prst="rect">
-            <a:avLst/>
-          </a:prstGeom>
-          <a:noFill/>
-          <a:ln/>
-        </p:spPr>
-        <p:txBody>
-          <a:bodyPr wrap="square" lIns="0" tIns="0" rIns="0" bIns="0" rtlCol="0" anchor="ctr"/>
-          <a:lstStyle/>
-          <a:p>
-            <a:pPr algn="ctr" indent="0" marL="0">
-              <a:buNone/>
-            </a:pPr>
-            <a:r>
-              <a:rPr lang="en-US" sz="2000" b="1" dirty="0">
-                <a:solidFill>
-                  <a:srgbClr val="002D62"/>
-                </a:solidFill>
-                <a:latin typeface="Arial Black" pitchFamily="34" charset="0"/>
-                <a:ea typeface="Arial Black" pitchFamily="34" charset="-122"/>
-                <a:cs typeface="Arial Black" pitchFamily="34" charset="-120"/>
-              </a:rPr>
-              <a:t>SILVER</a:t>
-            </a:r>
-            <a:endParaRPr lang="en-US" sz="2000" dirty="0"/>
-          </a:p>
-        </p:txBody>
-      </p:sp>
-      <p:sp>
-        <p:nvSpPr>
-          <p:cNvPr id="15" name="Text 13"/>
-          <p:cNvSpPr/>
-          <p:nvPr/>
-        </p:nvSpPr>
-        <p:spPr>
-          <a:xfrm>
-            <a:off x="3429000" y="1554480"/>
-            <a:ext cx="2651760" cy="502920"/>
-          </a:xfrm>
-          <a:prstGeom prst="rect">
-            <a:avLst/>
-          </a:prstGeom>
-          <a:noFill/>
-          <a:ln/>
-        </p:spPr>
-        <p:txBody>
-          <a:bodyPr wrap="square" lIns="0" tIns="0" rIns="0" bIns="0" rtlCol="0" anchor="ctr"/>
-          <a:lstStyle/>
-          <a:p>
-            <a:pPr algn="ctr" indent="0" marL="0">
-              <a:buNone/>
-            </a:pPr>
-            <a:r>
-              <a:rPr lang="en-US" sz="3200" b="1" dirty="0">
-                <a:solidFill>
-                  <a:srgbClr val="002D62"/>
-                </a:solidFill>
-                <a:latin typeface="Arial Black" pitchFamily="34" charset="0"/>
-                <a:ea typeface="Arial Black" pitchFamily="34" charset="-122"/>
-                <a:cs typeface="Arial Black" pitchFamily="34" charset="-120"/>
-              </a:rPr>
-              <a:t>$250</a:t>
-            </a:r>
-            <a:endParaRPr lang="en-US" sz="3200" dirty="0"/>
-          </a:p>
-        </p:txBody>
-      </p:sp>
-      <p:sp>
-        <p:nvSpPr>
-          <p:cNvPr id="16" name="Text 14"/>
-          <p:cNvSpPr/>
-          <p:nvPr/>
-        </p:nvSpPr>
-        <p:spPr>
-          <a:xfrm>
-            <a:off x="3703320" y="2377440"/>
-            <a:ext cx="2103120" cy="411480"/>
-          </a:xfrm>
-          <a:prstGeom prst="rect">
-            <a:avLst/>
-          </a:prstGeom>
-          <a:noFill/>
-          <a:ln/>
-        </p:spPr>
-        <p:txBody>
-          <a:bodyPr wrap="square" lIns="0" tIns="0" rIns="0" bIns="0" rtlCol="0" anchor="ctr"/>
-          <a:lstStyle/>
-          <a:p>
-            <a:pPr indent="0" marL="0">
-              <a:buNone/>
-            </a:pPr>
-            <a:r>
-              <a:rPr lang="en-US" sz="1100" dirty="0">
-                <a:solidFill>
-                  <a:srgbClr val="FFFFFF"/>
-                </a:solidFill>
-                <a:latin typeface="Arial" pitchFamily="34" charset="0"/>
-                <a:ea typeface="Arial" pitchFamily="34" charset="-122"/>
-                <a:cs typeface="Arial" pitchFamily="34" charset="-120"/>
-              </a:rPr>
-              <a:t>Listed on the card</a:t>
-            </a:r>
-            <a:endParaRPr lang="en-US" sz="1100" dirty="0"/>
-          </a:p>
-        </p:txBody>
-      </p:sp>
-      <p:sp>
-        <p:nvSpPr>
-          <p:cNvPr id="17" name="Text 15"/>
-          <p:cNvSpPr/>
-          <p:nvPr/>
-        </p:nvSpPr>
-        <p:spPr>
-          <a:xfrm>
-            <a:off x="3703320" y="2880360"/>
-            <a:ext cx="2103120" cy="411480"/>
-          </a:xfrm>
-          <a:prstGeom prst="rect">
-            <a:avLst/>
-          </a:prstGeom>
-          <a:noFill/>
-          <a:ln/>
-        </p:spPr>
-        <p:txBody>
-          <a:bodyPr wrap="square" lIns="0" tIns="0" rIns="0" bIns="0" rtlCol="0" anchor="ctr"/>
-          <a:lstStyle/>
-          <a:p>
-            <a:pPr indent="0" marL="0">
-              <a:buNone/>
-            </a:pPr>
-            <a:r>
-              <a:rPr lang="en-US" sz="1100" dirty="0">
-                <a:solidFill>
-                  <a:srgbClr val="FFFFFF"/>
-                </a:solidFill>
-                <a:latin typeface="Arial" pitchFamily="34" charset="0"/>
-                <a:ea typeface="Arial" pitchFamily="34" charset="-122"/>
-                <a:cs typeface="Arial" pitchFamily="34" charset="-120"/>
-              </a:rPr>
-              <a:t>1 push promotion/month</a:t>
-            </a:r>
-            <a:endParaRPr lang="en-US" sz="1100" dirty="0"/>
-          </a:p>
-        </p:txBody>
-      </p:sp>
-      <p:sp>
-        <p:nvSpPr>
-          <p:cNvPr id="18" name="Text 16"/>
-          <p:cNvSpPr/>
-          <p:nvPr/>
-        </p:nvSpPr>
-        <p:spPr>
-          <a:xfrm>
-            <a:off x="3703320" y="3383280"/>
-            <a:ext cx="2103120" cy="411480"/>
-          </a:xfrm>
-          <a:prstGeom prst="rect">
-            <a:avLst/>
-          </a:prstGeom>
-          <a:noFill/>
-          <a:ln/>
-        </p:spPr>
-        <p:txBody>
-          <a:bodyPr wrap="square" lIns="0" tIns="0" rIns="0" bIns="0" rtlCol="0" anchor="ctr"/>
-          <a:lstStyle/>
-          <a:p>
-            <a:pPr indent="0" marL="0">
-              <a:buNone/>
-            </a:pPr>
-            <a:r>
-              <a:rPr lang="en-US" sz="1100" dirty="0">
-                <a:solidFill>
-                  <a:srgbClr val="FFFFFF"/>
-                </a:solidFill>
-                <a:latin typeface="Arial" pitchFamily="34" charset="0"/>
-                <a:ea typeface="Arial" pitchFamily="34" charset="-122"/>
-                <a:cs typeface="Arial" pitchFamily="34" charset="-120"/>
-              </a:rPr>
-              <a:t>Quarterly usage reports</a:t>
-            </a:r>
-            <a:endParaRPr lang="en-US" sz="1100" dirty="0"/>
-          </a:p>
-        </p:txBody>
-      </p:sp>
-      <p:sp>
-        <p:nvSpPr>
-          <p:cNvPr id="19" name="Shape 17"/>
-          <p:cNvSpPr/>
-          <p:nvPr/>
-        </p:nvSpPr>
-        <p:spPr>
-          <a:xfrm>
-            <a:off x="6309360" y="1005840"/>
-            <a:ext cx="2651760" cy="3840480"/>
-          </a:xfrm>
-          <a:prstGeom prst="rect">
-            <a:avLst/>
-          </a:prstGeom>
-          <a:solidFill>
-            <a:srgbClr val="0A1A35"/>
-          </a:solidFill>
-          <a:ln/>
-          <a:effectLst>
-            <a:outerShdw sx="100000" sy="100000" kx="0" ky="0" algn="bl" rotWithShape="0" blurRad="101600" dist="38100" dir="8100000">
-              <a:srgbClr val="000000">
-                <a:alpha val="20000"/>
-              </a:srgbClr>
-            </a:outerShdw>
-          </a:effectLst>
-        </p:spPr>
-      </p:sp>
-      <p:sp>
-        <p:nvSpPr>
-          <p:cNvPr id="20" name="Shape 18"/>
-          <p:cNvSpPr/>
-          <p:nvPr/>
-        </p:nvSpPr>
-        <p:spPr>
-          <a:xfrm>
-            <a:off x="6309360" y="1005840"/>
-            <a:ext cx="2651760" cy="1097280"/>
-          </a:xfrm>
-          <a:prstGeom prst="rect">
-            <a:avLst/>
-          </a:prstGeom>
-          <a:solidFill>
-            <a:srgbClr val="CD7F32"/>
-          </a:solidFill>
-          <a:ln/>
-        </p:spPr>
-      </p:sp>
-      <p:sp>
-        <p:nvSpPr>
-          <p:cNvPr id="21" name="Text 19"/>
-          <p:cNvSpPr/>
-          <p:nvPr/>
-        </p:nvSpPr>
-        <p:spPr>
-          <a:xfrm>
-            <a:off x="6309360" y="1051560"/>
-            <a:ext cx="2651760" cy="548640"/>
-          </a:xfrm>
-          <a:prstGeom prst="rect">
-            <a:avLst/>
-          </a:prstGeom>
-          <a:noFill/>
-          <a:ln/>
-        </p:spPr>
-        <p:txBody>
-          <a:bodyPr wrap="square" lIns="0" tIns="0" rIns="0" bIns="0" rtlCol="0" anchor="ctr"/>
-          <a:lstStyle/>
-          <a:p>
-            <a:pPr algn="ctr" indent="0" marL="0">
-              <a:buNone/>
-            </a:pPr>
-            <a:r>
-              <a:rPr lang="en-US" sz="2000" b="1" dirty="0">
-                <a:solidFill>
-                  <a:srgbClr val="FFFFFF"/>
-                </a:solidFill>
-                <a:latin typeface="Arial Black" pitchFamily="34" charset="0"/>
-                <a:ea typeface="Arial Black" pitchFamily="34" charset="-122"/>
-                <a:cs typeface="Arial Black" pitchFamily="34" charset="-120"/>
-              </a:rPr>
-              <a:t>BRONZE</a:t>
-            </a:r>
-            <a:endParaRPr lang="en-US" sz="2000" dirty="0"/>
-          </a:p>
-        </p:txBody>
-      </p:sp>
-      <p:sp>
-        <p:nvSpPr>
-          <p:cNvPr id="22" name="Text 20"/>
-          <p:cNvSpPr/>
-          <p:nvPr/>
-        </p:nvSpPr>
-        <p:spPr>
-          <a:xfrm>
-            <a:off x="6309360" y="1554480"/>
-            <a:ext cx="2651760" cy="502920"/>
-          </a:xfrm>
-          <a:prstGeom prst="rect">
-            <a:avLst/>
-          </a:prstGeom>
-          <a:noFill/>
-          <a:ln/>
-        </p:spPr>
-        <p:txBody>
-          <a:bodyPr wrap="square" lIns="0" tIns="0" rIns="0" bIns="0" rtlCol="0" anchor="ctr"/>
-          <a:lstStyle/>
-          <a:p>
-            <a:pPr algn="ctr" indent="0" marL="0">
-              <a:buNone/>
-            </a:pPr>
-            <a:r>
-              <a:rPr lang="en-US" sz="3200" b="1" dirty="0">
-                <a:solidFill>
-                  <a:srgbClr val="FFFFFF"/>
-                </a:solidFill>
-                <a:latin typeface="Arial Black" pitchFamily="34" charset="0"/>
-                <a:ea typeface="Arial Black" pitchFamily="34" charset="-122"/>
-                <a:cs typeface="Arial Black" pitchFamily="34" charset="-120"/>
-              </a:rPr>
-              <a:t>$100</a:t>
-            </a:r>
-            <a:endParaRPr lang="en-US" sz="3200" dirty="0"/>
-          </a:p>
-        </p:txBody>
-      </p:sp>
-      <p:sp>
-        <p:nvSpPr>
-          <p:cNvPr id="23" name="Text 21"/>
-          <p:cNvSpPr/>
-          <p:nvPr/>
-        </p:nvSpPr>
-        <p:spPr>
-          <a:xfrm>
-            <a:off x="6583680" y="2377440"/>
-            <a:ext cx="2103120" cy="411480"/>
-          </a:xfrm>
-          <a:prstGeom prst="rect">
-            <a:avLst/>
-          </a:prstGeom>
-          <a:noFill/>
-          <a:ln/>
-        </p:spPr>
-        <p:txBody>
-          <a:bodyPr wrap="square" lIns="0" tIns="0" rIns="0" bIns="0" rtlCol="0" anchor="ctr"/>
-          <a:lstStyle/>
-          <a:p>
-            <a:pPr indent="0" marL="0">
-              <a:buNone/>
-            </a:pPr>
-            <a:r>
-              <a:rPr lang="en-US" sz="1100" dirty="0">
-                <a:solidFill>
-                  <a:srgbClr val="FFFFFF"/>
-                </a:solidFill>
-                <a:latin typeface="Arial" pitchFamily="34" charset="0"/>
-                <a:ea typeface="Arial" pitchFamily="34" charset="-122"/>
-                <a:cs typeface="Arial" pitchFamily="34" charset="-120"/>
-              </a:rPr>
-              <a:t>Listed on the card</a:t>
-            </a:r>
-            <a:endParaRPr lang="en-US" sz="1100" dirty="0"/>
-          </a:p>
-        </p:txBody>
-      </p:sp>
-      <p:sp>
-        <p:nvSpPr>
-          <p:cNvPr id="24" name="Text 22"/>
-          <p:cNvSpPr/>
-          <p:nvPr/>
-        </p:nvSpPr>
-        <p:spPr>
-          <a:xfrm>
-            <a:off x="6583680" y="2880360"/>
-            <a:ext cx="2103120" cy="411480"/>
-          </a:xfrm>
-          <a:prstGeom prst="rect">
-            <a:avLst/>
-          </a:prstGeom>
-          <a:noFill/>
-          <a:ln/>
-        </p:spPr>
-        <p:txBody>
-          <a:bodyPr wrap="square" lIns="0" tIns="0" rIns="0" bIns="0" rtlCol="0" anchor="ctr"/>
-          <a:lstStyle/>
-          <a:p>
-            <a:pPr indent="0" marL="0">
-              <a:buNone/>
-            </a:pPr>
-            <a:r>
-              <a:rPr lang="en-US" sz="1100" dirty="0">
-                <a:solidFill>
-                  <a:srgbClr val="FFFFFF"/>
-                </a:solidFill>
-                <a:latin typeface="Arial" pitchFamily="34" charset="0"/>
-                <a:ea typeface="Arial" pitchFamily="34" charset="-122"/>
-                <a:cs typeface="Arial" pitchFamily="34" charset="-120"/>
-              </a:rPr>
-              <a:t>Seasonal usage reports</a:t>
-            </a:r>
-            <a:endParaRPr lang="en-US" sz="1100" dirty="0"/>
-          </a:p>
-        </p:txBody>
-      </p:sp>
+              <a:t>Each sponsor gets a private login to view their analytics.</a:t>
+            </a:r>
+            <a:endParaRPr lang="en-US" sz="1300" dirty="0"/>
+          </a:p>
+        </p:txBody>
+      </p:sp>
+      <p:pic>
+        <p:nvPicPr>
+          <p:cNvPr id="5" name="Image 0" descr="preencoded.png">    </p:cNvPr>
+          <p:cNvPicPr>
+            <a:picLocks noChangeAspect="1"/>
+          </p:cNvPicPr>
+          <p:nvPr/>
+        </p:nvPicPr>
+        <p:blipFill>
+          <a:blip r:embed="rId1"/>
+          <a:srcRect l="0" r="0" t="0" b="0"/>
+          <a:stretch/>
+        </p:blipFill>
+        <p:spPr>
+          <a:xfrm>
+            <a:off x="914400" y="1280160"/>
+            <a:ext cx="7315200" cy="3474720"/>
+          </a:xfrm>
+          <a:prstGeom prst="rect">
+            <a:avLst/>
+          </a:prstGeom>
+        </p:spPr>
+      </p:pic>
     </p:spTree>
   </p:cSld>
   <p:clrMapOvr>
@@ -4218,7 +3455,7 @@
                 <a:ea typeface="Arial Black" pitchFamily="34" charset="-122"/>
                 <a:cs typeface="Arial Black" pitchFamily="34" charset="-120"/>
               </a:rPr>
-              <a:t>HOW TO GET STARTED</a:t>
+              <a:t>CURRENT SPONSORS (2026-2027)</a:t>
             </a:r>
             <a:endParaRPr lang="en-US" sz="2800" dirty="0"/>
           </a:p>
@@ -4232,56 +3469,44 @@
         </p:nvSpPr>
         <p:spPr>
           <a:xfrm>
-            <a:off x="914400" y="1417320"/>
-            <a:ext cx="457200" cy="457200"/>
-          </a:xfrm>
-          <a:prstGeom prst="ellipse">
-            <a:avLst/>
-          </a:prstGeom>
-          <a:solidFill>
-            <a:srgbClr val="002D62"/>
-          </a:solidFill>
-          <a:ln/>
-        </p:spPr>
-      </p:sp>
-      <p:sp>
-        <p:nvSpPr>
-          <p:cNvPr id="5" name="Text 3"/>
-          <p:cNvSpPr/>
-          <p:nvPr/>
-        </p:nvSpPr>
-        <p:spPr>
-          <a:xfrm>
-            <a:off x="914400" y="1417320"/>
-            <a:ext cx="457200" cy="457200"/>
-          </a:xfrm>
-          <a:prstGeom prst="rect">
-            <a:avLst/>
-          </a:prstGeom>
-          <a:noFill/>
-          <a:ln/>
-        </p:spPr>
-        <p:txBody>
-          <a:bodyPr wrap="square" lIns="0" tIns="0" rIns="0" bIns="0" rtlCol="0" anchor="ctr"/>
-          <a:lstStyle/>
-          <a:p>
-            <a:pPr algn="ctr" indent="0" marL="0">
-              <a:buNone/>
-            </a:pPr>
-            <a:r>
-              <a:rPr lang="en-US" sz="1600" b="1" dirty="0">
-                <a:solidFill>
-                  <a:srgbClr val="C5A55A"/>
-                </a:solidFill>
-                <a:latin typeface="Arial Black" pitchFamily="34" charset="0"/>
-                <a:ea typeface="Arial Black" pitchFamily="34" charset="-122"/>
-                <a:cs typeface="Arial Black" pitchFamily="34" charset="-120"/>
-              </a:rPr>
-              <a:t>1</a:t>
-            </a:r>
-            <a:endParaRPr lang="en-US" sz="1600" dirty="0"/>
-          </a:p>
-        </p:txBody>
+            <a:off x="731520" y="1280160"/>
+            <a:ext cx="2468880" cy="640080"/>
+          </a:xfrm>
+          <a:prstGeom prst="rect">
+            <a:avLst/>
+          </a:prstGeom>
+          <a:solidFill>
+            <a:srgbClr val="F5F0E6"/>
+          </a:solidFill>
+          <a:ln/>
+          <a:effectLst>
+            <a:outerShdw sx="100000" sy="100000" kx="0" ky="0" algn="bl" rotWithShape="0" blurRad="101600" dist="38100" dir="8100000">
+              <a:srgbClr val="000000">
+                <a:alpha val="20000"/>
+              </a:srgbClr>
+            </a:outerShdw>
+          </a:effectLst>
+        </p:spPr>
+      </p:sp>
+      <p:sp>
+        <p:nvSpPr>
+          <p:cNvPr id="5" name="Shape 3"/>
+          <p:cNvSpPr/>
+          <p:nvPr/>
+        </p:nvSpPr>
+        <p:spPr>
+          <a:xfrm>
+            <a:off x="731520" y="1280160"/>
+            <a:ext cx="54864" cy="640080"/>
+          </a:xfrm>
+          <a:prstGeom prst="rect">
+            <a:avLst/>
+          </a:prstGeom>
+          <a:solidFill>
+            <a:srgbClr val="C5A55A"/>
+          </a:solidFill>
+          <a:ln/>
+        </p:spPr>
       </p:sp>
       <p:sp>
         <p:nvSpPr>
@@ -4291,8 +3516,8 @@
         </p:nvSpPr>
         <p:spPr>
           <a:xfrm>
-            <a:off x="1645920" y="1371600"/>
-            <a:ext cx="6766560" cy="548640"/>
+            <a:off x="914400" y="1280160"/>
+            <a:ext cx="2103120" cy="640080"/>
           </a:xfrm>
           <a:prstGeom prst="rect">
             <a:avLst/>
@@ -4308,17 +3533,17 @@
               <a:buNone/>
             </a:pPr>
             <a:r>
-              <a:rPr lang="en-US" sz="1500" dirty="0">
-                <a:solidFill>
-                  <a:srgbClr val="333333"/>
+              <a:rPr lang="en-US" sz="1300" b="1" dirty="0">
+                <a:solidFill>
+                  <a:srgbClr val="002D62"/>
                 </a:solidFill>
                 <a:latin typeface="Arial" pitchFamily="34" charset="0"/>
                 <a:ea typeface="Arial" pitchFamily="34" charset="-122"/>
                 <a:cs typeface="Arial" pitchFamily="34" charset="-120"/>
               </a:rPr>
-              <a:t>Choose your sponsorship tier</a:t>
-            </a:r>
-            <a:endParaRPr lang="en-US" sz="1500" dirty="0"/>
+              <a:t>Baskin Robbins</a:t>
+            </a:r>
+            <a:endParaRPr lang="en-US" sz="1300" dirty="0"/>
           </a:p>
         </p:txBody>
       </p:sp>
@@ -4330,56 +3555,44 @@
         </p:nvSpPr>
         <p:spPr>
           <a:xfrm>
-            <a:off x="914400" y="2057400"/>
-            <a:ext cx="457200" cy="457200"/>
-          </a:xfrm>
-          <a:prstGeom prst="ellipse">
-            <a:avLst/>
-          </a:prstGeom>
-          <a:solidFill>
-            <a:srgbClr val="002D62"/>
-          </a:solidFill>
-          <a:ln/>
-        </p:spPr>
-      </p:sp>
-      <p:sp>
-        <p:nvSpPr>
-          <p:cNvPr id="8" name="Text 6"/>
-          <p:cNvSpPr/>
-          <p:nvPr/>
-        </p:nvSpPr>
-        <p:spPr>
-          <a:xfrm>
-            <a:off x="914400" y="2057400"/>
-            <a:ext cx="457200" cy="457200"/>
-          </a:xfrm>
-          <a:prstGeom prst="rect">
-            <a:avLst/>
-          </a:prstGeom>
-          <a:noFill/>
-          <a:ln/>
-        </p:spPr>
-        <p:txBody>
-          <a:bodyPr wrap="square" lIns="0" tIns="0" rIns="0" bIns="0" rtlCol="0" anchor="ctr"/>
-          <a:lstStyle/>
-          <a:p>
-            <a:pPr algn="ctr" indent="0" marL="0">
-              <a:buNone/>
-            </a:pPr>
-            <a:r>
-              <a:rPr lang="en-US" sz="1600" b="1" dirty="0">
-                <a:solidFill>
-                  <a:srgbClr val="C5A55A"/>
-                </a:solidFill>
-                <a:latin typeface="Arial Black" pitchFamily="34" charset="0"/>
-                <a:ea typeface="Arial Black" pitchFamily="34" charset="-122"/>
-                <a:cs typeface="Arial Black" pitchFamily="34" charset="-120"/>
-              </a:rPr>
-              <a:t>2</a:t>
-            </a:r>
-            <a:endParaRPr lang="en-US" sz="1600" dirty="0"/>
-          </a:p>
-        </p:txBody>
+            <a:off x="3474720" y="1280160"/>
+            <a:ext cx="2468880" cy="640080"/>
+          </a:xfrm>
+          <a:prstGeom prst="rect">
+            <a:avLst/>
+          </a:prstGeom>
+          <a:solidFill>
+            <a:srgbClr val="F5F0E6"/>
+          </a:solidFill>
+          <a:ln/>
+          <a:effectLst>
+            <a:outerShdw sx="100000" sy="100000" kx="0" ky="0" algn="bl" rotWithShape="0" blurRad="101600" dist="38100" dir="8100000">
+              <a:srgbClr val="000000">
+                <a:alpha val="20000"/>
+              </a:srgbClr>
+            </a:outerShdw>
+          </a:effectLst>
+        </p:spPr>
+      </p:sp>
+      <p:sp>
+        <p:nvSpPr>
+          <p:cNvPr id="8" name="Shape 6"/>
+          <p:cNvSpPr/>
+          <p:nvPr/>
+        </p:nvSpPr>
+        <p:spPr>
+          <a:xfrm>
+            <a:off x="3474720" y="1280160"/>
+            <a:ext cx="54864" cy="640080"/>
+          </a:xfrm>
+          <a:prstGeom prst="rect">
+            <a:avLst/>
+          </a:prstGeom>
+          <a:solidFill>
+            <a:srgbClr val="C5A55A"/>
+          </a:solidFill>
+          <a:ln/>
+        </p:spPr>
       </p:sp>
       <p:sp>
         <p:nvSpPr>
@@ -4389,8 +3602,8 @@
         </p:nvSpPr>
         <p:spPr>
           <a:xfrm>
-            <a:off x="1645920" y="2011680"/>
-            <a:ext cx="6766560" cy="548640"/>
+            <a:off x="3657600" y="1280160"/>
+            <a:ext cx="2103120" cy="640080"/>
           </a:xfrm>
           <a:prstGeom prst="rect">
             <a:avLst/>
@@ -4406,17 +3619,17 @@
               <a:buNone/>
             </a:pPr>
             <a:r>
-              <a:rPr lang="en-US" sz="1500" dirty="0">
-                <a:solidFill>
-                  <a:srgbClr val="333333"/>
+              <a:rPr lang="en-US" sz="1300" b="1" dirty="0">
+                <a:solidFill>
+                  <a:srgbClr val="002D62"/>
                 </a:solidFill>
                 <a:latin typeface="Arial" pitchFamily="34" charset="0"/>
                 <a:ea typeface="Arial" pitchFamily="34" charset="-122"/>
                 <a:cs typeface="Arial" pitchFamily="34" charset="-120"/>
               </a:rPr>
-              <a:t>Tell us your discount offer</a:t>
-            </a:r>
-            <a:endParaRPr lang="en-US" sz="1500" dirty="0"/>
+              <a:t>Harland Brewing</a:t>
+            </a:r>
+            <a:endParaRPr lang="en-US" sz="1300" dirty="0"/>
           </a:p>
         </p:txBody>
       </p:sp>
@@ -4428,56 +3641,44 @@
         </p:nvSpPr>
         <p:spPr>
           <a:xfrm>
-            <a:off x="914400" y="2697480"/>
-            <a:ext cx="457200" cy="457200"/>
-          </a:xfrm>
-          <a:prstGeom prst="ellipse">
-            <a:avLst/>
-          </a:prstGeom>
-          <a:solidFill>
-            <a:srgbClr val="002D62"/>
-          </a:solidFill>
-          <a:ln/>
-        </p:spPr>
-      </p:sp>
-      <p:sp>
-        <p:nvSpPr>
-          <p:cNvPr id="11" name="Text 9"/>
-          <p:cNvSpPr/>
-          <p:nvPr/>
-        </p:nvSpPr>
-        <p:spPr>
-          <a:xfrm>
-            <a:off x="914400" y="2697480"/>
-            <a:ext cx="457200" cy="457200"/>
-          </a:xfrm>
-          <a:prstGeom prst="rect">
-            <a:avLst/>
-          </a:prstGeom>
-          <a:noFill/>
-          <a:ln/>
-        </p:spPr>
-        <p:txBody>
-          <a:bodyPr wrap="square" lIns="0" tIns="0" rIns="0" bIns="0" rtlCol="0" anchor="ctr"/>
-          <a:lstStyle/>
-          <a:p>
-            <a:pPr algn="ctr" indent="0" marL="0">
-              <a:buNone/>
-            </a:pPr>
-            <a:r>
-              <a:rPr lang="en-US" sz="1600" b="1" dirty="0">
-                <a:solidFill>
-                  <a:srgbClr val="C5A55A"/>
-                </a:solidFill>
-                <a:latin typeface="Arial Black" pitchFamily="34" charset="0"/>
-                <a:ea typeface="Arial Black" pitchFamily="34" charset="-122"/>
-                <a:cs typeface="Arial Black" pitchFamily="34" charset="-120"/>
-              </a:rPr>
-              <a:t>3</a:t>
-            </a:r>
-            <a:endParaRPr lang="en-US" sz="1600" dirty="0"/>
-          </a:p>
-        </p:txBody>
+            <a:off x="6217920" y="1280160"/>
+            <a:ext cx="2468880" cy="640080"/>
+          </a:xfrm>
+          <a:prstGeom prst="rect">
+            <a:avLst/>
+          </a:prstGeom>
+          <a:solidFill>
+            <a:srgbClr val="F5F0E6"/>
+          </a:solidFill>
+          <a:ln/>
+          <a:effectLst>
+            <a:outerShdw sx="100000" sy="100000" kx="0" ky="0" algn="bl" rotWithShape="0" blurRad="101600" dist="38100" dir="8100000">
+              <a:srgbClr val="000000">
+                <a:alpha val="20000"/>
+              </a:srgbClr>
+            </a:outerShdw>
+          </a:effectLst>
+        </p:spPr>
+      </p:sp>
+      <p:sp>
+        <p:nvSpPr>
+          <p:cNvPr id="11" name="Shape 9"/>
+          <p:cNvSpPr/>
+          <p:nvPr/>
+        </p:nvSpPr>
+        <p:spPr>
+          <a:xfrm>
+            <a:off x="6217920" y="1280160"/>
+            <a:ext cx="54864" cy="640080"/>
+          </a:xfrm>
+          <a:prstGeom prst="rect">
+            <a:avLst/>
+          </a:prstGeom>
+          <a:solidFill>
+            <a:srgbClr val="C5A55A"/>
+          </a:solidFill>
+          <a:ln/>
+        </p:spPr>
       </p:sp>
       <p:sp>
         <p:nvSpPr>
@@ -4487,8 +3688,8 @@
         </p:nvSpPr>
         <p:spPr>
           <a:xfrm>
-            <a:off x="1645920" y="2651760"/>
-            <a:ext cx="6766560" cy="548640"/>
+            <a:off x="6400800" y="1280160"/>
+            <a:ext cx="2103120" cy="640080"/>
           </a:xfrm>
           <a:prstGeom prst="rect">
             <a:avLst/>
@@ -4504,17 +3705,17 @@
               <a:buNone/>
             </a:pPr>
             <a:r>
-              <a:rPr lang="en-US" sz="1500" dirty="0">
-                <a:solidFill>
-                  <a:srgbClr val="333333"/>
+              <a:rPr lang="en-US" sz="1300" b="1" dirty="0">
+                <a:solidFill>
+                  <a:srgbClr val="002D62"/>
                 </a:solidFill>
                 <a:latin typeface="Arial" pitchFamily="34" charset="0"/>
                 <a:ea typeface="Arial" pitchFamily="34" charset="-122"/>
                 <a:cs typeface="Arial" pitchFamily="34" charset="-120"/>
               </a:rPr>
-              <a:t>We add your business to the card — live immediately</a:t>
-            </a:r>
-            <a:endParaRPr lang="en-US" sz="1500" dirty="0"/>
+              <a:t>Board &amp; Brew</a:t>
+            </a:r>
+            <a:endParaRPr lang="en-US" sz="1300" dirty="0"/>
           </a:p>
         </p:txBody>
       </p:sp>
@@ -4526,56 +3727,44 @@
         </p:nvSpPr>
         <p:spPr>
           <a:xfrm>
-            <a:off x="914400" y="3337560"/>
-            <a:ext cx="457200" cy="457200"/>
-          </a:xfrm>
-          <a:prstGeom prst="ellipse">
-            <a:avLst/>
-          </a:prstGeom>
-          <a:solidFill>
-            <a:srgbClr val="002D62"/>
-          </a:solidFill>
-          <a:ln/>
-        </p:spPr>
-      </p:sp>
-      <p:sp>
-        <p:nvSpPr>
-          <p:cNvPr id="14" name="Text 12"/>
-          <p:cNvSpPr/>
-          <p:nvPr/>
-        </p:nvSpPr>
-        <p:spPr>
-          <a:xfrm>
-            <a:off x="914400" y="3337560"/>
-            <a:ext cx="457200" cy="457200"/>
-          </a:xfrm>
-          <a:prstGeom prst="rect">
-            <a:avLst/>
-          </a:prstGeom>
-          <a:noFill/>
-          <a:ln/>
-        </p:spPr>
-        <p:txBody>
-          <a:bodyPr wrap="square" lIns="0" tIns="0" rIns="0" bIns="0" rtlCol="0" anchor="ctr"/>
-          <a:lstStyle/>
-          <a:p>
-            <a:pPr algn="ctr" indent="0" marL="0">
-              <a:buNone/>
-            </a:pPr>
-            <a:r>
-              <a:rPr lang="en-US" sz="1600" b="1" dirty="0">
-                <a:solidFill>
-                  <a:srgbClr val="C5A55A"/>
-                </a:solidFill>
-                <a:latin typeface="Arial Black" pitchFamily="34" charset="0"/>
-                <a:ea typeface="Arial Black" pitchFamily="34" charset="-122"/>
-                <a:cs typeface="Arial Black" pitchFamily="34" charset="-120"/>
-              </a:rPr>
-              <a:t>4</a:t>
-            </a:r>
-            <a:endParaRPr lang="en-US" sz="1600" dirty="0"/>
-          </a:p>
-        </p:txBody>
+            <a:off x="731520" y="2103120"/>
+            <a:ext cx="2468880" cy="640080"/>
+          </a:xfrm>
+          <a:prstGeom prst="rect">
+            <a:avLst/>
+          </a:prstGeom>
+          <a:solidFill>
+            <a:srgbClr val="F5F0E6"/>
+          </a:solidFill>
+          <a:ln/>
+          <a:effectLst>
+            <a:outerShdw sx="100000" sy="100000" kx="0" ky="0" algn="bl" rotWithShape="0" blurRad="101600" dist="38100" dir="8100000">
+              <a:srgbClr val="000000">
+                <a:alpha val="20000"/>
+              </a:srgbClr>
+            </a:outerShdw>
+          </a:effectLst>
+        </p:spPr>
+      </p:sp>
+      <p:sp>
+        <p:nvSpPr>
+          <p:cNvPr id="14" name="Shape 12"/>
+          <p:cNvSpPr/>
+          <p:nvPr/>
+        </p:nvSpPr>
+        <p:spPr>
+          <a:xfrm>
+            <a:off x="731520" y="2103120"/>
+            <a:ext cx="54864" cy="640080"/>
+          </a:xfrm>
+          <a:prstGeom prst="rect">
+            <a:avLst/>
+          </a:prstGeom>
+          <a:solidFill>
+            <a:srgbClr val="C5A55A"/>
+          </a:solidFill>
+          <a:ln/>
+        </p:spPr>
       </p:sp>
       <p:sp>
         <p:nvSpPr>
@@ -4585,8 +3774,8 @@
         </p:nvSpPr>
         <p:spPr>
           <a:xfrm>
-            <a:off x="1645920" y="3291840"/>
-            <a:ext cx="6766560" cy="548640"/>
+            <a:off x="914400" y="2103120"/>
+            <a:ext cx="2103120" cy="640080"/>
           </a:xfrm>
           <a:prstGeom prst="rect">
             <a:avLst/>
@@ -4602,17 +3791,17 @@
               <a:buNone/>
             </a:pPr>
             <a:r>
-              <a:rPr lang="en-US" sz="1500" dirty="0">
-                <a:solidFill>
-                  <a:srgbClr val="333333"/>
+              <a:rPr lang="en-US" sz="1300" b="1" dirty="0">
+                <a:solidFill>
+                  <a:srgbClr val="002D62"/>
                 </a:solidFill>
                 <a:latin typeface="Arial" pitchFamily="34" charset="0"/>
                 <a:ea typeface="Arial" pitchFamily="34" charset="-122"/>
                 <a:cs typeface="Arial" pitchFamily="34" charset="-120"/>
               </a:rPr>
-              <a:t>Existing cardholders get a push notification</a:t>
-            </a:r>
-            <a:endParaRPr lang="en-US" sz="1500" dirty="0"/>
+              <a:t>L&amp;L Hawaiian Barbecue</a:t>
+            </a:r>
+            <a:endParaRPr lang="en-US" sz="1300" dirty="0"/>
           </a:p>
         </p:txBody>
       </p:sp>
@@ -4624,56 +3813,44 @@
         </p:nvSpPr>
         <p:spPr>
           <a:xfrm>
-            <a:off x="914400" y="3977640"/>
-            <a:ext cx="457200" cy="457200"/>
-          </a:xfrm>
-          <a:prstGeom prst="ellipse">
-            <a:avLst/>
-          </a:prstGeom>
-          <a:solidFill>
-            <a:srgbClr val="002D62"/>
-          </a:solidFill>
-          <a:ln/>
-        </p:spPr>
-      </p:sp>
-      <p:sp>
-        <p:nvSpPr>
-          <p:cNvPr id="17" name="Text 15"/>
-          <p:cNvSpPr/>
-          <p:nvPr/>
-        </p:nvSpPr>
-        <p:spPr>
-          <a:xfrm>
-            <a:off x="914400" y="3977640"/>
-            <a:ext cx="457200" cy="457200"/>
-          </a:xfrm>
-          <a:prstGeom prst="rect">
-            <a:avLst/>
-          </a:prstGeom>
-          <a:noFill/>
-          <a:ln/>
-        </p:spPr>
-        <p:txBody>
-          <a:bodyPr wrap="square" lIns="0" tIns="0" rIns="0" bIns="0" rtlCol="0" anchor="ctr"/>
-          <a:lstStyle/>
-          <a:p>
-            <a:pPr algn="ctr" indent="0" marL="0">
-              <a:buNone/>
-            </a:pPr>
-            <a:r>
-              <a:rPr lang="en-US" sz="1600" b="1" dirty="0">
-                <a:solidFill>
-                  <a:srgbClr val="C5A55A"/>
-                </a:solidFill>
-                <a:latin typeface="Arial Black" pitchFamily="34" charset="0"/>
-                <a:ea typeface="Arial Black" pitchFamily="34" charset="-122"/>
-                <a:cs typeface="Arial Black" pitchFamily="34" charset="-120"/>
-              </a:rPr>
-              <a:t>5</a:t>
-            </a:r>
-            <a:endParaRPr lang="en-US" sz="1600" dirty="0"/>
-          </a:p>
-        </p:txBody>
+            <a:off x="3474720" y="2103120"/>
+            <a:ext cx="2468880" cy="640080"/>
+          </a:xfrm>
+          <a:prstGeom prst="rect">
+            <a:avLst/>
+          </a:prstGeom>
+          <a:solidFill>
+            <a:srgbClr val="F5F0E6"/>
+          </a:solidFill>
+          <a:ln/>
+          <a:effectLst>
+            <a:outerShdw sx="100000" sy="100000" kx="0" ky="0" algn="bl" rotWithShape="0" blurRad="101600" dist="38100" dir="8100000">
+              <a:srgbClr val="000000">
+                <a:alpha val="20000"/>
+              </a:srgbClr>
+            </a:outerShdw>
+          </a:effectLst>
+        </p:spPr>
+      </p:sp>
+      <p:sp>
+        <p:nvSpPr>
+          <p:cNvPr id="17" name="Shape 15"/>
+          <p:cNvSpPr/>
+          <p:nvPr/>
+        </p:nvSpPr>
+        <p:spPr>
+          <a:xfrm>
+            <a:off x="3474720" y="2103120"/>
+            <a:ext cx="54864" cy="640080"/>
+          </a:xfrm>
+          <a:prstGeom prst="rect">
+            <a:avLst/>
+          </a:prstGeom>
+          <a:solidFill>
+            <a:srgbClr val="C5A55A"/>
+          </a:solidFill>
+          <a:ln/>
+        </p:spPr>
       </p:sp>
       <p:sp>
         <p:nvSpPr>
@@ -4683,8 +3860,8 @@
         </p:nvSpPr>
         <p:spPr>
           <a:xfrm>
-            <a:off x="1645920" y="3931920"/>
-            <a:ext cx="6766560" cy="548640"/>
+            <a:off x="3657600" y="2103120"/>
+            <a:ext cx="2103120" cy="640080"/>
           </a:xfrm>
           <a:prstGeom prst="rect">
             <a:avLst/>
@@ -4700,80 +3877,572 @@
               <a:buNone/>
             </a:pPr>
             <a:r>
-              <a:rPr lang="en-US" sz="1500" dirty="0">
-                <a:solidFill>
-                  <a:srgbClr val="333333"/>
+              <a:rPr lang="en-US" sz="1300" b="1" dirty="0">
+                <a:solidFill>
+                  <a:srgbClr val="002D62"/>
                 </a:solidFill>
                 <a:latin typeface="Arial" pitchFamily="34" charset="0"/>
                 <a:ea typeface="Arial" pitchFamily="34" charset="-122"/>
                 <a:cs typeface="Arial" pitchFamily="34" charset="-120"/>
               </a:rPr>
-              <a:t>Start seeing customers with the Nighthawk Card</a:t>
-            </a:r>
-            <a:endParaRPr lang="en-US" sz="1500" dirty="0"/>
-          </a:p>
-        </p:txBody>
-      </p:sp>
-      <p:pic>
-        <p:nvPicPr>
-          <p:cNvPr id="19" name="Image 0" descr="preencoded.png">    </p:cNvPr>
-          <p:cNvPicPr>
-            <a:picLocks noChangeAspect="1"/>
-          </p:cNvPicPr>
-          <p:nvPr/>
-        </p:nvPicPr>
-        <p:blipFill>
-          <a:blip r:embed="rId1"/>
-          <a:stretch>
-            <a:fillRect/>
-          </a:stretch>
-        </p:blipFill>
-        <p:spPr>
-          <a:xfrm>
-            <a:off x="6858000" y="1280160"/>
-            <a:ext cx="1645920" cy="1645920"/>
-          </a:xfrm>
-          <a:prstGeom prst="rect">
-            <a:avLst/>
-          </a:prstGeom>
-        </p:spPr>
-      </p:pic>
-      <p:sp>
-        <p:nvSpPr>
-          <p:cNvPr id="20" name="Text 17"/>
-          <p:cNvSpPr/>
-          <p:nvPr/>
-        </p:nvSpPr>
-        <p:spPr>
-          <a:xfrm>
-            <a:off x="6858000" y="2926080"/>
-            <a:ext cx="1645920" cy="274320"/>
-          </a:xfrm>
-          <a:prstGeom prst="rect">
-            <a:avLst/>
-          </a:prstGeom>
-          <a:noFill/>
-          <a:ln/>
-        </p:spPr>
-        <p:txBody>
-          <a:bodyPr wrap="square" lIns="0" tIns="0" rIns="0" bIns="0" rtlCol="0" anchor="ctr"/>
-          <a:lstStyle/>
-          <a:p>
-            <a:pPr algn="ctr" indent="0" marL="0">
-              <a:buNone/>
-            </a:pPr>
-            <a:r>
-              <a:rPr lang="en-US" sz="900" dirty="0">
-                <a:solidFill>
-                  <a:srgbClr val="999999"/>
+              <a:t>Kahoots</a:t>
+            </a:r>
+            <a:endParaRPr lang="en-US" sz="1300" dirty="0"/>
+          </a:p>
+        </p:txBody>
+      </p:sp>
+      <p:sp>
+        <p:nvSpPr>
+          <p:cNvPr id="19" name="Shape 17"/>
+          <p:cNvSpPr/>
+          <p:nvPr/>
+        </p:nvSpPr>
+        <p:spPr>
+          <a:xfrm>
+            <a:off x="6217920" y="2103120"/>
+            <a:ext cx="2468880" cy="640080"/>
+          </a:xfrm>
+          <a:prstGeom prst="rect">
+            <a:avLst/>
+          </a:prstGeom>
+          <a:solidFill>
+            <a:srgbClr val="F5F0E6"/>
+          </a:solidFill>
+          <a:ln/>
+          <a:effectLst>
+            <a:outerShdw sx="100000" sy="100000" kx="0" ky="0" algn="bl" rotWithShape="0" blurRad="101600" dist="38100" dir="8100000">
+              <a:srgbClr val="000000">
+                <a:alpha val="20000"/>
+              </a:srgbClr>
+            </a:outerShdw>
+          </a:effectLst>
+        </p:spPr>
+      </p:sp>
+      <p:sp>
+        <p:nvSpPr>
+          <p:cNvPr id="20" name="Shape 18"/>
+          <p:cNvSpPr/>
+          <p:nvPr/>
+        </p:nvSpPr>
+        <p:spPr>
+          <a:xfrm>
+            <a:off x="6217920" y="2103120"/>
+            <a:ext cx="54864" cy="640080"/>
+          </a:xfrm>
+          <a:prstGeom prst="rect">
+            <a:avLst/>
+          </a:prstGeom>
+          <a:solidFill>
+            <a:srgbClr val="C5A55A"/>
+          </a:solidFill>
+          <a:ln/>
+        </p:spPr>
+      </p:sp>
+      <p:sp>
+        <p:nvSpPr>
+          <p:cNvPr id="21" name="Text 19"/>
+          <p:cNvSpPr/>
+          <p:nvPr/>
+        </p:nvSpPr>
+        <p:spPr>
+          <a:xfrm>
+            <a:off x="6400800" y="2103120"/>
+            <a:ext cx="2103120" cy="640080"/>
+          </a:xfrm>
+          <a:prstGeom prst="rect">
+            <a:avLst/>
+          </a:prstGeom>
+          <a:noFill/>
+          <a:ln/>
+        </p:spPr>
+        <p:txBody>
+          <a:bodyPr wrap="square" lIns="0" tIns="0" rIns="0" bIns="0" rtlCol="0" anchor="ctr"/>
+          <a:lstStyle/>
+          <a:p>
+            <a:pPr indent="0" marL="0">
+              <a:buNone/>
+            </a:pPr>
+            <a:r>
+              <a:rPr lang="en-US" sz="1300" b="1" dirty="0">
+                <a:solidFill>
+                  <a:srgbClr val="002D62"/>
                 </a:solidFill>
                 <a:latin typeface="Arial" pitchFamily="34" charset="0"/>
                 <a:ea typeface="Arial" pitchFamily="34" charset="-122"/>
                 <a:cs typeface="Arial" pitchFamily="34" charset="-120"/>
               </a:rPr>
-              <a:t>Sample QR Code</a:t>
-            </a:r>
-            <a:endParaRPr lang="en-US" sz="900" dirty="0"/>
+              <a:t>Mostra Coffee</a:t>
+            </a:r>
+            <a:endParaRPr lang="en-US" sz="1300" dirty="0"/>
+          </a:p>
+        </p:txBody>
+      </p:sp>
+      <p:sp>
+        <p:nvSpPr>
+          <p:cNvPr id="22" name="Shape 20"/>
+          <p:cNvSpPr/>
+          <p:nvPr/>
+        </p:nvSpPr>
+        <p:spPr>
+          <a:xfrm>
+            <a:off x="731520" y="2926080"/>
+            <a:ext cx="2468880" cy="640080"/>
+          </a:xfrm>
+          <a:prstGeom prst="rect">
+            <a:avLst/>
+          </a:prstGeom>
+          <a:solidFill>
+            <a:srgbClr val="F5F0E6"/>
+          </a:solidFill>
+          <a:ln/>
+          <a:effectLst>
+            <a:outerShdw sx="100000" sy="100000" kx="0" ky="0" algn="bl" rotWithShape="0" blurRad="101600" dist="38100" dir="8100000">
+              <a:srgbClr val="000000">
+                <a:alpha val="20000"/>
+              </a:srgbClr>
+            </a:outerShdw>
+          </a:effectLst>
+        </p:spPr>
+      </p:sp>
+      <p:sp>
+        <p:nvSpPr>
+          <p:cNvPr id="23" name="Shape 21"/>
+          <p:cNvSpPr/>
+          <p:nvPr/>
+        </p:nvSpPr>
+        <p:spPr>
+          <a:xfrm>
+            <a:off x="731520" y="2926080"/>
+            <a:ext cx="54864" cy="640080"/>
+          </a:xfrm>
+          <a:prstGeom prst="rect">
+            <a:avLst/>
+          </a:prstGeom>
+          <a:solidFill>
+            <a:srgbClr val="C5A55A"/>
+          </a:solidFill>
+          <a:ln/>
+        </p:spPr>
+      </p:sp>
+      <p:sp>
+        <p:nvSpPr>
+          <p:cNvPr id="24" name="Text 22"/>
+          <p:cNvSpPr/>
+          <p:nvPr/>
+        </p:nvSpPr>
+        <p:spPr>
+          <a:xfrm>
+            <a:off x="914400" y="2926080"/>
+            <a:ext cx="2103120" cy="640080"/>
+          </a:xfrm>
+          <a:prstGeom prst="rect">
+            <a:avLst/>
+          </a:prstGeom>
+          <a:noFill/>
+          <a:ln/>
+        </p:spPr>
+        <p:txBody>
+          <a:bodyPr wrap="square" lIns="0" tIns="0" rIns="0" bIns="0" rtlCol="0" anchor="ctr"/>
+          <a:lstStyle/>
+          <a:p>
+            <a:pPr indent="0" marL="0">
+              <a:buNone/>
+            </a:pPr>
+            <a:r>
+              <a:rPr lang="en-US" sz="1300" b="1" dirty="0">
+                <a:solidFill>
+                  <a:srgbClr val="002D62"/>
+                </a:solidFill>
+                <a:latin typeface="Arial" pitchFamily="34" charset="0"/>
+                <a:ea typeface="Arial" pitchFamily="34" charset="-122"/>
+                <a:cs typeface="Arial" pitchFamily="34" charset="-120"/>
+              </a:rPr>
+              <a:t>Rosinas</a:t>
+            </a:r>
+            <a:endParaRPr lang="en-US" sz="1300" dirty="0"/>
+          </a:p>
+        </p:txBody>
+      </p:sp>
+      <p:sp>
+        <p:nvSpPr>
+          <p:cNvPr id="25" name="Shape 23"/>
+          <p:cNvSpPr/>
+          <p:nvPr/>
+        </p:nvSpPr>
+        <p:spPr>
+          <a:xfrm>
+            <a:off x="3474720" y="2926080"/>
+            <a:ext cx="2468880" cy="640080"/>
+          </a:xfrm>
+          <a:prstGeom prst="rect">
+            <a:avLst/>
+          </a:prstGeom>
+          <a:solidFill>
+            <a:srgbClr val="F5F0E6"/>
+          </a:solidFill>
+          <a:ln/>
+          <a:effectLst>
+            <a:outerShdw sx="100000" sy="100000" kx="0" ky="0" algn="bl" rotWithShape="0" blurRad="101600" dist="38100" dir="8100000">
+              <a:srgbClr val="000000">
+                <a:alpha val="20000"/>
+              </a:srgbClr>
+            </a:outerShdw>
+          </a:effectLst>
+        </p:spPr>
+      </p:sp>
+      <p:sp>
+        <p:nvSpPr>
+          <p:cNvPr id="26" name="Shape 24"/>
+          <p:cNvSpPr/>
+          <p:nvPr/>
+        </p:nvSpPr>
+        <p:spPr>
+          <a:xfrm>
+            <a:off x="3474720" y="2926080"/>
+            <a:ext cx="54864" cy="640080"/>
+          </a:xfrm>
+          <a:prstGeom prst="rect">
+            <a:avLst/>
+          </a:prstGeom>
+          <a:solidFill>
+            <a:srgbClr val="C5A55A"/>
+          </a:solidFill>
+          <a:ln/>
+        </p:spPr>
+      </p:sp>
+      <p:sp>
+        <p:nvSpPr>
+          <p:cNvPr id="27" name="Text 25"/>
+          <p:cNvSpPr/>
+          <p:nvPr/>
+        </p:nvSpPr>
+        <p:spPr>
+          <a:xfrm>
+            <a:off x="3657600" y="2926080"/>
+            <a:ext cx="2103120" cy="640080"/>
+          </a:xfrm>
+          <a:prstGeom prst="rect">
+            <a:avLst/>
+          </a:prstGeom>
+          <a:noFill/>
+          <a:ln/>
+        </p:spPr>
+        <p:txBody>
+          <a:bodyPr wrap="square" lIns="0" tIns="0" rIns="0" bIns="0" rtlCol="0" anchor="ctr"/>
+          <a:lstStyle/>
+          <a:p>
+            <a:pPr indent="0" marL="0">
+              <a:buNone/>
+            </a:pPr>
+            <a:r>
+              <a:rPr lang="en-US" sz="1300" b="1" dirty="0">
+                <a:solidFill>
+                  <a:srgbClr val="002D62"/>
+                </a:solidFill>
+                <a:latin typeface="Arial" pitchFamily="34" charset="0"/>
+                <a:ea typeface="Arial" pitchFamily="34" charset="-122"/>
+                <a:cs typeface="Arial" pitchFamily="34" charset="-120"/>
+              </a:rPr>
+              <a:t>Donut Touch</a:t>
+            </a:r>
+            <a:endParaRPr lang="en-US" sz="1300" dirty="0"/>
+          </a:p>
+        </p:txBody>
+      </p:sp>
+      <p:sp>
+        <p:nvSpPr>
+          <p:cNvPr id="28" name="Shape 26"/>
+          <p:cNvSpPr/>
+          <p:nvPr/>
+        </p:nvSpPr>
+        <p:spPr>
+          <a:xfrm>
+            <a:off x="6217920" y="2926080"/>
+            <a:ext cx="2468880" cy="640080"/>
+          </a:xfrm>
+          <a:prstGeom prst="rect">
+            <a:avLst/>
+          </a:prstGeom>
+          <a:solidFill>
+            <a:srgbClr val="F5F0E6"/>
+          </a:solidFill>
+          <a:ln/>
+          <a:effectLst>
+            <a:outerShdw sx="100000" sy="100000" kx="0" ky="0" algn="bl" rotWithShape="0" blurRad="101600" dist="38100" dir="8100000">
+              <a:srgbClr val="000000">
+                <a:alpha val="20000"/>
+              </a:srgbClr>
+            </a:outerShdw>
+          </a:effectLst>
+        </p:spPr>
+      </p:sp>
+      <p:sp>
+        <p:nvSpPr>
+          <p:cNvPr id="29" name="Shape 27"/>
+          <p:cNvSpPr/>
+          <p:nvPr/>
+        </p:nvSpPr>
+        <p:spPr>
+          <a:xfrm>
+            <a:off x="6217920" y="2926080"/>
+            <a:ext cx="54864" cy="640080"/>
+          </a:xfrm>
+          <a:prstGeom prst="rect">
+            <a:avLst/>
+          </a:prstGeom>
+          <a:solidFill>
+            <a:srgbClr val="C5A55A"/>
+          </a:solidFill>
+          <a:ln/>
+        </p:spPr>
+      </p:sp>
+      <p:sp>
+        <p:nvSpPr>
+          <p:cNvPr id="30" name="Text 28"/>
+          <p:cNvSpPr/>
+          <p:nvPr/>
+        </p:nvSpPr>
+        <p:spPr>
+          <a:xfrm>
+            <a:off x="6400800" y="2926080"/>
+            <a:ext cx="2103120" cy="640080"/>
+          </a:xfrm>
+          <a:prstGeom prst="rect">
+            <a:avLst/>
+          </a:prstGeom>
+          <a:noFill/>
+          <a:ln/>
+        </p:spPr>
+        <p:txBody>
+          <a:bodyPr wrap="square" lIns="0" tIns="0" rIns="0" bIns="0" rtlCol="0" anchor="ctr"/>
+          <a:lstStyle/>
+          <a:p>
+            <a:pPr indent="0" marL="0">
+              <a:buNone/>
+            </a:pPr>
+            <a:r>
+              <a:rPr lang="en-US" sz="1300" b="1" dirty="0">
+                <a:solidFill>
+                  <a:srgbClr val="002D62"/>
+                </a:solidFill>
+                <a:latin typeface="Arial" pitchFamily="34" charset="0"/>
+                <a:ea typeface="Arial" pitchFamily="34" charset="-122"/>
+                <a:cs typeface="Arial" pitchFamily="34" charset="-120"/>
+              </a:rPr>
+              <a:t>Sushi Ren</a:t>
+            </a:r>
+            <a:endParaRPr lang="en-US" sz="1300" dirty="0"/>
+          </a:p>
+        </p:txBody>
+      </p:sp>
+      <p:sp>
+        <p:nvSpPr>
+          <p:cNvPr id="31" name="Shape 29"/>
+          <p:cNvSpPr/>
+          <p:nvPr/>
+        </p:nvSpPr>
+        <p:spPr>
+          <a:xfrm>
+            <a:off x="731520" y="3749040"/>
+            <a:ext cx="2468880" cy="640080"/>
+          </a:xfrm>
+          <a:prstGeom prst="rect">
+            <a:avLst/>
+          </a:prstGeom>
+          <a:solidFill>
+            <a:srgbClr val="F5F0E6"/>
+          </a:solidFill>
+          <a:ln/>
+          <a:effectLst>
+            <a:outerShdw sx="100000" sy="100000" kx="0" ky="0" algn="bl" rotWithShape="0" blurRad="101600" dist="38100" dir="8100000">
+              <a:srgbClr val="000000">
+                <a:alpha val="20000"/>
+              </a:srgbClr>
+            </a:outerShdw>
+          </a:effectLst>
+        </p:spPr>
+      </p:sp>
+      <p:sp>
+        <p:nvSpPr>
+          <p:cNvPr id="32" name="Shape 30"/>
+          <p:cNvSpPr/>
+          <p:nvPr/>
+        </p:nvSpPr>
+        <p:spPr>
+          <a:xfrm>
+            <a:off x="731520" y="3749040"/>
+            <a:ext cx="54864" cy="640080"/>
+          </a:xfrm>
+          <a:prstGeom prst="rect">
+            <a:avLst/>
+          </a:prstGeom>
+          <a:solidFill>
+            <a:srgbClr val="C5A55A"/>
+          </a:solidFill>
+          <a:ln/>
+        </p:spPr>
+      </p:sp>
+      <p:sp>
+        <p:nvSpPr>
+          <p:cNvPr id="33" name="Text 31"/>
+          <p:cNvSpPr/>
+          <p:nvPr/>
+        </p:nvSpPr>
+        <p:spPr>
+          <a:xfrm>
+            <a:off x="914400" y="3749040"/>
+            <a:ext cx="2103120" cy="640080"/>
+          </a:xfrm>
+          <a:prstGeom prst="rect">
+            <a:avLst/>
+          </a:prstGeom>
+          <a:noFill/>
+          <a:ln/>
+        </p:spPr>
+        <p:txBody>
+          <a:bodyPr wrap="square" lIns="0" tIns="0" rIns="0" bIns="0" rtlCol="0" anchor="ctr"/>
+          <a:lstStyle/>
+          <a:p>
+            <a:pPr indent="0" marL="0">
+              <a:buNone/>
+            </a:pPr>
+            <a:r>
+              <a:rPr lang="en-US" sz="1300" b="1" dirty="0">
+                <a:solidFill>
+                  <a:srgbClr val="002D62"/>
+                </a:solidFill>
+                <a:latin typeface="Arial" pitchFamily="34" charset="0"/>
+                <a:ea typeface="Arial" pitchFamily="34" charset="-122"/>
+                <a:cs typeface="Arial" pitchFamily="34" charset="-120"/>
+              </a:rPr>
+              <a:t>Flippin Pizza</a:t>
+            </a:r>
+            <a:endParaRPr lang="en-US" sz="1300" dirty="0"/>
+          </a:p>
+        </p:txBody>
+      </p:sp>
+      <p:sp>
+        <p:nvSpPr>
+          <p:cNvPr id="34" name="Shape 32"/>
+          <p:cNvSpPr/>
+          <p:nvPr/>
+        </p:nvSpPr>
+        <p:spPr>
+          <a:xfrm>
+            <a:off x="3474720" y="3749040"/>
+            <a:ext cx="2468880" cy="640080"/>
+          </a:xfrm>
+          <a:prstGeom prst="rect">
+            <a:avLst/>
+          </a:prstGeom>
+          <a:solidFill>
+            <a:srgbClr val="F5F0E6"/>
+          </a:solidFill>
+          <a:ln/>
+          <a:effectLst>
+            <a:outerShdw sx="100000" sy="100000" kx="0" ky="0" algn="bl" rotWithShape="0" blurRad="101600" dist="38100" dir="8100000">
+              <a:srgbClr val="000000">
+                <a:alpha val="20000"/>
+              </a:srgbClr>
+            </a:outerShdw>
+          </a:effectLst>
+        </p:spPr>
+      </p:sp>
+      <p:sp>
+        <p:nvSpPr>
+          <p:cNvPr id="35" name="Shape 33"/>
+          <p:cNvSpPr/>
+          <p:nvPr/>
+        </p:nvSpPr>
+        <p:spPr>
+          <a:xfrm>
+            <a:off x="3474720" y="3749040"/>
+            <a:ext cx="54864" cy="640080"/>
+          </a:xfrm>
+          <a:prstGeom prst="rect">
+            <a:avLst/>
+          </a:prstGeom>
+          <a:solidFill>
+            <a:srgbClr val="C5A55A"/>
+          </a:solidFill>
+          <a:ln/>
+        </p:spPr>
+      </p:sp>
+      <p:sp>
+        <p:nvSpPr>
+          <p:cNvPr id="36" name="Text 34"/>
+          <p:cNvSpPr/>
+          <p:nvPr/>
+        </p:nvSpPr>
+        <p:spPr>
+          <a:xfrm>
+            <a:off x="3657600" y="3749040"/>
+            <a:ext cx="2103120" cy="640080"/>
+          </a:xfrm>
+          <a:prstGeom prst="rect">
+            <a:avLst/>
+          </a:prstGeom>
+          <a:noFill/>
+          <a:ln/>
+        </p:spPr>
+        <p:txBody>
+          <a:bodyPr wrap="square" lIns="0" tIns="0" rIns="0" bIns="0" rtlCol="0" anchor="ctr"/>
+          <a:lstStyle/>
+          <a:p>
+            <a:pPr indent="0" marL="0">
+              <a:buNone/>
+            </a:pPr>
+            <a:r>
+              <a:rPr lang="en-US" sz="1300" b="1" dirty="0">
+                <a:solidFill>
+                  <a:srgbClr val="002D62"/>
+                </a:solidFill>
+                <a:latin typeface="Arial" pitchFamily="34" charset="0"/>
+                <a:ea typeface="Arial" pitchFamily="34" charset="-122"/>
+                <a:cs typeface="Arial" pitchFamily="34" charset="-120"/>
+              </a:rPr>
+              <a:t>Round Table Pizza</a:t>
+            </a:r>
+            <a:endParaRPr lang="en-US" sz="1300" dirty="0"/>
+          </a:p>
+        </p:txBody>
+      </p:sp>
+      <p:sp>
+        <p:nvSpPr>
+          <p:cNvPr id="37" name="Text 35"/>
+          <p:cNvSpPr/>
+          <p:nvPr/>
+        </p:nvSpPr>
+        <p:spPr>
+          <a:xfrm>
+            <a:off x="731520" y="4572000"/>
+            <a:ext cx="7680960" cy="365760"/>
+          </a:xfrm>
+          <a:prstGeom prst="rect">
+            <a:avLst/>
+          </a:prstGeom>
+          <a:noFill/>
+          <a:ln/>
+        </p:spPr>
+        <p:txBody>
+          <a:bodyPr wrap="square" lIns="0" tIns="0" rIns="0" bIns="0" rtlCol="0" anchor="ctr"/>
+          <a:lstStyle/>
+          <a:p>
+            <a:pPr indent="0" marL="0">
+              <a:buNone/>
+            </a:pPr>
+            <a:r>
+              <a:rPr lang="en-US" sz="1300" i="1" dirty="0">
+                <a:solidFill>
+                  <a:srgbClr val="888888"/>
+                </a:solidFill>
+                <a:latin typeface="Arial" pitchFamily="34" charset="0"/>
+                <a:ea typeface="Arial" pitchFamily="34" charset="-122"/>
+                <a:cs typeface="Arial" pitchFamily="34" charset="-120"/>
+              </a:rPr>
+              <a:t>Join them and put your business in front of the entire Nighthawk community.</a:t>
+            </a:r>
+            <a:endParaRPr lang="en-US" sz="1300" dirty="0"/>
           </a:p>
         </p:txBody>
       </p:sp>
@@ -4829,6 +4498,1467 @@
           <a:ln/>
         </p:spPr>
       </p:sp>
+      <p:sp>
+        <p:nvSpPr>
+          <p:cNvPr id="3" name="Text 1"/>
+          <p:cNvSpPr/>
+          <p:nvPr/>
+        </p:nvSpPr>
+        <p:spPr>
+          <a:xfrm>
+            <a:off x="731520" y="274320"/>
+            <a:ext cx="8229600" cy="548640"/>
+          </a:xfrm>
+          <a:prstGeom prst="rect">
+            <a:avLst/>
+          </a:prstGeom>
+          <a:noFill/>
+          <a:ln/>
+        </p:spPr>
+        <p:txBody>
+          <a:bodyPr wrap="square" lIns="0" tIns="0" rIns="0" bIns="0" rtlCol="0" anchor="ctr"/>
+          <a:lstStyle/>
+          <a:p>
+            <a:pPr indent="0" marL="0">
+              <a:buNone/>
+            </a:pPr>
+            <a:r>
+              <a:rPr lang="en-US" sz="2400" b="1" dirty="0">
+                <a:solidFill>
+                  <a:srgbClr val="C5A55A"/>
+                </a:solidFill>
+                <a:latin typeface="Arial Black" pitchFamily="34" charset="0"/>
+                <a:ea typeface="Arial Black" pitchFamily="34" charset="-122"/>
+                <a:cs typeface="Arial Black" pitchFamily="34" charset="-120"/>
+              </a:rPr>
+              <a:t>SPONSORSHIP TIERS</a:t>
+            </a:r>
+            <a:endParaRPr lang="en-US" sz="2400" dirty="0"/>
+          </a:p>
+        </p:txBody>
+      </p:sp>
+      <p:sp>
+        <p:nvSpPr>
+          <p:cNvPr id="4" name="Shape 2"/>
+          <p:cNvSpPr/>
+          <p:nvPr/>
+        </p:nvSpPr>
+        <p:spPr>
+          <a:xfrm>
+            <a:off x="548640" y="1005840"/>
+            <a:ext cx="2651760" cy="3840480"/>
+          </a:xfrm>
+          <a:prstGeom prst="rect">
+            <a:avLst/>
+          </a:prstGeom>
+          <a:solidFill>
+            <a:srgbClr val="0A1A35"/>
+          </a:solidFill>
+          <a:ln/>
+          <a:effectLst>
+            <a:outerShdw sx="100000" sy="100000" kx="0" ky="0" algn="bl" rotWithShape="0" blurRad="101600" dist="38100" dir="8100000">
+              <a:srgbClr val="000000">
+                <a:alpha val="20000"/>
+              </a:srgbClr>
+            </a:outerShdw>
+          </a:effectLst>
+        </p:spPr>
+      </p:sp>
+      <p:sp>
+        <p:nvSpPr>
+          <p:cNvPr id="5" name="Shape 3"/>
+          <p:cNvSpPr/>
+          <p:nvPr/>
+        </p:nvSpPr>
+        <p:spPr>
+          <a:xfrm>
+            <a:off x="548640" y="1005840"/>
+            <a:ext cx="2651760" cy="1097280"/>
+          </a:xfrm>
+          <a:prstGeom prst="rect">
+            <a:avLst/>
+          </a:prstGeom>
+          <a:solidFill>
+            <a:srgbClr val="C5A55A"/>
+          </a:solidFill>
+          <a:ln/>
+        </p:spPr>
+      </p:sp>
+      <p:sp>
+        <p:nvSpPr>
+          <p:cNvPr id="6" name="Text 4"/>
+          <p:cNvSpPr/>
+          <p:nvPr/>
+        </p:nvSpPr>
+        <p:spPr>
+          <a:xfrm>
+            <a:off x="548640" y="1051560"/>
+            <a:ext cx="2651760" cy="548640"/>
+          </a:xfrm>
+          <a:prstGeom prst="rect">
+            <a:avLst/>
+          </a:prstGeom>
+          <a:noFill/>
+          <a:ln/>
+        </p:spPr>
+        <p:txBody>
+          <a:bodyPr wrap="square" lIns="0" tIns="0" rIns="0" bIns="0" rtlCol="0" anchor="ctr"/>
+          <a:lstStyle/>
+          <a:p>
+            <a:pPr algn="ctr" indent="0" marL="0">
+              <a:buNone/>
+            </a:pPr>
+            <a:r>
+              <a:rPr lang="en-US" sz="2000" b="1" dirty="0">
+                <a:solidFill>
+                  <a:srgbClr val="002D62"/>
+                </a:solidFill>
+                <a:latin typeface="Arial Black" pitchFamily="34" charset="0"/>
+                <a:ea typeface="Arial Black" pitchFamily="34" charset="-122"/>
+                <a:cs typeface="Arial Black" pitchFamily="34" charset="-120"/>
+              </a:rPr>
+              <a:t>GOLD</a:t>
+            </a:r>
+            <a:endParaRPr lang="en-US" sz="2000" dirty="0"/>
+          </a:p>
+        </p:txBody>
+      </p:sp>
+      <p:sp>
+        <p:nvSpPr>
+          <p:cNvPr id="7" name="Text 5"/>
+          <p:cNvSpPr/>
+          <p:nvPr/>
+        </p:nvSpPr>
+        <p:spPr>
+          <a:xfrm>
+            <a:off x="548640" y="1554480"/>
+            <a:ext cx="2651760" cy="502920"/>
+          </a:xfrm>
+          <a:prstGeom prst="rect">
+            <a:avLst/>
+          </a:prstGeom>
+          <a:noFill/>
+          <a:ln/>
+        </p:spPr>
+        <p:txBody>
+          <a:bodyPr wrap="square" lIns="0" tIns="0" rIns="0" bIns="0" rtlCol="0" anchor="ctr"/>
+          <a:lstStyle/>
+          <a:p>
+            <a:pPr algn="ctr" indent="0" marL="0">
+              <a:buNone/>
+            </a:pPr>
+            <a:r>
+              <a:rPr lang="en-US" sz="3200" b="1" dirty="0">
+                <a:solidFill>
+                  <a:srgbClr val="002D62"/>
+                </a:solidFill>
+                <a:latin typeface="Arial Black" pitchFamily="34" charset="0"/>
+                <a:ea typeface="Arial Black" pitchFamily="34" charset="-122"/>
+                <a:cs typeface="Arial Black" pitchFamily="34" charset="-120"/>
+              </a:rPr>
+              <a:t>$500</a:t>
+            </a:r>
+            <a:endParaRPr lang="en-US" sz="3200" dirty="0"/>
+          </a:p>
+        </p:txBody>
+      </p:sp>
+      <p:sp>
+        <p:nvSpPr>
+          <p:cNvPr id="8" name="Text 6"/>
+          <p:cNvSpPr/>
+          <p:nvPr/>
+        </p:nvSpPr>
+        <p:spPr>
+          <a:xfrm>
+            <a:off x="822960" y="2377440"/>
+            <a:ext cx="2103120" cy="411480"/>
+          </a:xfrm>
+          <a:prstGeom prst="rect">
+            <a:avLst/>
+          </a:prstGeom>
+          <a:noFill/>
+          <a:ln/>
+        </p:spPr>
+        <p:txBody>
+          <a:bodyPr wrap="square" lIns="0" tIns="0" rIns="0" bIns="0" rtlCol="0" anchor="ctr"/>
+          <a:lstStyle/>
+          <a:p>
+            <a:pPr indent="0" marL="0">
+              <a:buNone/>
+            </a:pPr>
+            <a:r>
+              <a:rPr lang="en-US" sz="1100" dirty="0">
+                <a:solidFill>
+                  <a:srgbClr val="FFFFFF"/>
+                </a:solidFill>
+                <a:latin typeface="Arial" pitchFamily="34" charset="0"/>
+                <a:ea typeface="Arial" pitchFamily="34" charset="-122"/>
+                <a:cs typeface="Arial" pitchFamily="34" charset="-120"/>
+              </a:rPr>
+              <a:t>Featured at top of card</a:t>
+            </a:r>
+            <a:endParaRPr lang="en-US" sz="1100" dirty="0"/>
+          </a:p>
+        </p:txBody>
+      </p:sp>
+      <p:sp>
+        <p:nvSpPr>
+          <p:cNvPr id="9" name="Text 7"/>
+          <p:cNvSpPr/>
+          <p:nvPr/>
+        </p:nvSpPr>
+        <p:spPr>
+          <a:xfrm>
+            <a:off x="822960" y="2880360"/>
+            <a:ext cx="2103120" cy="411480"/>
+          </a:xfrm>
+          <a:prstGeom prst="rect">
+            <a:avLst/>
+          </a:prstGeom>
+          <a:noFill/>
+          <a:ln/>
+        </p:spPr>
+        <p:txBody>
+          <a:bodyPr wrap="square" lIns="0" tIns="0" rIns="0" bIns="0" rtlCol="0" anchor="ctr"/>
+          <a:lstStyle/>
+          <a:p>
+            <a:pPr indent="0" marL="0">
+              <a:buNone/>
+            </a:pPr>
+            <a:r>
+              <a:rPr lang="en-US" sz="1100" dirty="0">
+                <a:solidFill>
+                  <a:srgbClr val="FFFFFF"/>
+                </a:solidFill>
+                <a:latin typeface="Arial" pitchFamily="34" charset="0"/>
+                <a:ea typeface="Arial" pitchFamily="34" charset="-122"/>
+                <a:cs typeface="Arial" pitchFamily="34" charset="-120"/>
+              </a:rPr>
+              <a:t>2 push promotions/month</a:t>
+            </a:r>
+            <a:endParaRPr lang="en-US" sz="1100" dirty="0"/>
+          </a:p>
+        </p:txBody>
+      </p:sp>
+      <p:sp>
+        <p:nvSpPr>
+          <p:cNvPr id="10" name="Text 8"/>
+          <p:cNvSpPr/>
+          <p:nvPr/>
+        </p:nvSpPr>
+        <p:spPr>
+          <a:xfrm>
+            <a:off x="822960" y="3383280"/>
+            <a:ext cx="2103120" cy="411480"/>
+          </a:xfrm>
+          <a:prstGeom prst="rect">
+            <a:avLst/>
+          </a:prstGeom>
+          <a:noFill/>
+          <a:ln/>
+        </p:spPr>
+        <p:txBody>
+          <a:bodyPr wrap="square" lIns="0" tIns="0" rIns="0" bIns="0" rtlCol="0" anchor="ctr"/>
+          <a:lstStyle/>
+          <a:p>
+            <a:pPr indent="0" marL="0">
+              <a:buNone/>
+            </a:pPr>
+            <a:r>
+              <a:rPr lang="en-US" sz="1100" dirty="0">
+                <a:solidFill>
+                  <a:srgbClr val="FFFFFF"/>
+                </a:solidFill>
+                <a:latin typeface="Arial" pitchFamily="34" charset="0"/>
+                <a:ea typeface="Arial" pitchFamily="34" charset="-122"/>
+                <a:cs typeface="Arial" pitchFamily="34" charset="-120"/>
+              </a:rPr>
+              <a:t>Monthly usage reports</a:t>
+            </a:r>
+            <a:endParaRPr lang="en-US" sz="1100" dirty="0"/>
+          </a:p>
+        </p:txBody>
+      </p:sp>
+      <p:sp>
+        <p:nvSpPr>
+          <p:cNvPr id="11" name="Text 9"/>
+          <p:cNvSpPr/>
+          <p:nvPr/>
+        </p:nvSpPr>
+        <p:spPr>
+          <a:xfrm>
+            <a:off x="822960" y="3886200"/>
+            <a:ext cx="2103120" cy="411480"/>
+          </a:xfrm>
+          <a:prstGeom prst="rect">
+            <a:avLst/>
+          </a:prstGeom>
+          <a:noFill/>
+          <a:ln/>
+        </p:spPr>
+        <p:txBody>
+          <a:bodyPr wrap="square" lIns="0" tIns="0" rIns="0" bIns="0" rtlCol="0" anchor="ctr"/>
+          <a:lstStyle/>
+          <a:p>
+            <a:pPr indent="0" marL="0">
+              <a:buNone/>
+            </a:pPr>
+            <a:r>
+              <a:rPr lang="en-US" sz="1100" dirty="0">
+                <a:solidFill>
+                  <a:srgbClr val="FFFFFF"/>
+                </a:solidFill>
+                <a:latin typeface="Arial" pitchFamily="34" charset="0"/>
+                <a:ea typeface="Arial" pitchFamily="34" charset="-122"/>
+                <a:cs typeface="Arial" pitchFamily="34" charset="-120"/>
+              </a:rPr>
+              <a:t>Logo on game day materials</a:t>
+            </a:r>
+            <a:endParaRPr lang="en-US" sz="1100" dirty="0"/>
+          </a:p>
+        </p:txBody>
+      </p:sp>
+      <p:sp>
+        <p:nvSpPr>
+          <p:cNvPr id="12" name="Shape 10"/>
+          <p:cNvSpPr/>
+          <p:nvPr/>
+        </p:nvSpPr>
+        <p:spPr>
+          <a:xfrm>
+            <a:off x="3429000" y="1005840"/>
+            <a:ext cx="2651760" cy="3840480"/>
+          </a:xfrm>
+          <a:prstGeom prst="rect">
+            <a:avLst/>
+          </a:prstGeom>
+          <a:solidFill>
+            <a:srgbClr val="0A1A35"/>
+          </a:solidFill>
+          <a:ln/>
+          <a:effectLst>
+            <a:outerShdw sx="100000" sy="100000" kx="0" ky="0" algn="bl" rotWithShape="0" blurRad="101600" dist="38100" dir="8100000">
+              <a:srgbClr val="000000">
+                <a:alpha val="20000"/>
+              </a:srgbClr>
+            </a:outerShdw>
+          </a:effectLst>
+        </p:spPr>
+      </p:sp>
+      <p:sp>
+        <p:nvSpPr>
+          <p:cNvPr id="13" name="Shape 11"/>
+          <p:cNvSpPr/>
+          <p:nvPr/>
+        </p:nvSpPr>
+        <p:spPr>
+          <a:xfrm>
+            <a:off x="3429000" y="1005840"/>
+            <a:ext cx="2651760" cy="1097280"/>
+          </a:xfrm>
+          <a:prstGeom prst="rect">
+            <a:avLst/>
+          </a:prstGeom>
+          <a:solidFill>
+            <a:srgbClr val="C0C0C0"/>
+          </a:solidFill>
+          <a:ln/>
+        </p:spPr>
+      </p:sp>
+      <p:sp>
+        <p:nvSpPr>
+          <p:cNvPr id="14" name="Text 12"/>
+          <p:cNvSpPr/>
+          <p:nvPr/>
+        </p:nvSpPr>
+        <p:spPr>
+          <a:xfrm>
+            <a:off x="3429000" y="1051560"/>
+            <a:ext cx="2651760" cy="548640"/>
+          </a:xfrm>
+          <a:prstGeom prst="rect">
+            <a:avLst/>
+          </a:prstGeom>
+          <a:noFill/>
+          <a:ln/>
+        </p:spPr>
+        <p:txBody>
+          <a:bodyPr wrap="square" lIns="0" tIns="0" rIns="0" bIns="0" rtlCol="0" anchor="ctr"/>
+          <a:lstStyle/>
+          <a:p>
+            <a:pPr algn="ctr" indent="0" marL="0">
+              <a:buNone/>
+            </a:pPr>
+            <a:r>
+              <a:rPr lang="en-US" sz="2000" b="1" dirty="0">
+                <a:solidFill>
+                  <a:srgbClr val="002D62"/>
+                </a:solidFill>
+                <a:latin typeface="Arial Black" pitchFamily="34" charset="0"/>
+                <a:ea typeface="Arial Black" pitchFamily="34" charset="-122"/>
+                <a:cs typeface="Arial Black" pitchFamily="34" charset="-120"/>
+              </a:rPr>
+              <a:t>SILVER</a:t>
+            </a:r>
+            <a:endParaRPr lang="en-US" sz="2000" dirty="0"/>
+          </a:p>
+        </p:txBody>
+      </p:sp>
+      <p:sp>
+        <p:nvSpPr>
+          <p:cNvPr id="15" name="Text 13"/>
+          <p:cNvSpPr/>
+          <p:nvPr/>
+        </p:nvSpPr>
+        <p:spPr>
+          <a:xfrm>
+            <a:off x="3429000" y="1554480"/>
+            <a:ext cx="2651760" cy="502920"/>
+          </a:xfrm>
+          <a:prstGeom prst="rect">
+            <a:avLst/>
+          </a:prstGeom>
+          <a:noFill/>
+          <a:ln/>
+        </p:spPr>
+        <p:txBody>
+          <a:bodyPr wrap="square" lIns="0" tIns="0" rIns="0" bIns="0" rtlCol="0" anchor="ctr"/>
+          <a:lstStyle/>
+          <a:p>
+            <a:pPr algn="ctr" indent="0" marL="0">
+              <a:buNone/>
+            </a:pPr>
+            <a:r>
+              <a:rPr lang="en-US" sz="3200" b="1" dirty="0">
+                <a:solidFill>
+                  <a:srgbClr val="002D62"/>
+                </a:solidFill>
+                <a:latin typeface="Arial Black" pitchFamily="34" charset="0"/>
+                <a:ea typeface="Arial Black" pitchFamily="34" charset="-122"/>
+                <a:cs typeface="Arial Black" pitchFamily="34" charset="-120"/>
+              </a:rPr>
+              <a:t>$250</a:t>
+            </a:r>
+            <a:endParaRPr lang="en-US" sz="3200" dirty="0"/>
+          </a:p>
+        </p:txBody>
+      </p:sp>
+      <p:sp>
+        <p:nvSpPr>
+          <p:cNvPr id="16" name="Text 14"/>
+          <p:cNvSpPr/>
+          <p:nvPr/>
+        </p:nvSpPr>
+        <p:spPr>
+          <a:xfrm>
+            <a:off x="3703320" y="2377440"/>
+            <a:ext cx="2103120" cy="411480"/>
+          </a:xfrm>
+          <a:prstGeom prst="rect">
+            <a:avLst/>
+          </a:prstGeom>
+          <a:noFill/>
+          <a:ln/>
+        </p:spPr>
+        <p:txBody>
+          <a:bodyPr wrap="square" lIns="0" tIns="0" rIns="0" bIns="0" rtlCol="0" anchor="ctr"/>
+          <a:lstStyle/>
+          <a:p>
+            <a:pPr indent="0" marL="0">
+              <a:buNone/>
+            </a:pPr>
+            <a:r>
+              <a:rPr lang="en-US" sz="1100" dirty="0">
+                <a:solidFill>
+                  <a:srgbClr val="FFFFFF"/>
+                </a:solidFill>
+                <a:latin typeface="Arial" pitchFamily="34" charset="0"/>
+                <a:ea typeface="Arial" pitchFamily="34" charset="-122"/>
+                <a:cs typeface="Arial" pitchFamily="34" charset="-120"/>
+              </a:rPr>
+              <a:t>Listed on the card</a:t>
+            </a:r>
+            <a:endParaRPr lang="en-US" sz="1100" dirty="0"/>
+          </a:p>
+        </p:txBody>
+      </p:sp>
+      <p:sp>
+        <p:nvSpPr>
+          <p:cNvPr id="17" name="Text 15"/>
+          <p:cNvSpPr/>
+          <p:nvPr/>
+        </p:nvSpPr>
+        <p:spPr>
+          <a:xfrm>
+            <a:off x="3703320" y="2880360"/>
+            <a:ext cx="2103120" cy="411480"/>
+          </a:xfrm>
+          <a:prstGeom prst="rect">
+            <a:avLst/>
+          </a:prstGeom>
+          <a:noFill/>
+          <a:ln/>
+        </p:spPr>
+        <p:txBody>
+          <a:bodyPr wrap="square" lIns="0" tIns="0" rIns="0" bIns="0" rtlCol="0" anchor="ctr"/>
+          <a:lstStyle/>
+          <a:p>
+            <a:pPr indent="0" marL="0">
+              <a:buNone/>
+            </a:pPr>
+            <a:r>
+              <a:rPr lang="en-US" sz="1100" dirty="0">
+                <a:solidFill>
+                  <a:srgbClr val="FFFFFF"/>
+                </a:solidFill>
+                <a:latin typeface="Arial" pitchFamily="34" charset="0"/>
+                <a:ea typeface="Arial" pitchFamily="34" charset="-122"/>
+                <a:cs typeface="Arial" pitchFamily="34" charset="-120"/>
+              </a:rPr>
+              <a:t>1 push promotion/month</a:t>
+            </a:r>
+            <a:endParaRPr lang="en-US" sz="1100" dirty="0"/>
+          </a:p>
+        </p:txBody>
+      </p:sp>
+      <p:sp>
+        <p:nvSpPr>
+          <p:cNvPr id="18" name="Text 16"/>
+          <p:cNvSpPr/>
+          <p:nvPr/>
+        </p:nvSpPr>
+        <p:spPr>
+          <a:xfrm>
+            <a:off x="3703320" y="3383280"/>
+            <a:ext cx="2103120" cy="411480"/>
+          </a:xfrm>
+          <a:prstGeom prst="rect">
+            <a:avLst/>
+          </a:prstGeom>
+          <a:noFill/>
+          <a:ln/>
+        </p:spPr>
+        <p:txBody>
+          <a:bodyPr wrap="square" lIns="0" tIns="0" rIns="0" bIns="0" rtlCol="0" anchor="ctr"/>
+          <a:lstStyle/>
+          <a:p>
+            <a:pPr indent="0" marL="0">
+              <a:buNone/>
+            </a:pPr>
+            <a:r>
+              <a:rPr lang="en-US" sz="1100" dirty="0">
+                <a:solidFill>
+                  <a:srgbClr val="FFFFFF"/>
+                </a:solidFill>
+                <a:latin typeface="Arial" pitchFamily="34" charset="0"/>
+                <a:ea typeface="Arial" pitchFamily="34" charset="-122"/>
+                <a:cs typeface="Arial" pitchFamily="34" charset="-120"/>
+              </a:rPr>
+              <a:t>Quarterly usage reports</a:t>
+            </a:r>
+            <a:endParaRPr lang="en-US" sz="1100" dirty="0"/>
+          </a:p>
+        </p:txBody>
+      </p:sp>
+      <p:sp>
+        <p:nvSpPr>
+          <p:cNvPr id="19" name="Shape 17"/>
+          <p:cNvSpPr/>
+          <p:nvPr/>
+        </p:nvSpPr>
+        <p:spPr>
+          <a:xfrm>
+            <a:off x="6309360" y="1005840"/>
+            <a:ext cx="2651760" cy="3840480"/>
+          </a:xfrm>
+          <a:prstGeom prst="rect">
+            <a:avLst/>
+          </a:prstGeom>
+          <a:solidFill>
+            <a:srgbClr val="0A1A35"/>
+          </a:solidFill>
+          <a:ln/>
+          <a:effectLst>
+            <a:outerShdw sx="100000" sy="100000" kx="0" ky="0" algn="bl" rotWithShape="0" blurRad="101600" dist="38100" dir="8100000">
+              <a:srgbClr val="000000">
+                <a:alpha val="20000"/>
+              </a:srgbClr>
+            </a:outerShdw>
+          </a:effectLst>
+        </p:spPr>
+      </p:sp>
+      <p:sp>
+        <p:nvSpPr>
+          <p:cNvPr id="20" name="Shape 18"/>
+          <p:cNvSpPr/>
+          <p:nvPr/>
+        </p:nvSpPr>
+        <p:spPr>
+          <a:xfrm>
+            <a:off x="6309360" y="1005840"/>
+            <a:ext cx="2651760" cy="1097280"/>
+          </a:xfrm>
+          <a:prstGeom prst="rect">
+            <a:avLst/>
+          </a:prstGeom>
+          <a:solidFill>
+            <a:srgbClr val="CD7F32"/>
+          </a:solidFill>
+          <a:ln/>
+        </p:spPr>
+      </p:sp>
+      <p:sp>
+        <p:nvSpPr>
+          <p:cNvPr id="21" name="Text 19"/>
+          <p:cNvSpPr/>
+          <p:nvPr/>
+        </p:nvSpPr>
+        <p:spPr>
+          <a:xfrm>
+            <a:off x="6309360" y="1051560"/>
+            <a:ext cx="2651760" cy="548640"/>
+          </a:xfrm>
+          <a:prstGeom prst="rect">
+            <a:avLst/>
+          </a:prstGeom>
+          <a:noFill/>
+          <a:ln/>
+        </p:spPr>
+        <p:txBody>
+          <a:bodyPr wrap="square" lIns="0" tIns="0" rIns="0" bIns="0" rtlCol="0" anchor="ctr"/>
+          <a:lstStyle/>
+          <a:p>
+            <a:pPr algn="ctr" indent="0" marL="0">
+              <a:buNone/>
+            </a:pPr>
+            <a:r>
+              <a:rPr lang="en-US" sz="2000" b="1" dirty="0">
+                <a:solidFill>
+                  <a:srgbClr val="FFFFFF"/>
+                </a:solidFill>
+                <a:latin typeface="Arial Black" pitchFamily="34" charset="0"/>
+                <a:ea typeface="Arial Black" pitchFamily="34" charset="-122"/>
+                <a:cs typeface="Arial Black" pitchFamily="34" charset="-120"/>
+              </a:rPr>
+              <a:t>BRONZE</a:t>
+            </a:r>
+            <a:endParaRPr lang="en-US" sz="2000" dirty="0"/>
+          </a:p>
+        </p:txBody>
+      </p:sp>
+      <p:sp>
+        <p:nvSpPr>
+          <p:cNvPr id="22" name="Text 20"/>
+          <p:cNvSpPr/>
+          <p:nvPr/>
+        </p:nvSpPr>
+        <p:spPr>
+          <a:xfrm>
+            <a:off x="6309360" y="1554480"/>
+            <a:ext cx="2651760" cy="502920"/>
+          </a:xfrm>
+          <a:prstGeom prst="rect">
+            <a:avLst/>
+          </a:prstGeom>
+          <a:noFill/>
+          <a:ln/>
+        </p:spPr>
+        <p:txBody>
+          <a:bodyPr wrap="square" lIns="0" tIns="0" rIns="0" bIns="0" rtlCol="0" anchor="ctr"/>
+          <a:lstStyle/>
+          <a:p>
+            <a:pPr algn="ctr" indent="0" marL="0">
+              <a:buNone/>
+            </a:pPr>
+            <a:r>
+              <a:rPr lang="en-US" sz="3200" b="1" dirty="0">
+                <a:solidFill>
+                  <a:srgbClr val="FFFFFF"/>
+                </a:solidFill>
+                <a:latin typeface="Arial Black" pitchFamily="34" charset="0"/>
+                <a:ea typeface="Arial Black" pitchFamily="34" charset="-122"/>
+                <a:cs typeface="Arial Black" pitchFamily="34" charset="-120"/>
+              </a:rPr>
+              <a:t>$100</a:t>
+            </a:r>
+            <a:endParaRPr lang="en-US" sz="3200" dirty="0"/>
+          </a:p>
+        </p:txBody>
+      </p:sp>
+      <p:sp>
+        <p:nvSpPr>
+          <p:cNvPr id="23" name="Text 21"/>
+          <p:cNvSpPr/>
+          <p:nvPr/>
+        </p:nvSpPr>
+        <p:spPr>
+          <a:xfrm>
+            <a:off x="6583680" y="2377440"/>
+            <a:ext cx="2103120" cy="411480"/>
+          </a:xfrm>
+          <a:prstGeom prst="rect">
+            <a:avLst/>
+          </a:prstGeom>
+          <a:noFill/>
+          <a:ln/>
+        </p:spPr>
+        <p:txBody>
+          <a:bodyPr wrap="square" lIns="0" tIns="0" rIns="0" bIns="0" rtlCol="0" anchor="ctr"/>
+          <a:lstStyle/>
+          <a:p>
+            <a:pPr indent="0" marL="0">
+              <a:buNone/>
+            </a:pPr>
+            <a:r>
+              <a:rPr lang="en-US" sz="1100" dirty="0">
+                <a:solidFill>
+                  <a:srgbClr val="FFFFFF"/>
+                </a:solidFill>
+                <a:latin typeface="Arial" pitchFamily="34" charset="0"/>
+                <a:ea typeface="Arial" pitchFamily="34" charset="-122"/>
+                <a:cs typeface="Arial" pitchFamily="34" charset="-120"/>
+              </a:rPr>
+              <a:t>Listed on the card</a:t>
+            </a:r>
+            <a:endParaRPr lang="en-US" sz="1100" dirty="0"/>
+          </a:p>
+        </p:txBody>
+      </p:sp>
+      <p:sp>
+        <p:nvSpPr>
+          <p:cNvPr id="24" name="Text 22"/>
+          <p:cNvSpPr/>
+          <p:nvPr/>
+        </p:nvSpPr>
+        <p:spPr>
+          <a:xfrm>
+            <a:off x="6583680" y="2880360"/>
+            <a:ext cx="2103120" cy="411480"/>
+          </a:xfrm>
+          <a:prstGeom prst="rect">
+            <a:avLst/>
+          </a:prstGeom>
+          <a:noFill/>
+          <a:ln/>
+        </p:spPr>
+        <p:txBody>
+          <a:bodyPr wrap="square" lIns="0" tIns="0" rIns="0" bIns="0" rtlCol="0" anchor="ctr"/>
+          <a:lstStyle/>
+          <a:p>
+            <a:pPr indent="0" marL="0">
+              <a:buNone/>
+            </a:pPr>
+            <a:r>
+              <a:rPr lang="en-US" sz="1100" dirty="0">
+                <a:solidFill>
+                  <a:srgbClr val="FFFFFF"/>
+                </a:solidFill>
+                <a:latin typeface="Arial" pitchFamily="34" charset="0"/>
+                <a:ea typeface="Arial" pitchFamily="34" charset="-122"/>
+                <a:cs typeface="Arial" pitchFamily="34" charset="-120"/>
+              </a:rPr>
+              <a:t>Seasonal usage reports</a:t>
+            </a:r>
+            <a:endParaRPr lang="en-US" sz="1100" dirty="0"/>
+          </a:p>
+        </p:txBody>
+      </p:sp>
+    </p:spTree>
+  </p:cSld>
+  <p:clrMapOvr>
+    <a:masterClrMapping/>
+  </p:clrMapOvr>
+</p:sld>
+</file>
+
+<file path=ppt/slides/slide14.xml><?xml version="1.0" encoding="utf-8"?>
+<p:sld xmlns:a="http://schemas.openxmlformats.org/drawingml/2006/main" xmlns:r="http://schemas.openxmlformats.org/officeDocument/2006/relationships" xmlns:p="http://schemas.openxmlformats.org/presentationml/2006/main">
+  <p:cSld name="Slide 14">
+    <p:bg>
+      <p:bgPr>
+        <a:solidFill>
+          <a:srgbClr val="FFFFFF"/>
+        </a:solidFill>
+      </p:bgPr>
+    </p:bg>
+    <p:spTree>
+      <p:nvGrpSpPr>
+        <p:cNvPr id="1" name=""/>
+        <p:cNvGrpSpPr/>
+        <p:nvPr/>
+      </p:nvGrpSpPr>
+      <p:grpSpPr>
+        <a:xfrm>
+          <a:off x="0" y="0"/>
+          <a:ext cx="0" cy="0"/>
+          <a:chOff x="0" y="0"/>
+          <a:chExt cx="0" cy="0"/>
+        </a:xfrm>
+      </p:grpSpPr>
+      <p:sp>
+        <p:nvSpPr>
+          <p:cNvPr id="2" name="Shape 0"/>
+          <p:cNvSpPr/>
+          <p:nvPr/>
+        </p:nvSpPr>
+        <p:spPr>
+          <a:xfrm>
+            <a:off x="0" y="0"/>
+            <a:ext cx="9144000" cy="1005840"/>
+          </a:xfrm>
+          <a:prstGeom prst="rect">
+            <a:avLst/>
+          </a:prstGeom>
+          <a:solidFill>
+            <a:srgbClr val="002D62"/>
+          </a:solidFill>
+          <a:ln/>
+        </p:spPr>
+      </p:sp>
+      <p:sp>
+        <p:nvSpPr>
+          <p:cNvPr id="3" name="Text 1"/>
+          <p:cNvSpPr/>
+          <p:nvPr/>
+        </p:nvSpPr>
+        <p:spPr>
+          <a:xfrm>
+            <a:off x="731520" y="228600"/>
+            <a:ext cx="7315200" cy="548640"/>
+          </a:xfrm>
+          <a:prstGeom prst="rect">
+            <a:avLst/>
+          </a:prstGeom>
+          <a:noFill/>
+          <a:ln/>
+        </p:spPr>
+        <p:txBody>
+          <a:bodyPr wrap="square" lIns="0" tIns="0" rIns="0" bIns="0" rtlCol="0" anchor="ctr"/>
+          <a:lstStyle/>
+          <a:p>
+            <a:pPr indent="0" marL="0">
+              <a:buNone/>
+            </a:pPr>
+            <a:r>
+              <a:rPr lang="en-US" sz="2800" b="1" dirty="0">
+                <a:solidFill>
+                  <a:srgbClr val="C5A55A"/>
+                </a:solidFill>
+                <a:latin typeface="Arial Black" pitchFamily="34" charset="0"/>
+                <a:ea typeface="Arial Black" pitchFamily="34" charset="-122"/>
+                <a:cs typeface="Arial Black" pitchFamily="34" charset="-120"/>
+              </a:rPr>
+              <a:t>HOW TO GET STARTED</a:t>
+            </a:r>
+            <a:endParaRPr lang="en-US" sz="2800" dirty="0"/>
+          </a:p>
+        </p:txBody>
+      </p:sp>
+      <p:sp>
+        <p:nvSpPr>
+          <p:cNvPr id="4" name="Shape 2"/>
+          <p:cNvSpPr/>
+          <p:nvPr/>
+        </p:nvSpPr>
+        <p:spPr>
+          <a:xfrm>
+            <a:off x="914400" y="1417320"/>
+            <a:ext cx="457200" cy="457200"/>
+          </a:xfrm>
+          <a:prstGeom prst="ellipse">
+            <a:avLst/>
+          </a:prstGeom>
+          <a:solidFill>
+            <a:srgbClr val="002D62"/>
+          </a:solidFill>
+          <a:ln/>
+        </p:spPr>
+      </p:sp>
+      <p:sp>
+        <p:nvSpPr>
+          <p:cNvPr id="5" name="Text 3"/>
+          <p:cNvSpPr/>
+          <p:nvPr/>
+        </p:nvSpPr>
+        <p:spPr>
+          <a:xfrm>
+            <a:off x="914400" y="1417320"/>
+            <a:ext cx="457200" cy="457200"/>
+          </a:xfrm>
+          <a:prstGeom prst="rect">
+            <a:avLst/>
+          </a:prstGeom>
+          <a:noFill/>
+          <a:ln/>
+        </p:spPr>
+        <p:txBody>
+          <a:bodyPr wrap="square" lIns="0" tIns="0" rIns="0" bIns="0" rtlCol="0" anchor="ctr"/>
+          <a:lstStyle/>
+          <a:p>
+            <a:pPr algn="ctr" indent="0" marL="0">
+              <a:buNone/>
+            </a:pPr>
+            <a:r>
+              <a:rPr lang="en-US" sz="1600" b="1" dirty="0">
+                <a:solidFill>
+                  <a:srgbClr val="C5A55A"/>
+                </a:solidFill>
+                <a:latin typeface="Arial Black" pitchFamily="34" charset="0"/>
+                <a:ea typeface="Arial Black" pitchFamily="34" charset="-122"/>
+                <a:cs typeface="Arial Black" pitchFamily="34" charset="-120"/>
+              </a:rPr>
+              <a:t>1</a:t>
+            </a:r>
+            <a:endParaRPr lang="en-US" sz="1600" dirty="0"/>
+          </a:p>
+        </p:txBody>
+      </p:sp>
+      <p:sp>
+        <p:nvSpPr>
+          <p:cNvPr id="6" name="Text 4"/>
+          <p:cNvSpPr/>
+          <p:nvPr/>
+        </p:nvSpPr>
+        <p:spPr>
+          <a:xfrm>
+            <a:off x="1645920" y="1371600"/>
+            <a:ext cx="6766560" cy="548640"/>
+          </a:xfrm>
+          <a:prstGeom prst="rect">
+            <a:avLst/>
+          </a:prstGeom>
+          <a:noFill/>
+          <a:ln/>
+        </p:spPr>
+        <p:txBody>
+          <a:bodyPr wrap="square" lIns="0" tIns="0" rIns="0" bIns="0" rtlCol="0" anchor="ctr"/>
+          <a:lstStyle/>
+          <a:p>
+            <a:pPr indent="0" marL="0">
+              <a:buNone/>
+            </a:pPr>
+            <a:r>
+              <a:rPr lang="en-US" sz="1500" dirty="0">
+                <a:solidFill>
+                  <a:srgbClr val="333333"/>
+                </a:solidFill>
+                <a:latin typeface="Arial" pitchFamily="34" charset="0"/>
+                <a:ea typeface="Arial" pitchFamily="34" charset="-122"/>
+                <a:cs typeface="Arial" pitchFamily="34" charset="-120"/>
+              </a:rPr>
+              <a:t>Choose your sponsorship tier</a:t>
+            </a:r>
+            <a:endParaRPr lang="en-US" sz="1500" dirty="0"/>
+          </a:p>
+        </p:txBody>
+      </p:sp>
+      <p:sp>
+        <p:nvSpPr>
+          <p:cNvPr id="7" name="Shape 5"/>
+          <p:cNvSpPr/>
+          <p:nvPr/>
+        </p:nvSpPr>
+        <p:spPr>
+          <a:xfrm>
+            <a:off x="914400" y="2057400"/>
+            <a:ext cx="457200" cy="457200"/>
+          </a:xfrm>
+          <a:prstGeom prst="ellipse">
+            <a:avLst/>
+          </a:prstGeom>
+          <a:solidFill>
+            <a:srgbClr val="002D62"/>
+          </a:solidFill>
+          <a:ln/>
+        </p:spPr>
+      </p:sp>
+      <p:sp>
+        <p:nvSpPr>
+          <p:cNvPr id="8" name="Text 6"/>
+          <p:cNvSpPr/>
+          <p:nvPr/>
+        </p:nvSpPr>
+        <p:spPr>
+          <a:xfrm>
+            <a:off x="914400" y="2057400"/>
+            <a:ext cx="457200" cy="457200"/>
+          </a:xfrm>
+          <a:prstGeom prst="rect">
+            <a:avLst/>
+          </a:prstGeom>
+          <a:noFill/>
+          <a:ln/>
+        </p:spPr>
+        <p:txBody>
+          <a:bodyPr wrap="square" lIns="0" tIns="0" rIns="0" bIns="0" rtlCol="0" anchor="ctr"/>
+          <a:lstStyle/>
+          <a:p>
+            <a:pPr algn="ctr" indent="0" marL="0">
+              <a:buNone/>
+            </a:pPr>
+            <a:r>
+              <a:rPr lang="en-US" sz="1600" b="1" dirty="0">
+                <a:solidFill>
+                  <a:srgbClr val="C5A55A"/>
+                </a:solidFill>
+                <a:latin typeface="Arial Black" pitchFamily="34" charset="0"/>
+                <a:ea typeface="Arial Black" pitchFamily="34" charset="-122"/>
+                <a:cs typeface="Arial Black" pitchFamily="34" charset="-120"/>
+              </a:rPr>
+              <a:t>2</a:t>
+            </a:r>
+            <a:endParaRPr lang="en-US" sz="1600" dirty="0"/>
+          </a:p>
+        </p:txBody>
+      </p:sp>
+      <p:sp>
+        <p:nvSpPr>
+          <p:cNvPr id="9" name="Text 7"/>
+          <p:cNvSpPr/>
+          <p:nvPr/>
+        </p:nvSpPr>
+        <p:spPr>
+          <a:xfrm>
+            <a:off x="1645920" y="2011680"/>
+            <a:ext cx="6766560" cy="548640"/>
+          </a:xfrm>
+          <a:prstGeom prst="rect">
+            <a:avLst/>
+          </a:prstGeom>
+          <a:noFill/>
+          <a:ln/>
+        </p:spPr>
+        <p:txBody>
+          <a:bodyPr wrap="square" lIns="0" tIns="0" rIns="0" bIns="0" rtlCol="0" anchor="ctr"/>
+          <a:lstStyle/>
+          <a:p>
+            <a:pPr indent="0" marL="0">
+              <a:buNone/>
+            </a:pPr>
+            <a:r>
+              <a:rPr lang="en-US" sz="1500" dirty="0">
+                <a:solidFill>
+                  <a:srgbClr val="333333"/>
+                </a:solidFill>
+                <a:latin typeface="Arial" pitchFamily="34" charset="0"/>
+                <a:ea typeface="Arial" pitchFamily="34" charset="-122"/>
+                <a:cs typeface="Arial" pitchFamily="34" charset="-120"/>
+              </a:rPr>
+              <a:t>Tell us your discount offer</a:t>
+            </a:r>
+            <a:endParaRPr lang="en-US" sz="1500" dirty="0"/>
+          </a:p>
+        </p:txBody>
+      </p:sp>
+      <p:sp>
+        <p:nvSpPr>
+          <p:cNvPr id="10" name="Shape 8"/>
+          <p:cNvSpPr/>
+          <p:nvPr/>
+        </p:nvSpPr>
+        <p:spPr>
+          <a:xfrm>
+            <a:off x="914400" y="2697480"/>
+            <a:ext cx="457200" cy="457200"/>
+          </a:xfrm>
+          <a:prstGeom prst="ellipse">
+            <a:avLst/>
+          </a:prstGeom>
+          <a:solidFill>
+            <a:srgbClr val="002D62"/>
+          </a:solidFill>
+          <a:ln/>
+        </p:spPr>
+      </p:sp>
+      <p:sp>
+        <p:nvSpPr>
+          <p:cNvPr id="11" name="Text 9"/>
+          <p:cNvSpPr/>
+          <p:nvPr/>
+        </p:nvSpPr>
+        <p:spPr>
+          <a:xfrm>
+            <a:off x="914400" y="2697480"/>
+            <a:ext cx="457200" cy="457200"/>
+          </a:xfrm>
+          <a:prstGeom prst="rect">
+            <a:avLst/>
+          </a:prstGeom>
+          <a:noFill/>
+          <a:ln/>
+        </p:spPr>
+        <p:txBody>
+          <a:bodyPr wrap="square" lIns="0" tIns="0" rIns="0" bIns="0" rtlCol="0" anchor="ctr"/>
+          <a:lstStyle/>
+          <a:p>
+            <a:pPr algn="ctr" indent="0" marL="0">
+              <a:buNone/>
+            </a:pPr>
+            <a:r>
+              <a:rPr lang="en-US" sz="1600" b="1" dirty="0">
+                <a:solidFill>
+                  <a:srgbClr val="C5A55A"/>
+                </a:solidFill>
+                <a:latin typeface="Arial Black" pitchFamily="34" charset="0"/>
+                <a:ea typeface="Arial Black" pitchFamily="34" charset="-122"/>
+                <a:cs typeface="Arial Black" pitchFamily="34" charset="-120"/>
+              </a:rPr>
+              <a:t>3</a:t>
+            </a:r>
+            <a:endParaRPr lang="en-US" sz="1600" dirty="0"/>
+          </a:p>
+        </p:txBody>
+      </p:sp>
+      <p:sp>
+        <p:nvSpPr>
+          <p:cNvPr id="12" name="Text 10"/>
+          <p:cNvSpPr/>
+          <p:nvPr/>
+        </p:nvSpPr>
+        <p:spPr>
+          <a:xfrm>
+            <a:off x="1645920" y="2651760"/>
+            <a:ext cx="6766560" cy="548640"/>
+          </a:xfrm>
+          <a:prstGeom prst="rect">
+            <a:avLst/>
+          </a:prstGeom>
+          <a:noFill/>
+          <a:ln/>
+        </p:spPr>
+        <p:txBody>
+          <a:bodyPr wrap="square" lIns="0" tIns="0" rIns="0" bIns="0" rtlCol="0" anchor="ctr"/>
+          <a:lstStyle/>
+          <a:p>
+            <a:pPr indent="0" marL="0">
+              <a:buNone/>
+            </a:pPr>
+            <a:r>
+              <a:rPr lang="en-US" sz="1500" dirty="0">
+                <a:solidFill>
+                  <a:srgbClr val="333333"/>
+                </a:solidFill>
+                <a:latin typeface="Arial" pitchFamily="34" charset="0"/>
+                <a:ea typeface="Arial" pitchFamily="34" charset="-122"/>
+                <a:cs typeface="Arial" pitchFamily="34" charset="-120"/>
+              </a:rPr>
+              <a:t>We add your business to the card — live immediately</a:t>
+            </a:r>
+            <a:endParaRPr lang="en-US" sz="1500" dirty="0"/>
+          </a:p>
+        </p:txBody>
+      </p:sp>
+      <p:sp>
+        <p:nvSpPr>
+          <p:cNvPr id="13" name="Shape 11"/>
+          <p:cNvSpPr/>
+          <p:nvPr/>
+        </p:nvSpPr>
+        <p:spPr>
+          <a:xfrm>
+            <a:off x="914400" y="3337560"/>
+            <a:ext cx="457200" cy="457200"/>
+          </a:xfrm>
+          <a:prstGeom prst="ellipse">
+            <a:avLst/>
+          </a:prstGeom>
+          <a:solidFill>
+            <a:srgbClr val="002D62"/>
+          </a:solidFill>
+          <a:ln/>
+        </p:spPr>
+      </p:sp>
+      <p:sp>
+        <p:nvSpPr>
+          <p:cNvPr id="14" name="Text 12"/>
+          <p:cNvSpPr/>
+          <p:nvPr/>
+        </p:nvSpPr>
+        <p:spPr>
+          <a:xfrm>
+            <a:off x="914400" y="3337560"/>
+            <a:ext cx="457200" cy="457200"/>
+          </a:xfrm>
+          <a:prstGeom prst="rect">
+            <a:avLst/>
+          </a:prstGeom>
+          <a:noFill/>
+          <a:ln/>
+        </p:spPr>
+        <p:txBody>
+          <a:bodyPr wrap="square" lIns="0" tIns="0" rIns="0" bIns="0" rtlCol="0" anchor="ctr"/>
+          <a:lstStyle/>
+          <a:p>
+            <a:pPr algn="ctr" indent="0" marL="0">
+              <a:buNone/>
+            </a:pPr>
+            <a:r>
+              <a:rPr lang="en-US" sz="1600" b="1" dirty="0">
+                <a:solidFill>
+                  <a:srgbClr val="C5A55A"/>
+                </a:solidFill>
+                <a:latin typeface="Arial Black" pitchFamily="34" charset="0"/>
+                <a:ea typeface="Arial Black" pitchFamily="34" charset="-122"/>
+                <a:cs typeface="Arial Black" pitchFamily="34" charset="-120"/>
+              </a:rPr>
+              <a:t>4</a:t>
+            </a:r>
+            <a:endParaRPr lang="en-US" sz="1600" dirty="0"/>
+          </a:p>
+        </p:txBody>
+      </p:sp>
+      <p:sp>
+        <p:nvSpPr>
+          <p:cNvPr id="15" name="Text 13"/>
+          <p:cNvSpPr/>
+          <p:nvPr/>
+        </p:nvSpPr>
+        <p:spPr>
+          <a:xfrm>
+            <a:off x="1645920" y="3291840"/>
+            <a:ext cx="6766560" cy="548640"/>
+          </a:xfrm>
+          <a:prstGeom prst="rect">
+            <a:avLst/>
+          </a:prstGeom>
+          <a:noFill/>
+          <a:ln/>
+        </p:spPr>
+        <p:txBody>
+          <a:bodyPr wrap="square" lIns="0" tIns="0" rIns="0" bIns="0" rtlCol="0" anchor="ctr"/>
+          <a:lstStyle/>
+          <a:p>
+            <a:pPr indent="0" marL="0">
+              <a:buNone/>
+            </a:pPr>
+            <a:r>
+              <a:rPr lang="en-US" sz="1500" dirty="0">
+                <a:solidFill>
+                  <a:srgbClr val="333333"/>
+                </a:solidFill>
+                <a:latin typeface="Arial" pitchFamily="34" charset="0"/>
+                <a:ea typeface="Arial" pitchFamily="34" charset="-122"/>
+                <a:cs typeface="Arial" pitchFamily="34" charset="-120"/>
+              </a:rPr>
+              <a:t>Existing cardholders get a push notification</a:t>
+            </a:r>
+            <a:endParaRPr lang="en-US" sz="1500" dirty="0"/>
+          </a:p>
+        </p:txBody>
+      </p:sp>
+      <p:sp>
+        <p:nvSpPr>
+          <p:cNvPr id="16" name="Shape 14"/>
+          <p:cNvSpPr/>
+          <p:nvPr/>
+        </p:nvSpPr>
+        <p:spPr>
+          <a:xfrm>
+            <a:off x="914400" y="3977640"/>
+            <a:ext cx="457200" cy="457200"/>
+          </a:xfrm>
+          <a:prstGeom prst="ellipse">
+            <a:avLst/>
+          </a:prstGeom>
+          <a:solidFill>
+            <a:srgbClr val="002D62"/>
+          </a:solidFill>
+          <a:ln/>
+        </p:spPr>
+      </p:sp>
+      <p:sp>
+        <p:nvSpPr>
+          <p:cNvPr id="17" name="Text 15"/>
+          <p:cNvSpPr/>
+          <p:nvPr/>
+        </p:nvSpPr>
+        <p:spPr>
+          <a:xfrm>
+            <a:off x="914400" y="3977640"/>
+            <a:ext cx="457200" cy="457200"/>
+          </a:xfrm>
+          <a:prstGeom prst="rect">
+            <a:avLst/>
+          </a:prstGeom>
+          <a:noFill/>
+          <a:ln/>
+        </p:spPr>
+        <p:txBody>
+          <a:bodyPr wrap="square" lIns="0" tIns="0" rIns="0" bIns="0" rtlCol="0" anchor="ctr"/>
+          <a:lstStyle/>
+          <a:p>
+            <a:pPr algn="ctr" indent="0" marL="0">
+              <a:buNone/>
+            </a:pPr>
+            <a:r>
+              <a:rPr lang="en-US" sz="1600" b="1" dirty="0">
+                <a:solidFill>
+                  <a:srgbClr val="C5A55A"/>
+                </a:solidFill>
+                <a:latin typeface="Arial Black" pitchFamily="34" charset="0"/>
+                <a:ea typeface="Arial Black" pitchFamily="34" charset="-122"/>
+                <a:cs typeface="Arial Black" pitchFamily="34" charset="-120"/>
+              </a:rPr>
+              <a:t>5</a:t>
+            </a:r>
+            <a:endParaRPr lang="en-US" sz="1600" dirty="0"/>
+          </a:p>
+        </p:txBody>
+      </p:sp>
+      <p:sp>
+        <p:nvSpPr>
+          <p:cNvPr id="18" name="Text 16"/>
+          <p:cNvSpPr/>
+          <p:nvPr/>
+        </p:nvSpPr>
+        <p:spPr>
+          <a:xfrm>
+            <a:off x="1645920" y="3931920"/>
+            <a:ext cx="6766560" cy="548640"/>
+          </a:xfrm>
+          <a:prstGeom prst="rect">
+            <a:avLst/>
+          </a:prstGeom>
+          <a:noFill/>
+          <a:ln/>
+        </p:spPr>
+        <p:txBody>
+          <a:bodyPr wrap="square" lIns="0" tIns="0" rIns="0" bIns="0" rtlCol="0" anchor="ctr"/>
+          <a:lstStyle/>
+          <a:p>
+            <a:pPr indent="0" marL="0">
+              <a:buNone/>
+            </a:pPr>
+            <a:r>
+              <a:rPr lang="en-US" sz="1500" dirty="0">
+                <a:solidFill>
+                  <a:srgbClr val="333333"/>
+                </a:solidFill>
+                <a:latin typeface="Arial" pitchFamily="34" charset="0"/>
+                <a:ea typeface="Arial" pitchFamily="34" charset="-122"/>
+                <a:cs typeface="Arial" pitchFamily="34" charset="-120"/>
+              </a:rPr>
+              <a:t>Start seeing customers with the Nighthawk Card</a:t>
+            </a:r>
+            <a:endParaRPr lang="en-US" sz="1500" dirty="0"/>
+          </a:p>
+        </p:txBody>
+      </p:sp>
+      <p:pic>
+        <p:nvPicPr>
+          <p:cNvPr id="19" name="Image 0" descr="preencoded.png">    </p:cNvPr>
+          <p:cNvPicPr>
+            <a:picLocks noChangeAspect="1"/>
+          </p:cNvPicPr>
+          <p:nvPr/>
+        </p:nvPicPr>
+        <p:blipFill>
+          <a:blip r:embed="rId1"/>
+          <a:stretch>
+            <a:fillRect/>
+          </a:stretch>
+        </p:blipFill>
+        <p:spPr>
+          <a:xfrm>
+            <a:off x="6858000" y="1280160"/>
+            <a:ext cx="1645920" cy="1645920"/>
+          </a:xfrm>
+          <a:prstGeom prst="rect">
+            <a:avLst/>
+          </a:prstGeom>
+        </p:spPr>
+      </p:pic>
+      <p:sp>
+        <p:nvSpPr>
+          <p:cNvPr id="20" name="Text 17"/>
+          <p:cNvSpPr/>
+          <p:nvPr/>
+        </p:nvSpPr>
+        <p:spPr>
+          <a:xfrm>
+            <a:off x="6858000" y="2926080"/>
+            <a:ext cx="1645920" cy="274320"/>
+          </a:xfrm>
+          <a:prstGeom prst="rect">
+            <a:avLst/>
+          </a:prstGeom>
+          <a:noFill/>
+          <a:ln/>
+        </p:spPr>
+        <p:txBody>
+          <a:bodyPr wrap="square" lIns="0" tIns="0" rIns="0" bIns="0" rtlCol="0" anchor="ctr"/>
+          <a:lstStyle/>
+          <a:p>
+            <a:pPr algn="ctr" indent="0" marL="0">
+              <a:buNone/>
+            </a:pPr>
+            <a:r>
+              <a:rPr lang="en-US" sz="900" dirty="0">
+                <a:solidFill>
+                  <a:srgbClr val="999999"/>
+                </a:solidFill>
+                <a:latin typeface="Arial" pitchFamily="34" charset="0"/>
+                <a:ea typeface="Arial" pitchFamily="34" charset="-122"/>
+                <a:cs typeface="Arial" pitchFamily="34" charset="-120"/>
+              </a:rPr>
+              <a:t>Sample QR Code</a:t>
+            </a:r>
+            <a:endParaRPr lang="en-US" sz="900" dirty="0"/>
+          </a:p>
+        </p:txBody>
+      </p:sp>
+    </p:spTree>
+  </p:cSld>
+  <p:clrMapOvr>
+    <a:masterClrMapping/>
+  </p:clrMapOvr>
+</p:sld>
+</file>
+
+<file path=ppt/slides/slide15.xml><?xml version="1.0" encoding="utf-8"?>
+<p:sld xmlns:a="http://schemas.openxmlformats.org/drawingml/2006/main" xmlns:r="http://schemas.openxmlformats.org/officeDocument/2006/relationships" xmlns:p="http://schemas.openxmlformats.org/presentationml/2006/main">
+  <p:cSld name="Slide 15">
+    <p:bg>
+      <p:bgPr>
+        <a:solidFill>
+          <a:srgbClr val="001A3A"/>
+        </a:solidFill>
+      </p:bgPr>
+    </p:bg>
+    <p:spTree>
+      <p:nvGrpSpPr>
+        <p:cNvPr id="1" name=""/>
+        <p:cNvGrpSpPr/>
+        <p:nvPr/>
+      </p:nvGrpSpPr>
+      <p:grpSpPr>
+        <a:xfrm>
+          <a:off x="0" y="0"/>
+          <a:ext cx="0" cy="0"/>
+          <a:chOff x="0" y="0"/>
+          <a:chExt cx="0" cy="0"/>
+        </a:xfrm>
+      </p:grpSpPr>
+      <p:sp>
+        <p:nvSpPr>
+          <p:cNvPr id="2" name="Shape 0"/>
+          <p:cNvSpPr/>
+          <p:nvPr/>
+        </p:nvSpPr>
+        <p:spPr>
+          <a:xfrm>
+            <a:off x="0" y="0"/>
+            <a:ext cx="9144000" cy="54864"/>
+          </a:xfrm>
+          <a:prstGeom prst="rect">
+            <a:avLst/>
+          </a:prstGeom>
+          <a:solidFill>
+            <a:srgbClr val="C5A55A"/>
+          </a:solidFill>
+          <a:ln/>
+        </p:spPr>
+      </p:sp>
       <p:pic>
         <p:nvPicPr>
           <p:cNvPr id="3" name="Image 0" descr="preencoded.png">    </p:cNvPr>
@@ -5346,17 +6476,17 @@
               <a:buNone/>
             </a:pPr>
             <a:r>
-              <a:rPr lang="en-US" sz="1400" i="1" dirty="0">
-                <a:solidFill>
-                  <a:srgbClr val="888888"/>
+              <a:rPr lang="en-US" sz="1300" b="1" dirty="0">
+                <a:solidFill>
+                  <a:srgbClr val="002D62"/>
                 </a:solidFill>
                 <a:latin typeface="Arial" pitchFamily="34" charset="0"/>
                 <a:ea typeface="Arial" pitchFamily="34" charset="-122"/>
                 <a:cs typeface="Arial" pitchFamily="34" charset="-120"/>
               </a:rPr>
-              <a:t>Same card. Now digital. Always in their phone.</a:t>
-            </a:r>
-            <a:endParaRPr lang="en-US" sz="1400" dirty="0"/>
+              <a:t>Every person gets a physical card with a unique QR code. Scan it to add to Apple Wallet.</a:t>
+            </a:r>
+            <a:endParaRPr lang="en-US" sz="1300" dirty="0"/>
           </a:p>
         </p:txBody>
       </p:sp>
@@ -6203,7 +7333,7 @@
                 <a:ea typeface="Arial" pitchFamily="34" charset="-122"/>
                 <a:cs typeface="Arial" pitchFamily="34" charset="-120"/>
               </a:rPr>
-              <a:t>No POS changes — cashier just scans and applies discount</a:t>
+              <a:t>Integrates with your POS (Toast, Square, Clover, and more)</a:t>
             </a:r>
             <a:endParaRPr lang="en-US" sz="1400" dirty="0"/>
           </a:p>
@@ -6371,7 +7501,7 @@
               <a:buNone/>
             </a:pPr>
             <a:r>
-              <a:rPr lang="en-US" sz="1200" i="1" dirty="0">
+              <a:rPr lang="en-US" sz="1200" b="1" dirty="0">
                 <a:solidFill>
                   <a:srgbClr val="D4B96A"/>
                 </a:solidFill>
@@ -6379,7 +7509,7 @@
                 <a:ea typeface="Arial" pitchFamily="34" charset="-122"/>
                 <a:cs typeface="Arial" pitchFamily="34" charset="-120"/>
               </a:rPr>
-              <a:t>Each card has a unique QR code linking the physical card to Apple Wallet</a:t>
+              <a:t>Every physical card has a unique QR code on the back. Scan it to load the digital version into Apple Wallet.</a:t>
             </a:r>
             <a:endParaRPr lang="en-US" sz="1200" dirty="0"/>
           </a:p>
@@ -8269,7 +9399,7 @@
     <p:bg>
       <p:bgPr>
         <a:solidFill>
-          <a:srgbClr val="001A3A"/>
+          <a:srgbClr val="FFFFFF"/>
         </a:solidFill>
       </p:bgPr>
     </p:bg>
@@ -8296,13 +9426,13 @@
         <p:spPr>
           <a:xfrm>
             <a:off x="0" y="0"/>
-            <a:ext cx="9144000" cy="54864"/>
-          </a:xfrm>
-          <a:prstGeom prst="rect">
-            <a:avLst/>
-          </a:prstGeom>
-          <a:solidFill>
-            <a:srgbClr val="C5A55A"/>
+            <a:ext cx="9144000" cy="1005840"/>
+          </a:xfrm>
+          <a:prstGeom prst="rect">
+            <a:avLst/>
+          </a:prstGeom>
+          <a:solidFill>
+            <a:srgbClr val="002D62"/>
           </a:solidFill>
           <a:ln/>
         </p:spPr>
@@ -8315,8 +9445,8 @@
         </p:nvSpPr>
         <p:spPr>
           <a:xfrm>
-            <a:off x="731520" y="320040"/>
-            <a:ext cx="8229600" cy="457200"/>
+            <a:off x="731520" y="228600"/>
+            <a:ext cx="7315200" cy="548640"/>
           </a:xfrm>
           <a:prstGeom prst="rect">
             <a:avLst/>
@@ -8332,7 +9462,7 @@
               <a:buNone/>
             </a:pPr>
             <a:r>
-              <a:rPr lang="en-US" sz="2400" b="1" dirty="0">
+              <a:rPr lang="en-US" sz="2800" b="1" dirty="0">
                 <a:solidFill>
                   <a:srgbClr val="C5A55A"/>
                 </a:solidFill>
@@ -8340,22 +9470,69 @@
                 <a:ea typeface="Arial Black" pitchFamily="34" charset="-122"/>
                 <a:cs typeface="Arial Black" pitchFamily="34" charset="-120"/>
               </a:rPr>
-              <a:t>YOUR OWN DASHBOARD</a:t>
-            </a:r>
-            <a:endParaRPr lang="en-US" sz="2400" dirty="0"/>
-          </a:p>
-        </p:txBody>
-      </p:sp>
-      <p:sp>
-        <p:nvSpPr>
-          <p:cNvPr id="4" name="Text 2"/>
-          <p:cNvSpPr/>
-          <p:nvPr/>
-        </p:nvSpPr>
-        <p:spPr>
-          <a:xfrm>
-            <a:off x="731520" y="777240"/>
-            <a:ext cx="7315200" cy="274320"/>
+              <a:t>WORKS WITH YOUR POS</a:t>
+            </a:r>
+            <a:endParaRPr lang="en-US" sz="2800" dirty="0"/>
+          </a:p>
+        </p:txBody>
+      </p:sp>
+      <p:sp>
+        <p:nvSpPr>
+          <p:cNvPr id="4" name="Shape 2"/>
+          <p:cNvSpPr/>
+          <p:nvPr/>
+        </p:nvSpPr>
+        <p:spPr>
+          <a:xfrm>
+            <a:off x="548640" y="1188720"/>
+            <a:ext cx="8046720" cy="1005840"/>
+          </a:xfrm>
+          <a:prstGeom prst="rect">
+            <a:avLst/>
+          </a:prstGeom>
+          <a:solidFill>
+            <a:srgbClr val="F5F0E6"/>
+          </a:solidFill>
+          <a:ln/>
+          <a:effectLst>
+            <a:outerShdw sx="100000" sy="100000" kx="0" ky="0" algn="bl" rotWithShape="0" blurRad="101600" dist="38100" dir="8100000">
+              <a:srgbClr val="000000">
+                <a:alpha val="20000"/>
+              </a:srgbClr>
+            </a:outerShdw>
+          </a:effectLst>
+        </p:spPr>
+      </p:sp>
+      <p:sp>
+        <p:nvSpPr>
+          <p:cNvPr id="5" name="Shape 3"/>
+          <p:cNvSpPr/>
+          <p:nvPr/>
+        </p:nvSpPr>
+        <p:spPr>
+          <a:xfrm>
+            <a:off x="548640" y="1188720"/>
+            <a:ext cx="64008" cy="1005840"/>
+          </a:xfrm>
+          <a:prstGeom prst="rect">
+            <a:avLst/>
+          </a:prstGeom>
+          <a:solidFill>
+            <a:srgbClr val="C5A55A"/>
+          </a:solidFill>
+          <a:ln/>
+        </p:spPr>
+      </p:sp>
+      <p:sp>
+        <p:nvSpPr>
+          <p:cNvPr id="6" name="Text 4"/>
+          <p:cNvSpPr/>
+          <p:nvPr/>
+        </p:nvSpPr>
+        <p:spPr>
+          <a:xfrm>
+            <a:off x="822960" y="1234440"/>
+            <a:ext cx="2743200" cy="320040"/>
           </a:xfrm>
           <a:prstGeom prst="rect">
             <a:avLst/>
@@ -8371,43 +9548,348 @@
               <a:buNone/>
             </a:pPr>
             <a:r>
-              <a:rPr lang="en-US" sz="1300" dirty="0">
-                <a:solidFill>
-                  <a:srgbClr val="A0A0A0"/>
+              <a:rPr lang="en-US" sz="1400" b="1" dirty="0">
+                <a:solidFill>
+                  <a:srgbClr val="002D62"/>
                 </a:solidFill>
                 <a:latin typeface="Arial" pitchFamily="34" charset="0"/>
                 <a:ea typeface="Arial" pitchFamily="34" charset="-122"/>
                 <a:cs typeface="Arial" pitchFamily="34" charset="-120"/>
               </a:rPr>
-              <a:t>Each sponsor gets a private login to view their analytics.</a:t>
-            </a:r>
-            <a:endParaRPr lang="en-US" sz="1300" dirty="0"/>
-          </a:p>
-        </p:txBody>
-      </p:sp>
-      <p:pic>
-        <p:nvPicPr>
-          <p:cNvPr id="5" name="Image 0" descr="preencoded.png">    </p:cNvPr>
-          <p:cNvPicPr>
-            <a:picLocks noChangeAspect="1"/>
-          </p:cNvPicPr>
-          <p:nvPr/>
-        </p:nvPicPr>
-        <p:blipFill>
-          <a:blip r:embed="rId1"/>
-          <a:srcRect l="0" r="0" t="0" b="0"/>
-          <a:stretch/>
-        </p:blipFill>
-        <p:spPr>
-          <a:xfrm>
-            <a:off x="914400" y="1280160"/>
-            <a:ext cx="7315200" cy="3474720"/>
-          </a:xfrm>
-          <a:prstGeom prst="rect">
-            <a:avLst/>
-          </a:prstGeom>
-        </p:spPr>
-      </p:pic>
+              <a:t>Full API Integration</a:t>
+            </a:r>
+            <a:endParaRPr lang="en-US" sz="1400" dirty="0"/>
+          </a:p>
+        </p:txBody>
+      </p:sp>
+      <p:sp>
+        <p:nvSpPr>
+          <p:cNvPr id="7" name="Text 5"/>
+          <p:cNvSpPr/>
+          <p:nvPr/>
+        </p:nvSpPr>
+        <p:spPr>
+          <a:xfrm>
+            <a:off x="822960" y="1554480"/>
+            <a:ext cx="7498080" cy="457200"/>
+          </a:xfrm>
+          <a:prstGeom prst="rect">
+            <a:avLst/>
+          </a:prstGeom>
+          <a:noFill/>
+          <a:ln/>
+        </p:spPr>
+        <p:txBody>
+          <a:bodyPr wrap="square" lIns="0" tIns="0" rIns="0" bIns="0" rtlCol="0" anchor="ctr"/>
+          <a:lstStyle/>
+          <a:p>
+            <a:pPr indent="0" marL="0">
+              <a:buNone/>
+            </a:pPr>
+            <a:r>
+              <a:rPr lang="en-US" sz="1200" dirty="0">
+                <a:solidFill>
+                  <a:srgbClr val="555555"/>
+                </a:solidFill>
+                <a:latin typeface="Arial" pitchFamily="34" charset="0"/>
+                <a:ea typeface="Arial" pitchFamily="34" charset="-122"/>
+                <a:cs typeface="Arial" pitchFamily="34" charset="-120"/>
+              </a:rPr>
+              <a:t>Toast, Square, Clover, Shopify — discount applies automatically at the POS when the card is scanned. No manual entry.</a:t>
+            </a:r>
+            <a:endParaRPr lang="en-US" sz="1200" dirty="0"/>
+          </a:p>
+        </p:txBody>
+      </p:sp>
+      <p:sp>
+        <p:nvSpPr>
+          <p:cNvPr id="8" name="Shape 6"/>
+          <p:cNvSpPr/>
+          <p:nvPr/>
+        </p:nvSpPr>
+        <p:spPr>
+          <a:xfrm>
+            <a:off x="548640" y="2377440"/>
+            <a:ext cx="8046720" cy="1005840"/>
+          </a:xfrm>
+          <a:prstGeom prst="rect">
+            <a:avLst/>
+          </a:prstGeom>
+          <a:solidFill>
+            <a:srgbClr val="F5F0E6"/>
+          </a:solidFill>
+          <a:ln/>
+          <a:effectLst>
+            <a:outerShdw sx="100000" sy="100000" kx="0" ky="0" algn="bl" rotWithShape="0" blurRad="101600" dist="38100" dir="8100000">
+              <a:srgbClr val="000000">
+                <a:alpha val="20000"/>
+              </a:srgbClr>
+            </a:outerShdw>
+          </a:effectLst>
+        </p:spPr>
+      </p:sp>
+      <p:sp>
+        <p:nvSpPr>
+          <p:cNvPr id="9" name="Shape 7"/>
+          <p:cNvSpPr/>
+          <p:nvPr/>
+        </p:nvSpPr>
+        <p:spPr>
+          <a:xfrm>
+            <a:off x="548640" y="2377440"/>
+            <a:ext cx="64008" cy="1005840"/>
+          </a:xfrm>
+          <a:prstGeom prst="rect">
+            <a:avLst/>
+          </a:prstGeom>
+          <a:solidFill>
+            <a:srgbClr val="C5A55A"/>
+          </a:solidFill>
+          <a:ln/>
+        </p:spPr>
+      </p:sp>
+      <p:sp>
+        <p:nvSpPr>
+          <p:cNvPr id="10" name="Text 8"/>
+          <p:cNvSpPr/>
+          <p:nvPr/>
+        </p:nvSpPr>
+        <p:spPr>
+          <a:xfrm>
+            <a:off x="822960" y="2423160"/>
+            <a:ext cx="2743200" cy="320040"/>
+          </a:xfrm>
+          <a:prstGeom prst="rect">
+            <a:avLst/>
+          </a:prstGeom>
+          <a:noFill/>
+          <a:ln/>
+        </p:spPr>
+        <p:txBody>
+          <a:bodyPr wrap="square" lIns="0" tIns="0" rIns="0" bIns="0" rtlCol="0" anchor="ctr"/>
+          <a:lstStyle/>
+          <a:p>
+            <a:pPr indent="0" marL="0">
+              <a:buNone/>
+            </a:pPr>
+            <a:r>
+              <a:rPr lang="en-US" sz="1400" b="1" dirty="0">
+                <a:solidFill>
+                  <a:srgbClr val="002D62"/>
+                </a:solidFill>
+                <a:latin typeface="Arial" pitchFamily="34" charset="0"/>
+                <a:ea typeface="Arial" pitchFamily="34" charset="-122"/>
+                <a:cs typeface="Arial" pitchFamily="34" charset="-120"/>
+              </a:rPr>
+              <a:t>Barcode Scan Integration</a:t>
+            </a:r>
+            <a:endParaRPr lang="en-US" sz="1400" dirty="0"/>
+          </a:p>
+        </p:txBody>
+      </p:sp>
+      <p:sp>
+        <p:nvSpPr>
+          <p:cNvPr id="11" name="Text 9"/>
+          <p:cNvSpPr/>
+          <p:nvPr/>
+        </p:nvSpPr>
+        <p:spPr>
+          <a:xfrm>
+            <a:off x="822960" y="2743200"/>
+            <a:ext cx="7498080" cy="457200"/>
+          </a:xfrm>
+          <a:prstGeom prst="rect">
+            <a:avLst/>
+          </a:prstGeom>
+          <a:noFill/>
+          <a:ln/>
+        </p:spPr>
+        <p:txBody>
+          <a:bodyPr wrap="square" lIns="0" tIns="0" rIns="0" bIns="0" rtlCol="0" anchor="ctr"/>
+          <a:lstStyle/>
+          <a:p>
+            <a:pPr indent="0" marL="0">
+              <a:buNone/>
+            </a:pPr>
+            <a:r>
+              <a:rPr lang="en-US" sz="1200" dirty="0">
+                <a:solidFill>
+                  <a:srgbClr val="555555"/>
+                </a:solidFill>
+                <a:latin typeface="Arial" pitchFamily="34" charset="0"/>
+                <a:ea typeface="Arial" pitchFamily="34" charset="-122"/>
+                <a:cs typeface="Arial" pitchFamily="34" charset="-120"/>
+              </a:rPr>
+              <a:t>Revel, Heartland, SpotOn — POS reads the barcode on the card and applies the configured coupon.</a:t>
+            </a:r>
+            <a:endParaRPr lang="en-US" sz="1200" dirty="0"/>
+          </a:p>
+        </p:txBody>
+      </p:sp>
+      <p:sp>
+        <p:nvSpPr>
+          <p:cNvPr id="12" name="Shape 10"/>
+          <p:cNvSpPr/>
+          <p:nvPr/>
+        </p:nvSpPr>
+        <p:spPr>
+          <a:xfrm>
+            <a:off x="548640" y="3566160"/>
+            <a:ext cx="8046720" cy="1005840"/>
+          </a:xfrm>
+          <a:prstGeom prst="rect">
+            <a:avLst/>
+          </a:prstGeom>
+          <a:solidFill>
+            <a:srgbClr val="F5F0E6"/>
+          </a:solidFill>
+          <a:ln/>
+          <a:effectLst>
+            <a:outerShdw sx="100000" sy="100000" kx="0" ky="0" algn="bl" rotWithShape="0" blurRad="101600" dist="38100" dir="8100000">
+              <a:srgbClr val="000000">
+                <a:alpha val="20000"/>
+              </a:srgbClr>
+            </a:outerShdw>
+          </a:effectLst>
+        </p:spPr>
+      </p:sp>
+      <p:sp>
+        <p:nvSpPr>
+          <p:cNvPr id="13" name="Shape 11"/>
+          <p:cNvSpPr/>
+          <p:nvPr/>
+        </p:nvSpPr>
+        <p:spPr>
+          <a:xfrm>
+            <a:off x="548640" y="3566160"/>
+            <a:ext cx="64008" cy="1005840"/>
+          </a:xfrm>
+          <a:prstGeom prst="rect">
+            <a:avLst/>
+          </a:prstGeom>
+          <a:solidFill>
+            <a:srgbClr val="C5A55A"/>
+          </a:solidFill>
+          <a:ln/>
+        </p:spPr>
+      </p:sp>
+      <p:sp>
+        <p:nvSpPr>
+          <p:cNvPr id="14" name="Text 12"/>
+          <p:cNvSpPr/>
+          <p:nvPr/>
+        </p:nvSpPr>
+        <p:spPr>
+          <a:xfrm>
+            <a:off x="822960" y="3611880"/>
+            <a:ext cx="2743200" cy="320040"/>
+          </a:xfrm>
+          <a:prstGeom prst="rect">
+            <a:avLst/>
+          </a:prstGeom>
+          <a:noFill/>
+          <a:ln/>
+        </p:spPr>
+        <p:txBody>
+          <a:bodyPr wrap="square" lIns="0" tIns="0" rIns="0" bIns="0" rtlCol="0" anchor="ctr"/>
+          <a:lstStyle/>
+          <a:p>
+            <a:pPr indent="0" marL="0">
+              <a:buNone/>
+            </a:pPr>
+            <a:r>
+              <a:rPr lang="en-US" sz="1400" b="1" dirty="0">
+                <a:solidFill>
+                  <a:srgbClr val="002D62"/>
+                </a:solidFill>
+                <a:latin typeface="Arial" pitchFamily="34" charset="0"/>
+                <a:ea typeface="Arial" pitchFamily="34" charset="-122"/>
+                <a:cs typeface="Arial" pitchFamily="34" charset="-120"/>
+              </a:rPr>
+              <a:t>Any Other POS</a:t>
+            </a:r>
+            <a:endParaRPr lang="en-US" sz="1400" dirty="0"/>
+          </a:p>
+        </p:txBody>
+      </p:sp>
+      <p:sp>
+        <p:nvSpPr>
+          <p:cNvPr id="15" name="Text 13"/>
+          <p:cNvSpPr/>
+          <p:nvPr/>
+        </p:nvSpPr>
+        <p:spPr>
+          <a:xfrm>
+            <a:off x="822960" y="3931920"/>
+            <a:ext cx="7498080" cy="457200"/>
+          </a:xfrm>
+          <a:prstGeom prst="rect">
+            <a:avLst/>
+          </a:prstGeom>
+          <a:noFill/>
+          <a:ln/>
+        </p:spPr>
+        <p:txBody>
+          <a:bodyPr wrap="square" lIns="0" tIns="0" rIns="0" bIns="0" rtlCol="0" anchor="ctr"/>
+          <a:lstStyle/>
+          <a:p>
+            <a:pPr indent="0" marL="0">
+              <a:buNone/>
+            </a:pPr>
+            <a:r>
+              <a:rPr lang="en-US" sz="1200" dirty="0">
+                <a:solidFill>
+                  <a:srgbClr val="555555"/>
+                </a:solidFill>
+                <a:latin typeface="Arial" pitchFamily="34" charset="0"/>
+                <a:ea typeface="Arial" pitchFamily="34" charset="-122"/>
+                <a:cs typeface="Arial" pitchFamily="34" charset="-120"/>
+              </a:rPr>
+              <a:t>Cashier scans the QR code or views the card on the customer's phone. Verification screen confirms the card is valid.</a:t>
+            </a:r>
+            <a:endParaRPr lang="en-US" sz="1200" dirty="0"/>
+          </a:p>
+        </p:txBody>
+      </p:sp>
+      <p:sp>
+        <p:nvSpPr>
+          <p:cNvPr id="16" name="Text 14"/>
+          <p:cNvSpPr/>
+          <p:nvPr/>
+        </p:nvSpPr>
+        <p:spPr>
+          <a:xfrm>
+            <a:off x="731520" y="4663440"/>
+            <a:ext cx="7680960" cy="320040"/>
+          </a:xfrm>
+          <a:prstGeom prst="rect">
+            <a:avLst/>
+          </a:prstGeom>
+          <a:noFill/>
+          <a:ln/>
+        </p:spPr>
+        <p:txBody>
+          <a:bodyPr wrap="square" lIns="0" tIns="0" rIns="0" bIns="0" rtlCol="0" anchor="ctr"/>
+          <a:lstStyle/>
+          <a:p>
+            <a:pPr indent="0" marL="0">
+              <a:buNone/>
+            </a:pPr>
+            <a:r>
+              <a:rPr lang="en-US" sz="1200" b="1" i="1" dirty="0">
+                <a:solidFill>
+                  <a:srgbClr val="002D62"/>
+                </a:solidFill>
+                <a:latin typeface="Arial" pitchFamily="34" charset="0"/>
+                <a:ea typeface="Arial" pitchFamily="34" charset="-122"/>
+                <a:cs typeface="Arial" pitchFamily="34" charset="-120"/>
+              </a:rPr>
+              <a:t>We configure everything for you. No tech changes needed at your business.</a:t>
+            </a:r>
+            <a:endParaRPr lang="en-US" sz="1200" dirty="0"/>
+          </a:p>
+        </p:txBody>
+      </p:sp>
     </p:spTree>
   </p:cSld>
   <p:clrMapOvr>
